--- a/slides/CEP146_Rust_2026.pptx
+++ b/slides/CEP146_Rust_2026.pptx
@@ -14,6 +14,12 @@
     <p:sldId id="259" r:id="rId9"/>
     <p:sldId id="260" r:id="rId10"/>
     <p:sldId id="261" r:id="rId11"/>
+    <p:sldId id="262" r:id="rId12"/>
+    <p:sldId id="263" r:id="rId13"/>
+    <p:sldId id="264" r:id="rId14"/>
+    <p:sldId id="265" r:id="rId15"/>
+    <p:sldId id="266" r:id="rId16"/>
+    <p:sldId id="267" r:id="rId17"/>
   </p:sldIdLst>
   <p:sldSz cy="6858000" cx="12191675"/>
   <p:notesSz cx="6858000" cy="9144000"/>
@@ -790,6 +796,303 @@
 </p:notes>
 </file>
 
+<file path=ppt/notesSlides/notesSlide10.xml><?xml version="1.0" encoding="utf-8"?>
+<p:notes xmlns:a="http://schemas.openxmlformats.org/drawingml/2006/main" xmlns:r="http://schemas.openxmlformats.org/officeDocument/2006/relationships" xmlns:mc="http://schemas.openxmlformats.org/markup-compatibility/2006" xmlns:mv="urn:schemas-microsoft-com:mac:vml" xmlns:p="http://schemas.openxmlformats.org/presentationml/2006/main" xmlns:c="http://schemas.openxmlformats.org/drawingml/2006/chart" xmlns:dgm="http://schemas.openxmlformats.org/drawingml/2006/diagram" xmlns:o="urn:schemas-microsoft-com:office:office" xmlns:v="urn:schemas-microsoft-com:vml" xmlns:pvml="urn:schemas-microsoft-com:office:powerpoint" xmlns:com="http://schemas.openxmlformats.org/drawingml/2006/compatibility" xmlns:p14="http://schemas.microsoft.com/office/powerpoint/2010/main" xmlns:p15="http://schemas.microsoft.com/office/powerpoint/2012/main" xmlns:ahyp="http://schemas.microsoft.com/office/drawing/2018/hyperlinkcolor" showMasterPhAnim="0" showMasterSp="0">
+  <p:cSld>
+    <p:spTree>
+      <p:nvGrpSpPr>
+        <p:cNvPr id="213" name="Shape 213"/>
+        <p:cNvGrpSpPr/>
+        <p:nvPr/>
+      </p:nvGrpSpPr>
+      <p:grpSpPr>
+        <a:xfrm>
+          <a:off x="0" y="0"/>
+          <a:ext cx="0" cy="0"/>
+          <a:chOff x="0" y="0"/>
+          <a:chExt cx="0" cy="0"/>
+        </a:xfrm>
+      </p:grpSpPr>
+      <p:sp>
+        <p:nvSpPr>
+          <p:cNvPr id="214" name="Google Shape;214;p4:notes"/>
+          <p:cNvSpPr txBox="1"/>
+          <p:nvPr>
+            <p:ph idx="1" type="body"/>
+          </p:nvPr>
+        </p:nvSpPr>
+        <p:spPr>
+          <a:xfrm>
+            <a:off x="685800" y="4343400"/>
+            <a:ext cx="5486400" cy="4114800"/>
+          </a:xfrm>
+          <a:prstGeom prst="rect">
+            <a:avLst/>
+          </a:prstGeom>
+        </p:spPr>
+        <p:txBody>
+          <a:bodyPr anchorCtr="0" anchor="t" bIns="91425" lIns="91425" spcFirstLastPara="1" rIns="91425" wrap="square" tIns="91425">
+            <a:noAutofit/>
+          </a:bodyPr>
+          <a:lstStyle/>
+          <a:p>
+            <a:pPr indent="0" lvl="0" marL="0" rtl="0" algn="l">
+              <a:spcBef>
+                <a:spcPts val="0"/>
+              </a:spcBef>
+              <a:spcAft>
+                <a:spcPts val="0"/>
+              </a:spcAft>
+              <a:buNone/>
+            </a:pPr>
+            <a:r>
+              <a:t/>
+            </a:r>
+            <a:endParaRPr/>
+          </a:p>
+        </p:txBody>
+      </p:sp>
+      <p:sp>
+        <p:nvSpPr>
+          <p:cNvPr id="215" name="Google Shape;215;p4:notes"/>
+          <p:cNvSpPr/>
+          <p:nvPr>
+            <p:ph idx="2" type="sldImg"/>
+          </p:nvPr>
+        </p:nvSpPr>
+        <p:spPr>
+          <a:xfrm>
+            <a:off x="1143225" y="685800"/>
+            <a:ext cx="4572225" cy="3429000"/>
+          </a:xfrm>
+          <a:custGeom>
+            <a:rect b="b" l="l" r="r" t="t"/>
+            <a:pathLst>
+              <a:path extrusionOk="0" h="120000" w="120000">
+                <a:moveTo>
+                  <a:pt x="0" y="0"/>
+                </a:moveTo>
+                <a:lnTo>
+                  <a:pt x="120000" y="0"/>
+                </a:lnTo>
+                <a:lnTo>
+                  <a:pt x="120000" y="120000"/>
+                </a:lnTo>
+                <a:lnTo>
+                  <a:pt x="0" y="120000"/>
+                </a:lnTo>
+                <a:close/>
+              </a:path>
+            </a:pathLst>
+          </a:custGeom>
+        </p:spPr>
+      </p:sp>
+    </p:spTree>
+  </p:cSld>
+  <p:clrMapOvr>
+    <a:masterClrMapping/>
+  </p:clrMapOvr>
+</p:notes>
+</file>
+
+<file path=ppt/notesSlides/notesSlide11.xml><?xml version="1.0" encoding="utf-8"?>
+<p:notes xmlns:a="http://schemas.openxmlformats.org/drawingml/2006/main" xmlns:r="http://schemas.openxmlformats.org/officeDocument/2006/relationships" xmlns:mc="http://schemas.openxmlformats.org/markup-compatibility/2006" xmlns:mv="urn:schemas-microsoft-com:mac:vml" xmlns:p="http://schemas.openxmlformats.org/presentationml/2006/main" xmlns:c="http://schemas.openxmlformats.org/drawingml/2006/chart" xmlns:dgm="http://schemas.openxmlformats.org/drawingml/2006/diagram" xmlns:o="urn:schemas-microsoft-com:office:office" xmlns:v="urn:schemas-microsoft-com:vml" xmlns:pvml="urn:schemas-microsoft-com:office:powerpoint" xmlns:com="http://schemas.openxmlformats.org/drawingml/2006/compatibility" xmlns:p14="http://schemas.microsoft.com/office/powerpoint/2010/main" xmlns:p15="http://schemas.microsoft.com/office/powerpoint/2012/main" xmlns:ahyp="http://schemas.microsoft.com/office/drawing/2018/hyperlinkcolor" showMasterPhAnim="0" showMasterSp="0">
+  <p:cSld>
+    <p:spTree>
+      <p:nvGrpSpPr>
+        <p:cNvPr id="228" name="Shape 228"/>
+        <p:cNvGrpSpPr/>
+        <p:nvPr/>
+      </p:nvGrpSpPr>
+      <p:grpSpPr>
+        <a:xfrm>
+          <a:off x="0" y="0"/>
+          <a:ext cx="0" cy="0"/>
+          <a:chOff x="0" y="0"/>
+          <a:chExt cx="0" cy="0"/>
+        </a:xfrm>
+      </p:grpSpPr>
+      <p:sp>
+        <p:nvSpPr>
+          <p:cNvPr id="229" name="Google Shape;229;p5:notes"/>
+          <p:cNvSpPr txBox="1"/>
+          <p:nvPr>
+            <p:ph idx="1" type="body"/>
+          </p:nvPr>
+        </p:nvSpPr>
+        <p:spPr>
+          <a:xfrm>
+            <a:off x="685800" y="4343400"/>
+            <a:ext cx="5486400" cy="4114800"/>
+          </a:xfrm>
+          <a:prstGeom prst="rect">
+            <a:avLst/>
+          </a:prstGeom>
+        </p:spPr>
+        <p:txBody>
+          <a:bodyPr anchorCtr="0" anchor="t" bIns="91425" lIns="91425" spcFirstLastPara="1" rIns="91425" wrap="square" tIns="91425">
+            <a:noAutofit/>
+          </a:bodyPr>
+          <a:lstStyle/>
+          <a:p>
+            <a:pPr indent="0" lvl="0" marL="0" rtl="0" algn="l">
+              <a:spcBef>
+                <a:spcPts val="0"/>
+              </a:spcBef>
+              <a:spcAft>
+                <a:spcPts val="0"/>
+              </a:spcAft>
+              <a:buNone/>
+            </a:pPr>
+            <a:r>
+              <a:t/>
+            </a:r>
+            <a:endParaRPr/>
+          </a:p>
+        </p:txBody>
+      </p:sp>
+      <p:sp>
+        <p:nvSpPr>
+          <p:cNvPr id="230" name="Google Shape;230;p5:notes"/>
+          <p:cNvSpPr/>
+          <p:nvPr>
+            <p:ph idx="2" type="sldImg"/>
+          </p:nvPr>
+        </p:nvSpPr>
+        <p:spPr>
+          <a:xfrm>
+            <a:off x="1143225" y="685800"/>
+            <a:ext cx="4572225" cy="3429000"/>
+          </a:xfrm>
+          <a:custGeom>
+            <a:rect b="b" l="l" r="r" t="t"/>
+            <a:pathLst>
+              <a:path extrusionOk="0" h="120000" w="120000">
+                <a:moveTo>
+                  <a:pt x="0" y="0"/>
+                </a:moveTo>
+                <a:lnTo>
+                  <a:pt x="120000" y="0"/>
+                </a:lnTo>
+                <a:lnTo>
+                  <a:pt x="120000" y="120000"/>
+                </a:lnTo>
+                <a:lnTo>
+                  <a:pt x="0" y="120000"/>
+                </a:lnTo>
+                <a:close/>
+              </a:path>
+            </a:pathLst>
+          </a:custGeom>
+        </p:spPr>
+      </p:sp>
+    </p:spTree>
+  </p:cSld>
+  <p:clrMapOvr>
+    <a:masterClrMapping/>
+  </p:clrMapOvr>
+</p:notes>
+</file>
+
+<file path=ppt/notesSlides/notesSlide12.xml><?xml version="1.0" encoding="utf-8"?>
+<p:notes xmlns:a="http://schemas.openxmlformats.org/drawingml/2006/main" xmlns:r="http://schemas.openxmlformats.org/officeDocument/2006/relationships" xmlns:mc="http://schemas.openxmlformats.org/markup-compatibility/2006" xmlns:mv="urn:schemas-microsoft-com:mac:vml" xmlns:p="http://schemas.openxmlformats.org/presentationml/2006/main" xmlns:c="http://schemas.openxmlformats.org/drawingml/2006/chart" xmlns:dgm="http://schemas.openxmlformats.org/drawingml/2006/diagram" xmlns:o="urn:schemas-microsoft-com:office:office" xmlns:v="urn:schemas-microsoft-com:vml" xmlns:pvml="urn:schemas-microsoft-com:office:powerpoint" xmlns:com="http://schemas.openxmlformats.org/drawingml/2006/compatibility" xmlns:p14="http://schemas.microsoft.com/office/powerpoint/2010/main" xmlns:p15="http://schemas.microsoft.com/office/powerpoint/2012/main" xmlns:ahyp="http://schemas.microsoft.com/office/drawing/2018/hyperlinkcolor" showMasterPhAnim="0" showMasterSp="0">
+  <p:cSld>
+    <p:spTree>
+      <p:nvGrpSpPr>
+        <p:cNvPr id="249" name="Shape 249"/>
+        <p:cNvGrpSpPr/>
+        <p:nvPr/>
+      </p:nvGrpSpPr>
+      <p:grpSpPr>
+        <a:xfrm>
+          <a:off x="0" y="0"/>
+          <a:ext cx="0" cy="0"/>
+          <a:chOff x="0" y="0"/>
+          <a:chExt cx="0" cy="0"/>
+        </a:xfrm>
+      </p:grpSpPr>
+      <p:sp>
+        <p:nvSpPr>
+          <p:cNvPr id="250" name="Google Shape;250;p6:notes"/>
+          <p:cNvSpPr txBox="1"/>
+          <p:nvPr>
+            <p:ph idx="1" type="body"/>
+          </p:nvPr>
+        </p:nvSpPr>
+        <p:spPr>
+          <a:xfrm>
+            <a:off x="685800" y="4343400"/>
+            <a:ext cx="5486400" cy="4114800"/>
+          </a:xfrm>
+          <a:prstGeom prst="rect">
+            <a:avLst/>
+          </a:prstGeom>
+        </p:spPr>
+        <p:txBody>
+          <a:bodyPr anchorCtr="0" anchor="t" bIns="91425" lIns="91425" spcFirstLastPara="1" rIns="91425" wrap="square" tIns="91425">
+            <a:noAutofit/>
+          </a:bodyPr>
+          <a:lstStyle/>
+          <a:p>
+            <a:pPr indent="0" lvl="0" marL="0" rtl="0" algn="l">
+              <a:spcBef>
+                <a:spcPts val="0"/>
+              </a:spcBef>
+              <a:spcAft>
+                <a:spcPts val="0"/>
+              </a:spcAft>
+              <a:buNone/>
+            </a:pPr>
+            <a:r>
+              <a:t/>
+            </a:r>
+            <a:endParaRPr/>
+          </a:p>
+        </p:txBody>
+      </p:sp>
+      <p:sp>
+        <p:nvSpPr>
+          <p:cNvPr id="251" name="Google Shape;251;p6:notes"/>
+          <p:cNvSpPr/>
+          <p:nvPr>
+            <p:ph idx="2" type="sldImg"/>
+          </p:nvPr>
+        </p:nvSpPr>
+        <p:spPr>
+          <a:xfrm>
+            <a:off x="1143225" y="685800"/>
+            <a:ext cx="4572225" cy="3429000"/>
+          </a:xfrm>
+          <a:custGeom>
+            <a:rect b="b" l="l" r="r" t="t"/>
+            <a:pathLst>
+              <a:path extrusionOk="0" h="120000" w="120000">
+                <a:moveTo>
+                  <a:pt x="0" y="0"/>
+                </a:moveTo>
+                <a:lnTo>
+                  <a:pt x="120000" y="0"/>
+                </a:lnTo>
+                <a:lnTo>
+                  <a:pt x="120000" y="120000"/>
+                </a:lnTo>
+                <a:lnTo>
+                  <a:pt x="0" y="120000"/>
+                </a:lnTo>
+                <a:close/>
+              </a:path>
+            </a:pathLst>
+          </a:custGeom>
+        </p:spPr>
+      </p:sp>
+    </p:spTree>
+  </p:cSld>
+  <p:clrMapOvr>
+    <a:masterClrMapping/>
+  </p:clrMapOvr>
+</p:notes>
+</file>
+
 <file path=ppt/notesSlides/notesSlide2.xml><?xml version="1.0" encoding="utf-8"?>
 <p:notes xmlns:a="http://schemas.openxmlformats.org/drawingml/2006/main" xmlns:r="http://schemas.openxmlformats.org/officeDocument/2006/relationships" xmlns:mc="http://schemas.openxmlformats.org/markup-compatibility/2006" xmlns:mv="urn:schemas-microsoft-com:mac:vml" xmlns:p="http://schemas.openxmlformats.org/presentationml/2006/main" xmlns:c="http://schemas.openxmlformats.org/drawingml/2006/chart" xmlns:dgm="http://schemas.openxmlformats.org/drawingml/2006/diagram" xmlns:o="urn:schemas-microsoft-com:office:office" xmlns:v="urn:schemas-microsoft-com:vml" xmlns:pvml="urn:schemas-microsoft-com:office:powerpoint" xmlns:com="http://schemas.openxmlformats.org/drawingml/2006/compatibility" xmlns:p14="http://schemas.microsoft.com/office/powerpoint/2010/main" xmlns:p15="http://schemas.microsoft.com/office/powerpoint/2012/main" xmlns:ahyp="http://schemas.microsoft.com/office/drawing/2018/hyperlinkcolor" showMasterPhAnim="0" showMasterSp="0">
   <p:cSld>
@@ -809,7 +1112,7 @@
       </p:grpSpPr>
       <p:sp>
         <p:nvSpPr>
-          <p:cNvPr id="92" name="Google Shape;92;p2:notes"/>
+          <p:cNvPr id="92" name="Google Shape;92;h46067e3cb066642d_0_0:notes"/>
           <p:cNvSpPr txBox="1"/>
           <p:nvPr>
             <p:ph idx="1" type="body"/>
@@ -848,7 +1151,7 @@
       </p:sp>
       <p:sp>
         <p:nvSpPr>
-          <p:cNvPr id="93" name="Google Shape;93;p2:notes"/>
+          <p:cNvPr id="93" name="Google Shape;93;h46067e3cb066642d_0_0:notes"/>
           <p:cNvSpPr/>
           <p:nvPr>
             <p:ph idx="2" type="sldImg"/>
@@ -857,7 +1160,7 @@
         <p:spPr>
           <a:xfrm>
             <a:off x="1143225" y="685800"/>
-            <a:ext cx="4572225" cy="3429000"/>
+            <a:ext cx="4572300" cy="3429000"/>
           </a:xfrm>
           <a:custGeom>
             <a:rect b="b" l="l" r="r" t="t"/>
@@ -908,7 +1211,7 @@
       </p:grpSpPr>
       <p:sp>
         <p:nvSpPr>
-          <p:cNvPr id="108" name="Google Shape;108;p3:notes"/>
+          <p:cNvPr id="108" name="Google Shape;108;h46067e3cb066642d_0_15:notes"/>
           <p:cNvSpPr txBox="1"/>
           <p:nvPr>
             <p:ph idx="1" type="body"/>
@@ -947,7 +1250,7 @@
       </p:sp>
       <p:sp>
         <p:nvSpPr>
-          <p:cNvPr id="109" name="Google Shape;109;p3:notes"/>
+          <p:cNvPr id="109" name="Google Shape;109;h46067e3cb066642d_0_15:notes"/>
           <p:cNvSpPr/>
           <p:nvPr>
             <p:ph idx="2" type="sldImg"/>
@@ -956,7 +1259,7 @@
         <p:spPr>
           <a:xfrm>
             <a:off x="1143225" y="685800"/>
-            <a:ext cx="4572225" cy="3429000"/>
+            <a:ext cx="4572300" cy="3429000"/>
           </a:xfrm>
           <a:custGeom>
             <a:rect b="b" l="l" r="r" t="t"/>
@@ -993,7 +1296,7 @@
   <p:cSld>
     <p:spTree>
       <p:nvGrpSpPr>
-        <p:cNvPr id="124" name="Shape 124"/>
+        <p:cNvPr id="123" name="Shape 123"/>
         <p:cNvGrpSpPr/>
         <p:nvPr/>
       </p:nvGrpSpPr>
@@ -1007,7 +1310,7 @@
       </p:grpSpPr>
       <p:sp>
         <p:nvSpPr>
-          <p:cNvPr id="125" name="Google Shape;125;p4:notes"/>
+          <p:cNvPr id="124" name="Google Shape;124;p2:notes"/>
           <p:cNvSpPr txBox="1"/>
           <p:nvPr>
             <p:ph idx="1" type="body"/>
@@ -1046,7 +1349,7 @@
       </p:sp>
       <p:sp>
         <p:nvSpPr>
-          <p:cNvPr id="126" name="Google Shape;126;p4:notes"/>
+          <p:cNvPr id="125" name="Google Shape;125;p2:notes"/>
           <p:cNvSpPr/>
           <p:nvPr>
             <p:ph idx="2" type="sldImg"/>
@@ -1092,7 +1395,7 @@
   <p:cSld>
     <p:spTree>
       <p:nvGrpSpPr>
-        <p:cNvPr id="139" name="Shape 139"/>
+        <p:cNvPr id="134" name="Shape 134"/>
         <p:cNvGrpSpPr/>
         <p:nvPr/>
       </p:nvGrpSpPr>
@@ -1106,7 +1409,7 @@
       </p:grpSpPr>
       <p:sp>
         <p:nvSpPr>
-          <p:cNvPr id="140" name="Google Shape;140;p5:notes"/>
+          <p:cNvPr id="135" name="Google Shape;135;h46067e3cb066642d_0_46:notes"/>
           <p:cNvSpPr txBox="1"/>
           <p:nvPr>
             <p:ph idx="1" type="body"/>
@@ -1145,7 +1448,7 @@
       </p:sp>
       <p:sp>
         <p:nvSpPr>
-          <p:cNvPr id="141" name="Google Shape;141;p5:notes"/>
+          <p:cNvPr id="136" name="Google Shape;136;h46067e3cb066642d_0_46:notes"/>
           <p:cNvSpPr/>
           <p:nvPr>
             <p:ph idx="2" type="sldImg"/>
@@ -1154,7 +1457,7 @@
         <p:spPr>
           <a:xfrm>
             <a:off x="1143225" y="685800"/>
-            <a:ext cx="4572225" cy="3429000"/>
+            <a:ext cx="4572300" cy="3429000"/>
           </a:xfrm>
           <a:custGeom>
             <a:rect b="b" l="l" r="r" t="t"/>
@@ -1191,7 +1494,7 @@
   <p:cSld>
     <p:spTree>
       <p:nvGrpSpPr>
-        <p:cNvPr id="160" name="Shape 160"/>
+        <p:cNvPr id="152" name="Shape 152"/>
         <p:cNvGrpSpPr/>
         <p:nvPr/>
       </p:nvGrpSpPr>
@@ -1205,7 +1508,7 @@
       </p:grpSpPr>
       <p:sp>
         <p:nvSpPr>
-          <p:cNvPr id="161" name="Google Shape;161;p6:notes"/>
+          <p:cNvPr id="153" name="Google Shape;153;h46067e3cb066642d_0_30:notes"/>
           <p:cNvSpPr txBox="1"/>
           <p:nvPr>
             <p:ph idx="1" type="body"/>
@@ -1244,7 +1547,304 @@
       </p:sp>
       <p:sp>
         <p:nvSpPr>
-          <p:cNvPr id="162" name="Google Shape;162;p6:notes"/>
+          <p:cNvPr id="154" name="Google Shape;154;h46067e3cb066642d_0_30:notes"/>
+          <p:cNvSpPr/>
+          <p:nvPr>
+            <p:ph idx="2" type="sldImg"/>
+          </p:nvPr>
+        </p:nvSpPr>
+        <p:spPr>
+          <a:xfrm>
+            <a:off x="1143225" y="685800"/>
+            <a:ext cx="4572300" cy="3429000"/>
+          </a:xfrm>
+          <a:custGeom>
+            <a:rect b="b" l="l" r="r" t="t"/>
+            <a:pathLst>
+              <a:path extrusionOk="0" h="120000" w="120000">
+                <a:moveTo>
+                  <a:pt x="0" y="0"/>
+                </a:moveTo>
+                <a:lnTo>
+                  <a:pt x="120000" y="0"/>
+                </a:lnTo>
+                <a:lnTo>
+                  <a:pt x="120000" y="120000"/>
+                </a:lnTo>
+                <a:lnTo>
+                  <a:pt x="0" y="120000"/>
+                </a:lnTo>
+                <a:close/>
+              </a:path>
+            </a:pathLst>
+          </a:custGeom>
+        </p:spPr>
+      </p:sp>
+    </p:spTree>
+  </p:cSld>
+  <p:clrMapOvr>
+    <a:masterClrMapping/>
+  </p:clrMapOvr>
+</p:notes>
+</file>
+
+<file path=ppt/notesSlides/notesSlide7.xml><?xml version="1.0" encoding="utf-8"?>
+<p:notes xmlns:a="http://schemas.openxmlformats.org/drawingml/2006/main" xmlns:r="http://schemas.openxmlformats.org/officeDocument/2006/relationships" xmlns:mc="http://schemas.openxmlformats.org/markup-compatibility/2006" xmlns:mv="urn:schemas-microsoft-com:mac:vml" xmlns:p="http://schemas.openxmlformats.org/presentationml/2006/main" xmlns:c="http://schemas.openxmlformats.org/drawingml/2006/chart" xmlns:dgm="http://schemas.openxmlformats.org/drawingml/2006/diagram" xmlns:o="urn:schemas-microsoft-com:office:office" xmlns:v="urn:schemas-microsoft-com:vml" xmlns:pvml="urn:schemas-microsoft-com:office:powerpoint" xmlns:com="http://schemas.openxmlformats.org/drawingml/2006/compatibility" xmlns:p14="http://schemas.microsoft.com/office/powerpoint/2010/main" xmlns:p15="http://schemas.microsoft.com/office/powerpoint/2012/main" xmlns:ahyp="http://schemas.microsoft.com/office/drawing/2018/hyperlinkcolor" showMasterPhAnim="0" showMasterSp="0">
+  <p:cSld>
+    <p:spTree>
+      <p:nvGrpSpPr>
+        <p:cNvPr id="166" name="Shape 166"/>
+        <p:cNvGrpSpPr/>
+        <p:nvPr/>
+      </p:nvGrpSpPr>
+      <p:grpSpPr>
+        <a:xfrm>
+          <a:off x="0" y="0"/>
+          <a:ext cx="0" cy="0"/>
+          <a:chOff x="0" y="0"/>
+          <a:chExt cx="0" cy="0"/>
+        </a:xfrm>
+      </p:grpSpPr>
+      <p:sp>
+        <p:nvSpPr>
+          <p:cNvPr id="167" name="Google Shape;167;h46067e3cb066642d_0_68:notes"/>
+          <p:cNvSpPr txBox="1"/>
+          <p:nvPr>
+            <p:ph idx="1" type="body"/>
+          </p:nvPr>
+        </p:nvSpPr>
+        <p:spPr>
+          <a:xfrm>
+            <a:off x="685800" y="4343400"/>
+            <a:ext cx="5486400" cy="4114800"/>
+          </a:xfrm>
+          <a:prstGeom prst="rect">
+            <a:avLst/>
+          </a:prstGeom>
+        </p:spPr>
+        <p:txBody>
+          <a:bodyPr anchorCtr="0" anchor="t" bIns="91425" lIns="91425" spcFirstLastPara="1" rIns="91425" wrap="square" tIns="91425">
+            <a:noAutofit/>
+          </a:bodyPr>
+          <a:lstStyle/>
+          <a:p>
+            <a:pPr indent="0" lvl="0" marL="0" rtl="0" algn="l">
+              <a:spcBef>
+                <a:spcPts val="0"/>
+              </a:spcBef>
+              <a:spcAft>
+                <a:spcPts val="0"/>
+              </a:spcAft>
+              <a:buNone/>
+            </a:pPr>
+            <a:r>
+              <a:t/>
+            </a:r>
+            <a:endParaRPr/>
+          </a:p>
+        </p:txBody>
+      </p:sp>
+      <p:sp>
+        <p:nvSpPr>
+          <p:cNvPr id="168" name="Google Shape;168;h46067e3cb066642d_0_68:notes"/>
+          <p:cNvSpPr/>
+          <p:nvPr>
+            <p:ph idx="2" type="sldImg"/>
+          </p:nvPr>
+        </p:nvSpPr>
+        <p:spPr>
+          <a:xfrm>
+            <a:off x="1143225" y="685800"/>
+            <a:ext cx="4572300" cy="3429000"/>
+          </a:xfrm>
+          <a:custGeom>
+            <a:rect b="b" l="l" r="r" t="t"/>
+            <a:pathLst>
+              <a:path extrusionOk="0" h="120000" w="120000">
+                <a:moveTo>
+                  <a:pt x="0" y="0"/>
+                </a:moveTo>
+                <a:lnTo>
+                  <a:pt x="120000" y="0"/>
+                </a:lnTo>
+                <a:lnTo>
+                  <a:pt x="120000" y="120000"/>
+                </a:lnTo>
+                <a:lnTo>
+                  <a:pt x="0" y="120000"/>
+                </a:lnTo>
+                <a:close/>
+              </a:path>
+            </a:pathLst>
+          </a:custGeom>
+        </p:spPr>
+      </p:sp>
+    </p:spTree>
+  </p:cSld>
+  <p:clrMapOvr>
+    <a:masterClrMapping/>
+  </p:clrMapOvr>
+</p:notes>
+</file>
+
+<file path=ppt/notesSlides/notesSlide8.xml><?xml version="1.0" encoding="utf-8"?>
+<p:notes xmlns:a="http://schemas.openxmlformats.org/drawingml/2006/main" xmlns:r="http://schemas.openxmlformats.org/officeDocument/2006/relationships" xmlns:mc="http://schemas.openxmlformats.org/markup-compatibility/2006" xmlns:mv="urn:schemas-microsoft-com:mac:vml" xmlns:p="http://schemas.openxmlformats.org/presentationml/2006/main" xmlns:c="http://schemas.openxmlformats.org/drawingml/2006/chart" xmlns:dgm="http://schemas.openxmlformats.org/drawingml/2006/diagram" xmlns:o="urn:schemas-microsoft-com:office:office" xmlns:v="urn:schemas-microsoft-com:vml" xmlns:pvml="urn:schemas-microsoft-com:office:powerpoint" xmlns:com="http://schemas.openxmlformats.org/drawingml/2006/compatibility" xmlns:p14="http://schemas.microsoft.com/office/powerpoint/2010/main" xmlns:p15="http://schemas.microsoft.com/office/powerpoint/2012/main" xmlns:ahyp="http://schemas.microsoft.com/office/drawing/2018/hyperlinkcolor" showMasterPhAnim="0" showMasterSp="0">
+  <p:cSld>
+    <p:spTree>
+      <p:nvGrpSpPr>
+        <p:cNvPr id="183" name="Shape 183"/>
+        <p:cNvGrpSpPr/>
+        <p:nvPr/>
+      </p:nvGrpSpPr>
+      <p:grpSpPr>
+        <a:xfrm>
+          <a:off x="0" y="0"/>
+          <a:ext cx="0" cy="0"/>
+          <a:chOff x="0" y="0"/>
+          <a:chExt cx="0" cy="0"/>
+        </a:xfrm>
+      </p:grpSpPr>
+      <p:sp>
+        <p:nvSpPr>
+          <p:cNvPr id="184" name="Google Shape;184;h46067e3cb066642d_0_87:notes"/>
+          <p:cNvSpPr txBox="1"/>
+          <p:nvPr>
+            <p:ph idx="1" type="body"/>
+          </p:nvPr>
+        </p:nvSpPr>
+        <p:spPr>
+          <a:xfrm>
+            <a:off x="685800" y="4343400"/>
+            <a:ext cx="5486400" cy="4114800"/>
+          </a:xfrm>
+          <a:prstGeom prst="rect">
+            <a:avLst/>
+          </a:prstGeom>
+        </p:spPr>
+        <p:txBody>
+          <a:bodyPr anchorCtr="0" anchor="t" bIns="91425" lIns="91425" spcFirstLastPara="1" rIns="91425" wrap="square" tIns="91425">
+            <a:noAutofit/>
+          </a:bodyPr>
+          <a:lstStyle/>
+          <a:p>
+            <a:pPr indent="0" lvl="0" marL="0" rtl="0" algn="l">
+              <a:spcBef>
+                <a:spcPts val="0"/>
+              </a:spcBef>
+              <a:spcAft>
+                <a:spcPts val="0"/>
+              </a:spcAft>
+              <a:buNone/>
+            </a:pPr>
+            <a:r>
+              <a:t/>
+            </a:r>
+            <a:endParaRPr/>
+          </a:p>
+        </p:txBody>
+      </p:sp>
+      <p:sp>
+        <p:nvSpPr>
+          <p:cNvPr id="185" name="Google Shape;185;h46067e3cb066642d_0_87:notes"/>
+          <p:cNvSpPr/>
+          <p:nvPr>
+            <p:ph idx="2" type="sldImg"/>
+          </p:nvPr>
+        </p:nvSpPr>
+        <p:spPr>
+          <a:xfrm>
+            <a:off x="1143225" y="685800"/>
+            <a:ext cx="4572300" cy="3429000"/>
+          </a:xfrm>
+          <a:custGeom>
+            <a:rect b="b" l="l" r="r" t="t"/>
+            <a:pathLst>
+              <a:path extrusionOk="0" h="120000" w="120000">
+                <a:moveTo>
+                  <a:pt x="0" y="0"/>
+                </a:moveTo>
+                <a:lnTo>
+                  <a:pt x="120000" y="0"/>
+                </a:lnTo>
+                <a:lnTo>
+                  <a:pt x="120000" y="120000"/>
+                </a:lnTo>
+                <a:lnTo>
+                  <a:pt x="0" y="120000"/>
+                </a:lnTo>
+                <a:close/>
+              </a:path>
+            </a:pathLst>
+          </a:custGeom>
+        </p:spPr>
+      </p:sp>
+    </p:spTree>
+  </p:cSld>
+  <p:clrMapOvr>
+    <a:masterClrMapping/>
+  </p:clrMapOvr>
+</p:notes>
+</file>
+
+<file path=ppt/notesSlides/notesSlide9.xml><?xml version="1.0" encoding="utf-8"?>
+<p:notes xmlns:a="http://schemas.openxmlformats.org/drawingml/2006/main" xmlns:r="http://schemas.openxmlformats.org/officeDocument/2006/relationships" xmlns:mc="http://schemas.openxmlformats.org/markup-compatibility/2006" xmlns:mv="urn:schemas-microsoft-com:mac:vml" xmlns:p="http://schemas.openxmlformats.org/presentationml/2006/main" xmlns:c="http://schemas.openxmlformats.org/drawingml/2006/chart" xmlns:dgm="http://schemas.openxmlformats.org/drawingml/2006/diagram" xmlns:o="urn:schemas-microsoft-com:office:office" xmlns:v="urn:schemas-microsoft-com:vml" xmlns:pvml="urn:schemas-microsoft-com:office:powerpoint" xmlns:com="http://schemas.openxmlformats.org/drawingml/2006/compatibility" xmlns:p14="http://schemas.microsoft.com/office/powerpoint/2010/main" xmlns:p15="http://schemas.microsoft.com/office/powerpoint/2012/main" xmlns:ahyp="http://schemas.microsoft.com/office/drawing/2018/hyperlinkcolor" showMasterPhAnim="0" showMasterSp="0">
+  <p:cSld>
+    <p:spTree>
+      <p:nvGrpSpPr>
+        <p:cNvPr id="196" name="Shape 196"/>
+        <p:cNvGrpSpPr/>
+        <p:nvPr/>
+      </p:nvGrpSpPr>
+      <p:grpSpPr>
+        <a:xfrm>
+          <a:off x="0" y="0"/>
+          <a:ext cx="0" cy="0"/>
+          <a:chOff x="0" y="0"/>
+          <a:chExt cx="0" cy="0"/>
+        </a:xfrm>
+      </p:grpSpPr>
+      <p:sp>
+        <p:nvSpPr>
+          <p:cNvPr id="197" name="Google Shape;197;p3:notes"/>
+          <p:cNvSpPr txBox="1"/>
+          <p:nvPr>
+            <p:ph idx="1" type="body"/>
+          </p:nvPr>
+        </p:nvSpPr>
+        <p:spPr>
+          <a:xfrm>
+            <a:off x="685800" y="4343400"/>
+            <a:ext cx="5486400" cy="4114800"/>
+          </a:xfrm>
+          <a:prstGeom prst="rect">
+            <a:avLst/>
+          </a:prstGeom>
+        </p:spPr>
+        <p:txBody>
+          <a:bodyPr anchorCtr="0" anchor="t" bIns="91425" lIns="91425" spcFirstLastPara="1" rIns="91425" wrap="square" tIns="91425">
+            <a:noAutofit/>
+          </a:bodyPr>
+          <a:lstStyle/>
+          <a:p>
+            <a:pPr indent="0" lvl="0" marL="0" rtl="0" algn="l">
+              <a:spcBef>
+                <a:spcPts val="0"/>
+              </a:spcBef>
+              <a:spcAft>
+                <a:spcPts val="0"/>
+              </a:spcAft>
+              <a:buNone/>
+            </a:pPr>
+            <a:r>
+              <a:t/>
+            </a:r>
+            <a:endParaRPr/>
+          </a:p>
+        </p:txBody>
+      </p:sp>
+      <p:sp>
+        <p:nvSpPr>
+          <p:cNvPr id="198" name="Google Shape;198;p3:notes"/>
           <p:cNvSpPr/>
           <p:nvPr>
             <p:ph idx="2" type="sldImg"/>
@@ -11296,6 +11896,2267 @@
 </p:sld>
 </file>
 
+<file path=ppt/slides/slide10.xml><?xml version="1.0" encoding="utf-8"?>
+<p:sld xmlns:a="http://schemas.openxmlformats.org/drawingml/2006/main" xmlns:r="http://schemas.openxmlformats.org/officeDocument/2006/relationships" xmlns:mc="http://schemas.openxmlformats.org/markup-compatibility/2006" xmlns:mv="urn:schemas-microsoft-com:mac:vml" xmlns:p="http://schemas.openxmlformats.org/presentationml/2006/main" xmlns:c="http://schemas.openxmlformats.org/drawingml/2006/chart" xmlns:dgm="http://schemas.openxmlformats.org/drawingml/2006/diagram" xmlns:o="urn:schemas-microsoft-com:office:office" xmlns:v="urn:schemas-microsoft-com:vml" xmlns:pvml="urn:schemas-microsoft-com:office:powerpoint" xmlns:com="http://schemas.openxmlformats.org/drawingml/2006/compatibility" xmlns:p14="http://schemas.microsoft.com/office/powerpoint/2010/main" xmlns:p15="http://schemas.microsoft.com/office/powerpoint/2012/main" xmlns:ahyp="http://schemas.microsoft.com/office/drawing/2018/hyperlinkcolor">
+  <p:cSld>
+    <p:spTree>
+      <p:nvGrpSpPr>
+        <p:cNvPr id="216" name="Shape 216"/>
+        <p:cNvGrpSpPr/>
+        <p:nvPr/>
+      </p:nvGrpSpPr>
+      <p:grpSpPr>
+        <a:xfrm>
+          <a:off x="0" y="0"/>
+          <a:ext cx="0" cy="0"/>
+          <a:chOff x="0" y="0"/>
+          <a:chExt cx="0" cy="0"/>
+        </a:xfrm>
+      </p:grpSpPr>
+      <p:sp>
+        <p:nvSpPr>
+          <p:cNvPr id="217" name="Google Shape;217;p22"/>
+          <p:cNvSpPr/>
+          <p:nvPr/>
+        </p:nvSpPr>
+        <p:spPr>
+          <a:xfrm>
+            <a:off x="0" y="0"/>
+            <a:ext cx="12191695" cy="6858000"/>
+          </a:xfrm>
+          <a:prstGeom prst="rect">
+            <a:avLst/>
+          </a:prstGeom>
+          <a:solidFill>
+            <a:srgbClr val="111B2B"/>
+          </a:solidFill>
+          <a:ln>
+            <a:noFill/>
+          </a:ln>
+          <a:effectLst>
+            <a:outerShdw blurRad="40000" rotWithShape="0" dir="5400000" dist="23000">
+              <a:srgbClr val="000000">
+                <a:alpha val="34902"/>
+              </a:srgbClr>
+            </a:outerShdw>
+          </a:effectLst>
+        </p:spPr>
+        <p:txBody>
+          <a:bodyPr anchorCtr="0" anchor="ctr" bIns="45700" lIns="91425" spcFirstLastPara="1" rIns="91425" wrap="square" tIns="45700">
+            <a:noAutofit/>
+          </a:bodyPr>
+          <a:lstStyle/>
+          <a:p>
+            <a:pPr indent="0" lvl="0" marL="0" marR="0" rtl="0" algn="ctr">
+              <a:spcBef>
+                <a:spcPts val="0"/>
+              </a:spcBef>
+              <a:spcAft>
+                <a:spcPts val="0"/>
+              </a:spcAft>
+              <a:buNone/>
+            </a:pPr>
+            <a:r>
+              <a:t/>
+            </a:r>
+            <a:endParaRPr b="0" i="0" sz="1800" u="none" cap="none" strike="noStrike">
+              <a:solidFill>
+                <a:schemeClr val="dk1"/>
+              </a:solidFill>
+              <a:latin typeface="Calibri"/>
+              <a:ea typeface="Calibri"/>
+              <a:cs typeface="Calibri"/>
+              <a:sym typeface="Calibri"/>
+            </a:endParaRPr>
+          </a:p>
+        </p:txBody>
+      </p:sp>
+      <p:sp>
+        <p:nvSpPr>
+          <p:cNvPr id="218" name="Google Shape;218;p22"/>
+          <p:cNvSpPr/>
+          <p:nvPr/>
+        </p:nvSpPr>
+        <p:spPr>
+          <a:xfrm>
+            <a:off x="411480" y="393192"/>
+            <a:ext cx="73152" cy="429768"/>
+          </a:xfrm>
+          <a:prstGeom prst="rect">
+            <a:avLst/>
+          </a:prstGeom>
+          <a:solidFill>
+            <a:srgbClr val="F08443"/>
+          </a:solidFill>
+          <a:ln>
+            <a:noFill/>
+          </a:ln>
+          <a:effectLst>
+            <a:outerShdw blurRad="40000" rotWithShape="0" dir="5400000" dist="23000">
+              <a:srgbClr val="000000">
+                <a:alpha val="34902"/>
+              </a:srgbClr>
+            </a:outerShdw>
+          </a:effectLst>
+        </p:spPr>
+        <p:txBody>
+          <a:bodyPr anchorCtr="0" anchor="ctr" bIns="45700" lIns="91425" spcFirstLastPara="1" rIns="91425" wrap="square" tIns="45700">
+            <a:noAutofit/>
+          </a:bodyPr>
+          <a:lstStyle/>
+          <a:p>
+            <a:pPr indent="0" lvl="0" marL="0" marR="0" rtl="0" algn="ctr">
+              <a:spcBef>
+                <a:spcPts val="0"/>
+              </a:spcBef>
+              <a:spcAft>
+                <a:spcPts val="0"/>
+              </a:spcAft>
+              <a:buNone/>
+            </a:pPr>
+            <a:r>
+              <a:t/>
+            </a:r>
+            <a:endParaRPr b="0" i="0" sz="1800" u="none" cap="none" strike="noStrike">
+              <a:solidFill>
+                <a:schemeClr val="dk1"/>
+              </a:solidFill>
+              <a:latin typeface="Calibri"/>
+              <a:ea typeface="Calibri"/>
+              <a:cs typeface="Calibri"/>
+              <a:sym typeface="Calibri"/>
+            </a:endParaRPr>
+          </a:p>
+        </p:txBody>
+      </p:sp>
+      <p:sp>
+        <p:nvSpPr>
+          <p:cNvPr id="219" name="Google Shape;219;p22"/>
+          <p:cNvSpPr txBox="1"/>
+          <p:nvPr/>
+        </p:nvSpPr>
+        <p:spPr>
+          <a:xfrm>
+            <a:off x="612648" y="411480"/>
+            <a:ext cx="7315200" cy="274320"/>
+          </a:xfrm>
+          <a:prstGeom prst="rect">
+            <a:avLst/>
+          </a:prstGeom>
+          <a:noFill/>
+          <a:ln>
+            <a:noFill/>
+          </a:ln>
+        </p:spPr>
+        <p:txBody>
+          <a:bodyPr anchorCtr="0" anchor="t" bIns="0" lIns="0" spcFirstLastPara="1" rIns="0" wrap="square" tIns="0">
+            <a:spAutoFit/>
+          </a:bodyPr>
+          <a:lstStyle/>
+          <a:p>
+            <a:pPr indent="0" lvl="0" marL="0" marR="0" rtl="0" algn="l">
+              <a:spcBef>
+                <a:spcPts val="0"/>
+              </a:spcBef>
+              <a:spcAft>
+                <a:spcPts val="0"/>
+              </a:spcAft>
+              <a:buNone/>
+            </a:pPr>
+            <a:r>
+              <a:rPr b="1" i="0" lang="en-US" sz="1100" u="none" cap="none" strike="noStrike">
+                <a:solidFill>
+                  <a:srgbClr val="BDC8D6"/>
+                </a:solidFill>
+                <a:latin typeface="Arial"/>
+                <a:ea typeface="Arial"/>
+                <a:cs typeface="Arial"/>
+                <a:sym typeface="Arial"/>
+              </a:rPr>
+              <a:t>CEP146  /  SOFTWARE DEVELOPMENT CURRENT EVENT</a:t>
+            </a:r>
+            <a:endParaRPr/>
+          </a:p>
+        </p:txBody>
+      </p:sp>
+      <p:sp>
+        <p:nvSpPr>
+          <p:cNvPr id="220" name="Google Shape;220;p22"/>
+          <p:cNvSpPr txBox="1"/>
+          <p:nvPr/>
+        </p:nvSpPr>
+        <p:spPr>
+          <a:xfrm>
+            <a:off x="621792" y="978408"/>
+            <a:ext cx="10972800" cy="731520"/>
+          </a:xfrm>
+          <a:prstGeom prst="rect">
+            <a:avLst/>
+          </a:prstGeom>
+          <a:noFill/>
+          <a:ln>
+            <a:noFill/>
+          </a:ln>
+        </p:spPr>
+        <p:txBody>
+          <a:bodyPr anchorCtr="0" anchor="t" bIns="0" lIns="0" spcFirstLastPara="1" rIns="0" wrap="square" tIns="0">
+            <a:spAutoFit/>
+          </a:bodyPr>
+          <a:lstStyle/>
+          <a:p>
+            <a:pPr indent="0" lvl="0" marL="0" marR="0" rtl="0" algn="l">
+              <a:spcBef>
+                <a:spcPts val="0"/>
+              </a:spcBef>
+              <a:spcAft>
+                <a:spcPts val="0"/>
+              </a:spcAft>
+              <a:buNone/>
+            </a:pPr>
+            <a:r>
+              <a:rPr b="1" i="0" lang="en-US" sz="3100" u="none" cap="none" strike="noStrike">
+                <a:solidFill>
+                  <a:srgbClr val="F6F7FA"/>
+                </a:solidFill>
+                <a:latin typeface="Arial"/>
+                <a:ea typeface="Arial"/>
+                <a:cs typeface="Arial"/>
+                <a:sym typeface="Arial"/>
+              </a:rPr>
+              <a:t>Why does memory safety matter?</a:t>
+            </a:r>
+            <a:endParaRPr/>
+          </a:p>
+        </p:txBody>
+      </p:sp>
+      <p:sp>
+        <p:nvSpPr>
+          <p:cNvPr id="221" name="Google Shape;221;p22"/>
+          <p:cNvSpPr txBox="1"/>
+          <p:nvPr/>
+        </p:nvSpPr>
+        <p:spPr>
+          <a:xfrm>
+            <a:off x="9875520" y="6446520"/>
+            <a:ext cx="1828800" cy="182880"/>
+          </a:xfrm>
+          <a:prstGeom prst="rect">
+            <a:avLst/>
+          </a:prstGeom>
+          <a:noFill/>
+          <a:ln>
+            <a:noFill/>
+          </a:ln>
+        </p:spPr>
+        <p:txBody>
+          <a:bodyPr anchorCtr="0" anchor="t" bIns="0" lIns="0" spcFirstLastPara="1" rIns="0" wrap="square" tIns="0">
+            <a:spAutoFit/>
+          </a:bodyPr>
+          <a:lstStyle/>
+          <a:p>
+            <a:pPr indent="0" lvl="0" marL="0" marR="0" rtl="0" algn="l">
+              <a:spcBef>
+                <a:spcPts val="0"/>
+              </a:spcBef>
+              <a:spcAft>
+                <a:spcPts val="0"/>
+              </a:spcAft>
+              <a:buNone/>
+            </a:pPr>
+            <a:r>
+              <a:rPr b="0" i="0" lang="en-US" sz="900" u="none" cap="none" strike="noStrike">
+                <a:solidFill>
+                  <a:srgbClr val="BDC8D6"/>
+                </a:solidFill>
+                <a:latin typeface="Arial"/>
+                <a:ea typeface="Arial"/>
+                <a:cs typeface="Arial"/>
+                <a:sym typeface="Arial"/>
+              </a:rPr>
+              <a:t>04  /  RUST IN 2026</a:t>
+            </a:r>
+            <a:endParaRPr/>
+          </a:p>
+        </p:txBody>
+      </p:sp>
+      <p:sp>
+        <p:nvSpPr>
+          <p:cNvPr id="222" name="Google Shape;222;p22"/>
+          <p:cNvSpPr/>
+          <p:nvPr/>
+        </p:nvSpPr>
+        <p:spPr>
+          <a:xfrm>
+            <a:off x="758952" y="2157984"/>
+            <a:ext cx="100584" cy="100584"/>
+          </a:xfrm>
+          <a:prstGeom prst="rect">
+            <a:avLst/>
+          </a:prstGeom>
+          <a:solidFill>
+            <a:srgbClr val="F08443"/>
+          </a:solidFill>
+          <a:ln>
+            <a:noFill/>
+          </a:ln>
+          <a:effectLst>
+            <a:outerShdw blurRad="40000" rotWithShape="0" dir="5400000" dist="23000">
+              <a:srgbClr val="000000">
+                <a:alpha val="34902"/>
+              </a:srgbClr>
+            </a:outerShdw>
+          </a:effectLst>
+        </p:spPr>
+        <p:txBody>
+          <a:bodyPr anchorCtr="0" anchor="ctr" bIns="45700" lIns="91425" spcFirstLastPara="1" rIns="91425" wrap="square" tIns="45700">
+            <a:noAutofit/>
+          </a:bodyPr>
+          <a:lstStyle/>
+          <a:p>
+            <a:pPr indent="0" lvl="0" marL="0" marR="0" rtl="0" algn="ctr">
+              <a:spcBef>
+                <a:spcPts val="0"/>
+              </a:spcBef>
+              <a:spcAft>
+                <a:spcPts val="0"/>
+              </a:spcAft>
+              <a:buNone/>
+            </a:pPr>
+            <a:r>
+              <a:t/>
+            </a:r>
+            <a:endParaRPr b="0" i="0" sz="1800" u="none" cap="none" strike="noStrike">
+              <a:solidFill>
+                <a:schemeClr val="dk1"/>
+              </a:solidFill>
+              <a:latin typeface="Calibri"/>
+              <a:ea typeface="Calibri"/>
+              <a:cs typeface="Calibri"/>
+              <a:sym typeface="Calibri"/>
+            </a:endParaRPr>
+          </a:p>
+        </p:txBody>
+      </p:sp>
+      <p:sp>
+        <p:nvSpPr>
+          <p:cNvPr id="223" name="Google Shape;223;p22"/>
+          <p:cNvSpPr txBox="1"/>
+          <p:nvPr/>
+        </p:nvSpPr>
+        <p:spPr>
+          <a:xfrm>
+            <a:off x="1042415" y="2048256"/>
+            <a:ext cx="10241280" cy="685800"/>
+          </a:xfrm>
+          <a:prstGeom prst="rect">
+            <a:avLst/>
+          </a:prstGeom>
+          <a:noFill/>
+          <a:ln>
+            <a:noFill/>
+          </a:ln>
+        </p:spPr>
+        <p:txBody>
+          <a:bodyPr anchorCtr="0" anchor="t" bIns="0" lIns="0" spcFirstLastPara="1" rIns="0" wrap="square" tIns="0">
+            <a:spAutoFit/>
+          </a:bodyPr>
+          <a:lstStyle/>
+          <a:p>
+            <a:pPr indent="0" lvl="0" marL="0" marR="0" rtl="0" algn="l">
+              <a:spcBef>
+                <a:spcPts val="0"/>
+              </a:spcBef>
+              <a:spcAft>
+                <a:spcPts val="0"/>
+              </a:spcAft>
+              <a:buNone/>
+            </a:pPr>
+            <a:r>
+              <a:rPr b="0" i="0" lang="en-US" sz="2100" u="none" cap="none" strike="noStrike">
+                <a:solidFill>
+                  <a:srgbClr val="F6F7FA"/>
+                </a:solidFill>
+                <a:latin typeface="Arial"/>
+                <a:ea typeface="Arial"/>
+                <a:cs typeface="Arial"/>
+                <a:sym typeface="Arial"/>
+              </a:rPr>
+              <a:t>Memory mistakes can cause crashes and security problems</a:t>
+            </a:r>
+            <a:endParaRPr/>
+          </a:p>
+        </p:txBody>
+      </p:sp>
+      <p:sp>
+        <p:nvSpPr>
+          <p:cNvPr id="224" name="Google Shape;224;p22"/>
+          <p:cNvSpPr/>
+          <p:nvPr/>
+        </p:nvSpPr>
+        <p:spPr>
+          <a:xfrm>
+            <a:off x="758952" y="3264408"/>
+            <a:ext cx="100584" cy="100584"/>
+          </a:xfrm>
+          <a:prstGeom prst="rect">
+            <a:avLst/>
+          </a:prstGeom>
+          <a:solidFill>
+            <a:srgbClr val="F08443"/>
+          </a:solidFill>
+          <a:ln>
+            <a:noFill/>
+          </a:ln>
+          <a:effectLst>
+            <a:outerShdw blurRad="40000" rotWithShape="0" dir="5400000" dist="23000">
+              <a:srgbClr val="000000">
+                <a:alpha val="34902"/>
+              </a:srgbClr>
+            </a:outerShdw>
+          </a:effectLst>
+        </p:spPr>
+        <p:txBody>
+          <a:bodyPr anchorCtr="0" anchor="ctr" bIns="45700" lIns="91425" spcFirstLastPara="1" rIns="91425" wrap="square" tIns="45700">
+            <a:noAutofit/>
+          </a:bodyPr>
+          <a:lstStyle/>
+          <a:p>
+            <a:pPr indent="0" lvl="0" marL="0" marR="0" rtl="0" algn="ctr">
+              <a:spcBef>
+                <a:spcPts val="0"/>
+              </a:spcBef>
+              <a:spcAft>
+                <a:spcPts val="0"/>
+              </a:spcAft>
+              <a:buNone/>
+            </a:pPr>
+            <a:r>
+              <a:t/>
+            </a:r>
+            <a:endParaRPr b="0" i="0" sz="1800" u="none" cap="none" strike="noStrike">
+              <a:solidFill>
+                <a:schemeClr val="dk1"/>
+              </a:solidFill>
+              <a:latin typeface="Calibri"/>
+              <a:ea typeface="Calibri"/>
+              <a:cs typeface="Calibri"/>
+              <a:sym typeface="Calibri"/>
+            </a:endParaRPr>
+          </a:p>
+        </p:txBody>
+      </p:sp>
+      <p:sp>
+        <p:nvSpPr>
+          <p:cNvPr id="225" name="Google Shape;225;p22"/>
+          <p:cNvSpPr txBox="1"/>
+          <p:nvPr/>
+        </p:nvSpPr>
+        <p:spPr>
+          <a:xfrm>
+            <a:off x="1042415" y="3154680"/>
+            <a:ext cx="10241280" cy="685800"/>
+          </a:xfrm>
+          <a:prstGeom prst="rect">
+            <a:avLst/>
+          </a:prstGeom>
+          <a:noFill/>
+          <a:ln>
+            <a:noFill/>
+          </a:ln>
+        </p:spPr>
+        <p:txBody>
+          <a:bodyPr anchorCtr="0" anchor="t" bIns="0" lIns="0" spcFirstLastPara="1" rIns="0" wrap="square" tIns="0">
+            <a:spAutoFit/>
+          </a:bodyPr>
+          <a:lstStyle/>
+          <a:p>
+            <a:pPr indent="0" lvl="0" marL="0" marR="0" rtl="0" algn="l">
+              <a:spcBef>
+                <a:spcPts val="0"/>
+              </a:spcBef>
+              <a:spcAft>
+                <a:spcPts val="0"/>
+              </a:spcAft>
+              <a:buNone/>
+            </a:pPr>
+            <a:r>
+              <a:rPr b="0" i="0" lang="en-US" sz="2100" u="none" cap="none" strike="noStrike">
+                <a:solidFill>
+                  <a:srgbClr val="F6F7FA"/>
+                </a:solidFill>
+                <a:latin typeface="Arial"/>
+                <a:ea typeface="Arial"/>
+                <a:cs typeface="Arial"/>
+                <a:sym typeface="Arial"/>
+              </a:rPr>
+              <a:t>Rust checks ownership and borrowing while code is compiled</a:t>
+            </a:r>
+            <a:endParaRPr/>
+          </a:p>
+        </p:txBody>
+      </p:sp>
+      <p:sp>
+        <p:nvSpPr>
+          <p:cNvPr id="226" name="Google Shape;226;p22"/>
+          <p:cNvSpPr/>
+          <p:nvPr/>
+        </p:nvSpPr>
+        <p:spPr>
+          <a:xfrm>
+            <a:off x="758952" y="4407408"/>
+            <a:ext cx="100584" cy="100584"/>
+          </a:xfrm>
+          <a:prstGeom prst="rect">
+            <a:avLst/>
+          </a:prstGeom>
+          <a:solidFill>
+            <a:srgbClr val="F08443"/>
+          </a:solidFill>
+          <a:ln>
+            <a:noFill/>
+          </a:ln>
+          <a:effectLst>
+            <a:outerShdw blurRad="40000" rotWithShape="0" dir="5400000" dist="23000">
+              <a:srgbClr val="000000">
+                <a:alpha val="34902"/>
+              </a:srgbClr>
+            </a:outerShdw>
+          </a:effectLst>
+        </p:spPr>
+        <p:txBody>
+          <a:bodyPr anchorCtr="0" anchor="ctr" bIns="45700" lIns="91425" spcFirstLastPara="1" rIns="91425" wrap="square" tIns="45700">
+            <a:noAutofit/>
+          </a:bodyPr>
+          <a:lstStyle/>
+          <a:p>
+            <a:pPr indent="0" lvl="0" marL="0" marR="0" rtl="0" algn="ctr">
+              <a:spcBef>
+                <a:spcPts val="0"/>
+              </a:spcBef>
+              <a:spcAft>
+                <a:spcPts val="0"/>
+              </a:spcAft>
+              <a:buNone/>
+            </a:pPr>
+            <a:r>
+              <a:t/>
+            </a:r>
+            <a:endParaRPr b="0" i="0" sz="1800" u="none" cap="none" strike="noStrike">
+              <a:solidFill>
+                <a:schemeClr val="dk1"/>
+              </a:solidFill>
+              <a:latin typeface="Calibri"/>
+              <a:ea typeface="Calibri"/>
+              <a:cs typeface="Calibri"/>
+              <a:sym typeface="Calibri"/>
+            </a:endParaRPr>
+          </a:p>
+        </p:txBody>
+      </p:sp>
+      <p:sp>
+        <p:nvSpPr>
+          <p:cNvPr id="227" name="Google Shape;227;p22"/>
+          <p:cNvSpPr txBox="1"/>
+          <p:nvPr/>
+        </p:nvSpPr>
+        <p:spPr>
+          <a:xfrm>
+            <a:off x="1042415" y="4297680"/>
+            <a:ext cx="10241280" cy="685800"/>
+          </a:xfrm>
+          <a:prstGeom prst="rect">
+            <a:avLst/>
+          </a:prstGeom>
+          <a:noFill/>
+          <a:ln>
+            <a:noFill/>
+          </a:ln>
+        </p:spPr>
+        <p:txBody>
+          <a:bodyPr anchorCtr="0" anchor="t" bIns="0" lIns="0" spcFirstLastPara="1" rIns="0" wrap="square" tIns="0">
+            <a:spAutoFit/>
+          </a:bodyPr>
+          <a:lstStyle/>
+          <a:p>
+            <a:pPr indent="0" lvl="0" marL="0" marR="0" rtl="0" algn="l">
+              <a:spcBef>
+                <a:spcPts val="0"/>
+              </a:spcBef>
+              <a:spcAft>
+                <a:spcPts val="0"/>
+              </a:spcAft>
+              <a:buNone/>
+            </a:pPr>
+            <a:r>
+              <a:rPr b="0" i="0" lang="en-US" sz="2100" u="none" cap="none" strike="noStrike">
+                <a:solidFill>
+                  <a:srgbClr val="F6F7FA"/>
+                </a:solidFill>
+                <a:latin typeface="Arial"/>
+                <a:ea typeface="Arial"/>
+                <a:cs typeface="Arial"/>
+                <a:sym typeface="Arial"/>
+              </a:rPr>
+              <a:t>This helps catch some bugs before the program runs</a:t>
+            </a:r>
+            <a:endParaRPr/>
+          </a:p>
+        </p:txBody>
+      </p:sp>
+    </p:spTree>
+  </p:cSld>
+  <p:clrMapOvr>
+    <a:masterClrMapping/>
+  </p:clrMapOvr>
+</p:sld>
+</file>
+
+<file path=ppt/slides/slide11.xml><?xml version="1.0" encoding="utf-8"?>
+<p:sld xmlns:a="http://schemas.openxmlformats.org/drawingml/2006/main" xmlns:r="http://schemas.openxmlformats.org/officeDocument/2006/relationships" xmlns:mc="http://schemas.openxmlformats.org/markup-compatibility/2006" xmlns:mv="urn:schemas-microsoft-com:mac:vml" xmlns:p="http://schemas.openxmlformats.org/presentationml/2006/main" xmlns:c="http://schemas.openxmlformats.org/drawingml/2006/chart" xmlns:dgm="http://schemas.openxmlformats.org/drawingml/2006/diagram" xmlns:o="urn:schemas-microsoft-com:office:office" xmlns:v="urn:schemas-microsoft-com:vml" xmlns:pvml="urn:schemas-microsoft-com:office:powerpoint" xmlns:com="http://schemas.openxmlformats.org/drawingml/2006/compatibility" xmlns:p14="http://schemas.microsoft.com/office/powerpoint/2010/main" xmlns:p15="http://schemas.microsoft.com/office/powerpoint/2012/main" xmlns:ahyp="http://schemas.microsoft.com/office/drawing/2018/hyperlinkcolor">
+  <p:cSld>
+    <p:spTree>
+      <p:nvGrpSpPr>
+        <p:cNvPr id="231" name="Shape 231"/>
+        <p:cNvGrpSpPr/>
+        <p:nvPr/>
+      </p:nvGrpSpPr>
+      <p:grpSpPr>
+        <a:xfrm>
+          <a:off x="0" y="0"/>
+          <a:ext cx="0" cy="0"/>
+          <a:chOff x="0" y="0"/>
+          <a:chExt cx="0" cy="0"/>
+        </a:xfrm>
+      </p:grpSpPr>
+      <p:sp>
+        <p:nvSpPr>
+          <p:cNvPr id="232" name="Google Shape;232;p23"/>
+          <p:cNvSpPr/>
+          <p:nvPr/>
+        </p:nvSpPr>
+        <p:spPr>
+          <a:xfrm>
+            <a:off x="0" y="0"/>
+            <a:ext cx="12191695" cy="6858000"/>
+          </a:xfrm>
+          <a:prstGeom prst="rect">
+            <a:avLst/>
+          </a:prstGeom>
+          <a:solidFill>
+            <a:srgbClr val="111B2B"/>
+          </a:solidFill>
+          <a:ln>
+            <a:noFill/>
+          </a:ln>
+          <a:effectLst>
+            <a:outerShdw blurRad="40000" rotWithShape="0" dir="5400000" dist="23000">
+              <a:srgbClr val="000000">
+                <a:alpha val="34902"/>
+              </a:srgbClr>
+            </a:outerShdw>
+          </a:effectLst>
+        </p:spPr>
+        <p:txBody>
+          <a:bodyPr anchorCtr="0" anchor="ctr" bIns="45700" lIns="91425" spcFirstLastPara="1" rIns="91425" wrap="square" tIns="45700">
+            <a:noAutofit/>
+          </a:bodyPr>
+          <a:lstStyle/>
+          <a:p>
+            <a:pPr indent="0" lvl="0" marL="0" marR="0" rtl="0" algn="ctr">
+              <a:spcBef>
+                <a:spcPts val="0"/>
+              </a:spcBef>
+              <a:spcAft>
+                <a:spcPts val="0"/>
+              </a:spcAft>
+              <a:buNone/>
+            </a:pPr>
+            <a:r>
+              <a:t/>
+            </a:r>
+            <a:endParaRPr b="0" i="0" sz="1800" u="none" cap="none" strike="noStrike">
+              <a:solidFill>
+                <a:schemeClr val="dk1"/>
+              </a:solidFill>
+              <a:latin typeface="Calibri"/>
+              <a:ea typeface="Calibri"/>
+              <a:cs typeface="Calibri"/>
+              <a:sym typeface="Calibri"/>
+            </a:endParaRPr>
+          </a:p>
+        </p:txBody>
+      </p:sp>
+      <p:sp>
+        <p:nvSpPr>
+          <p:cNvPr id="233" name="Google Shape;233;p23"/>
+          <p:cNvSpPr/>
+          <p:nvPr/>
+        </p:nvSpPr>
+        <p:spPr>
+          <a:xfrm>
+            <a:off x="411480" y="393192"/>
+            <a:ext cx="73152" cy="429768"/>
+          </a:xfrm>
+          <a:prstGeom prst="rect">
+            <a:avLst/>
+          </a:prstGeom>
+          <a:solidFill>
+            <a:srgbClr val="F08443"/>
+          </a:solidFill>
+          <a:ln>
+            <a:noFill/>
+          </a:ln>
+          <a:effectLst>
+            <a:outerShdw blurRad="40000" rotWithShape="0" dir="5400000" dist="23000">
+              <a:srgbClr val="000000">
+                <a:alpha val="34902"/>
+              </a:srgbClr>
+            </a:outerShdw>
+          </a:effectLst>
+        </p:spPr>
+        <p:txBody>
+          <a:bodyPr anchorCtr="0" anchor="ctr" bIns="45700" lIns="91425" spcFirstLastPara="1" rIns="91425" wrap="square" tIns="45700">
+            <a:noAutofit/>
+          </a:bodyPr>
+          <a:lstStyle/>
+          <a:p>
+            <a:pPr indent="0" lvl="0" marL="0" marR="0" rtl="0" algn="ctr">
+              <a:spcBef>
+                <a:spcPts val="0"/>
+              </a:spcBef>
+              <a:spcAft>
+                <a:spcPts val="0"/>
+              </a:spcAft>
+              <a:buNone/>
+            </a:pPr>
+            <a:r>
+              <a:t/>
+            </a:r>
+            <a:endParaRPr b="0" i="0" sz="1800" u="none" cap="none" strike="noStrike">
+              <a:solidFill>
+                <a:schemeClr val="dk1"/>
+              </a:solidFill>
+              <a:latin typeface="Calibri"/>
+              <a:ea typeface="Calibri"/>
+              <a:cs typeface="Calibri"/>
+              <a:sym typeface="Calibri"/>
+            </a:endParaRPr>
+          </a:p>
+        </p:txBody>
+      </p:sp>
+      <p:sp>
+        <p:nvSpPr>
+          <p:cNvPr id="234" name="Google Shape;234;p23"/>
+          <p:cNvSpPr txBox="1"/>
+          <p:nvPr/>
+        </p:nvSpPr>
+        <p:spPr>
+          <a:xfrm>
+            <a:off x="612648" y="411480"/>
+            <a:ext cx="7315200" cy="274320"/>
+          </a:xfrm>
+          <a:prstGeom prst="rect">
+            <a:avLst/>
+          </a:prstGeom>
+          <a:noFill/>
+          <a:ln>
+            <a:noFill/>
+          </a:ln>
+        </p:spPr>
+        <p:txBody>
+          <a:bodyPr anchorCtr="0" anchor="t" bIns="0" lIns="0" spcFirstLastPara="1" rIns="0" wrap="square" tIns="0">
+            <a:spAutoFit/>
+          </a:bodyPr>
+          <a:lstStyle/>
+          <a:p>
+            <a:pPr indent="0" lvl="0" marL="0" marR="0" rtl="0" algn="l">
+              <a:spcBef>
+                <a:spcPts val="0"/>
+              </a:spcBef>
+              <a:spcAft>
+                <a:spcPts val="0"/>
+              </a:spcAft>
+              <a:buNone/>
+            </a:pPr>
+            <a:r>
+              <a:rPr b="1" i="0" lang="en-US" sz="1100" u="none" cap="none" strike="noStrike">
+                <a:solidFill>
+                  <a:srgbClr val="BDC8D6"/>
+                </a:solidFill>
+                <a:latin typeface="Arial"/>
+                <a:ea typeface="Arial"/>
+                <a:cs typeface="Arial"/>
+                <a:sym typeface="Arial"/>
+              </a:rPr>
+              <a:t>CEP146  /  SOFTWARE DEVELOPMENT CURRENT EVENT</a:t>
+            </a:r>
+            <a:endParaRPr/>
+          </a:p>
+        </p:txBody>
+      </p:sp>
+      <p:sp>
+        <p:nvSpPr>
+          <p:cNvPr id="235" name="Google Shape;235;p23"/>
+          <p:cNvSpPr txBox="1"/>
+          <p:nvPr/>
+        </p:nvSpPr>
+        <p:spPr>
+          <a:xfrm>
+            <a:off x="621792" y="978408"/>
+            <a:ext cx="10972800" cy="731520"/>
+          </a:xfrm>
+          <a:prstGeom prst="rect">
+            <a:avLst/>
+          </a:prstGeom>
+          <a:noFill/>
+          <a:ln>
+            <a:noFill/>
+          </a:ln>
+        </p:spPr>
+        <p:txBody>
+          <a:bodyPr anchorCtr="0" anchor="t" bIns="0" lIns="0" spcFirstLastPara="1" rIns="0" wrap="square" tIns="0">
+            <a:spAutoFit/>
+          </a:bodyPr>
+          <a:lstStyle/>
+          <a:p>
+            <a:pPr indent="0" lvl="0" marL="0" marR="0" rtl="0" algn="l">
+              <a:spcBef>
+                <a:spcPts val="0"/>
+              </a:spcBef>
+              <a:spcAft>
+                <a:spcPts val="0"/>
+              </a:spcAft>
+              <a:buNone/>
+            </a:pPr>
+            <a:r>
+              <a:rPr b="1" i="0" lang="en-US" sz="3100" u="none" cap="none" strike="noStrike">
+                <a:solidFill>
+                  <a:srgbClr val="F6F7FA"/>
+                </a:solidFill>
+                <a:latin typeface="Arial"/>
+                <a:ea typeface="Arial"/>
+                <a:cs typeface="Arial"/>
+                <a:sym typeface="Arial"/>
+              </a:rPr>
+              <a:t>Where is Rust being used?</a:t>
+            </a:r>
+            <a:endParaRPr/>
+          </a:p>
+        </p:txBody>
+      </p:sp>
+      <p:sp>
+        <p:nvSpPr>
+          <p:cNvPr id="236" name="Google Shape;236;p23"/>
+          <p:cNvSpPr txBox="1"/>
+          <p:nvPr/>
+        </p:nvSpPr>
+        <p:spPr>
+          <a:xfrm>
+            <a:off x="9875520" y="6446520"/>
+            <a:ext cx="1828800" cy="182880"/>
+          </a:xfrm>
+          <a:prstGeom prst="rect">
+            <a:avLst/>
+          </a:prstGeom>
+          <a:noFill/>
+          <a:ln>
+            <a:noFill/>
+          </a:ln>
+        </p:spPr>
+        <p:txBody>
+          <a:bodyPr anchorCtr="0" anchor="t" bIns="0" lIns="0" spcFirstLastPara="1" rIns="0" wrap="square" tIns="0">
+            <a:spAutoFit/>
+          </a:bodyPr>
+          <a:lstStyle/>
+          <a:p>
+            <a:pPr indent="0" lvl="0" marL="0" marR="0" rtl="0" algn="l">
+              <a:spcBef>
+                <a:spcPts val="0"/>
+              </a:spcBef>
+              <a:spcAft>
+                <a:spcPts val="0"/>
+              </a:spcAft>
+              <a:buNone/>
+            </a:pPr>
+            <a:r>
+              <a:rPr b="0" i="0" lang="en-US" sz="900" u="none" cap="none" strike="noStrike">
+                <a:solidFill>
+                  <a:srgbClr val="BDC8D6"/>
+                </a:solidFill>
+                <a:latin typeface="Arial"/>
+                <a:ea typeface="Arial"/>
+                <a:cs typeface="Arial"/>
+                <a:sym typeface="Arial"/>
+              </a:rPr>
+              <a:t>05  /  RUST IN 2026</a:t>
+            </a:r>
+            <a:endParaRPr/>
+          </a:p>
+        </p:txBody>
+      </p:sp>
+      <p:sp>
+        <p:nvSpPr>
+          <p:cNvPr id="237" name="Google Shape;237;p23"/>
+          <p:cNvSpPr/>
+          <p:nvPr/>
+        </p:nvSpPr>
+        <p:spPr>
+          <a:xfrm>
+            <a:off x="749808" y="1938528"/>
+            <a:ext cx="2514600" cy="731520"/>
+          </a:xfrm>
+          <a:prstGeom prst="rect">
+            <a:avLst/>
+          </a:prstGeom>
+          <a:solidFill>
+            <a:srgbClr val="1D2B3F"/>
+          </a:solidFill>
+          <a:ln>
+            <a:noFill/>
+          </a:ln>
+          <a:effectLst>
+            <a:outerShdw blurRad="40000" rotWithShape="0" dir="5400000" dist="23000">
+              <a:srgbClr val="000000">
+                <a:alpha val="34902"/>
+              </a:srgbClr>
+            </a:outerShdw>
+          </a:effectLst>
+        </p:spPr>
+        <p:txBody>
+          <a:bodyPr anchorCtr="0" anchor="ctr" bIns="45700" lIns="91425" spcFirstLastPara="1" rIns="91425" wrap="square" tIns="45700">
+            <a:noAutofit/>
+          </a:bodyPr>
+          <a:lstStyle/>
+          <a:p>
+            <a:pPr indent="0" lvl="0" marL="0" marR="0" rtl="0" algn="ctr">
+              <a:spcBef>
+                <a:spcPts val="0"/>
+              </a:spcBef>
+              <a:spcAft>
+                <a:spcPts val="0"/>
+              </a:spcAft>
+              <a:buNone/>
+            </a:pPr>
+            <a:r>
+              <a:t/>
+            </a:r>
+            <a:endParaRPr b="0" i="0" sz="1800" u="none" cap="none" strike="noStrike">
+              <a:solidFill>
+                <a:schemeClr val="dk1"/>
+              </a:solidFill>
+              <a:latin typeface="Calibri"/>
+              <a:ea typeface="Calibri"/>
+              <a:cs typeface="Calibri"/>
+              <a:sym typeface="Calibri"/>
+            </a:endParaRPr>
+          </a:p>
+        </p:txBody>
+      </p:sp>
+      <p:sp>
+        <p:nvSpPr>
+          <p:cNvPr id="238" name="Google Shape;238;p23"/>
+          <p:cNvSpPr txBox="1"/>
+          <p:nvPr/>
+        </p:nvSpPr>
+        <p:spPr>
+          <a:xfrm>
+            <a:off x="950976" y="2093976"/>
+            <a:ext cx="2194560" cy="393192"/>
+          </a:xfrm>
+          <a:prstGeom prst="rect">
+            <a:avLst/>
+          </a:prstGeom>
+          <a:noFill/>
+          <a:ln>
+            <a:noFill/>
+          </a:ln>
+        </p:spPr>
+        <p:txBody>
+          <a:bodyPr anchorCtr="0" anchor="t" bIns="0" lIns="0" spcFirstLastPara="1" rIns="0" wrap="square" tIns="0">
+            <a:spAutoFit/>
+          </a:bodyPr>
+          <a:lstStyle/>
+          <a:p>
+            <a:pPr indent="0" lvl="0" marL="0" marR="0" rtl="0" algn="l">
+              <a:spcBef>
+                <a:spcPts val="0"/>
+              </a:spcBef>
+              <a:spcAft>
+                <a:spcPts val="0"/>
+              </a:spcAft>
+              <a:buNone/>
+            </a:pPr>
+            <a:r>
+              <a:rPr b="1" i="0" lang="en-US" sz="1900" u="none" cap="none" strike="noStrike">
+                <a:solidFill>
+                  <a:srgbClr val="F08443"/>
+                </a:solidFill>
+                <a:latin typeface="Arial"/>
+                <a:ea typeface="Arial"/>
+                <a:cs typeface="Arial"/>
+                <a:sym typeface="Arial"/>
+              </a:rPr>
+              <a:t>Linux</a:t>
+            </a:r>
+            <a:endParaRPr/>
+          </a:p>
+        </p:txBody>
+      </p:sp>
+      <p:sp>
+        <p:nvSpPr>
+          <p:cNvPr id="239" name="Google Shape;239;p23"/>
+          <p:cNvSpPr txBox="1"/>
+          <p:nvPr/>
+        </p:nvSpPr>
+        <p:spPr>
+          <a:xfrm>
+            <a:off x="3547872" y="2057400"/>
+            <a:ext cx="7863840" cy="594360"/>
+          </a:xfrm>
+          <a:prstGeom prst="rect">
+            <a:avLst/>
+          </a:prstGeom>
+          <a:noFill/>
+          <a:ln>
+            <a:noFill/>
+          </a:ln>
+        </p:spPr>
+        <p:txBody>
+          <a:bodyPr anchorCtr="0" anchor="t" bIns="0" lIns="0" spcFirstLastPara="1" rIns="0" wrap="square" tIns="0">
+            <a:spAutoFit/>
+          </a:bodyPr>
+          <a:lstStyle/>
+          <a:p>
+            <a:pPr indent="0" lvl="0" marL="0" marR="0" rtl="0" algn="l">
+              <a:spcBef>
+                <a:spcPts val="0"/>
+              </a:spcBef>
+              <a:spcAft>
+                <a:spcPts val="0"/>
+              </a:spcAft>
+              <a:buNone/>
+            </a:pPr>
+            <a:r>
+              <a:rPr b="0" i="0" lang="en-US" sz="1900" u="none" cap="none" strike="noStrike">
+                <a:solidFill>
+                  <a:srgbClr val="F6F7FA"/>
+                </a:solidFill>
+                <a:latin typeface="Arial"/>
+                <a:ea typeface="Arial"/>
+                <a:cs typeface="Arial"/>
+                <a:sym typeface="Arial"/>
+              </a:rPr>
+              <a:t>Developers can write some kernel components in Rust.</a:t>
+            </a:r>
+            <a:endParaRPr/>
+          </a:p>
+        </p:txBody>
+      </p:sp>
+      <p:sp>
+        <p:nvSpPr>
+          <p:cNvPr id="240" name="Google Shape;240;p23"/>
+          <p:cNvSpPr/>
+          <p:nvPr/>
+        </p:nvSpPr>
+        <p:spPr>
+          <a:xfrm>
+            <a:off x="749808" y="2962656"/>
+            <a:ext cx="2514600" cy="731520"/>
+          </a:xfrm>
+          <a:prstGeom prst="rect">
+            <a:avLst/>
+          </a:prstGeom>
+          <a:solidFill>
+            <a:srgbClr val="1D2B3F"/>
+          </a:solidFill>
+          <a:ln>
+            <a:noFill/>
+          </a:ln>
+          <a:effectLst>
+            <a:outerShdw blurRad="40000" rotWithShape="0" dir="5400000" dist="23000">
+              <a:srgbClr val="000000">
+                <a:alpha val="34902"/>
+              </a:srgbClr>
+            </a:outerShdw>
+          </a:effectLst>
+        </p:spPr>
+        <p:txBody>
+          <a:bodyPr anchorCtr="0" anchor="ctr" bIns="45700" lIns="91425" spcFirstLastPara="1" rIns="91425" wrap="square" tIns="45700">
+            <a:noAutofit/>
+          </a:bodyPr>
+          <a:lstStyle/>
+          <a:p>
+            <a:pPr indent="0" lvl="0" marL="0" marR="0" rtl="0" algn="ctr">
+              <a:spcBef>
+                <a:spcPts val="0"/>
+              </a:spcBef>
+              <a:spcAft>
+                <a:spcPts val="0"/>
+              </a:spcAft>
+              <a:buNone/>
+            </a:pPr>
+            <a:r>
+              <a:t/>
+            </a:r>
+            <a:endParaRPr b="0" i="0" sz="1800" u="none" cap="none" strike="noStrike">
+              <a:solidFill>
+                <a:schemeClr val="dk1"/>
+              </a:solidFill>
+              <a:latin typeface="Calibri"/>
+              <a:ea typeface="Calibri"/>
+              <a:cs typeface="Calibri"/>
+              <a:sym typeface="Calibri"/>
+            </a:endParaRPr>
+          </a:p>
+        </p:txBody>
+      </p:sp>
+      <p:sp>
+        <p:nvSpPr>
+          <p:cNvPr id="241" name="Google Shape;241;p23"/>
+          <p:cNvSpPr txBox="1"/>
+          <p:nvPr/>
+        </p:nvSpPr>
+        <p:spPr>
+          <a:xfrm>
+            <a:off x="950976" y="3118104"/>
+            <a:ext cx="2194560" cy="393192"/>
+          </a:xfrm>
+          <a:prstGeom prst="rect">
+            <a:avLst/>
+          </a:prstGeom>
+          <a:noFill/>
+          <a:ln>
+            <a:noFill/>
+          </a:ln>
+        </p:spPr>
+        <p:txBody>
+          <a:bodyPr anchorCtr="0" anchor="t" bIns="0" lIns="0" spcFirstLastPara="1" rIns="0" wrap="square" tIns="0">
+            <a:spAutoFit/>
+          </a:bodyPr>
+          <a:lstStyle/>
+          <a:p>
+            <a:pPr indent="0" lvl="0" marL="0" marR="0" rtl="0" algn="l">
+              <a:spcBef>
+                <a:spcPts val="0"/>
+              </a:spcBef>
+              <a:spcAft>
+                <a:spcPts val="0"/>
+              </a:spcAft>
+              <a:buNone/>
+            </a:pPr>
+            <a:r>
+              <a:rPr b="1" i="0" lang="en-US" sz="1900" u="none" cap="none" strike="noStrike">
+                <a:solidFill>
+                  <a:srgbClr val="F08443"/>
+                </a:solidFill>
+                <a:latin typeface="Arial"/>
+                <a:ea typeface="Arial"/>
+                <a:cs typeface="Arial"/>
+                <a:sym typeface="Arial"/>
+              </a:rPr>
+              <a:t>Google / Android</a:t>
+            </a:r>
+            <a:endParaRPr/>
+          </a:p>
+        </p:txBody>
+      </p:sp>
+      <p:sp>
+        <p:nvSpPr>
+          <p:cNvPr id="242" name="Google Shape;242;p23"/>
+          <p:cNvSpPr txBox="1"/>
+          <p:nvPr/>
+        </p:nvSpPr>
+        <p:spPr>
+          <a:xfrm>
+            <a:off x="3547872" y="3081528"/>
+            <a:ext cx="7863840" cy="594360"/>
+          </a:xfrm>
+          <a:prstGeom prst="rect">
+            <a:avLst/>
+          </a:prstGeom>
+          <a:noFill/>
+          <a:ln>
+            <a:noFill/>
+          </a:ln>
+        </p:spPr>
+        <p:txBody>
+          <a:bodyPr anchorCtr="0" anchor="t" bIns="0" lIns="0" spcFirstLastPara="1" rIns="0" wrap="square" tIns="0">
+            <a:spAutoFit/>
+          </a:bodyPr>
+          <a:lstStyle/>
+          <a:p>
+            <a:pPr indent="0" lvl="0" marL="0" marR="0" rtl="0" algn="l">
+              <a:spcBef>
+                <a:spcPts val="0"/>
+              </a:spcBef>
+              <a:spcAft>
+                <a:spcPts val="0"/>
+              </a:spcAft>
+              <a:buNone/>
+            </a:pPr>
+            <a:r>
+              <a:rPr b="0" i="0" lang="en-US" sz="1900" u="none" cap="none" strike="noStrike">
+                <a:solidFill>
+                  <a:srgbClr val="F6F7FA"/>
+                </a:solidFill>
+                <a:latin typeface="Arial"/>
+                <a:ea typeface="Arial"/>
+                <a:cs typeface="Arial"/>
+                <a:sym typeface="Arial"/>
+              </a:rPr>
+              <a:t>Rust is used in security-sensitive Android code.</a:t>
+            </a:r>
+            <a:endParaRPr/>
+          </a:p>
+        </p:txBody>
+      </p:sp>
+      <p:sp>
+        <p:nvSpPr>
+          <p:cNvPr id="243" name="Google Shape;243;p23"/>
+          <p:cNvSpPr/>
+          <p:nvPr/>
+        </p:nvSpPr>
+        <p:spPr>
+          <a:xfrm>
+            <a:off x="749808" y="3986784"/>
+            <a:ext cx="2514600" cy="731520"/>
+          </a:xfrm>
+          <a:prstGeom prst="rect">
+            <a:avLst/>
+          </a:prstGeom>
+          <a:solidFill>
+            <a:srgbClr val="1D2B3F"/>
+          </a:solidFill>
+          <a:ln>
+            <a:noFill/>
+          </a:ln>
+          <a:effectLst>
+            <a:outerShdw blurRad="40000" rotWithShape="0" dir="5400000" dist="23000">
+              <a:srgbClr val="000000">
+                <a:alpha val="34902"/>
+              </a:srgbClr>
+            </a:outerShdw>
+          </a:effectLst>
+        </p:spPr>
+        <p:txBody>
+          <a:bodyPr anchorCtr="0" anchor="ctr" bIns="45700" lIns="91425" spcFirstLastPara="1" rIns="91425" wrap="square" tIns="45700">
+            <a:noAutofit/>
+          </a:bodyPr>
+          <a:lstStyle/>
+          <a:p>
+            <a:pPr indent="0" lvl="0" marL="0" marR="0" rtl="0" algn="ctr">
+              <a:spcBef>
+                <a:spcPts val="0"/>
+              </a:spcBef>
+              <a:spcAft>
+                <a:spcPts val="0"/>
+              </a:spcAft>
+              <a:buNone/>
+            </a:pPr>
+            <a:r>
+              <a:t/>
+            </a:r>
+            <a:endParaRPr b="0" i="0" sz="1800" u="none" cap="none" strike="noStrike">
+              <a:solidFill>
+                <a:schemeClr val="dk1"/>
+              </a:solidFill>
+              <a:latin typeface="Calibri"/>
+              <a:ea typeface="Calibri"/>
+              <a:cs typeface="Calibri"/>
+              <a:sym typeface="Calibri"/>
+            </a:endParaRPr>
+          </a:p>
+        </p:txBody>
+      </p:sp>
+      <p:sp>
+        <p:nvSpPr>
+          <p:cNvPr id="244" name="Google Shape;244;p23"/>
+          <p:cNvSpPr txBox="1"/>
+          <p:nvPr/>
+        </p:nvSpPr>
+        <p:spPr>
+          <a:xfrm>
+            <a:off x="950976" y="4142232"/>
+            <a:ext cx="2194560" cy="393192"/>
+          </a:xfrm>
+          <a:prstGeom prst="rect">
+            <a:avLst/>
+          </a:prstGeom>
+          <a:noFill/>
+          <a:ln>
+            <a:noFill/>
+          </a:ln>
+        </p:spPr>
+        <p:txBody>
+          <a:bodyPr anchorCtr="0" anchor="t" bIns="0" lIns="0" spcFirstLastPara="1" rIns="0" wrap="square" tIns="0">
+            <a:spAutoFit/>
+          </a:bodyPr>
+          <a:lstStyle/>
+          <a:p>
+            <a:pPr indent="0" lvl="0" marL="0" marR="0" rtl="0" algn="l">
+              <a:spcBef>
+                <a:spcPts val="0"/>
+              </a:spcBef>
+              <a:spcAft>
+                <a:spcPts val="0"/>
+              </a:spcAft>
+              <a:buNone/>
+            </a:pPr>
+            <a:r>
+              <a:rPr b="1" i="0" lang="en-US" sz="1900" u="none" cap="none" strike="noStrike">
+                <a:solidFill>
+                  <a:srgbClr val="F08443"/>
+                </a:solidFill>
+                <a:latin typeface="Arial"/>
+                <a:ea typeface="Arial"/>
+                <a:cs typeface="Arial"/>
+                <a:sym typeface="Arial"/>
+              </a:rPr>
+              <a:t>Microsoft</a:t>
+            </a:r>
+            <a:endParaRPr/>
+          </a:p>
+        </p:txBody>
+      </p:sp>
+      <p:sp>
+        <p:nvSpPr>
+          <p:cNvPr id="245" name="Google Shape;245;p23"/>
+          <p:cNvSpPr txBox="1"/>
+          <p:nvPr/>
+        </p:nvSpPr>
+        <p:spPr>
+          <a:xfrm>
+            <a:off x="3547872" y="4105656"/>
+            <a:ext cx="7863840" cy="594360"/>
+          </a:xfrm>
+          <a:prstGeom prst="rect">
+            <a:avLst/>
+          </a:prstGeom>
+          <a:noFill/>
+          <a:ln>
+            <a:noFill/>
+          </a:ln>
+        </p:spPr>
+        <p:txBody>
+          <a:bodyPr anchorCtr="0" anchor="t" bIns="0" lIns="0" spcFirstLastPara="1" rIns="0" wrap="square" tIns="0">
+            <a:spAutoFit/>
+          </a:bodyPr>
+          <a:lstStyle/>
+          <a:p>
+            <a:pPr indent="0" lvl="0" marL="0" marR="0" rtl="0" algn="l">
+              <a:spcBef>
+                <a:spcPts val="0"/>
+              </a:spcBef>
+              <a:spcAft>
+                <a:spcPts val="0"/>
+              </a:spcAft>
+              <a:buNone/>
+            </a:pPr>
+            <a:r>
+              <a:rPr b="0" i="0" lang="en-US" sz="1900" u="none" cap="none" strike="noStrike">
+                <a:solidFill>
+                  <a:srgbClr val="F6F7FA"/>
+                </a:solidFill>
+                <a:latin typeface="Arial"/>
+                <a:ea typeface="Arial"/>
+                <a:cs typeface="Arial"/>
+                <a:sym typeface="Arial"/>
+              </a:rPr>
+              <a:t>Rust is being explored and used in some systems work.</a:t>
+            </a:r>
+            <a:endParaRPr/>
+          </a:p>
+        </p:txBody>
+      </p:sp>
+      <p:sp>
+        <p:nvSpPr>
+          <p:cNvPr id="246" name="Google Shape;246;p23"/>
+          <p:cNvSpPr/>
+          <p:nvPr/>
+        </p:nvSpPr>
+        <p:spPr>
+          <a:xfrm>
+            <a:off x="749808" y="5010912"/>
+            <a:ext cx="2514600" cy="731520"/>
+          </a:xfrm>
+          <a:prstGeom prst="rect">
+            <a:avLst/>
+          </a:prstGeom>
+          <a:solidFill>
+            <a:srgbClr val="1D2B3F"/>
+          </a:solidFill>
+          <a:ln>
+            <a:noFill/>
+          </a:ln>
+          <a:effectLst>
+            <a:outerShdw blurRad="40000" rotWithShape="0" dir="5400000" dist="23000">
+              <a:srgbClr val="000000">
+                <a:alpha val="34902"/>
+              </a:srgbClr>
+            </a:outerShdw>
+          </a:effectLst>
+        </p:spPr>
+        <p:txBody>
+          <a:bodyPr anchorCtr="0" anchor="ctr" bIns="45700" lIns="91425" spcFirstLastPara="1" rIns="91425" wrap="square" tIns="45700">
+            <a:noAutofit/>
+          </a:bodyPr>
+          <a:lstStyle/>
+          <a:p>
+            <a:pPr indent="0" lvl="0" marL="0" marR="0" rtl="0" algn="ctr">
+              <a:spcBef>
+                <a:spcPts val="0"/>
+              </a:spcBef>
+              <a:spcAft>
+                <a:spcPts val="0"/>
+              </a:spcAft>
+              <a:buNone/>
+            </a:pPr>
+            <a:r>
+              <a:t/>
+            </a:r>
+            <a:endParaRPr b="0" i="0" sz="1800" u="none" cap="none" strike="noStrike">
+              <a:solidFill>
+                <a:schemeClr val="dk1"/>
+              </a:solidFill>
+              <a:latin typeface="Calibri"/>
+              <a:ea typeface="Calibri"/>
+              <a:cs typeface="Calibri"/>
+              <a:sym typeface="Calibri"/>
+            </a:endParaRPr>
+          </a:p>
+        </p:txBody>
+      </p:sp>
+      <p:sp>
+        <p:nvSpPr>
+          <p:cNvPr id="247" name="Google Shape;247;p23"/>
+          <p:cNvSpPr txBox="1"/>
+          <p:nvPr/>
+        </p:nvSpPr>
+        <p:spPr>
+          <a:xfrm>
+            <a:off x="950976" y="5166360"/>
+            <a:ext cx="2194560" cy="393192"/>
+          </a:xfrm>
+          <a:prstGeom prst="rect">
+            <a:avLst/>
+          </a:prstGeom>
+          <a:noFill/>
+          <a:ln>
+            <a:noFill/>
+          </a:ln>
+        </p:spPr>
+        <p:txBody>
+          <a:bodyPr anchorCtr="0" anchor="t" bIns="0" lIns="0" spcFirstLastPara="1" rIns="0" wrap="square" tIns="0">
+            <a:spAutoFit/>
+          </a:bodyPr>
+          <a:lstStyle/>
+          <a:p>
+            <a:pPr indent="0" lvl="0" marL="0" marR="0" rtl="0" algn="l">
+              <a:spcBef>
+                <a:spcPts val="0"/>
+              </a:spcBef>
+              <a:spcAft>
+                <a:spcPts val="0"/>
+              </a:spcAft>
+              <a:buNone/>
+            </a:pPr>
+            <a:r>
+              <a:rPr b="1" i="0" lang="en-US" sz="1900" u="none" cap="none" strike="noStrike">
+                <a:solidFill>
+                  <a:srgbClr val="F08443"/>
+                </a:solidFill>
+                <a:latin typeface="Arial"/>
+                <a:ea typeface="Arial"/>
+                <a:cs typeface="Arial"/>
+                <a:sym typeface="Arial"/>
+              </a:rPr>
+              <a:t>AWS</a:t>
+            </a:r>
+            <a:endParaRPr/>
+          </a:p>
+        </p:txBody>
+      </p:sp>
+      <p:sp>
+        <p:nvSpPr>
+          <p:cNvPr id="248" name="Google Shape;248;p23"/>
+          <p:cNvSpPr txBox="1"/>
+          <p:nvPr/>
+        </p:nvSpPr>
+        <p:spPr>
+          <a:xfrm>
+            <a:off x="3547872" y="5129784"/>
+            <a:ext cx="7863840" cy="594360"/>
+          </a:xfrm>
+          <a:prstGeom prst="rect">
+            <a:avLst/>
+          </a:prstGeom>
+          <a:noFill/>
+          <a:ln>
+            <a:noFill/>
+          </a:ln>
+        </p:spPr>
+        <p:txBody>
+          <a:bodyPr anchorCtr="0" anchor="t" bIns="0" lIns="0" spcFirstLastPara="1" rIns="0" wrap="square" tIns="0">
+            <a:spAutoFit/>
+          </a:bodyPr>
+          <a:lstStyle/>
+          <a:p>
+            <a:pPr indent="0" lvl="0" marL="0" marR="0" rtl="0" algn="l">
+              <a:spcBef>
+                <a:spcPts val="0"/>
+              </a:spcBef>
+              <a:spcAft>
+                <a:spcPts val="0"/>
+              </a:spcAft>
+              <a:buNone/>
+            </a:pPr>
+            <a:r>
+              <a:rPr b="0" i="0" lang="en-US" sz="1900" u="none" cap="none" strike="noStrike">
+                <a:solidFill>
+                  <a:srgbClr val="F6F7FA"/>
+                </a:solidFill>
+                <a:latin typeface="Arial"/>
+                <a:ea typeface="Arial"/>
+                <a:cs typeface="Arial"/>
+                <a:sym typeface="Arial"/>
+              </a:rPr>
+              <a:t>Rust powers projects such as Firecracker.</a:t>
+            </a:r>
+            <a:endParaRPr/>
+          </a:p>
+        </p:txBody>
+      </p:sp>
+    </p:spTree>
+  </p:cSld>
+  <p:clrMapOvr>
+    <a:masterClrMapping/>
+  </p:clrMapOvr>
+</p:sld>
+</file>
+
+<file path=ppt/slides/slide12.xml><?xml version="1.0" encoding="utf-8"?>
+<p:sld xmlns:a="http://schemas.openxmlformats.org/drawingml/2006/main" xmlns:r="http://schemas.openxmlformats.org/officeDocument/2006/relationships" xmlns:mc="http://schemas.openxmlformats.org/markup-compatibility/2006" xmlns:mv="urn:schemas-microsoft-com:mac:vml" xmlns:p="http://schemas.openxmlformats.org/presentationml/2006/main" xmlns:c="http://schemas.openxmlformats.org/drawingml/2006/chart" xmlns:dgm="http://schemas.openxmlformats.org/drawingml/2006/diagram" xmlns:o="urn:schemas-microsoft-com:office:office" xmlns:v="urn:schemas-microsoft-com:vml" xmlns:pvml="urn:schemas-microsoft-com:office:powerpoint" xmlns:com="http://schemas.openxmlformats.org/drawingml/2006/compatibility" xmlns:p14="http://schemas.microsoft.com/office/powerpoint/2010/main" xmlns:p15="http://schemas.microsoft.com/office/powerpoint/2012/main" xmlns:ahyp="http://schemas.microsoft.com/office/drawing/2018/hyperlinkcolor">
+  <p:cSld>
+    <p:spTree>
+      <p:nvGrpSpPr>
+        <p:cNvPr id="252" name="Shape 252"/>
+        <p:cNvGrpSpPr/>
+        <p:nvPr/>
+      </p:nvGrpSpPr>
+      <p:grpSpPr>
+        <a:xfrm>
+          <a:off x="0" y="0"/>
+          <a:ext cx="0" cy="0"/>
+          <a:chOff x="0" y="0"/>
+          <a:chExt cx="0" cy="0"/>
+        </a:xfrm>
+      </p:grpSpPr>
+      <p:sp>
+        <p:nvSpPr>
+          <p:cNvPr id="253" name="Google Shape;253;p24"/>
+          <p:cNvSpPr/>
+          <p:nvPr/>
+        </p:nvSpPr>
+        <p:spPr>
+          <a:xfrm>
+            <a:off x="0" y="0"/>
+            <a:ext cx="12191695" cy="6858000"/>
+          </a:xfrm>
+          <a:prstGeom prst="rect">
+            <a:avLst/>
+          </a:prstGeom>
+          <a:solidFill>
+            <a:srgbClr val="111B2B"/>
+          </a:solidFill>
+          <a:ln>
+            <a:noFill/>
+          </a:ln>
+          <a:effectLst>
+            <a:outerShdw blurRad="40000" rotWithShape="0" dir="5400000" dist="23000">
+              <a:srgbClr val="000000">
+                <a:alpha val="34902"/>
+              </a:srgbClr>
+            </a:outerShdw>
+          </a:effectLst>
+        </p:spPr>
+        <p:txBody>
+          <a:bodyPr anchorCtr="0" anchor="ctr" bIns="45700" lIns="91425" spcFirstLastPara="1" rIns="91425" wrap="square" tIns="45700">
+            <a:noAutofit/>
+          </a:bodyPr>
+          <a:lstStyle/>
+          <a:p>
+            <a:pPr indent="0" lvl="0" marL="0" marR="0" rtl="0" algn="ctr">
+              <a:spcBef>
+                <a:spcPts val="0"/>
+              </a:spcBef>
+              <a:spcAft>
+                <a:spcPts val="0"/>
+              </a:spcAft>
+              <a:buNone/>
+            </a:pPr>
+            <a:r>
+              <a:t/>
+            </a:r>
+            <a:endParaRPr b="0" i="0" sz="1800" u="none" cap="none" strike="noStrike">
+              <a:solidFill>
+                <a:schemeClr val="dk1"/>
+              </a:solidFill>
+              <a:latin typeface="Calibri"/>
+              <a:ea typeface="Calibri"/>
+              <a:cs typeface="Calibri"/>
+              <a:sym typeface="Calibri"/>
+            </a:endParaRPr>
+          </a:p>
+        </p:txBody>
+      </p:sp>
+      <p:sp>
+        <p:nvSpPr>
+          <p:cNvPr id="254" name="Google Shape;254;p24"/>
+          <p:cNvSpPr/>
+          <p:nvPr/>
+        </p:nvSpPr>
+        <p:spPr>
+          <a:xfrm>
+            <a:off x="411480" y="393192"/>
+            <a:ext cx="73152" cy="429768"/>
+          </a:xfrm>
+          <a:prstGeom prst="rect">
+            <a:avLst/>
+          </a:prstGeom>
+          <a:solidFill>
+            <a:srgbClr val="F08443"/>
+          </a:solidFill>
+          <a:ln>
+            <a:noFill/>
+          </a:ln>
+          <a:effectLst>
+            <a:outerShdw blurRad="40000" rotWithShape="0" dir="5400000" dist="23000">
+              <a:srgbClr val="000000">
+                <a:alpha val="34902"/>
+              </a:srgbClr>
+            </a:outerShdw>
+          </a:effectLst>
+        </p:spPr>
+        <p:txBody>
+          <a:bodyPr anchorCtr="0" anchor="ctr" bIns="45700" lIns="91425" spcFirstLastPara="1" rIns="91425" wrap="square" tIns="45700">
+            <a:noAutofit/>
+          </a:bodyPr>
+          <a:lstStyle/>
+          <a:p>
+            <a:pPr indent="0" lvl="0" marL="0" marR="0" rtl="0" algn="ctr">
+              <a:spcBef>
+                <a:spcPts val="0"/>
+              </a:spcBef>
+              <a:spcAft>
+                <a:spcPts val="0"/>
+              </a:spcAft>
+              <a:buNone/>
+            </a:pPr>
+            <a:r>
+              <a:t/>
+            </a:r>
+            <a:endParaRPr b="0" i="0" sz="1800" u="none" cap="none" strike="noStrike">
+              <a:solidFill>
+                <a:schemeClr val="dk1"/>
+              </a:solidFill>
+              <a:latin typeface="Calibri"/>
+              <a:ea typeface="Calibri"/>
+              <a:cs typeface="Calibri"/>
+              <a:sym typeface="Calibri"/>
+            </a:endParaRPr>
+          </a:p>
+        </p:txBody>
+      </p:sp>
+      <p:sp>
+        <p:nvSpPr>
+          <p:cNvPr id="255" name="Google Shape;255;p24"/>
+          <p:cNvSpPr txBox="1"/>
+          <p:nvPr/>
+        </p:nvSpPr>
+        <p:spPr>
+          <a:xfrm>
+            <a:off x="612648" y="411480"/>
+            <a:ext cx="7315200" cy="274320"/>
+          </a:xfrm>
+          <a:prstGeom prst="rect">
+            <a:avLst/>
+          </a:prstGeom>
+          <a:noFill/>
+          <a:ln>
+            <a:noFill/>
+          </a:ln>
+        </p:spPr>
+        <p:txBody>
+          <a:bodyPr anchorCtr="0" anchor="t" bIns="0" lIns="0" spcFirstLastPara="1" rIns="0" wrap="square" tIns="0">
+            <a:spAutoFit/>
+          </a:bodyPr>
+          <a:lstStyle/>
+          <a:p>
+            <a:pPr indent="0" lvl="0" marL="0" marR="0" rtl="0" algn="l">
+              <a:spcBef>
+                <a:spcPts val="0"/>
+              </a:spcBef>
+              <a:spcAft>
+                <a:spcPts val="0"/>
+              </a:spcAft>
+              <a:buNone/>
+            </a:pPr>
+            <a:r>
+              <a:rPr b="1" i="0" lang="en-US" sz="1100" u="none" cap="none" strike="noStrike">
+                <a:solidFill>
+                  <a:srgbClr val="BDC8D6"/>
+                </a:solidFill>
+                <a:latin typeface="Arial"/>
+                <a:ea typeface="Arial"/>
+                <a:cs typeface="Arial"/>
+                <a:sym typeface="Arial"/>
+              </a:rPr>
+              <a:t>CEP146  /  SOFTWARE DEVELOPMENT CURRENT EVENT</a:t>
+            </a:r>
+            <a:endParaRPr/>
+          </a:p>
+        </p:txBody>
+      </p:sp>
+      <p:sp>
+        <p:nvSpPr>
+          <p:cNvPr id="256" name="Google Shape;256;p24"/>
+          <p:cNvSpPr txBox="1"/>
+          <p:nvPr/>
+        </p:nvSpPr>
+        <p:spPr>
+          <a:xfrm>
+            <a:off x="621792" y="978408"/>
+            <a:ext cx="10972800" cy="731520"/>
+          </a:xfrm>
+          <a:prstGeom prst="rect">
+            <a:avLst/>
+          </a:prstGeom>
+          <a:noFill/>
+          <a:ln>
+            <a:noFill/>
+          </a:ln>
+        </p:spPr>
+        <p:txBody>
+          <a:bodyPr anchorCtr="0" anchor="t" bIns="0" lIns="0" spcFirstLastPara="1" rIns="0" wrap="square" tIns="0">
+            <a:spAutoFit/>
+          </a:bodyPr>
+          <a:lstStyle/>
+          <a:p>
+            <a:pPr indent="0" lvl="0" marL="0" marR="0" rtl="0" algn="l">
+              <a:spcBef>
+                <a:spcPts val="0"/>
+              </a:spcBef>
+              <a:spcAft>
+                <a:spcPts val="0"/>
+              </a:spcAft>
+              <a:buNone/>
+            </a:pPr>
+            <a:r>
+              <a:rPr b="1" i="0" lang="en-US" sz="3100" u="none" cap="none" strike="noStrike">
+                <a:solidFill>
+                  <a:srgbClr val="F6F7FA"/>
+                </a:solidFill>
+                <a:latin typeface="Arial"/>
+                <a:ea typeface="Arial"/>
+                <a:cs typeface="Arial"/>
+                <a:sym typeface="Arial"/>
+              </a:rPr>
+              <a:t>Challenges and final thoughts</a:t>
+            </a:r>
+            <a:endParaRPr/>
+          </a:p>
+        </p:txBody>
+      </p:sp>
+      <p:sp>
+        <p:nvSpPr>
+          <p:cNvPr id="257" name="Google Shape;257;p24"/>
+          <p:cNvSpPr txBox="1"/>
+          <p:nvPr/>
+        </p:nvSpPr>
+        <p:spPr>
+          <a:xfrm>
+            <a:off x="9875520" y="6446520"/>
+            <a:ext cx="1828800" cy="182880"/>
+          </a:xfrm>
+          <a:prstGeom prst="rect">
+            <a:avLst/>
+          </a:prstGeom>
+          <a:noFill/>
+          <a:ln>
+            <a:noFill/>
+          </a:ln>
+        </p:spPr>
+        <p:txBody>
+          <a:bodyPr anchorCtr="0" anchor="t" bIns="0" lIns="0" spcFirstLastPara="1" rIns="0" wrap="square" tIns="0">
+            <a:spAutoFit/>
+          </a:bodyPr>
+          <a:lstStyle/>
+          <a:p>
+            <a:pPr indent="0" lvl="0" marL="0" marR="0" rtl="0" algn="l">
+              <a:spcBef>
+                <a:spcPts val="0"/>
+              </a:spcBef>
+              <a:spcAft>
+                <a:spcPts val="0"/>
+              </a:spcAft>
+              <a:buNone/>
+            </a:pPr>
+            <a:r>
+              <a:rPr b="0" i="0" lang="en-US" sz="900" u="none" cap="none" strike="noStrike">
+                <a:solidFill>
+                  <a:srgbClr val="BDC8D6"/>
+                </a:solidFill>
+                <a:latin typeface="Arial"/>
+                <a:ea typeface="Arial"/>
+                <a:cs typeface="Arial"/>
+                <a:sym typeface="Arial"/>
+              </a:rPr>
+              <a:t>06  /  RUST IN 2026</a:t>
+            </a:r>
+            <a:endParaRPr/>
+          </a:p>
+        </p:txBody>
+      </p:sp>
+      <p:sp>
+        <p:nvSpPr>
+          <p:cNvPr id="258" name="Google Shape;258;p24"/>
+          <p:cNvSpPr/>
+          <p:nvPr/>
+        </p:nvSpPr>
+        <p:spPr>
+          <a:xfrm>
+            <a:off x="758952" y="2103120"/>
+            <a:ext cx="100584" cy="100584"/>
+          </a:xfrm>
+          <a:prstGeom prst="rect">
+            <a:avLst/>
+          </a:prstGeom>
+          <a:solidFill>
+            <a:srgbClr val="F08443"/>
+          </a:solidFill>
+          <a:ln>
+            <a:noFill/>
+          </a:ln>
+          <a:effectLst>
+            <a:outerShdw blurRad="40000" rotWithShape="0" dir="5400000" dist="23000">
+              <a:srgbClr val="000000">
+                <a:alpha val="34902"/>
+              </a:srgbClr>
+            </a:outerShdw>
+          </a:effectLst>
+        </p:spPr>
+        <p:txBody>
+          <a:bodyPr anchorCtr="0" anchor="ctr" bIns="45700" lIns="91425" spcFirstLastPara="1" rIns="91425" wrap="square" tIns="45700">
+            <a:noAutofit/>
+          </a:bodyPr>
+          <a:lstStyle/>
+          <a:p>
+            <a:pPr indent="0" lvl="0" marL="0" marR="0" rtl="0" algn="ctr">
+              <a:spcBef>
+                <a:spcPts val="0"/>
+              </a:spcBef>
+              <a:spcAft>
+                <a:spcPts val="0"/>
+              </a:spcAft>
+              <a:buNone/>
+            </a:pPr>
+            <a:r>
+              <a:t/>
+            </a:r>
+            <a:endParaRPr b="0" i="0" sz="1800" u="none" cap="none" strike="noStrike">
+              <a:solidFill>
+                <a:schemeClr val="dk1"/>
+              </a:solidFill>
+              <a:latin typeface="Calibri"/>
+              <a:ea typeface="Calibri"/>
+              <a:cs typeface="Calibri"/>
+              <a:sym typeface="Calibri"/>
+            </a:endParaRPr>
+          </a:p>
+        </p:txBody>
+      </p:sp>
+      <p:sp>
+        <p:nvSpPr>
+          <p:cNvPr id="259" name="Google Shape;259;p24"/>
+          <p:cNvSpPr txBox="1"/>
+          <p:nvPr/>
+        </p:nvSpPr>
+        <p:spPr>
+          <a:xfrm>
+            <a:off x="1042415" y="1993392"/>
+            <a:ext cx="10241280" cy="685800"/>
+          </a:xfrm>
+          <a:prstGeom prst="rect">
+            <a:avLst/>
+          </a:prstGeom>
+          <a:noFill/>
+          <a:ln>
+            <a:noFill/>
+          </a:ln>
+        </p:spPr>
+        <p:txBody>
+          <a:bodyPr anchorCtr="0" anchor="t" bIns="0" lIns="0" spcFirstLastPara="1" rIns="0" wrap="square" tIns="0">
+            <a:spAutoFit/>
+          </a:bodyPr>
+          <a:lstStyle/>
+          <a:p>
+            <a:pPr indent="0" lvl="0" marL="0" marR="0" rtl="0" algn="l">
+              <a:spcBef>
+                <a:spcPts val="0"/>
+              </a:spcBef>
+              <a:spcAft>
+                <a:spcPts val="0"/>
+              </a:spcAft>
+              <a:buNone/>
+            </a:pPr>
+            <a:r>
+              <a:rPr b="0" i="0" lang="en-US" sz="2000" u="none" cap="none" strike="noStrike">
+                <a:solidFill>
+                  <a:srgbClr val="F6F7FA"/>
+                </a:solidFill>
+                <a:latin typeface="Arial"/>
+                <a:ea typeface="Arial"/>
+                <a:cs typeface="Arial"/>
+                <a:sym typeface="Arial"/>
+              </a:rPr>
+              <a:t>Rust can be difficult to learn, especially ownership rules</a:t>
+            </a:r>
+            <a:endParaRPr/>
+          </a:p>
+        </p:txBody>
+      </p:sp>
+      <p:sp>
+        <p:nvSpPr>
+          <p:cNvPr id="260" name="Google Shape;260;p24"/>
+          <p:cNvSpPr/>
+          <p:nvPr/>
+        </p:nvSpPr>
+        <p:spPr>
+          <a:xfrm>
+            <a:off x="758952" y="3072384"/>
+            <a:ext cx="100584" cy="100584"/>
+          </a:xfrm>
+          <a:prstGeom prst="rect">
+            <a:avLst/>
+          </a:prstGeom>
+          <a:solidFill>
+            <a:srgbClr val="F08443"/>
+          </a:solidFill>
+          <a:ln>
+            <a:noFill/>
+          </a:ln>
+          <a:effectLst>
+            <a:outerShdw blurRad="40000" rotWithShape="0" dir="5400000" dist="23000">
+              <a:srgbClr val="000000">
+                <a:alpha val="34902"/>
+              </a:srgbClr>
+            </a:outerShdw>
+          </a:effectLst>
+        </p:spPr>
+        <p:txBody>
+          <a:bodyPr anchorCtr="0" anchor="ctr" bIns="45700" lIns="91425" spcFirstLastPara="1" rIns="91425" wrap="square" tIns="45700">
+            <a:noAutofit/>
+          </a:bodyPr>
+          <a:lstStyle/>
+          <a:p>
+            <a:pPr indent="0" lvl="0" marL="0" marR="0" rtl="0" algn="ctr">
+              <a:spcBef>
+                <a:spcPts val="0"/>
+              </a:spcBef>
+              <a:spcAft>
+                <a:spcPts val="0"/>
+              </a:spcAft>
+              <a:buNone/>
+            </a:pPr>
+            <a:r>
+              <a:t/>
+            </a:r>
+            <a:endParaRPr b="0" i="0" sz="1800" u="none" cap="none" strike="noStrike">
+              <a:solidFill>
+                <a:schemeClr val="dk1"/>
+              </a:solidFill>
+              <a:latin typeface="Calibri"/>
+              <a:ea typeface="Calibri"/>
+              <a:cs typeface="Calibri"/>
+              <a:sym typeface="Calibri"/>
+            </a:endParaRPr>
+          </a:p>
+        </p:txBody>
+      </p:sp>
+      <p:sp>
+        <p:nvSpPr>
+          <p:cNvPr id="261" name="Google Shape;261;p24"/>
+          <p:cNvSpPr txBox="1"/>
+          <p:nvPr/>
+        </p:nvSpPr>
+        <p:spPr>
+          <a:xfrm>
+            <a:off x="1042415" y="2962656"/>
+            <a:ext cx="10241280" cy="685800"/>
+          </a:xfrm>
+          <a:prstGeom prst="rect">
+            <a:avLst/>
+          </a:prstGeom>
+          <a:noFill/>
+          <a:ln>
+            <a:noFill/>
+          </a:ln>
+        </p:spPr>
+        <p:txBody>
+          <a:bodyPr anchorCtr="0" anchor="t" bIns="0" lIns="0" spcFirstLastPara="1" rIns="0" wrap="square" tIns="0">
+            <a:spAutoFit/>
+          </a:bodyPr>
+          <a:lstStyle/>
+          <a:p>
+            <a:pPr indent="0" lvl="0" marL="0" marR="0" rtl="0" algn="l">
+              <a:spcBef>
+                <a:spcPts val="0"/>
+              </a:spcBef>
+              <a:spcAft>
+                <a:spcPts val="0"/>
+              </a:spcAft>
+              <a:buNone/>
+            </a:pPr>
+            <a:r>
+              <a:rPr b="0" i="0" lang="en-US" sz="2000" u="none" cap="none" strike="noStrike">
+                <a:solidFill>
+                  <a:srgbClr val="F6F7FA"/>
+                </a:solidFill>
+                <a:latin typeface="Arial"/>
+                <a:ea typeface="Arial"/>
+                <a:cs typeface="Arial"/>
+                <a:sym typeface="Arial"/>
+              </a:rPr>
+              <a:t>Compiler checks can make development feel slower at first</a:t>
+            </a:r>
+            <a:endParaRPr/>
+          </a:p>
+        </p:txBody>
+      </p:sp>
+      <p:sp>
+        <p:nvSpPr>
+          <p:cNvPr id="262" name="Google Shape;262;p24"/>
+          <p:cNvSpPr/>
+          <p:nvPr/>
+        </p:nvSpPr>
+        <p:spPr>
+          <a:xfrm>
+            <a:off x="758952" y="4050791"/>
+            <a:ext cx="100584" cy="100584"/>
+          </a:xfrm>
+          <a:prstGeom prst="rect">
+            <a:avLst/>
+          </a:prstGeom>
+          <a:solidFill>
+            <a:srgbClr val="F08443"/>
+          </a:solidFill>
+          <a:ln>
+            <a:noFill/>
+          </a:ln>
+          <a:effectLst>
+            <a:outerShdw blurRad="40000" rotWithShape="0" dir="5400000" dist="23000">
+              <a:srgbClr val="000000">
+                <a:alpha val="34902"/>
+              </a:srgbClr>
+            </a:outerShdw>
+          </a:effectLst>
+        </p:spPr>
+        <p:txBody>
+          <a:bodyPr anchorCtr="0" anchor="ctr" bIns="45700" lIns="91425" spcFirstLastPara="1" rIns="91425" wrap="square" tIns="45700">
+            <a:noAutofit/>
+          </a:bodyPr>
+          <a:lstStyle/>
+          <a:p>
+            <a:pPr indent="0" lvl="0" marL="0" marR="0" rtl="0" algn="ctr">
+              <a:spcBef>
+                <a:spcPts val="0"/>
+              </a:spcBef>
+              <a:spcAft>
+                <a:spcPts val="0"/>
+              </a:spcAft>
+              <a:buNone/>
+            </a:pPr>
+            <a:r>
+              <a:t/>
+            </a:r>
+            <a:endParaRPr b="0" i="0" sz="1800" u="none" cap="none" strike="noStrike">
+              <a:solidFill>
+                <a:schemeClr val="dk1"/>
+              </a:solidFill>
+              <a:latin typeface="Calibri"/>
+              <a:ea typeface="Calibri"/>
+              <a:cs typeface="Calibri"/>
+              <a:sym typeface="Calibri"/>
+            </a:endParaRPr>
+          </a:p>
+        </p:txBody>
+      </p:sp>
+      <p:sp>
+        <p:nvSpPr>
+          <p:cNvPr id="263" name="Google Shape;263;p24"/>
+          <p:cNvSpPr txBox="1"/>
+          <p:nvPr/>
+        </p:nvSpPr>
+        <p:spPr>
+          <a:xfrm>
+            <a:off x="1042415" y="3941063"/>
+            <a:ext cx="10241280" cy="685800"/>
+          </a:xfrm>
+          <a:prstGeom prst="rect">
+            <a:avLst/>
+          </a:prstGeom>
+          <a:noFill/>
+          <a:ln>
+            <a:noFill/>
+          </a:ln>
+        </p:spPr>
+        <p:txBody>
+          <a:bodyPr anchorCtr="0" anchor="t" bIns="0" lIns="0" spcFirstLastPara="1" rIns="0" wrap="square" tIns="0">
+            <a:spAutoFit/>
+          </a:bodyPr>
+          <a:lstStyle/>
+          <a:p>
+            <a:pPr indent="0" lvl="0" marL="0" marR="0" rtl="0" algn="l">
+              <a:spcBef>
+                <a:spcPts val="0"/>
+              </a:spcBef>
+              <a:spcAft>
+                <a:spcPts val="0"/>
+              </a:spcAft>
+              <a:buNone/>
+            </a:pPr>
+            <a:r>
+              <a:rPr b="0" i="0" lang="en-US" sz="2000" u="none" cap="none" strike="noStrike">
+                <a:solidFill>
+                  <a:srgbClr val="F6F7FA"/>
+                </a:solidFill>
+                <a:latin typeface="Arial"/>
+                <a:ea typeface="Arial"/>
+                <a:cs typeface="Arial"/>
+                <a:sym typeface="Arial"/>
+              </a:rPr>
+              <a:t>It will not replace every C or C++ program</a:t>
+            </a:r>
+            <a:endParaRPr/>
+          </a:p>
+        </p:txBody>
+      </p:sp>
+      <p:sp>
+        <p:nvSpPr>
+          <p:cNvPr id="264" name="Google Shape;264;p24"/>
+          <p:cNvSpPr/>
+          <p:nvPr/>
+        </p:nvSpPr>
+        <p:spPr>
+          <a:xfrm>
+            <a:off x="749808" y="5074920"/>
+            <a:ext cx="10698480" cy="868680"/>
+          </a:xfrm>
+          <a:prstGeom prst="rect">
+            <a:avLst/>
+          </a:prstGeom>
+          <a:solidFill>
+            <a:srgbClr val="1D2B3F"/>
+          </a:solidFill>
+          <a:ln>
+            <a:noFill/>
+          </a:ln>
+          <a:effectLst>
+            <a:outerShdw blurRad="40000" rotWithShape="0" dir="5400000" dist="23000">
+              <a:srgbClr val="000000">
+                <a:alpha val="34902"/>
+              </a:srgbClr>
+            </a:outerShdw>
+          </a:effectLst>
+        </p:spPr>
+        <p:txBody>
+          <a:bodyPr anchorCtr="0" anchor="ctr" bIns="45700" lIns="91425" spcFirstLastPara="1" rIns="91425" wrap="square" tIns="45700">
+            <a:noAutofit/>
+          </a:bodyPr>
+          <a:lstStyle/>
+          <a:p>
+            <a:pPr indent="0" lvl="0" marL="0" marR="0" rtl="0" algn="ctr">
+              <a:spcBef>
+                <a:spcPts val="0"/>
+              </a:spcBef>
+              <a:spcAft>
+                <a:spcPts val="0"/>
+              </a:spcAft>
+              <a:buNone/>
+            </a:pPr>
+            <a:r>
+              <a:t/>
+            </a:r>
+            <a:endParaRPr b="0" i="0" sz="1800" u="none" cap="none" strike="noStrike">
+              <a:solidFill>
+                <a:schemeClr val="dk1"/>
+              </a:solidFill>
+              <a:latin typeface="Calibri"/>
+              <a:ea typeface="Calibri"/>
+              <a:cs typeface="Calibri"/>
+              <a:sym typeface="Calibri"/>
+            </a:endParaRPr>
+          </a:p>
+        </p:txBody>
+      </p:sp>
+      <p:sp>
+        <p:nvSpPr>
+          <p:cNvPr id="265" name="Google Shape;265;p24"/>
+          <p:cNvSpPr txBox="1"/>
+          <p:nvPr/>
+        </p:nvSpPr>
+        <p:spPr>
+          <a:xfrm>
+            <a:off x="1005840" y="5330952"/>
+            <a:ext cx="10241280" cy="411480"/>
+          </a:xfrm>
+          <a:prstGeom prst="rect">
+            <a:avLst/>
+          </a:prstGeom>
+          <a:noFill/>
+          <a:ln>
+            <a:noFill/>
+          </a:ln>
+        </p:spPr>
+        <p:txBody>
+          <a:bodyPr anchorCtr="0" anchor="t" bIns="0" lIns="0" spcFirstLastPara="1" rIns="0" wrap="square" tIns="0">
+            <a:spAutoFit/>
+          </a:bodyPr>
+          <a:lstStyle/>
+          <a:p>
+            <a:pPr indent="0" lvl="0" marL="0" marR="0" rtl="0" algn="l">
+              <a:spcBef>
+                <a:spcPts val="0"/>
+              </a:spcBef>
+              <a:spcAft>
+                <a:spcPts val="0"/>
+              </a:spcAft>
+              <a:buNone/>
+            </a:pPr>
+            <a:r>
+              <a:rPr b="1" i="0" lang="en-US" sz="2100" u="none" cap="none" strike="noStrike">
+                <a:solidFill>
+                  <a:srgbClr val="F6F7FA"/>
+                </a:solidFill>
+                <a:latin typeface="Arial"/>
+                <a:ea typeface="Arial"/>
+                <a:cs typeface="Arial"/>
+                <a:sym typeface="Arial"/>
+              </a:rPr>
+              <a:t>Rust is becoming a serious option for safer systems software.</a:t>
+            </a:r>
+            <a:endParaRPr/>
+          </a:p>
+        </p:txBody>
+      </p:sp>
+    </p:spTree>
+  </p:cSld>
+  <p:clrMapOvr>
+    <a:masterClrMapping/>
+  </p:clrMapOvr>
+</p:sld>
+</file>
+
 <file path=ppt/slides/slide2.xml><?xml version="1.0" encoding="utf-8"?>
 <p:sld xmlns:a="http://schemas.openxmlformats.org/drawingml/2006/main" xmlns:r="http://schemas.openxmlformats.org/officeDocument/2006/relationships" xmlns:mc="http://schemas.openxmlformats.org/markup-compatibility/2006" xmlns:mv="urn:schemas-microsoft-com:mac:vml" xmlns:p="http://schemas.openxmlformats.org/presentationml/2006/main" xmlns:c="http://schemas.openxmlformats.org/drawingml/2006/chart" xmlns:dgm="http://schemas.openxmlformats.org/drawingml/2006/diagram" xmlns:o="urn:schemas-microsoft-com:office:office" xmlns:v="urn:schemas-microsoft-com:vml" xmlns:pvml="urn:schemas-microsoft-com:office:powerpoint" xmlns:com="http://schemas.openxmlformats.org/drawingml/2006/compatibility" xmlns:p14="http://schemas.microsoft.com/office/powerpoint/2010/main" xmlns:p15="http://schemas.microsoft.com/office/powerpoint/2012/main" xmlns:ahyp="http://schemas.microsoft.com/office/drawing/2018/hyperlinkcolor">
   <p:cSld>
@@ -11321,8 +14182,8 @@
         </p:nvSpPr>
         <p:spPr>
           <a:xfrm>
-            <a:off x="0" y="0"/>
-            <a:ext cx="12191695" cy="6858000"/>
+            <a:off x="-12" y="40450"/>
+            <a:ext cx="12191700" cy="6858000"/>
           </a:xfrm>
           <a:prstGeom prst="rect">
             <a:avLst/>
@@ -11336,7 +14197,7 @@
           <a:effectLst>
             <a:outerShdw blurRad="40000" rotWithShape="0" dir="5400000" dist="23000">
               <a:srgbClr val="000000">
-                <a:alpha val="34902"/>
+                <a:alpha val="34900"/>
               </a:srgbClr>
             </a:outerShdw>
           </a:effectLst>
@@ -11380,7 +14241,7 @@
         <p:spPr>
           <a:xfrm>
             <a:off x="411480" y="393192"/>
-            <a:ext cx="73152" cy="429768"/>
+            <a:ext cx="73200" cy="429900"/>
           </a:xfrm>
           <a:prstGeom prst="rect">
             <a:avLst/>
@@ -11394,7 +14255,7 @@
           <a:effectLst>
             <a:outerShdw blurRad="40000" rotWithShape="0" dir="5400000" dist="23000">
               <a:srgbClr val="000000">
-                <a:alpha val="34902"/>
+                <a:alpha val="34900"/>
               </a:srgbClr>
             </a:outerShdw>
           </a:effectLst>
@@ -11438,7 +14299,7 @@
         <p:spPr>
           <a:xfrm>
             <a:off x="612648" y="411480"/>
-            <a:ext cx="7315200" cy="274320"/>
+            <a:ext cx="7315200" cy="169200"/>
           </a:xfrm>
           <a:prstGeom prst="rect">
             <a:avLst/>
@@ -11488,7 +14349,7 @@
         <p:spPr>
           <a:xfrm>
             <a:off x="621792" y="978408"/>
-            <a:ext cx="10972800" cy="731520"/>
+            <a:ext cx="10972800" cy="477300"/>
           </a:xfrm>
           <a:prstGeom prst="rect">
             <a:avLst/>
@@ -11514,16 +14375,12 @@
               <a:buNone/>
             </a:pPr>
             <a:r>
-              <a:rPr b="1" i="0" lang="en-US" sz="3100" u="none" cap="none" strike="noStrike">
+              <a:rPr b="1" lang="en-US" sz="3100">
                 <a:solidFill>
                   <a:srgbClr val="F6F7FA"/>
                 </a:solidFill>
-                <a:latin typeface="Arial"/>
-                <a:ea typeface="Arial"/>
-                <a:cs typeface="Arial"/>
-                <a:sym typeface="Arial"/>
               </a:rPr>
-              <a:t>What is Rust?</a:t>
+              <a:t>C : Fast and Risky</a:t>
             </a:r>
             <a:endParaRPr/>
           </a:p>
@@ -11538,7 +14395,7 @@
         <p:spPr>
           <a:xfrm>
             <a:off x="9875520" y="6446520"/>
-            <a:ext cx="1828800" cy="182880"/>
+            <a:ext cx="1828800" cy="138600"/>
           </a:xfrm>
           <a:prstGeom prst="rect">
             <a:avLst/>
@@ -11588,7 +14445,7 @@
         <p:spPr>
           <a:xfrm>
             <a:off x="758952" y="2176272"/>
-            <a:ext cx="100584" cy="100584"/>
+            <a:ext cx="100500" cy="100500"/>
           </a:xfrm>
           <a:prstGeom prst="rect">
             <a:avLst/>
@@ -11602,7 +14459,7 @@
           <a:effectLst>
             <a:outerShdw blurRad="40000" rotWithShape="0" dir="5400000" dist="23000">
               <a:srgbClr val="000000">
-                <a:alpha val="34902"/>
+                <a:alpha val="34900"/>
               </a:srgbClr>
             </a:outerShdw>
           </a:effectLst>
@@ -11646,7 +14503,7 @@
         <p:spPr>
           <a:xfrm>
             <a:off x="1042415" y="2066543"/>
-            <a:ext cx="10241280" cy="685800"/>
+            <a:ext cx="10241400" cy="338700"/>
           </a:xfrm>
           <a:prstGeom prst="rect">
             <a:avLst/>
@@ -11672,16 +14529,12 @@
               <a:buNone/>
             </a:pPr>
             <a:r>
-              <a:rPr b="0" i="0" lang="en-US" sz="2200" u="none" cap="none" strike="noStrike">
+              <a:rPr lang="en-US" sz="2200">
                 <a:solidFill>
                   <a:srgbClr val="F6F7FA"/>
                 </a:solidFill>
-                <a:latin typeface="Arial"/>
-                <a:ea typeface="Arial"/>
-                <a:cs typeface="Arial"/>
-                <a:sym typeface="Arial"/>
               </a:rPr>
-              <a:t>A programming language used to build fast, reliable software</a:t>
+              <a:t>Very fast </a:t>
             </a:r>
             <a:endParaRPr/>
           </a:p>
@@ -11696,7 +14549,7 @@
         <p:spPr>
           <a:xfrm>
             <a:off x="758952" y="3236976"/>
-            <a:ext cx="100584" cy="100584"/>
+            <a:ext cx="100500" cy="100500"/>
           </a:xfrm>
           <a:prstGeom prst="rect">
             <a:avLst/>
@@ -11710,7 +14563,7 @@
           <a:effectLst>
             <a:outerShdw blurRad="40000" rotWithShape="0" dir="5400000" dist="23000">
               <a:srgbClr val="000000">
-                <a:alpha val="34902"/>
+                <a:alpha val="34900"/>
               </a:srgbClr>
             </a:outerShdw>
           </a:effectLst>
@@ -11754,7 +14607,7 @@
         <p:spPr>
           <a:xfrm>
             <a:off x="1042415" y="3127248"/>
-            <a:ext cx="10241280" cy="685800"/>
+            <a:ext cx="10241400" cy="338700"/>
           </a:xfrm>
           <a:prstGeom prst="rect">
             <a:avLst/>
@@ -11780,16 +14633,12 @@
               <a:buNone/>
             </a:pPr>
             <a:r>
-              <a:rPr b="0" i="0" lang="en-US" sz="2200" u="none" cap="none" strike="noStrike">
+              <a:rPr lang="en-US" sz="2200">
                 <a:solidFill>
                   <a:srgbClr val="F6F7FA"/>
                 </a:solidFill>
-                <a:latin typeface="Arial"/>
-                <a:ea typeface="Arial"/>
-                <a:cs typeface="Arial"/>
-                <a:sym typeface="Arial"/>
               </a:rPr>
-              <a:t>Rust 1.0 came out in 2015</a:t>
+              <a:t>Manage memory yourself </a:t>
             </a:r>
             <a:endParaRPr/>
           </a:p>
@@ -11804,7 +14653,7 @@
         <p:spPr>
           <a:xfrm>
             <a:off x="758952" y="4315968"/>
-            <a:ext cx="100584" cy="100584"/>
+            <a:ext cx="100500" cy="100500"/>
           </a:xfrm>
           <a:prstGeom prst="rect">
             <a:avLst/>
@@ -11818,7 +14667,7 @@
           <a:effectLst>
             <a:outerShdw blurRad="40000" rotWithShape="0" dir="5400000" dist="23000">
               <a:srgbClr val="000000">
-                <a:alpha val="34902"/>
+                <a:alpha val="34900"/>
               </a:srgbClr>
             </a:outerShdw>
           </a:effectLst>
@@ -11862,7 +14711,7 @@
         <p:spPr>
           <a:xfrm>
             <a:off x="1042415" y="4206240"/>
-            <a:ext cx="10241280" cy="685800"/>
+            <a:ext cx="10241400" cy="338700"/>
           </a:xfrm>
           <a:prstGeom prst="rect">
             <a:avLst/>
@@ -11888,16 +14737,12 @@
               <a:buNone/>
             </a:pPr>
             <a:r>
-              <a:rPr b="0" i="0" lang="en-US" sz="2200" u="none" cap="none" strike="noStrike">
+              <a:rPr lang="en-US" sz="2200">
                 <a:solidFill>
                   <a:srgbClr val="F6F7FA"/>
                 </a:solidFill>
-                <a:latin typeface="Arial"/>
-                <a:ea typeface="Arial"/>
-                <a:cs typeface="Arial"/>
-                <a:sym typeface="Arial"/>
               </a:rPr>
-              <a:t>It focuses on memory safety without a garbage collector</a:t>
+              <a:t>Mistakes causes crashes and security holes</a:t>
             </a:r>
             <a:endParaRPr/>
           </a:p>
@@ -11912,7 +14757,7 @@
         <p:spPr>
           <a:xfrm>
             <a:off x="804672" y="5760720"/>
-            <a:ext cx="10058400" cy="457200"/>
+            <a:ext cx="10058400" cy="261600"/>
           </a:xfrm>
           <a:prstGeom prst="rect">
             <a:avLst/>
@@ -11938,16 +14783,12 @@
               <a:buNone/>
             </a:pPr>
             <a:r>
-              <a:rPr b="0" i="0" lang="en-US" sz="1700" u="none" cap="none" strike="noStrike">
+              <a:rPr lang="en-US" sz="1700">
                 <a:solidFill>
                   <a:srgbClr val="F08443"/>
                 </a:solidFill>
-                <a:latin typeface="Arial"/>
-                <a:ea typeface="Arial"/>
-                <a:cs typeface="Arial"/>
-                <a:sym typeface="Arial"/>
               </a:rPr>
-              <a:t>Rust is often used for systems software, tools and services.</a:t>
+              <a:t>C: Speed with Manual Mmeory</a:t>
             </a:r>
             <a:endParaRPr/>
           </a:p>
@@ -11987,7 +14828,7 @@
         <p:spPr>
           <a:xfrm>
             <a:off x="0" y="0"/>
-            <a:ext cx="12191695" cy="6858000"/>
+            <a:ext cx="12191700" cy="6858000"/>
           </a:xfrm>
           <a:prstGeom prst="rect">
             <a:avLst/>
@@ -12001,7 +14842,7 @@
           <a:effectLst>
             <a:outerShdw blurRad="40000" rotWithShape="0" dir="5400000" dist="23000">
               <a:srgbClr val="000000">
-                <a:alpha val="34902"/>
+                <a:alpha val="34900"/>
               </a:srgbClr>
             </a:outerShdw>
           </a:effectLst>
@@ -12045,7 +14886,7 @@
         <p:spPr>
           <a:xfrm>
             <a:off x="411480" y="393192"/>
-            <a:ext cx="73152" cy="429768"/>
+            <a:ext cx="73200" cy="429900"/>
           </a:xfrm>
           <a:prstGeom prst="rect">
             <a:avLst/>
@@ -12059,7 +14900,7 @@
           <a:effectLst>
             <a:outerShdw blurRad="40000" rotWithShape="0" dir="5400000" dist="23000">
               <a:srgbClr val="000000">
-                <a:alpha val="34902"/>
+                <a:alpha val="34900"/>
               </a:srgbClr>
             </a:outerShdw>
           </a:effectLst>
@@ -12103,7 +14944,7 @@
         <p:spPr>
           <a:xfrm>
             <a:off x="612648" y="411480"/>
-            <a:ext cx="7315200" cy="274320"/>
+            <a:ext cx="7315200" cy="169200"/>
           </a:xfrm>
           <a:prstGeom prst="rect">
             <a:avLst/>
@@ -12153,6 +14994,3587 @@
         <p:spPr>
           <a:xfrm>
             <a:off x="621792" y="978408"/>
+            <a:ext cx="10972800" cy="477300"/>
+          </a:xfrm>
+          <a:prstGeom prst="rect">
+            <a:avLst/>
+          </a:prstGeom>
+          <a:noFill/>
+          <a:ln>
+            <a:noFill/>
+          </a:ln>
+        </p:spPr>
+        <p:txBody>
+          <a:bodyPr anchorCtr="0" anchor="t" bIns="0" lIns="0" spcFirstLastPara="1" rIns="0" wrap="square" tIns="0">
+            <a:spAutoFit/>
+          </a:bodyPr>
+          <a:lstStyle/>
+          <a:p>
+            <a:pPr indent="0" lvl="0" marL="0" marR="0" rtl="0" algn="l">
+              <a:spcBef>
+                <a:spcPts val="0"/>
+              </a:spcBef>
+              <a:spcAft>
+                <a:spcPts val="0"/>
+              </a:spcAft>
+              <a:buNone/>
+            </a:pPr>
+            <a:r>
+              <a:rPr b="1" lang="en-US" sz="3100">
+                <a:solidFill>
+                  <a:srgbClr val="F6F7FA"/>
+                </a:solidFill>
+              </a:rPr>
+              <a:t>Java and Python (Safe but Slower)</a:t>
+            </a:r>
+            <a:endParaRPr/>
+          </a:p>
+        </p:txBody>
+      </p:sp>
+      <p:sp>
+        <p:nvSpPr>
+          <p:cNvPr id="115" name="Google Shape;115;p15"/>
+          <p:cNvSpPr txBox="1"/>
+          <p:nvPr/>
+        </p:nvSpPr>
+        <p:spPr>
+          <a:xfrm>
+            <a:off x="9875520" y="6446520"/>
+            <a:ext cx="1828800" cy="138600"/>
+          </a:xfrm>
+          <a:prstGeom prst="rect">
+            <a:avLst/>
+          </a:prstGeom>
+          <a:noFill/>
+          <a:ln>
+            <a:noFill/>
+          </a:ln>
+        </p:spPr>
+        <p:txBody>
+          <a:bodyPr anchorCtr="0" anchor="t" bIns="0" lIns="0" spcFirstLastPara="1" rIns="0" wrap="square" tIns="0">
+            <a:spAutoFit/>
+          </a:bodyPr>
+          <a:lstStyle/>
+          <a:p>
+            <a:pPr indent="0" lvl="0" marL="0" marR="0" rtl="0" algn="l">
+              <a:spcBef>
+                <a:spcPts val="0"/>
+              </a:spcBef>
+              <a:spcAft>
+                <a:spcPts val="0"/>
+              </a:spcAft>
+              <a:buNone/>
+            </a:pPr>
+            <a:r>
+              <a:rPr b="0" i="0" lang="en-US" sz="900" u="none" cap="none" strike="noStrike">
+                <a:solidFill>
+                  <a:srgbClr val="BDC8D6"/>
+                </a:solidFill>
+                <a:latin typeface="Arial"/>
+                <a:ea typeface="Arial"/>
+                <a:cs typeface="Arial"/>
+                <a:sym typeface="Arial"/>
+              </a:rPr>
+              <a:t>02  /  RUST IN 2026</a:t>
+            </a:r>
+            <a:endParaRPr/>
+          </a:p>
+        </p:txBody>
+      </p:sp>
+      <p:sp>
+        <p:nvSpPr>
+          <p:cNvPr id="116" name="Google Shape;116;p15"/>
+          <p:cNvSpPr/>
+          <p:nvPr/>
+        </p:nvSpPr>
+        <p:spPr>
+          <a:xfrm>
+            <a:off x="758952" y="2176272"/>
+            <a:ext cx="100500" cy="100500"/>
+          </a:xfrm>
+          <a:prstGeom prst="rect">
+            <a:avLst/>
+          </a:prstGeom>
+          <a:solidFill>
+            <a:srgbClr val="F08443"/>
+          </a:solidFill>
+          <a:ln>
+            <a:noFill/>
+          </a:ln>
+          <a:effectLst>
+            <a:outerShdw blurRad="40000" rotWithShape="0" dir="5400000" dist="23000">
+              <a:srgbClr val="000000">
+                <a:alpha val="34900"/>
+              </a:srgbClr>
+            </a:outerShdw>
+          </a:effectLst>
+        </p:spPr>
+        <p:txBody>
+          <a:bodyPr anchorCtr="0" anchor="ctr" bIns="45700" lIns="91425" spcFirstLastPara="1" rIns="91425" wrap="square" tIns="45700">
+            <a:noAutofit/>
+          </a:bodyPr>
+          <a:lstStyle/>
+          <a:p>
+            <a:pPr indent="0" lvl="0" marL="0" marR="0" rtl="0" algn="ctr">
+              <a:spcBef>
+                <a:spcPts val="0"/>
+              </a:spcBef>
+              <a:spcAft>
+                <a:spcPts val="0"/>
+              </a:spcAft>
+              <a:buNone/>
+            </a:pPr>
+            <a:r>
+              <a:t/>
+            </a:r>
+            <a:endParaRPr b="0" i="0" sz="1800" u="none" cap="none" strike="noStrike">
+              <a:solidFill>
+                <a:schemeClr val="dk1"/>
+              </a:solidFill>
+              <a:latin typeface="Calibri"/>
+              <a:ea typeface="Calibri"/>
+              <a:cs typeface="Calibri"/>
+              <a:sym typeface="Calibri"/>
+            </a:endParaRPr>
+          </a:p>
+        </p:txBody>
+      </p:sp>
+      <p:sp>
+        <p:nvSpPr>
+          <p:cNvPr id="117" name="Google Shape;117;p15"/>
+          <p:cNvSpPr txBox="1"/>
+          <p:nvPr/>
+        </p:nvSpPr>
+        <p:spPr>
+          <a:xfrm>
+            <a:off x="1042415" y="2066543"/>
+            <a:ext cx="10241400" cy="338700"/>
+          </a:xfrm>
+          <a:prstGeom prst="rect">
+            <a:avLst/>
+          </a:prstGeom>
+          <a:noFill/>
+          <a:ln>
+            <a:noFill/>
+          </a:ln>
+        </p:spPr>
+        <p:txBody>
+          <a:bodyPr anchorCtr="0" anchor="t" bIns="0" lIns="0" spcFirstLastPara="1" rIns="0" wrap="square" tIns="0">
+            <a:spAutoFit/>
+          </a:bodyPr>
+          <a:lstStyle/>
+          <a:p>
+            <a:pPr indent="0" lvl="0" marL="0" marR="0" rtl="0" algn="l">
+              <a:spcBef>
+                <a:spcPts val="0"/>
+              </a:spcBef>
+              <a:spcAft>
+                <a:spcPts val="0"/>
+              </a:spcAft>
+              <a:buNone/>
+            </a:pPr>
+            <a:r>
+              <a:rPr lang="en-US" sz="2200">
+                <a:solidFill>
+                  <a:srgbClr val="F6F7FA"/>
+                </a:solidFill>
+              </a:rPr>
+              <a:t>Memory is cleaned up automatically</a:t>
+            </a:r>
+            <a:endParaRPr/>
+          </a:p>
+        </p:txBody>
+      </p:sp>
+      <p:sp>
+        <p:nvSpPr>
+          <p:cNvPr id="118" name="Google Shape;118;p15"/>
+          <p:cNvSpPr/>
+          <p:nvPr/>
+        </p:nvSpPr>
+        <p:spPr>
+          <a:xfrm>
+            <a:off x="758952" y="3236976"/>
+            <a:ext cx="100500" cy="100500"/>
+          </a:xfrm>
+          <a:prstGeom prst="rect">
+            <a:avLst/>
+          </a:prstGeom>
+          <a:solidFill>
+            <a:srgbClr val="F08443"/>
+          </a:solidFill>
+          <a:ln>
+            <a:noFill/>
+          </a:ln>
+          <a:effectLst>
+            <a:outerShdw blurRad="40000" rotWithShape="0" dir="5400000" dist="23000">
+              <a:srgbClr val="000000">
+                <a:alpha val="34900"/>
+              </a:srgbClr>
+            </a:outerShdw>
+          </a:effectLst>
+        </p:spPr>
+        <p:txBody>
+          <a:bodyPr anchorCtr="0" anchor="ctr" bIns="45700" lIns="91425" spcFirstLastPara="1" rIns="91425" wrap="square" tIns="45700">
+            <a:noAutofit/>
+          </a:bodyPr>
+          <a:lstStyle/>
+          <a:p>
+            <a:pPr indent="0" lvl="0" marL="0" marR="0" rtl="0" algn="ctr">
+              <a:spcBef>
+                <a:spcPts val="0"/>
+              </a:spcBef>
+              <a:spcAft>
+                <a:spcPts val="0"/>
+              </a:spcAft>
+              <a:buNone/>
+            </a:pPr>
+            <a:r>
+              <a:t/>
+            </a:r>
+            <a:endParaRPr b="0" i="0" sz="1800" u="none" cap="none" strike="noStrike">
+              <a:solidFill>
+                <a:schemeClr val="dk1"/>
+              </a:solidFill>
+              <a:latin typeface="Calibri"/>
+              <a:ea typeface="Calibri"/>
+              <a:cs typeface="Calibri"/>
+              <a:sym typeface="Calibri"/>
+            </a:endParaRPr>
+          </a:p>
+        </p:txBody>
+      </p:sp>
+      <p:sp>
+        <p:nvSpPr>
+          <p:cNvPr id="119" name="Google Shape;119;p15"/>
+          <p:cNvSpPr txBox="1"/>
+          <p:nvPr/>
+        </p:nvSpPr>
+        <p:spPr>
+          <a:xfrm>
+            <a:off x="1042415" y="3127248"/>
+            <a:ext cx="10241400" cy="338700"/>
+          </a:xfrm>
+          <a:prstGeom prst="rect">
+            <a:avLst/>
+          </a:prstGeom>
+          <a:noFill/>
+          <a:ln>
+            <a:noFill/>
+          </a:ln>
+        </p:spPr>
+        <p:txBody>
+          <a:bodyPr anchorCtr="0" anchor="t" bIns="0" lIns="0" spcFirstLastPara="1" rIns="0" wrap="square" tIns="0">
+            <a:spAutoFit/>
+          </a:bodyPr>
+          <a:lstStyle/>
+          <a:p>
+            <a:pPr indent="0" lvl="0" marL="0" marR="0" rtl="0" algn="l">
+              <a:spcBef>
+                <a:spcPts val="0"/>
+              </a:spcBef>
+              <a:spcAft>
+                <a:spcPts val="0"/>
+              </a:spcAft>
+              <a:buNone/>
+            </a:pPr>
+            <a:r>
+              <a:rPr lang="en-US" sz="2200">
+                <a:solidFill>
+                  <a:srgbClr val="F6F7FA"/>
+                </a:solidFill>
+              </a:rPr>
+              <a:t>Extra </a:t>
+            </a:r>
+            <a:r>
+              <a:rPr lang="en-US" sz="2200">
+                <a:solidFill>
+                  <a:srgbClr val="F6F7FA"/>
+                </a:solidFill>
+              </a:rPr>
+              <a:t>memory usage</a:t>
+            </a:r>
+            <a:endParaRPr/>
+          </a:p>
+        </p:txBody>
+      </p:sp>
+      <p:sp>
+        <p:nvSpPr>
+          <p:cNvPr id="120" name="Google Shape;120;p15"/>
+          <p:cNvSpPr/>
+          <p:nvPr/>
+        </p:nvSpPr>
+        <p:spPr>
+          <a:xfrm>
+            <a:off x="758952" y="4315968"/>
+            <a:ext cx="100500" cy="100500"/>
+          </a:xfrm>
+          <a:prstGeom prst="rect">
+            <a:avLst/>
+          </a:prstGeom>
+          <a:solidFill>
+            <a:srgbClr val="F08443"/>
+          </a:solidFill>
+          <a:ln>
+            <a:noFill/>
+          </a:ln>
+          <a:effectLst>
+            <a:outerShdw blurRad="40000" rotWithShape="0" dir="5400000" dist="23000">
+              <a:srgbClr val="000000">
+                <a:alpha val="34900"/>
+              </a:srgbClr>
+            </a:outerShdw>
+          </a:effectLst>
+        </p:spPr>
+        <p:txBody>
+          <a:bodyPr anchorCtr="0" anchor="ctr" bIns="45700" lIns="91425" spcFirstLastPara="1" rIns="91425" wrap="square" tIns="45700">
+            <a:noAutofit/>
+          </a:bodyPr>
+          <a:lstStyle/>
+          <a:p>
+            <a:pPr indent="0" lvl="0" marL="0" marR="0" rtl="0" algn="ctr">
+              <a:spcBef>
+                <a:spcPts val="0"/>
+              </a:spcBef>
+              <a:spcAft>
+                <a:spcPts val="0"/>
+              </a:spcAft>
+              <a:buNone/>
+            </a:pPr>
+            <a:r>
+              <a:t/>
+            </a:r>
+            <a:endParaRPr b="0" i="0" sz="1800" u="none" cap="none" strike="noStrike">
+              <a:solidFill>
+                <a:schemeClr val="dk1"/>
+              </a:solidFill>
+              <a:latin typeface="Calibri"/>
+              <a:ea typeface="Calibri"/>
+              <a:cs typeface="Calibri"/>
+              <a:sym typeface="Calibri"/>
+            </a:endParaRPr>
+          </a:p>
+        </p:txBody>
+      </p:sp>
+      <p:sp>
+        <p:nvSpPr>
+          <p:cNvPr id="121" name="Google Shape;121;p15"/>
+          <p:cNvSpPr txBox="1"/>
+          <p:nvPr/>
+        </p:nvSpPr>
+        <p:spPr>
+          <a:xfrm>
+            <a:off x="1042415" y="4206240"/>
+            <a:ext cx="10241400" cy="338700"/>
+          </a:xfrm>
+          <a:prstGeom prst="rect">
+            <a:avLst/>
+          </a:prstGeom>
+          <a:noFill/>
+          <a:ln>
+            <a:noFill/>
+          </a:ln>
+        </p:spPr>
+        <p:txBody>
+          <a:bodyPr anchorCtr="0" anchor="t" bIns="0" lIns="0" spcFirstLastPara="1" rIns="0" wrap="square" tIns="0">
+            <a:spAutoFit/>
+          </a:bodyPr>
+          <a:lstStyle/>
+          <a:p>
+            <a:pPr indent="0" lvl="0" marL="0" marR="0" rtl="0" algn="l">
+              <a:spcBef>
+                <a:spcPts val="0"/>
+              </a:spcBef>
+              <a:spcAft>
+                <a:spcPts val="0"/>
+              </a:spcAft>
+              <a:buNone/>
+            </a:pPr>
+            <a:r>
+              <a:rPr lang="en-US" sz="2200">
+                <a:solidFill>
+                  <a:srgbClr val="F6F7FA"/>
+                </a:solidFill>
+              </a:rPr>
+              <a:t>Sporadic pauses and slower speed</a:t>
+            </a:r>
+            <a:endParaRPr/>
+          </a:p>
+        </p:txBody>
+      </p:sp>
+      <p:sp>
+        <p:nvSpPr>
+          <p:cNvPr id="122" name="Google Shape;122;p15"/>
+          <p:cNvSpPr txBox="1"/>
+          <p:nvPr/>
+        </p:nvSpPr>
+        <p:spPr>
+          <a:xfrm>
+            <a:off x="804672" y="5760720"/>
+            <a:ext cx="10058400" cy="261600"/>
+          </a:xfrm>
+          <a:prstGeom prst="rect">
+            <a:avLst/>
+          </a:prstGeom>
+          <a:noFill/>
+          <a:ln>
+            <a:noFill/>
+          </a:ln>
+        </p:spPr>
+        <p:txBody>
+          <a:bodyPr anchorCtr="0" anchor="t" bIns="0" lIns="0" spcFirstLastPara="1" rIns="0" wrap="square" tIns="0">
+            <a:spAutoFit/>
+          </a:bodyPr>
+          <a:lstStyle/>
+          <a:p>
+            <a:pPr indent="0" lvl="0" marL="0" marR="0" rtl="0" algn="l">
+              <a:spcBef>
+                <a:spcPts val="0"/>
+              </a:spcBef>
+              <a:spcAft>
+                <a:spcPts val="0"/>
+              </a:spcAft>
+              <a:buNone/>
+            </a:pPr>
+            <a:r>
+              <a:rPr lang="en-US" sz="1700">
+                <a:solidFill>
+                  <a:srgbClr val="F08443"/>
+                </a:solidFill>
+              </a:rPr>
+              <a:t>Garbage Collection: </a:t>
+            </a:r>
+            <a:r>
+              <a:rPr lang="en-US" sz="1700">
+                <a:solidFill>
+                  <a:srgbClr val="F08443"/>
+                </a:solidFill>
+              </a:rPr>
+              <a:t>Safety</a:t>
+            </a:r>
+            <a:r>
+              <a:rPr lang="en-US" sz="1700">
+                <a:solidFill>
+                  <a:srgbClr val="F08443"/>
+                </a:solidFill>
+              </a:rPr>
+              <a:t> at a cost</a:t>
+            </a:r>
+            <a:endParaRPr/>
+          </a:p>
+        </p:txBody>
+      </p:sp>
+    </p:spTree>
+  </p:cSld>
+  <p:clrMapOvr>
+    <a:masterClrMapping/>
+  </p:clrMapOvr>
+</p:sld>
+</file>
+
+<file path=ppt/slides/slide4.xml><?xml version="1.0" encoding="utf-8"?>
+<p:sld xmlns:a="http://schemas.openxmlformats.org/drawingml/2006/main" xmlns:r="http://schemas.openxmlformats.org/officeDocument/2006/relationships" xmlns:mc="http://schemas.openxmlformats.org/markup-compatibility/2006" xmlns:mv="urn:schemas-microsoft-com:mac:vml" xmlns:p="http://schemas.openxmlformats.org/presentationml/2006/main" xmlns:c="http://schemas.openxmlformats.org/drawingml/2006/chart" xmlns:dgm="http://schemas.openxmlformats.org/drawingml/2006/diagram" xmlns:o="urn:schemas-microsoft-com:office:office" xmlns:v="urn:schemas-microsoft-com:vml" xmlns:pvml="urn:schemas-microsoft-com:office:powerpoint" xmlns:com="http://schemas.openxmlformats.org/drawingml/2006/compatibility" xmlns:p14="http://schemas.microsoft.com/office/powerpoint/2010/main" xmlns:p15="http://schemas.microsoft.com/office/powerpoint/2012/main" xmlns:ahyp="http://schemas.microsoft.com/office/drawing/2018/hyperlinkcolor">
+  <p:cSld>
+    <p:spTree>
+      <p:nvGrpSpPr>
+        <p:cNvPr id="126" name="Shape 126"/>
+        <p:cNvGrpSpPr/>
+        <p:nvPr/>
+      </p:nvGrpSpPr>
+      <p:grpSpPr>
+        <a:xfrm>
+          <a:off x="0" y="0"/>
+          <a:ext cx="0" cy="0"/>
+          <a:chOff x="0" y="0"/>
+          <a:chExt cx="0" cy="0"/>
+        </a:xfrm>
+      </p:grpSpPr>
+      <p:sp>
+        <p:nvSpPr>
+          <p:cNvPr id="127" name="Google Shape;127;p16"/>
+          <p:cNvSpPr/>
+          <p:nvPr/>
+        </p:nvSpPr>
+        <p:spPr>
+          <a:xfrm>
+            <a:off x="0" y="0"/>
+            <a:ext cx="12191695" cy="6858000"/>
+          </a:xfrm>
+          <a:prstGeom prst="rect">
+            <a:avLst/>
+          </a:prstGeom>
+          <a:solidFill>
+            <a:srgbClr val="111B2B"/>
+          </a:solidFill>
+          <a:ln>
+            <a:noFill/>
+          </a:ln>
+          <a:effectLst>
+            <a:outerShdw blurRad="40000" rotWithShape="0" dir="5400000" dist="23000">
+              <a:srgbClr val="000000">
+                <a:alpha val="34902"/>
+              </a:srgbClr>
+            </a:outerShdw>
+          </a:effectLst>
+        </p:spPr>
+        <p:txBody>
+          <a:bodyPr anchorCtr="0" anchor="ctr" bIns="45700" lIns="91425" spcFirstLastPara="1" rIns="91425" wrap="square" tIns="45700">
+            <a:noAutofit/>
+          </a:bodyPr>
+          <a:lstStyle/>
+          <a:p>
+            <a:pPr indent="0" lvl="0" marL="0" marR="0" rtl="0" algn="ctr">
+              <a:spcBef>
+                <a:spcPts val="0"/>
+              </a:spcBef>
+              <a:spcAft>
+                <a:spcPts val="0"/>
+              </a:spcAft>
+              <a:buNone/>
+            </a:pPr>
+            <a:r>
+              <a:t/>
+            </a:r>
+            <a:endParaRPr b="0" i="0" sz="1800" u="none" cap="none" strike="noStrike">
+              <a:solidFill>
+                <a:schemeClr val="dk1"/>
+              </a:solidFill>
+              <a:latin typeface="Calibri"/>
+              <a:ea typeface="Calibri"/>
+              <a:cs typeface="Calibri"/>
+              <a:sym typeface="Calibri"/>
+            </a:endParaRPr>
+          </a:p>
+        </p:txBody>
+      </p:sp>
+      <p:sp>
+        <p:nvSpPr>
+          <p:cNvPr id="128" name="Google Shape;128;p16"/>
+          <p:cNvSpPr/>
+          <p:nvPr/>
+        </p:nvSpPr>
+        <p:spPr>
+          <a:xfrm>
+            <a:off x="411480" y="393192"/>
+            <a:ext cx="73152" cy="429768"/>
+          </a:xfrm>
+          <a:prstGeom prst="rect">
+            <a:avLst/>
+          </a:prstGeom>
+          <a:solidFill>
+            <a:srgbClr val="F08443"/>
+          </a:solidFill>
+          <a:ln>
+            <a:noFill/>
+          </a:ln>
+          <a:effectLst>
+            <a:outerShdw blurRad="40000" rotWithShape="0" dir="5400000" dist="23000">
+              <a:srgbClr val="000000">
+                <a:alpha val="34902"/>
+              </a:srgbClr>
+            </a:outerShdw>
+          </a:effectLst>
+        </p:spPr>
+        <p:txBody>
+          <a:bodyPr anchorCtr="0" anchor="ctr" bIns="45700" lIns="91425" spcFirstLastPara="1" rIns="91425" wrap="square" tIns="45700">
+            <a:noAutofit/>
+          </a:bodyPr>
+          <a:lstStyle/>
+          <a:p>
+            <a:pPr indent="0" lvl="0" marL="0" marR="0" rtl="0" algn="ctr">
+              <a:spcBef>
+                <a:spcPts val="0"/>
+              </a:spcBef>
+              <a:spcAft>
+                <a:spcPts val="0"/>
+              </a:spcAft>
+              <a:buNone/>
+            </a:pPr>
+            <a:r>
+              <a:t/>
+            </a:r>
+            <a:endParaRPr b="0" i="0" sz="1800" u="none" cap="none" strike="noStrike">
+              <a:solidFill>
+                <a:schemeClr val="dk1"/>
+              </a:solidFill>
+              <a:latin typeface="Calibri"/>
+              <a:ea typeface="Calibri"/>
+              <a:cs typeface="Calibri"/>
+              <a:sym typeface="Calibri"/>
+            </a:endParaRPr>
+          </a:p>
+        </p:txBody>
+      </p:sp>
+      <p:sp>
+        <p:nvSpPr>
+          <p:cNvPr id="129" name="Google Shape;129;p16"/>
+          <p:cNvSpPr txBox="1"/>
+          <p:nvPr/>
+        </p:nvSpPr>
+        <p:spPr>
+          <a:xfrm>
+            <a:off x="612648" y="411480"/>
+            <a:ext cx="7315200" cy="274320"/>
+          </a:xfrm>
+          <a:prstGeom prst="rect">
+            <a:avLst/>
+          </a:prstGeom>
+          <a:noFill/>
+          <a:ln>
+            <a:noFill/>
+          </a:ln>
+        </p:spPr>
+        <p:txBody>
+          <a:bodyPr anchorCtr="0" anchor="t" bIns="0" lIns="0" spcFirstLastPara="1" rIns="0" wrap="square" tIns="0">
+            <a:spAutoFit/>
+          </a:bodyPr>
+          <a:lstStyle/>
+          <a:p>
+            <a:pPr indent="0" lvl="0" marL="0" marR="0" rtl="0" algn="l">
+              <a:spcBef>
+                <a:spcPts val="0"/>
+              </a:spcBef>
+              <a:spcAft>
+                <a:spcPts val="0"/>
+              </a:spcAft>
+              <a:buNone/>
+            </a:pPr>
+            <a:r>
+              <a:rPr b="1" i="0" lang="en-US" sz="1100" u="none" cap="none" strike="noStrike">
+                <a:solidFill>
+                  <a:srgbClr val="BDC8D6"/>
+                </a:solidFill>
+                <a:latin typeface="Arial"/>
+                <a:ea typeface="Arial"/>
+                <a:cs typeface="Arial"/>
+                <a:sym typeface="Arial"/>
+              </a:rPr>
+              <a:t>CEP146  /  SOFTWARE DEVELOPMENT CURRENT EVENT</a:t>
+            </a:r>
+            <a:endParaRPr/>
+          </a:p>
+        </p:txBody>
+      </p:sp>
+      <p:sp>
+        <p:nvSpPr>
+          <p:cNvPr id="130" name="Google Shape;130;p16"/>
+          <p:cNvSpPr txBox="1"/>
+          <p:nvPr/>
+        </p:nvSpPr>
+        <p:spPr>
+          <a:xfrm>
+            <a:off x="621792" y="978408"/>
+            <a:ext cx="10972800" cy="477300"/>
+          </a:xfrm>
+          <a:prstGeom prst="rect">
+            <a:avLst/>
+          </a:prstGeom>
+          <a:noFill/>
+          <a:ln>
+            <a:noFill/>
+          </a:ln>
+        </p:spPr>
+        <p:txBody>
+          <a:bodyPr anchorCtr="0" anchor="t" bIns="0" lIns="0" spcFirstLastPara="1" rIns="0" wrap="square" tIns="0">
+            <a:spAutoFit/>
+          </a:bodyPr>
+          <a:lstStyle/>
+          <a:p>
+            <a:pPr indent="0" lvl="0" marL="0" marR="0" rtl="0" algn="ctr">
+              <a:spcBef>
+                <a:spcPts val="0"/>
+              </a:spcBef>
+              <a:spcAft>
+                <a:spcPts val="0"/>
+              </a:spcAft>
+              <a:buNone/>
+            </a:pPr>
+            <a:r>
+              <a:rPr b="1" lang="en-US" sz="3100">
+                <a:solidFill>
+                  <a:srgbClr val="F6F7FA"/>
+                </a:solidFill>
+              </a:rPr>
+              <a:t>Trade Off and Rust’s Reply</a:t>
+            </a:r>
+            <a:endParaRPr/>
+          </a:p>
+        </p:txBody>
+      </p:sp>
+      <p:sp>
+        <p:nvSpPr>
+          <p:cNvPr id="131" name="Google Shape;131;p16"/>
+          <p:cNvSpPr txBox="1"/>
+          <p:nvPr/>
+        </p:nvSpPr>
+        <p:spPr>
+          <a:xfrm>
+            <a:off x="9875520" y="6446520"/>
+            <a:ext cx="1828800" cy="182880"/>
+          </a:xfrm>
+          <a:prstGeom prst="rect">
+            <a:avLst/>
+          </a:prstGeom>
+          <a:noFill/>
+          <a:ln>
+            <a:noFill/>
+          </a:ln>
+        </p:spPr>
+        <p:txBody>
+          <a:bodyPr anchorCtr="0" anchor="t" bIns="0" lIns="0" spcFirstLastPara="1" rIns="0" wrap="square" tIns="0">
+            <a:spAutoFit/>
+          </a:bodyPr>
+          <a:lstStyle/>
+          <a:p>
+            <a:pPr indent="0" lvl="0" marL="0" marR="0" rtl="0" algn="l">
+              <a:spcBef>
+                <a:spcPts val="0"/>
+              </a:spcBef>
+              <a:spcAft>
+                <a:spcPts val="0"/>
+              </a:spcAft>
+              <a:buNone/>
+            </a:pPr>
+            <a:r>
+              <a:rPr b="0" i="0" lang="en-US" sz="900" u="none" cap="none" strike="noStrike">
+                <a:solidFill>
+                  <a:srgbClr val="BDC8D6"/>
+                </a:solidFill>
+                <a:latin typeface="Arial"/>
+                <a:ea typeface="Arial"/>
+                <a:cs typeface="Arial"/>
+                <a:sym typeface="Arial"/>
+              </a:rPr>
+              <a:t>02  /  RUST IN 2026</a:t>
+            </a:r>
+            <a:endParaRPr/>
+          </a:p>
+        </p:txBody>
+      </p:sp>
+      <p:sp>
+        <p:nvSpPr>
+          <p:cNvPr id="132" name="Google Shape;132;p16"/>
+          <p:cNvSpPr txBox="1"/>
+          <p:nvPr/>
+        </p:nvSpPr>
+        <p:spPr>
+          <a:xfrm>
+            <a:off x="784447" y="6063995"/>
+            <a:ext cx="10058400" cy="261600"/>
+          </a:xfrm>
+          <a:prstGeom prst="rect">
+            <a:avLst/>
+          </a:prstGeom>
+          <a:noFill/>
+          <a:ln>
+            <a:noFill/>
+          </a:ln>
+        </p:spPr>
+        <p:txBody>
+          <a:bodyPr anchorCtr="0" anchor="t" bIns="0" lIns="0" spcFirstLastPara="1" rIns="0" wrap="square" tIns="0">
+            <a:spAutoFit/>
+          </a:bodyPr>
+          <a:lstStyle/>
+          <a:p>
+            <a:pPr indent="0" lvl="0" marL="0" marR="0" rtl="0" algn="l">
+              <a:spcBef>
+                <a:spcPts val="0"/>
+              </a:spcBef>
+              <a:spcAft>
+                <a:spcPts val="0"/>
+              </a:spcAft>
+              <a:buNone/>
+            </a:pPr>
+            <a:r>
+              <a:rPr lang="en-US" sz="1700">
+                <a:solidFill>
+                  <a:srgbClr val="F08443"/>
+                </a:solidFill>
+              </a:rPr>
+              <a:t>Safety</a:t>
+            </a:r>
+            <a:r>
+              <a:rPr lang="en-US" sz="1700">
+                <a:solidFill>
+                  <a:srgbClr val="F08443"/>
+                </a:solidFill>
+              </a:rPr>
+              <a:t> or Speed? Why not Both?</a:t>
+            </a:r>
+            <a:endParaRPr/>
+          </a:p>
+        </p:txBody>
+      </p:sp>
+      <p:pic>
+        <p:nvPicPr>
+          <p:cNvPr id="133" name="Google Shape;133;p16"/>
+          <p:cNvPicPr preferRelativeResize="0"/>
+          <p:nvPr/>
+        </p:nvPicPr>
+        <p:blipFill>
+          <a:blip r:embed="rId3">
+            <a:alphaModFix/>
+          </a:blip>
+          <a:stretch>
+            <a:fillRect/>
+          </a:stretch>
+        </p:blipFill>
+        <p:spPr>
+          <a:xfrm>
+            <a:off x="2374700" y="1748300"/>
+            <a:ext cx="7401851" cy="3712751"/>
+          </a:xfrm>
+          <a:prstGeom prst="rect">
+            <a:avLst/>
+          </a:prstGeom>
+          <a:solidFill>
+            <a:srgbClr val="111B2B"/>
+          </a:solidFill>
+          <a:ln>
+            <a:noFill/>
+          </a:ln>
+          <a:effectLst>
+            <a:outerShdw blurRad="40000" rotWithShape="0" dir="5400000" dist="23000">
+              <a:srgbClr val="000000">
+                <a:alpha val="34900"/>
+              </a:srgbClr>
+            </a:outerShdw>
+          </a:effectLst>
+        </p:spPr>
+      </p:pic>
+    </p:spTree>
+  </p:cSld>
+  <p:clrMapOvr>
+    <a:masterClrMapping/>
+  </p:clrMapOvr>
+</p:sld>
+</file>
+
+<file path=ppt/slides/slide5.xml><?xml version="1.0" encoding="utf-8"?>
+<p:sld xmlns:a="http://schemas.openxmlformats.org/drawingml/2006/main" xmlns:r="http://schemas.openxmlformats.org/officeDocument/2006/relationships" xmlns:mc="http://schemas.openxmlformats.org/markup-compatibility/2006" xmlns:mv="urn:schemas-microsoft-com:mac:vml" xmlns:p="http://schemas.openxmlformats.org/presentationml/2006/main" xmlns:c="http://schemas.openxmlformats.org/drawingml/2006/chart" xmlns:dgm="http://schemas.openxmlformats.org/drawingml/2006/diagram" xmlns:o="urn:schemas-microsoft-com:office:office" xmlns:v="urn:schemas-microsoft-com:vml" xmlns:pvml="urn:schemas-microsoft-com:office:powerpoint" xmlns:com="http://schemas.openxmlformats.org/drawingml/2006/compatibility" xmlns:p14="http://schemas.microsoft.com/office/powerpoint/2010/main" xmlns:p15="http://schemas.microsoft.com/office/powerpoint/2012/main" xmlns:ahyp="http://schemas.microsoft.com/office/drawing/2018/hyperlinkcolor">
+  <p:cSld>
+    <p:spTree>
+      <p:nvGrpSpPr>
+        <p:cNvPr id="137" name="Shape 137"/>
+        <p:cNvGrpSpPr/>
+        <p:nvPr/>
+      </p:nvGrpSpPr>
+      <p:grpSpPr>
+        <a:xfrm>
+          <a:off x="0" y="0"/>
+          <a:ext cx="0" cy="0"/>
+          <a:chOff x="0" y="0"/>
+          <a:chExt cx="0" cy="0"/>
+        </a:xfrm>
+      </p:grpSpPr>
+      <p:sp>
+        <p:nvSpPr>
+          <p:cNvPr id="138" name="Google Shape;138;p17"/>
+          <p:cNvSpPr/>
+          <p:nvPr/>
+        </p:nvSpPr>
+        <p:spPr>
+          <a:xfrm>
+            <a:off x="0" y="0"/>
+            <a:ext cx="12191700" cy="6858000"/>
+          </a:xfrm>
+          <a:prstGeom prst="rect">
+            <a:avLst/>
+          </a:prstGeom>
+          <a:solidFill>
+            <a:srgbClr val="111B2B"/>
+          </a:solidFill>
+          <a:ln>
+            <a:noFill/>
+          </a:ln>
+          <a:effectLst>
+            <a:outerShdw blurRad="40000" rotWithShape="0" dir="5400000" dist="23000">
+              <a:srgbClr val="000000">
+                <a:alpha val="34900"/>
+              </a:srgbClr>
+            </a:outerShdw>
+          </a:effectLst>
+        </p:spPr>
+        <p:txBody>
+          <a:bodyPr anchorCtr="0" anchor="ctr" bIns="45700" lIns="91425" spcFirstLastPara="1" rIns="91425" wrap="square" tIns="45700">
+            <a:noAutofit/>
+          </a:bodyPr>
+          <a:lstStyle/>
+          <a:p>
+            <a:pPr indent="0" lvl="0" marL="0" marR="0" rtl="0" algn="ctr">
+              <a:spcBef>
+                <a:spcPts val="0"/>
+              </a:spcBef>
+              <a:spcAft>
+                <a:spcPts val="0"/>
+              </a:spcAft>
+              <a:buNone/>
+            </a:pPr>
+            <a:r>
+              <a:t/>
+            </a:r>
+            <a:endParaRPr b="0" i="0" sz="1800" u="none" cap="none" strike="noStrike">
+              <a:solidFill>
+                <a:schemeClr val="dk1"/>
+              </a:solidFill>
+              <a:latin typeface="Calibri"/>
+              <a:ea typeface="Calibri"/>
+              <a:cs typeface="Calibri"/>
+              <a:sym typeface="Calibri"/>
+            </a:endParaRPr>
+          </a:p>
+        </p:txBody>
+      </p:sp>
+      <p:sp>
+        <p:nvSpPr>
+          <p:cNvPr id="139" name="Google Shape;139;p17"/>
+          <p:cNvSpPr/>
+          <p:nvPr/>
+        </p:nvSpPr>
+        <p:spPr>
+          <a:xfrm>
+            <a:off x="411480" y="393192"/>
+            <a:ext cx="73200" cy="429900"/>
+          </a:xfrm>
+          <a:prstGeom prst="rect">
+            <a:avLst/>
+          </a:prstGeom>
+          <a:solidFill>
+            <a:srgbClr val="F08443"/>
+          </a:solidFill>
+          <a:ln>
+            <a:noFill/>
+          </a:ln>
+          <a:effectLst>
+            <a:outerShdw blurRad="40000" rotWithShape="0" dir="5400000" dist="23000">
+              <a:srgbClr val="000000">
+                <a:alpha val="34900"/>
+              </a:srgbClr>
+            </a:outerShdw>
+          </a:effectLst>
+        </p:spPr>
+        <p:txBody>
+          <a:bodyPr anchorCtr="0" anchor="ctr" bIns="45700" lIns="91425" spcFirstLastPara="1" rIns="91425" wrap="square" tIns="45700">
+            <a:noAutofit/>
+          </a:bodyPr>
+          <a:lstStyle/>
+          <a:p>
+            <a:pPr indent="0" lvl="0" marL="0" marR="0" rtl="0" algn="ctr">
+              <a:spcBef>
+                <a:spcPts val="0"/>
+              </a:spcBef>
+              <a:spcAft>
+                <a:spcPts val="0"/>
+              </a:spcAft>
+              <a:buNone/>
+            </a:pPr>
+            <a:r>
+              <a:t/>
+            </a:r>
+            <a:endParaRPr b="0" i="0" sz="1800" u="none" cap="none" strike="noStrike">
+              <a:solidFill>
+                <a:schemeClr val="dk1"/>
+              </a:solidFill>
+              <a:latin typeface="Calibri"/>
+              <a:ea typeface="Calibri"/>
+              <a:cs typeface="Calibri"/>
+              <a:sym typeface="Calibri"/>
+            </a:endParaRPr>
+          </a:p>
+        </p:txBody>
+      </p:sp>
+      <p:sp>
+        <p:nvSpPr>
+          <p:cNvPr id="140" name="Google Shape;140;p17"/>
+          <p:cNvSpPr txBox="1"/>
+          <p:nvPr/>
+        </p:nvSpPr>
+        <p:spPr>
+          <a:xfrm>
+            <a:off x="612648" y="411480"/>
+            <a:ext cx="7315200" cy="169200"/>
+          </a:xfrm>
+          <a:prstGeom prst="rect">
+            <a:avLst/>
+          </a:prstGeom>
+          <a:noFill/>
+          <a:ln>
+            <a:noFill/>
+          </a:ln>
+        </p:spPr>
+        <p:txBody>
+          <a:bodyPr anchorCtr="0" anchor="t" bIns="0" lIns="0" spcFirstLastPara="1" rIns="0" wrap="square" tIns="0">
+            <a:spAutoFit/>
+          </a:bodyPr>
+          <a:lstStyle/>
+          <a:p>
+            <a:pPr indent="0" lvl="0" marL="0" marR="0" rtl="0" algn="l">
+              <a:spcBef>
+                <a:spcPts val="0"/>
+              </a:spcBef>
+              <a:spcAft>
+                <a:spcPts val="0"/>
+              </a:spcAft>
+              <a:buNone/>
+            </a:pPr>
+            <a:r>
+              <a:rPr b="1" i="0" lang="en-US" sz="1100" u="none" cap="none" strike="noStrike">
+                <a:solidFill>
+                  <a:srgbClr val="BDC8D6"/>
+                </a:solidFill>
+                <a:latin typeface="Arial"/>
+                <a:ea typeface="Arial"/>
+                <a:cs typeface="Arial"/>
+                <a:sym typeface="Arial"/>
+              </a:rPr>
+              <a:t>CEP146  /  SOFTWARE DEVELOPMENT CURRENT EVENT</a:t>
+            </a:r>
+            <a:endParaRPr/>
+          </a:p>
+        </p:txBody>
+      </p:sp>
+      <p:sp>
+        <p:nvSpPr>
+          <p:cNvPr id="141" name="Google Shape;141;p17"/>
+          <p:cNvSpPr txBox="1"/>
+          <p:nvPr/>
+        </p:nvSpPr>
+        <p:spPr>
+          <a:xfrm>
+            <a:off x="621792" y="978408"/>
+            <a:ext cx="10972800" cy="477300"/>
+          </a:xfrm>
+          <a:prstGeom prst="rect">
+            <a:avLst/>
+          </a:prstGeom>
+          <a:noFill/>
+          <a:ln>
+            <a:noFill/>
+          </a:ln>
+        </p:spPr>
+        <p:txBody>
+          <a:bodyPr anchorCtr="0" anchor="t" bIns="0" lIns="0" spcFirstLastPara="1" rIns="0" wrap="square" tIns="0">
+            <a:spAutoFit/>
+          </a:bodyPr>
+          <a:lstStyle/>
+          <a:p>
+            <a:pPr indent="0" lvl="0" marL="0" marR="0" rtl="0" algn="l">
+              <a:spcBef>
+                <a:spcPts val="0"/>
+              </a:spcBef>
+              <a:spcAft>
+                <a:spcPts val="0"/>
+              </a:spcAft>
+              <a:buNone/>
+            </a:pPr>
+            <a:r>
+              <a:rPr b="1" lang="en-US" sz="3100">
+                <a:solidFill>
+                  <a:srgbClr val="F6F7FA"/>
+                </a:solidFill>
+              </a:rPr>
+              <a:t>How Does Rust Do it?</a:t>
+            </a:r>
+            <a:endParaRPr/>
+          </a:p>
+        </p:txBody>
+      </p:sp>
+      <p:sp>
+        <p:nvSpPr>
+          <p:cNvPr id="142" name="Google Shape;142;p17"/>
+          <p:cNvSpPr txBox="1"/>
+          <p:nvPr/>
+        </p:nvSpPr>
+        <p:spPr>
+          <a:xfrm>
+            <a:off x="9875520" y="6446520"/>
+            <a:ext cx="1828800" cy="138600"/>
+          </a:xfrm>
+          <a:prstGeom prst="rect">
+            <a:avLst/>
+          </a:prstGeom>
+          <a:noFill/>
+          <a:ln>
+            <a:noFill/>
+          </a:ln>
+        </p:spPr>
+        <p:txBody>
+          <a:bodyPr anchorCtr="0" anchor="t" bIns="0" lIns="0" spcFirstLastPara="1" rIns="0" wrap="square" tIns="0">
+            <a:spAutoFit/>
+          </a:bodyPr>
+          <a:lstStyle/>
+          <a:p>
+            <a:pPr indent="0" lvl="0" marL="0" marR="0" rtl="0" algn="l">
+              <a:spcBef>
+                <a:spcPts val="0"/>
+              </a:spcBef>
+              <a:spcAft>
+                <a:spcPts val="0"/>
+              </a:spcAft>
+              <a:buNone/>
+            </a:pPr>
+            <a:r>
+              <a:rPr b="0" i="0" lang="en-US" sz="900" u="none" cap="none" strike="noStrike">
+                <a:solidFill>
+                  <a:srgbClr val="BDC8D6"/>
+                </a:solidFill>
+                <a:latin typeface="Arial"/>
+                <a:ea typeface="Arial"/>
+                <a:cs typeface="Arial"/>
+                <a:sym typeface="Arial"/>
+              </a:rPr>
+              <a:t>03  /  RUST IN 2026</a:t>
+            </a:r>
+            <a:endParaRPr/>
+          </a:p>
+        </p:txBody>
+      </p:sp>
+      <p:sp>
+        <p:nvSpPr>
+          <p:cNvPr id="143" name="Google Shape;143;p17"/>
+          <p:cNvSpPr txBox="1"/>
+          <p:nvPr/>
+        </p:nvSpPr>
+        <p:spPr>
+          <a:xfrm>
+            <a:off x="1051560" y="2039112"/>
+            <a:ext cx="1828800" cy="400200"/>
+          </a:xfrm>
+          <a:prstGeom prst="rect">
+            <a:avLst/>
+          </a:prstGeom>
+          <a:noFill/>
+          <a:ln>
+            <a:noFill/>
+          </a:ln>
+        </p:spPr>
+        <p:txBody>
+          <a:bodyPr anchorCtr="0" anchor="t" bIns="0" lIns="0" spcFirstLastPara="1" rIns="0" wrap="square" tIns="0">
+            <a:spAutoFit/>
+          </a:bodyPr>
+          <a:lstStyle/>
+          <a:p>
+            <a:pPr indent="0" lvl="0" marL="0" marR="0" rtl="0" algn="l">
+              <a:spcBef>
+                <a:spcPts val="0"/>
+              </a:spcBef>
+              <a:spcAft>
+                <a:spcPts val="0"/>
+              </a:spcAft>
+              <a:buNone/>
+            </a:pPr>
+            <a:r>
+              <a:rPr b="1" i="0" lang="en-US" sz="2600" u="none" cap="none" strike="noStrike">
+                <a:solidFill>
+                  <a:srgbClr val="F08443"/>
+                </a:solidFill>
+                <a:latin typeface="Arial"/>
+                <a:ea typeface="Arial"/>
+                <a:cs typeface="Arial"/>
+                <a:sym typeface="Arial"/>
+              </a:rPr>
+              <a:t>202</a:t>
+            </a:r>
+            <a:endParaRPr/>
+          </a:p>
+        </p:txBody>
+      </p:sp>
+      <p:sp>
+        <p:nvSpPr>
+          <p:cNvPr id="144" name="Google Shape;144;p17"/>
+          <p:cNvSpPr txBox="1"/>
+          <p:nvPr/>
+        </p:nvSpPr>
+        <p:spPr>
+          <a:xfrm>
+            <a:off x="2880360" y="2011680"/>
+            <a:ext cx="8229600" cy="323100"/>
+          </a:xfrm>
+          <a:prstGeom prst="rect">
+            <a:avLst/>
+          </a:prstGeom>
+          <a:noFill/>
+          <a:ln>
+            <a:noFill/>
+          </a:ln>
+        </p:spPr>
+        <p:txBody>
+          <a:bodyPr anchorCtr="0" anchor="t" bIns="0" lIns="0" spcFirstLastPara="1" rIns="0" wrap="square" tIns="0">
+            <a:spAutoFit/>
+          </a:bodyPr>
+          <a:lstStyle/>
+          <a:p>
+            <a:pPr indent="0" lvl="0" marL="0" marR="0" rtl="0" algn="l">
+              <a:spcBef>
+                <a:spcPts val="0"/>
+              </a:spcBef>
+              <a:spcAft>
+                <a:spcPts val="0"/>
+              </a:spcAft>
+              <a:buNone/>
+            </a:pPr>
+            <a:r>
+              <a:rPr b="0" i="0" lang="en-US" sz="2100" u="none" cap="none" strike="noStrike">
+                <a:solidFill>
+                  <a:srgbClr val="F6F7FA"/>
+                </a:solidFill>
+                <a:latin typeface="Arial"/>
+                <a:ea typeface="Arial"/>
+                <a:cs typeface="Arial"/>
+                <a:sym typeface="Arial"/>
+              </a:rPr>
+              <a:t>Rust support entered the Linux kernel.</a:t>
+            </a:r>
+            <a:endParaRPr/>
+          </a:p>
+        </p:txBody>
+      </p:sp>
+      <p:sp>
+        <p:nvSpPr>
+          <p:cNvPr id="145" name="Google Shape;145;p17"/>
+          <p:cNvSpPr/>
+          <p:nvPr/>
+        </p:nvSpPr>
+        <p:spPr>
+          <a:xfrm>
+            <a:off x="1060704" y="2926080"/>
+            <a:ext cx="10058400" cy="22800"/>
+          </a:xfrm>
+          <a:prstGeom prst="rect">
+            <a:avLst/>
+          </a:prstGeom>
+          <a:solidFill>
+            <a:srgbClr val="BDC8D6"/>
+          </a:solidFill>
+          <a:ln>
+            <a:noFill/>
+          </a:ln>
+          <a:effectLst>
+            <a:outerShdw blurRad="40000" rotWithShape="0" dir="5400000" dist="23000">
+              <a:srgbClr val="000000">
+                <a:alpha val="34900"/>
+              </a:srgbClr>
+            </a:outerShdw>
+          </a:effectLst>
+        </p:spPr>
+        <p:txBody>
+          <a:bodyPr anchorCtr="0" anchor="ctr" bIns="45700" lIns="91425" spcFirstLastPara="1" rIns="91425" wrap="square" tIns="45700">
+            <a:noAutofit/>
+          </a:bodyPr>
+          <a:lstStyle/>
+          <a:p>
+            <a:pPr indent="0" lvl="0" marL="0" marR="0" rtl="0" algn="ctr">
+              <a:spcBef>
+                <a:spcPts val="0"/>
+              </a:spcBef>
+              <a:spcAft>
+                <a:spcPts val="0"/>
+              </a:spcAft>
+              <a:buNone/>
+            </a:pPr>
+            <a:r>
+              <a:t/>
+            </a:r>
+            <a:endParaRPr b="0" i="0" sz="1800" u="none" cap="none" strike="noStrike">
+              <a:solidFill>
+                <a:schemeClr val="dk1"/>
+              </a:solidFill>
+              <a:latin typeface="Calibri"/>
+              <a:ea typeface="Calibri"/>
+              <a:cs typeface="Calibri"/>
+              <a:sym typeface="Calibri"/>
+            </a:endParaRPr>
+          </a:p>
+        </p:txBody>
+      </p:sp>
+      <p:sp>
+        <p:nvSpPr>
+          <p:cNvPr id="146" name="Google Shape;146;p17"/>
+          <p:cNvSpPr txBox="1"/>
+          <p:nvPr/>
+        </p:nvSpPr>
+        <p:spPr>
+          <a:xfrm>
+            <a:off x="1051560" y="3328416"/>
+            <a:ext cx="2011800" cy="384900"/>
+          </a:xfrm>
+          <a:prstGeom prst="rect">
+            <a:avLst/>
+          </a:prstGeom>
+          <a:noFill/>
+          <a:ln>
+            <a:noFill/>
+          </a:ln>
+        </p:spPr>
+        <p:txBody>
+          <a:bodyPr anchorCtr="0" anchor="t" bIns="0" lIns="0" spcFirstLastPara="1" rIns="0" wrap="square" tIns="0">
+            <a:spAutoFit/>
+          </a:bodyPr>
+          <a:lstStyle/>
+          <a:p>
+            <a:pPr indent="0" lvl="0" marL="0" marR="0" rtl="0" algn="l">
+              <a:spcBef>
+                <a:spcPts val="0"/>
+              </a:spcBef>
+              <a:spcAft>
+                <a:spcPts val="0"/>
+              </a:spcAft>
+              <a:buNone/>
+            </a:pPr>
+            <a:r>
+              <a:rPr b="1" i="0" lang="en-US" sz="2500" u="none" cap="none" strike="noStrike">
+                <a:solidFill>
+                  <a:srgbClr val="F08443"/>
+                </a:solidFill>
+                <a:latin typeface="Arial"/>
+                <a:ea typeface="Arial"/>
+                <a:cs typeface="Arial"/>
+                <a:sym typeface="Arial"/>
+              </a:rPr>
+              <a:t>Dec 2025</a:t>
+            </a:r>
+            <a:endParaRPr/>
+          </a:p>
+        </p:txBody>
+      </p:sp>
+      <p:sp>
+        <p:nvSpPr>
+          <p:cNvPr id="147" name="Google Shape;147;p17"/>
+          <p:cNvSpPr txBox="1"/>
+          <p:nvPr/>
+        </p:nvSpPr>
+        <p:spPr>
+          <a:xfrm>
+            <a:off x="2880360" y="3310128"/>
+            <a:ext cx="8138100" cy="323100"/>
+          </a:xfrm>
+          <a:prstGeom prst="rect">
+            <a:avLst/>
+          </a:prstGeom>
+          <a:noFill/>
+          <a:ln>
+            <a:noFill/>
+          </a:ln>
+        </p:spPr>
+        <p:txBody>
+          <a:bodyPr anchorCtr="0" anchor="t" bIns="0" lIns="0" spcFirstLastPara="1" rIns="0" wrap="square" tIns="0">
+            <a:spAutoFit/>
+          </a:bodyPr>
+          <a:lstStyle/>
+          <a:p>
+            <a:pPr indent="0" lvl="0" marL="0" marR="0" rtl="0" algn="l">
+              <a:spcBef>
+                <a:spcPts val="0"/>
+              </a:spcBef>
+              <a:spcAft>
+                <a:spcPts val="0"/>
+              </a:spcAft>
+              <a:buNone/>
+            </a:pPr>
+            <a:r>
+              <a:rPr b="0" i="0" lang="en-US" sz="2100" u="none" cap="none" strike="noStrike">
+                <a:solidFill>
+                  <a:srgbClr val="F6F7FA"/>
+                </a:solidFill>
+                <a:latin typeface="Arial"/>
+                <a:ea typeface="Arial"/>
+                <a:cs typeface="Arial"/>
+                <a:sym typeface="Arial"/>
+              </a:rPr>
+              <a:t>Linux maintainers said Rust was no longer experimental.</a:t>
+            </a:r>
+            <a:endParaRPr/>
+          </a:p>
+        </p:txBody>
+      </p:sp>
+      <p:sp>
+        <p:nvSpPr>
+          <p:cNvPr id="148" name="Google Shape;148;p17"/>
+          <p:cNvSpPr/>
+          <p:nvPr/>
+        </p:nvSpPr>
+        <p:spPr>
+          <a:xfrm>
+            <a:off x="1060704" y="4343400"/>
+            <a:ext cx="10058400" cy="22800"/>
+          </a:xfrm>
+          <a:prstGeom prst="rect">
+            <a:avLst/>
+          </a:prstGeom>
+          <a:solidFill>
+            <a:srgbClr val="BDC8D6"/>
+          </a:solidFill>
+          <a:ln>
+            <a:noFill/>
+          </a:ln>
+          <a:effectLst>
+            <a:outerShdw blurRad="40000" rotWithShape="0" dir="5400000" dist="23000">
+              <a:srgbClr val="000000">
+                <a:alpha val="34900"/>
+              </a:srgbClr>
+            </a:outerShdw>
+          </a:effectLst>
+        </p:spPr>
+        <p:txBody>
+          <a:bodyPr anchorCtr="0" anchor="ctr" bIns="45700" lIns="91425" spcFirstLastPara="1" rIns="91425" wrap="square" tIns="45700">
+            <a:noAutofit/>
+          </a:bodyPr>
+          <a:lstStyle/>
+          <a:p>
+            <a:pPr indent="0" lvl="0" marL="0" marR="0" rtl="0" algn="ctr">
+              <a:spcBef>
+                <a:spcPts val="0"/>
+              </a:spcBef>
+              <a:spcAft>
+                <a:spcPts val="0"/>
+              </a:spcAft>
+              <a:buNone/>
+            </a:pPr>
+            <a:r>
+              <a:t/>
+            </a:r>
+            <a:endParaRPr b="0" i="0" sz="1800" u="none" cap="none" strike="noStrike">
+              <a:solidFill>
+                <a:schemeClr val="dk1"/>
+              </a:solidFill>
+              <a:latin typeface="Calibri"/>
+              <a:ea typeface="Calibri"/>
+              <a:cs typeface="Calibri"/>
+              <a:sym typeface="Calibri"/>
+            </a:endParaRPr>
+          </a:p>
+        </p:txBody>
+      </p:sp>
+      <p:sp>
+        <p:nvSpPr>
+          <p:cNvPr id="149" name="Google Shape;149;p17"/>
+          <p:cNvSpPr txBox="1"/>
+          <p:nvPr/>
+        </p:nvSpPr>
+        <p:spPr>
+          <a:xfrm>
+            <a:off x="1051560" y="4754880"/>
+            <a:ext cx="1828800" cy="400200"/>
+          </a:xfrm>
+          <a:prstGeom prst="rect">
+            <a:avLst/>
+          </a:prstGeom>
+          <a:noFill/>
+          <a:ln>
+            <a:noFill/>
+          </a:ln>
+        </p:spPr>
+        <p:txBody>
+          <a:bodyPr anchorCtr="0" anchor="t" bIns="0" lIns="0" spcFirstLastPara="1" rIns="0" wrap="square" tIns="0">
+            <a:spAutoFit/>
+          </a:bodyPr>
+          <a:lstStyle/>
+          <a:p>
+            <a:pPr indent="0" lvl="0" marL="0" marR="0" rtl="0" algn="l">
+              <a:spcBef>
+                <a:spcPts val="0"/>
+              </a:spcBef>
+              <a:spcAft>
+                <a:spcPts val="0"/>
+              </a:spcAft>
+              <a:buNone/>
+            </a:pPr>
+            <a:r>
+              <a:rPr b="1" i="0" lang="en-US" sz="2600" u="none" cap="none" strike="noStrike">
+                <a:solidFill>
+                  <a:srgbClr val="F08443"/>
+                </a:solidFill>
+                <a:latin typeface="Arial"/>
+                <a:ea typeface="Arial"/>
+                <a:cs typeface="Arial"/>
+                <a:sym typeface="Arial"/>
+              </a:rPr>
+              <a:t>2026</a:t>
+            </a:r>
+            <a:endParaRPr/>
+          </a:p>
+        </p:txBody>
+      </p:sp>
+      <p:sp>
+        <p:nvSpPr>
+          <p:cNvPr id="150" name="Google Shape;150;p17"/>
+          <p:cNvSpPr txBox="1"/>
+          <p:nvPr/>
+        </p:nvSpPr>
+        <p:spPr>
+          <a:xfrm>
+            <a:off x="814797" y="6102895"/>
+            <a:ext cx="10058400" cy="261600"/>
+          </a:xfrm>
+          <a:prstGeom prst="rect">
+            <a:avLst/>
+          </a:prstGeom>
+          <a:noFill/>
+          <a:ln>
+            <a:noFill/>
+          </a:ln>
+        </p:spPr>
+        <p:txBody>
+          <a:bodyPr anchorCtr="0" anchor="t" bIns="0" lIns="0" spcFirstLastPara="1" rIns="0" wrap="square" tIns="0">
+            <a:spAutoFit/>
+          </a:bodyPr>
+          <a:lstStyle/>
+          <a:p>
+            <a:pPr indent="0" lvl="0" marL="0" marR="0" rtl="0" algn="l">
+              <a:spcBef>
+                <a:spcPts val="0"/>
+              </a:spcBef>
+              <a:spcAft>
+                <a:spcPts val="0"/>
+              </a:spcAft>
+              <a:buNone/>
+            </a:pPr>
+            <a:r>
+              <a:rPr lang="en-US" sz="1700">
+                <a:solidFill>
+                  <a:srgbClr val="F08443"/>
+                </a:solidFill>
+              </a:rPr>
+              <a:t>No Garbage Collector? Then What?</a:t>
+            </a:r>
+            <a:endParaRPr/>
+          </a:p>
+        </p:txBody>
+      </p:sp>
+      <p:pic>
+        <p:nvPicPr>
+          <p:cNvPr id="151" name="Google Shape;151;p17"/>
+          <p:cNvPicPr preferRelativeResize="0"/>
+          <p:nvPr/>
+        </p:nvPicPr>
+        <p:blipFill>
+          <a:blip r:embed="rId3">
+            <a:alphaModFix/>
+          </a:blip>
+          <a:stretch>
+            <a:fillRect/>
+          </a:stretch>
+        </p:blipFill>
+        <p:spPr>
+          <a:xfrm>
+            <a:off x="889474" y="1797875"/>
+            <a:ext cx="10413574" cy="3962850"/>
+          </a:xfrm>
+          <a:prstGeom prst="rect">
+            <a:avLst/>
+          </a:prstGeom>
+          <a:solidFill>
+            <a:srgbClr val="111B2B"/>
+          </a:solidFill>
+          <a:ln>
+            <a:noFill/>
+          </a:ln>
+          <a:effectLst>
+            <a:outerShdw blurRad="40000" rotWithShape="0" dir="5400000" dist="23000">
+              <a:srgbClr val="000000">
+                <a:alpha val="34900"/>
+              </a:srgbClr>
+            </a:outerShdw>
+          </a:effectLst>
+        </p:spPr>
+      </p:pic>
+    </p:spTree>
+  </p:cSld>
+  <p:clrMapOvr>
+    <a:masterClrMapping/>
+  </p:clrMapOvr>
+</p:sld>
+</file>
+
+<file path=ppt/slides/slide6.xml><?xml version="1.0" encoding="utf-8"?>
+<p:sld xmlns:a="http://schemas.openxmlformats.org/drawingml/2006/main" xmlns:r="http://schemas.openxmlformats.org/officeDocument/2006/relationships" xmlns:mc="http://schemas.openxmlformats.org/markup-compatibility/2006" xmlns:mv="urn:schemas-microsoft-com:mac:vml" xmlns:p="http://schemas.openxmlformats.org/presentationml/2006/main" xmlns:c="http://schemas.openxmlformats.org/drawingml/2006/chart" xmlns:dgm="http://schemas.openxmlformats.org/drawingml/2006/diagram" xmlns:o="urn:schemas-microsoft-com:office:office" xmlns:v="urn:schemas-microsoft-com:vml" xmlns:pvml="urn:schemas-microsoft-com:office:powerpoint" xmlns:com="http://schemas.openxmlformats.org/drawingml/2006/compatibility" xmlns:p14="http://schemas.microsoft.com/office/powerpoint/2010/main" xmlns:p15="http://schemas.microsoft.com/office/powerpoint/2012/main" xmlns:ahyp="http://schemas.microsoft.com/office/drawing/2018/hyperlinkcolor">
+  <p:cSld>
+    <p:spTree>
+      <p:nvGrpSpPr>
+        <p:cNvPr id="155" name="Shape 155"/>
+        <p:cNvGrpSpPr/>
+        <p:nvPr/>
+      </p:nvGrpSpPr>
+      <p:grpSpPr>
+        <a:xfrm>
+          <a:off x="0" y="0"/>
+          <a:ext cx="0" cy="0"/>
+          <a:chOff x="0" y="0"/>
+          <a:chExt cx="0" cy="0"/>
+        </a:xfrm>
+      </p:grpSpPr>
+      <p:sp>
+        <p:nvSpPr>
+          <p:cNvPr id="156" name="Google Shape;156;p18"/>
+          <p:cNvSpPr/>
+          <p:nvPr/>
+        </p:nvSpPr>
+        <p:spPr>
+          <a:xfrm>
+            <a:off x="0" y="0"/>
+            <a:ext cx="12191700" cy="6858000"/>
+          </a:xfrm>
+          <a:prstGeom prst="rect">
+            <a:avLst/>
+          </a:prstGeom>
+          <a:solidFill>
+            <a:srgbClr val="111B2B"/>
+          </a:solidFill>
+          <a:ln>
+            <a:noFill/>
+          </a:ln>
+          <a:effectLst>
+            <a:outerShdw blurRad="40000" rotWithShape="0" dir="5400000" dist="23000">
+              <a:srgbClr val="000000">
+                <a:alpha val="34900"/>
+              </a:srgbClr>
+            </a:outerShdw>
+          </a:effectLst>
+        </p:spPr>
+        <p:txBody>
+          <a:bodyPr anchorCtr="0" anchor="ctr" bIns="45700" lIns="91425" spcFirstLastPara="1" rIns="91425" wrap="square" tIns="45700">
+            <a:noAutofit/>
+          </a:bodyPr>
+          <a:lstStyle/>
+          <a:p>
+            <a:pPr indent="0" lvl="0" marL="0" marR="0" rtl="0" algn="ctr">
+              <a:spcBef>
+                <a:spcPts val="0"/>
+              </a:spcBef>
+              <a:spcAft>
+                <a:spcPts val="0"/>
+              </a:spcAft>
+              <a:buNone/>
+            </a:pPr>
+            <a:r>
+              <a:t/>
+            </a:r>
+            <a:endParaRPr b="0" i="0" sz="1800" u="none" cap="none" strike="noStrike">
+              <a:solidFill>
+                <a:schemeClr val="dk1"/>
+              </a:solidFill>
+              <a:latin typeface="Calibri"/>
+              <a:ea typeface="Calibri"/>
+              <a:cs typeface="Calibri"/>
+              <a:sym typeface="Calibri"/>
+            </a:endParaRPr>
+          </a:p>
+        </p:txBody>
+      </p:sp>
+      <p:sp>
+        <p:nvSpPr>
+          <p:cNvPr id="157" name="Google Shape;157;p18"/>
+          <p:cNvSpPr/>
+          <p:nvPr/>
+        </p:nvSpPr>
+        <p:spPr>
+          <a:xfrm>
+            <a:off x="411480" y="393192"/>
+            <a:ext cx="73200" cy="429900"/>
+          </a:xfrm>
+          <a:prstGeom prst="rect">
+            <a:avLst/>
+          </a:prstGeom>
+          <a:solidFill>
+            <a:srgbClr val="F08443"/>
+          </a:solidFill>
+          <a:ln>
+            <a:noFill/>
+          </a:ln>
+          <a:effectLst>
+            <a:outerShdw blurRad="40000" rotWithShape="0" dir="5400000" dist="23000">
+              <a:srgbClr val="000000">
+                <a:alpha val="34900"/>
+              </a:srgbClr>
+            </a:outerShdw>
+          </a:effectLst>
+        </p:spPr>
+        <p:txBody>
+          <a:bodyPr anchorCtr="0" anchor="ctr" bIns="45700" lIns="91425" spcFirstLastPara="1" rIns="91425" wrap="square" tIns="45700">
+            <a:noAutofit/>
+          </a:bodyPr>
+          <a:lstStyle/>
+          <a:p>
+            <a:pPr indent="0" lvl="0" marL="0" marR="0" rtl="0" algn="ctr">
+              <a:spcBef>
+                <a:spcPts val="0"/>
+              </a:spcBef>
+              <a:spcAft>
+                <a:spcPts val="0"/>
+              </a:spcAft>
+              <a:buNone/>
+            </a:pPr>
+            <a:r>
+              <a:t/>
+            </a:r>
+            <a:endParaRPr b="0" i="0" sz="1800" u="none" cap="none" strike="noStrike">
+              <a:solidFill>
+                <a:schemeClr val="dk1"/>
+              </a:solidFill>
+              <a:latin typeface="Calibri"/>
+              <a:ea typeface="Calibri"/>
+              <a:cs typeface="Calibri"/>
+              <a:sym typeface="Calibri"/>
+            </a:endParaRPr>
+          </a:p>
+        </p:txBody>
+      </p:sp>
+      <p:sp>
+        <p:nvSpPr>
+          <p:cNvPr id="158" name="Google Shape;158;p18"/>
+          <p:cNvSpPr txBox="1"/>
+          <p:nvPr/>
+        </p:nvSpPr>
+        <p:spPr>
+          <a:xfrm>
+            <a:off x="612648" y="411480"/>
+            <a:ext cx="7315200" cy="169200"/>
+          </a:xfrm>
+          <a:prstGeom prst="rect">
+            <a:avLst/>
+          </a:prstGeom>
+          <a:noFill/>
+          <a:ln>
+            <a:noFill/>
+          </a:ln>
+        </p:spPr>
+        <p:txBody>
+          <a:bodyPr anchorCtr="0" anchor="t" bIns="0" lIns="0" spcFirstLastPara="1" rIns="0" wrap="square" tIns="0">
+            <a:spAutoFit/>
+          </a:bodyPr>
+          <a:lstStyle/>
+          <a:p>
+            <a:pPr indent="0" lvl="0" marL="0" marR="0" rtl="0" algn="l">
+              <a:spcBef>
+                <a:spcPts val="0"/>
+              </a:spcBef>
+              <a:spcAft>
+                <a:spcPts val="0"/>
+              </a:spcAft>
+              <a:buNone/>
+            </a:pPr>
+            <a:r>
+              <a:rPr b="1" i="0" lang="en-US" sz="1100" u="none" cap="none" strike="noStrike">
+                <a:solidFill>
+                  <a:srgbClr val="BDC8D6"/>
+                </a:solidFill>
+                <a:latin typeface="Arial"/>
+                <a:ea typeface="Arial"/>
+                <a:cs typeface="Arial"/>
+                <a:sym typeface="Arial"/>
+              </a:rPr>
+              <a:t>CEP146  /  SOFTWARE DEVELOPMENT CURRENT EVENT</a:t>
+            </a:r>
+            <a:endParaRPr/>
+          </a:p>
+        </p:txBody>
+      </p:sp>
+      <p:sp>
+        <p:nvSpPr>
+          <p:cNvPr id="159" name="Google Shape;159;p18"/>
+          <p:cNvSpPr txBox="1"/>
+          <p:nvPr/>
+        </p:nvSpPr>
+        <p:spPr>
+          <a:xfrm>
+            <a:off x="621792" y="978408"/>
+            <a:ext cx="10972800" cy="477300"/>
+          </a:xfrm>
+          <a:prstGeom prst="rect">
+            <a:avLst/>
+          </a:prstGeom>
+          <a:noFill/>
+          <a:ln>
+            <a:noFill/>
+          </a:ln>
+        </p:spPr>
+        <p:txBody>
+          <a:bodyPr anchorCtr="0" anchor="t" bIns="0" lIns="0" spcFirstLastPara="1" rIns="0" wrap="square" tIns="0">
+            <a:spAutoFit/>
+          </a:bodyPr>
+          <a:lstStyle/>
+          <a:p>
+            <a:pPr indent="0" lvl="0" marL="0" marR="0" rtl="0" algn="l">
+              <a:spcBef>
+                <a:spcPts val="0"/>
+              </a:spcBef>
+              <a:spcAft>
+                <a:spcPts val="0"/>
+              </a:spcAft>
+              <a:buNone/>
+            </a:pPr>
+            <a:r>
+              <a:rPr b="1" lang="en-US" sz="3100">
+                <a:solidFill>
+                  <a:srgbClr val="F6F7FA"/>
+                </a:solidFill>
+              </a:rPr>
+              <a:t>Why Memory </a:t>
+            </a:r>
+            <a:r>
+              <a:rPr b="1" lang="en-US" sz="3100">
+                <a:solidFill>
+                  <a:srgbClr val="F6F7FA"/>
+                </a:solidFill>
+              </a:rPr>
+              <a:t>Safety</a:t>
+            </a:r>
+            <a:r>
+              <a:rPr b="1" lang="en-US" sz="3100">
+                <a:solidFill>
+                  <a:srgbClr val="F6F7FA"/>
+                </a:solidFill>
+              </a:rPr>
+              <a:t> Matters</a:t>
+            </a:r>
+            <a:endParaRPr/>
+          </a:p>
+        </p:txBody>
+      </p:sp>
+      <p:sp>
+        <p:nvSpPr>
+          <p:cNvPr id="160" name="Google Shape;160;p18"/>
+          <p:cNvSpPr txBox="1"/>
+          <p:nvPr/>
+        </p:nvSpPr>
+        <p:spPr>
+          <a:xfrm>
+            <a:off x="9875520" y="6446520"/>
+            <a:ext cx="1828800" cy="138600"/>
+          </a:xfrm>
+          <a:prstGeom prst="rect">
+            <a:avLst/>
+          </a:prstGeom>
+          <a:noFill/>
+          <a:ln>
+            <a:noFill/>
+          </a:ln>
+        </p:spPr>
+        <p:txBody>
+          <a:bodyPr anchorCtr="0" anchor="t" bIns="0" lIns="0" spcFirstLastPara="1" rIns="0" wrap="square" tIns="0">
+            <a:spAutoFit/>
+          </a:bodyPr>
+          <a:lstStyle/>
+          <a:p>
+            <a:pPr indent="0" lvl="0" marL="0" marR="0" rtl="0" algn="l">
+              <a:spcBef>
+                <a:spcPts val="0"/>
+              </a:spcBef>
+              <a:spcAft>
+                <a:spcPts val="0"/>
+              </a:spcAft>
+              <a:buNone/>
+            </a:pPr>
+            <a:r>
+              <a:rPr b="0" i="0" lang="en-US" sz="900" u="none" cap="none" strike="noStrike">
+                <a:solidFill>
+                  <a:srgbClr val="BDC8D6"/>
+                </a:solidFill>
+                <a:latin typeface="Arial"/>
+                <a:ea typeface="Arial"/>
+                <a:cs typeface="Arial"/>
+                <a:sym typeface="Arial"/>
+              </a:rPr>
+              <a:t>02  /  RUST IN 2026</a:t>
+            </a:r>
+            <a:endParaRPr/>
+          </a:p>
+        </p:txBody>
+      </p:sp>
+      <p:sp>
+        <p:nvSpPr>
+          <p:cNvPr id="161" name="Google Shape;161;p18"/>
+          <p:cNvSpPr/>
+          <p:nvPr/>
+        </p:nvSpPr>
+        <p:spPr>
+          <a:xfrm>
+            <a:off x="758952" y="2176272"/>
+            <a:ext cx="100500" cy="100500"/>
+          </a:xfrm>
+          <a:prstGeom prst="rect">
+            <a:avLst/>
+          </a:prstGeom>
+          <a:solidFill>
+            <a:srgbClr val="F08443"/>
+          </a:solidFill>
+          <a:ln>
+            <a:noFill/>
+          </a:ln>
+          <a:effectLst>
+            <a:outerShdw blurRad="40000" rotWithShape="0" dir="5400000" dist="23000">
+              <a:srgbClr val="000000">
+                <a:alpha val="34900"/>
+              </a:srgbClr>
+            </a:outerShdw>
+          </a:effectLst>
+        </p:spPr>
+        <p:txBody>
+          <a:bodyPr anchorCtr="0" anchor="ctr" bIns="45700" lIns="91425" spcFirstLastPara="1" rIns="91425" wrap="square" tIns="45700">
+            <a:noAutofit/>
+          </a:bodyPr>
+          <a:lstStyle/>
+          <a:p>
+            <a:pPr indent="0" lvl="0" marL="0" marR="0" rtl="0" algn="ctr">
+              <a:spcBef>
+                <a:spcPts val="0"/>
+              </a:spcBef>
+              <a:spcAft>
+                <a:spcPts val="0"/>
+              </a:spcAft>
+              <a:buNone/>
+            </a:pPr>
+            <a:r>
+              <a:t/>
+            </a:r>
+            <a:endParaRPr b="0" i="0" sz="1800" u="none" cap="none" strike="noStrike">
+              <a:solidFill>
+                <a:schemeClr val="dk1"/>
+              </a:solidFill>
+              <a:latin typeface="Calibri"/>
+              <a:ea typeface="Calibri"/>
+              <a:cs typeface="Calibri"/>
+              <a:sym typeface="Calibri"/>
+            </a:endParaRPr>
+          </a:p>
+        </p:txBody>
+      </p:sp>
+      <p:sp>
+        <p:nvSpPr>
+          <p:cNvPr id="162" name="Google Shape;162;p18"/>
+          <p:cNvSpPr txBox="1"/>
+          <p:nvPr/>
+        </p:nvSpPr>
+        <p:spPr>
+          <a:xfrm>
+            <a:off x="1042415" y="2057181"/>
+            <a:ext cx="10241400" cy="338700"/>
+          </a:xfrm>
+          <a:prstGeom prst="rect">
+            <a:avLst/>
+          </a:prstGeom>
+          <a:noFill/>
+          <a:ln>
+            <a:noFill/>
+          </a:ln>
+        </p:spPr>
+        <p:txBody>
+          <a:bodyPr anchorCtr="0" anchor="t" bIns="0" lIns="0" spcFirstLastPara="1" rIns="0" wrap="square" tIns="0">
+            <a:spAutoFit/>
+          </a:bodyPr>
+          <a:lstStyle/>
+          <a:p>
+            <a:pPr indent="0" lvl="0" marL="0" marR="0" rtl="0" algn="l">
+              <a:spcBef>
+                <a:spcPts val="0"/>
+              </a:spcBef>
+              <a:spcAft>
+                <a:spcPts val="0"/>
+              </a:spcAft>
+              <a:buNone/>
+            </a:pPr>
+            <a:r>
+              <a:rPr lang="en-US" sz="2200">
+                <a:solidFill>
+                  <a:srgbClr val="F6F7FA"/>
+                </a:solidFill>
+              </a:rPr>
+              <a:t>A program should only touch memory its allowed to.</a:t>
+            </a:r>
+            <a:endParaRPr/>
+          </a:p>
+        </p:txBody>
+      </p:sp>
+      <p:sp>
+        <p:nvSpPr>
+          <p:cNvPr id="163" name="Google Shape;163;p18"/>
+          <p:cNvSpPr txBox="1"/>
+          <p:nvPr/>
+        </p:nvSpPr>
+        <p:spPr>
+          <a:xfrm>
+            <a:off x="758947" y="5922470"/>
+            <a:ext cx="10058400" cy="261600"/>
+          </a:xfrm>
+          <a:prstGeom prst="rect">
+            <a:avLst/>
+          </a:prstGeom>
+          <a:noFill/>
+          <a:ln>
+            <a:noFill/>
+          </a:ln>
+        </p:spPr>
+        <p:txBody>
+          <a:bodyPr anchorCtr="0" anchor="t" bIns="0" lIns="0" spcFirstLastPara="1" rIns="0" wrap="square" tIns="0">
+            <a:spAutoFit/>
+          </a:bodyPr>
+          <a:lstStyle/>
+          <a:p>
+            <a:pPr indent="0" lvl="0" marL="0" marR="0" rtl="0" algn="l">
+              <a:spcBef>
+                <a:spcPts val="0"/>
+              </a:spcBef>
+              <a:spcAft>
+                <a:spcPts val="0"/>
+              </a:spcAft>
+              <a:buNone/>
+            </a:pPr>
+            <a:r>
+              <a:rPr lang="en-US" sz="1700">
+                <a:solidFill>
+                  <a:srgbClr val="F08443"/>
+                </a:solidFill>
+              </a:rPr>
+              <a:t>“Memory-</a:t>
+            </a:r>
+            <a:r>
+              <a:rPr lang="en-US" sz="1700">
+                <a:solidFill>
+                  <a:srgbClr val="F08443"/>
+                </a:solidFill>
+              </a:rPr>
+              <a:t>safety</a:t>
+            </a:r>
+            <a:r>
+              <a:rPr lang="en-US" sz="1700">
+                <a:solidFill>
+                  <a:srgbClr val="F08443"/>
+                </a:solidFill>
+              </a:rPr>
+              <a:t> bugs causes most security vulnerabilities (CVEs)” (Roy, 2024)</a:t>
+            </a:r>
+            <a:endParaRPr/>
+          </a:p>
+        </p:txBody>
+      </p:sp>
+      <p:sp>
+        <p:nvSpPr>
+          <p:cNvPr id="164" name="Google Shape;164;p18"/>
+          <p:cNvSpPr txBox="1"/>
+          <p:nvPr/>
+        </p:nvSpPr>
+        <p:spPr>
+          <a:xfrm>
+            <a:off x="859440" y="1587093"/>
+            <a:ext cx="10241400" cy="338700"/>
+          </a:xfrm>
+          <a:prstGeom prst="rect">
+            <a:avLst/>
+          </a:prstGeom>
+          <a:noFill/>
+          <a:ln>
+            <a:noFill/>
+          </a:ln>
+        </p:spPr>
+        <p:txBody>
+          <a:bodyPr anchorCtr="0" anchor="t" bIns="0" lIns="0" spcFirstLastPara="1" rIns="0" wrap="square" tIns="0">
+            <a:spAutoFit/>
+          </a:bodyPr>
+          <a:lstStyle/>
+          <a:p>
+            <a:pPr indent="0" lvl="0" marL="0" marR="0" rtl="0" algn="l">
+              <a:spcBef>
+                <a:spcPts val="0"/>
+              </a:spcBef>
+              <a:spcAft>
+                <a:spcPts val="0"/>
+              </a:spcAft>
+              <a:buNone/>
+            </a:pPr>
+            <a:r>
+              <a:rPr i="1" lang="en-US" sz="2200">
+                <a:solidFill>
+                  <a:srgbClr val="F6F7FA"/>
+                </a:solidFill>
+              </a:rPr>
+              <a:t>What Happens When Memory </a:t>
+            </a:r>
+            <a:r>
+              <a:rPr i="1" lang="en-US" sz="2200">
+                <a:solidFill>
+                  <a:srgbClr val="F6F7FA"/>
+                </a:solidFill>
+              </a:rPr>
+              <a:t>Safety</a:t>
+            </a:r>
+            <a:r>
+              <a:rPr i="1" lang="en-US" sz="2200">
+                <a:solidFill>
+                  <a:srgbClr val="F6F7FA"/>
+                </a:solidFill>
+              </a:rPr>
+              <a:t> Breaks</a:t>
+            </a:r>
+            <a:endParaRPr i="1"/>
+          </a:p>
+        </p:txBody>
+      </p:sp>
+      <p:pic>
+        <p:nvPicPr>
+          <p:cNvPr id="165" name="Google Shape;165;p18"/>
+          <p:cNvPicPr preferRelativeResize="0"/>
+          <p:nvPr/>
+        </p:nvPicPr>
+        <p:blipFill>
+          <a:blip r:embed="rId3">
+            <a:alphaModFix/>
+          </a:blip>
+          <a:stretch>
+            <a:fillRect/>
+          </a:stretch>
+        </p:blipFill>
+        <p:spPr>
+          <a:xfrm>
+            <a:off x="2428611" y="2626048"/>
+            <a:ext cx="6810540" cy="2904499"/>
+          </a:xfrm>
+          <a:prstGeom prst="rect">
+            <a:avLst/>
+          </a:prstGeom>
+          <a:solidFill>
+            <a:srgbClr val="111B2B"/>
+          </a:solidFill>
+          <a:ln>
+            <a:noFill/>
+          </a:ln>
+          <a:effectLst>
+            <a:outerShdw blurRad="40000" rotWithShape="0" dir="5400000" dist="23000">
+              <a:srgbClr val="000000">
+                <a:alpha val="34900"/>
+              </a:srgbClr>
+            </a:outerShdw>
+          </a:effectLst>
+        </p:spPr>
+      </p:pic>
+    </p:spTree>
+  </p:cSld>
+  <p:clrMapOvr>
+    <a:masterClrMapping/>
+  </p:clrMapOvr>
+</p:sld>
+</file>
+
+<file path=ppt/slides/slide7.xml><?xml version="1.0" encoding="utf-8"?>
+<p:sld xmlns:a="http://schemas.openxmlformats.org/drawingml/2006/main" xmlns:r="http://schemas.openxmlformats.org/officeDocument/2006/relationships" xmlns:mc="http://schemas.openxmlformats.org/markup-compatibility/2006" xmlns:mv="urn:schemas-microsoft-com:mac:vml" xmlns:p="http://schemas.openxmlformats.org/presentationml/2006/main" xmlns:c="http://schemas.openxmlformats.org/drawingml/2006/chart" xmlns:dgm="http://schemas.openxmlformats.org/drawingml/2006/diagram" xmlns:o="urn:schemas-microsoft-com:office:office" xmlns:v="urn:schemas-microsoft-com:vml" xmlns:pvml="urn:schemas-microsoft-com:office:powerpoint" xmlns:com="http://schemas.openxmlformats.org/drawingml/2006/compatibility" xmlns:p14="http://schemas.microsoft.com/office/powerpoint/2010/main" xmlns:p15="http://schemas.microsoft.com/office/powerpoint/2012/main" xmlns:ahyp="http://schemas.microsoft.com/office/drawing/2018/hyperlinkcolor">
+  <p:cSld>
+    <p:spTree>
+      <p:nvGrpSpPr>
+        <p:cNvPr id="169" name="Shape 169"/>
+        <p:cNvGrpSpPr/>
+        <p:nvPr/>
+      </p:nvGrpSpPr>
+      <p:grpSpPr>
+        <a:xfrm>
+          <a:off x="0" y="0"/>
+          <a:ext cx="0" cy="0"/>
+          <a:chOff x="0" y="0"/>
+          <a:chExt cx="0" cy="0"/>
+        </a:xfrm>
+      </p:grpSpPr>
+      <p:sp>
+        <p:nvSpPr>
+          <p:cNvPr id="170" name="Google Shape;170;p19"/>
+          <p:cNvSpPr/>
+          <p:nvPr/>
+        </p:nvSpPr>
+        <p:spPr>
+          <a:xfrm>
+            <a:off x="0" y="0"/>
+            <a:ext cx="12191700" cy="6858000"/>
+          </a:xfrm>
+          <a:prstGeom prst="rect">
+            <a:avLst/>
+          </a:prstGeom>
+          <a:solidFill>
+            <a:srgbClr val="111B2B"/>
+          </a:solidFill>
+          <a:ln>
+            <a:noFill/>
+          </a:ln>
+          <a:effectLst>
+            <a:outerShdw blurRad="40000" rotWithShape="0" dir="5400000" dist="23000">
+              <a:srgbClr val="000000">
+                <a:alpha val="34900"/>
+              </a:srgbClr>
+            </a:outerShdw>
+          </a:effectLst>
+        </p:spPr>
+        <p:txBody>
+          <a:bodyPr anchorCtr="0" anchor="ctr" bIns="45700" lIns="91425" spcFirstLastPara="1" rIns="91425" wrap="square" tIns="45700">
+            <a:noAutofit/>
+          </a:bodyPr>
+          <a:lstStyle/>
+          <a:p>
+            <a:pPr indent="0" lvl="0" marL="0" marR="0" rtl="0" algn="ctr">
+              <a:spcBef>
+                <a:spcPts val="0"/>
+              </a:spcBef>
+              <a:spcAft>
+                <a:spcPts val="0"/>
+              </a:spcAft>
+              <a:buNone/>
+            </a:pPr>
+            <a:r>
+              <a:t/>
+            </a:r>
+            <a:endParaRPr b="0" i="0" sz="1800" u="none" cap="none" strike="noStrike">
+              <a:solidFill>
+                <a:schemeClr val="dk1"/>
+              </a:solidFill>
+              <a:latin typeface="Calibri"/>
+              <a:ea typeface="Calibri"/>
+              <a:cs typeface="Calibri"/>
+              <a:sym typeface="Calibri"/>
+            </a:endParaRPr>
+          </a:p>
+        </p:txBody>
+      </p:sp>
+      <p:sp>
+        <p:nvSpPr>
+          <p:cNvPr id="171" name="Google Shape;171;p19"/>
+          <p:cNvSpPr/>
+          <p:nvPr/>
+        </p:nvSpPr>
+        <p:spPr>
+          <a:xfrm>
+            <a:off x="411480" y="393192"/>
+            <a:ext cx="73200" cy="429900"/>
+          </a:xfrm>
+          <a:prstGeom prst="rect">
+            <a:avLst/>
+          </a:prstGeom>
+          <a:solidFill>
+            <a:srgbClr val="F08443"/>
+          </a:solidFill>
+          <a:ln>
+            <a:noFill/>
+          </a:ln>
+          <a:effectLst>
+            <a:outerShdw blurRad="40000" rotWithShape="0" dir="5400000" dist="23000">
+              <a:srgbClr val="000000">
+                <a:alpha val="34900"/>
+              </a:srgbClr>
+            </a:outerShdw>
+          </a:effectLst>
+        </p:spPr>
+        <p:txBody>
+          <a:bodyPr anchorCtr="0" anchor="ctr" bIns="45700" lIns="91425" spcFirstLastPara="1" rIns="91425" wrap="square" tIns="45700">
+            <a:noAutofit/>
+          </a:bodyPr>
+          <a:lstStyle/>
+          <a:p>
+            <a:pPr indent="0" lvl="0" marL="0" marR="0" rtl="0" algn="ctr">
+              <a:spcBef>
+                <a:spcPts val="0"/>
+              </a:spcBef>
+              <a:spcAft>
+                <a:spcPts val="0"/>
+              </a:spcAft>
+              <a:buNone/>
+            </a:pPr>
+            <a:r>
+              <a:t/>
+            </a:r>
+            <a:endParaRPr b="0" i="0" sz="1800" u="none" cap="none" strike="noStrike">
+              <a:solidFill>
+                <a:schemeClr val="dk1"/>
+              </a:solidFill>
+              <a:latin typeface="Calibri"/>
+              <a:ea typeface="Calibri"/>
+              <a:cs typeface="Calibri"/>
+              <a:sym typeface="Calibri"/>
+            </a:endParaRPr>
+          </a:p>
+        </p:txBody>
+      </p:sp>
+      <p:sp>
+        <p:nvSpPr>
+          <p:cNvPr id="172" name="Google Shape;172;p19"/>
+          <p:cNvSpPr txBox="1"/>
+          <p:nvPr/>
+        </p:nvSpPr>
+        <p:spPr>
+          <a:xfrm>
+            <a:off x="612648" y="411480"/>
+            <a:ext cx="7315200" cy="169200"/>
+          </a:xfrm>
+          <a:prstGeom prst="rect">
+            <a:avLst/>
+          </a:prstGeom>
+          <a:noFill/>
+          <a:ln>
+            <a:noFill/>
+          </a:ln>
+        </p:spPr>
+        <p:txBody>
+          <a:bodyPr anchorCtr="0" anchor="t" bIns="0" lIns="0" spcFirstLastPara="1" rIns="0" wrap="square" tIns="0">
+            <a:spAutoFit/>
+          </a:bodyPr>
+          <a:lstStyle/>
+          <a:p>
+            <a:pPr indent="0" lvl="0" marL="0" marR="0" rtl="0" algn="l">
+              <a:spcBef>
+                <a:spcPts val="0"/>
+              </a:spcBef>
+              <a:spcAft>
+                <a:spcPts val="0"/>
+              </a:spcAft>
+              <a:buNone/>
+            </a:pPr>
+            <a:r>
+              <a:rPr b="1" i="0" lang="en-US" sz="1100" u="none" cap="none" strike="noStrike">
+                <a:solidFill>
+                  <a:srgbClr val="BDC8D6"/>
+                </a:solidFill>
+                <a:latin typeface="Arial"/>
+                <a:ea typeface="Arial"/>
+                <a:cs typeface="Arial"/>
+                <a:sym typeface="Arial"/>
+              </a:rPr>
+              <a:t>CEP146  /  SOFTWARE DEVELOPMENT CURRENT EVENT</a:t>
+            </a:r>
+            <a:endParaRPr/>
+          </a:p>
+        </p:txBody>
+      </p:sp>
+      <p:sp>
+        <p:nvSpPr>
+          <p:cNvPr id="173" name="Google Shape;173;p19"/>
+          <p:cNvSpPr txBox="1"/>
+          <p:nvPr/>
+        </p:nvSpPr>
+        <p:spPr>
+          <a:xfrm>
+            <a:off x="621792" y="978408"/>
+            <a:ext cx="10972800" cy="477300"/>
+          </a:xfrm>
+          <a:prstGeom prst="rect">
+            <a:avLst/>
+          </a:prstGeom>
+          <a:noFill/>
+          <a:ln>
+            <a:noFill/>
+          </a:ln>
+        </p:spPr>
+        <p:txBody>
+          <a:bodyPr anchorCtr="0" anchor="t" bIns="0" lIns="0" spcFirstLastPara="1" rIns="0" wrap="square" tIns="0">
+            <a:spAutoFit/>
+          </a:bodyPr>
+          <a:lstStyle/>
+          <a:p>
+            <a:pPr indent="0" lvl="0" marL="0" marR="0" rtl="0" algn="l">
+              <a:spcBef>
+                <a:spcPts val="0"/>
+              </a:spcBef>
+              <a:spcAft>
+                <a:spcPts val="0"/>
+              </a:spcAft>
+              <a:buNone/>
+            </a:pPr>
+            <a:r>
+              <a:rPr b="1" lang="en-US" sz="3100">
+                <a:solidFill>
+                  <a:srgbClr val="F6F7FA"/>
+                </a:solidFill>
+              </a:rPr>
+              <a:t>Ownership: 3 Simple Rules</a:t>
+            </a:r>
+            <a:endParaRPr/>
+          </a:p>
+        </p:txBody>
+      </p:sp>
+      <p:sp>
+        <p:nvSpPr>
+          <p:cNvPr id="174" name="Google Shape;174;p19"/>
+          <p:cNvSpPr txBox="1"/>
+          <p:nvPr/>
+        </p:nvSpPr>
+        <p:spPr>
+          <a:xfrm>
+            <a:off x="9875520" y="6446520"/>
+            <a:ext cx="1828800" cy="138600"/>
+          </a:xfrm>
+          <a:prstGeom prst="rect">
+            <a:avLst/>
+          </a:prstGeom>
+          <a:noFill/>
+          <a:ln>
+            <a:noFill/>
+          </a:ln>
+        </p:spPr>
+        <p:txBody>
+          <a:bodyPr anchorCtr="0" anchor="t" bIns="0" lIns="0" spcFirstLastPara="1" rIns="0" wrap="square" tIns="0">
+            <a:spAutoFit/>
+          </a:bodyPr>
+          <a:lstStyle/>
+          <a:p>
+            <a:pPr indent="0" lvl="0" marL="0" marR="0" rtl="0" algn="l">
+              <a:spcBef>
+                <a:spcPts val="0"/>
+              </a:spcBef>
+              <a:spcAft>
+                <a:spcPts val="0"/>
+              </a:spcAft>
+              <a:buNone/>
+            </a:pPr>
+            <a:r>
+              <a:rPr b="0" i="0" lang="en-US" sz="900" u="none" cap="none" strike="noStrike">
+                <a:solidFill>
+                  <a:srgbClr val="BDC8D6"/>
+                </a:solidFill>
+                <a:latin typeface="Arial"/>
+                <a:ea typeface="Arial"/>
+                <a:cs typeface="Arial"/>
+                <a:sym typeface="Arial"/>
+              </a:rPr>
+              <a:t>03  /  RUST IN 2026</a:t>
+            </a:r>
+            <a:endParaRPr/>
+          </a:p>
+        </p:txBody>
+      </p:sp>
+      <p:sp>
+        <p:nvSpPr>
+          <p:cNvPr id="175" name="Google Shape;175;p19"/>
+          <p:cNvSpPr txBox="1"/>
+          <p:nvPr/>
+        </p:nvSpPr>
+        <p:spPr>
+          <a:xfrm>
+            <a:off x="1051560" y="2039112"/>
+            <a:ext cx="1828800" cy="400200"/>
+          </a:xfrm>
+          <a:prstGeom prst="rect">
+            <a:avLst/>
+          </a:prstGeom>
+          <a:noFill/>
+          <a:ln>
+            <a:noFill/>
+          </a:ln>
+        </p:spPr>
+        <p:txBody>
+          <a:bodyPr anchorCtr="0" anchor="t" bIns="0" lIns="0" spcFirstLastPara="1" rIns="0" wrap="square" tIns="0">
+            <a:spAutoFit/>
+          </a:bodyPr>
+          <a:lstStyle/>
+          <a:p>
+            <a:pPr indent="0" lvl="0" marL="0" marR="0" rtl="0" algn="l">
+              <a:spcBef>
+                <a:spcPts val="0"/>
+              </a:spcBef>
+              <a:spcAft>
+                <a:spcPts val="0"/>
+              </a:spcAft>
+              <a:buNone/>
+            </a:pPr>
+            <a:r>
+              <a:rPr b="1" lang="en-US" sz="2600">
+                <a:solidFill>
+                  <a:srgbClr val="F08443"/>
+                </a:solidFill>
+              </a:rPr>
+              <a:t>1.</a:t>
+            </a:r>
+            <a:endParaRPr/>
+          </a:p>
+        </p:txBody>
+      </p:sp>
+      <p:sp>
+        <p:nvSpPr>
+          <p:cNvPr id="176" name="Google Shape;176;p19"/>
+          <p:cNvSpPr txBox="1"/>
+          <p:nvPr/>
+        </p:nvSpPr>
+        <p:spPr>
+          <a:xfrm>
+            <a:off x="2880360" y="2011680"/>
+            <a:ext cx="8229600" cy="323100"/>
+          </a:xfrm>
+          <a:prstGeom prst="rect">
+            <a:avLst/>
+          </a:prstGeom>
+          <a:noFill/>
+          <a:ln>
+            <a:noFill/>
+          </a:ln>
+        </p:spPr>
+        <p:txBody>
+          <a:bodyPr anchorCtr="0" anchor="t" bIns="0" lIns="0" spcFirstLastPara="1" rIns="0" wrap="square" tIns="0">
+            <a:spAutoFit/>
+          </a:bodyPr>
+          <a:lstStyle/>
+          <a:p>
+            <a:pPr indent="0" lvl="0" marL="0" marR="0" rtl="0" algn="l">
+              <a:spcBef>
+                <a:spcPts val="0"/>
+              </a:spcBef>
+              <a:spcAft>
+                <a:spcPts val="0"/>
+              </a:spcAft>
+              <a:buNone/>
+            </a:pPr>
+            <a:r>
+              <a:rPr lang="en-US" sz="2100">
+                <a:solidFill>
+                  <a:srgbClr val="F6F7FA"/>
+                </a:solidFill>
+              </a:rPr>
+              <a:t>Every value has an </a:t>
+            </a:r>
+            <a:r>
+              <a:rPr b="1" lang="en-US" sz="2100">
+                <a:solidFill>
+                  <a:srgbClr val="F6F7FA"/>
+                </a:solidFill>
+              </a:rPr>
+              <a:t>owner</a:t>
+            </a:r>
+            <a:endParaRPr/>
+          </a:p>
+        </p:txBody>
+      </p:sp>
+      <p:sp>
+        <p:nvSpPr>
+          <p:cNvPr id="177" name="Google Shape;177;p19"/>
+          <p:cNvSpPr/>
+          <p:nvPr/>
+        </p:nvSpPr>
+        <p:spPr>
+          <a:xfrm>
+            <a:off x="1060704" y="2926080"/>
+            <a:ext cx="10058400" cy="22800"/>
+          </a:xfrm>
+          <a:prstGeom prst="rect">
+            <a:avLst/>
+          </a:prstGeom>
+          <a:solidFill>
+            <a:srgbClr val="BDC8D6"/>
+          </a:solidFill>
+          <a:ln>
+            <a:noFill/>
+          </a:ln>
+          <a:effectLst>
+            <a:outerShdw blurRad="40000" rotWithShape="0" dir="5400000" dist="23000">
+              <a:srgbClr val="000000">
+                <a:alpha val="34900"/>
+              </a:srgbClr>
+            </a:outerShdw>
+          </a:effectLst>
+        </p:spPr>
+        <p:txBody>
+          <a:bodyPr anchorCtr="0" anchor="ctr" bIns="45700" lIns="91425" spcFirstLastPara="1" rIns="91425" wrap="square" tIns="45700">
+            <a:noAutofit/>
+          </a:bodyPr>
+          <a:lstStyle/>
+          <a:p>
+            <a:pPr indent="0" lvl="0" marL="0" marR="0" rtl="0" algn="ctr">
+              <a:spcBef>
+                <a:spcPts val="0"/>
+              </a:spcBef>
+              <a:spcAft>
+                <a:spcPts val="0"/>
+              </a:spcAft>
+              <a:buNone/>
+            </a:pPr>
+            <a:r>
+              <a:t/>
+            </a:r>
+            <a:endParaRPr b="0" i="0" sz="1800" u="none" cap="none" strike="noStrike">
+              <a:solidFill>
+                <a:schemeClr val="dk1"/>
+              </a:solidFill>
+              <a:latin typeface="Calibri"/>
+              <a:ea typeface="Calibri"/>
+              <a:cs typeface="Calibri"/>
+              <a:sym typeface="Calibri"/>
+            </a:endParaRPr>
+          </a:p>
+        </p:txBody>
+      </p:sp>
+      <p:sp>
+        <p:nvSpPr>
+          <p:cNvPr id="178" name="Google Shape;178;p19"/>
+          <p:cNvSpPr txBox="1"/>
+          <p:nvPr/>
+        </p:nvSpPr>
+        <p:spPr>
+          <a:xfrm>
+            <a:off x="1051560" y="3328416"/>
+            <a:ext cx="2011800" cy="384900"/>
+          </a:xfrm>
+          <a:prstGeom prst="rect">
+            <a:avLst/>
+          </a:prstGeom>
+          <a:noFill/>
+          <a:ln>
+            <a:noFill/>
+          </a:ln>
+        </p:spPr>
+        <p:txBody>
+          <a:bodyPr anchorCtr="0" anchor="t" bIns="0" lIns="0" spcFirstLastPara="1" rIns="0" wrap="square" tIns="0">
+            <a:spAutoFit/>
+          </a:bodyPr>
+          <a:lstStyle/>
+          <a:p>
+            <a:pPr indent="0" lvl="0" marL="0" marR="0" rtl="0" algn="l">
+              <a:spcBef>
+                <a:spcPts val="0"/>
+              </a:spcBef>
+              <a:spcAft>
+                <a:spcPts val="0"/>
+              </a:spcAft>
+              <a:buNone/>
+            </a:pPr>
+            <a:r>
+              <a:rPr b="1" lang="en-US" sz="2500">
+                <a:solidFill>
+                  <a:srgbClr val="F08443"/>
+                </a:solidFill>
+              </a:rPr>
+              <a:t>2.</a:t>
+            </a:r>
+            <a:endParaRPr/>
+          </a:p>
+        </p:txBody>
+      </p:sp>
+      <p:sp>
+        <p:nvSpPr>
+          <p:cNvPr id="179" name="Google Shape;179;p19"/>
+          <p:cNvSpPr txBox="1"/>
+          <p:nvPr/>
+        </p:nvSpPr>
+        <p:spPr>
+          <a:xfrm>
+            <a:off x="2880360" y="3310128"/>
+            <a:ext cx="8138100" cy="323100"/>
+          </a:xfrm>
+          <a:prstGeom prst="rect">
+            <a:avLst/>
+          </a:prstGeom>
+          <a:noFill/>
+          <a:ln>
+            <a:noFill/>
+          </a:ln>
+        </p:spPr>
+        <p:txBody>
+          <a:bodyPr anchorCtr="0" anchor="t" bIns="0" lIns="0" spcFirstLastPara="1" rIns="0" wrap="square" tIns="0">
+            <a:spAutoFit/>
+          </a:bodyPr>
+          <a:lstStyle/>
+          <a:p>
+            <a:pPr indent="0" lvl="0" marL="0" marR="0" rtl="0" algn="l">
+              <a:spcBef>
+                <a:spcPts val="0"/>
+              </a:spcBef>
+              <a:spcAft>
+                <a:spcPts val="0"/>
+              </a:spcAft>
+              <a:buNone/>
+            </a:pPr>
+            <a:r>
+              <a:rPr lang="en-US" sz="2100">
+                <a:solidFill>
+                  <a:srgbClr val="F6F7FA"/>
+                </a:solidFill>
+              </a:rPr>
+              <a:t>Only </a:t>
+            </a:r>
+            <a:r>
+              <a:rPr b="1" lang="en-US" sz="2100">
+                <a:solidFill>
+                  <a:srgbClr val="F6F7FA"/>
+                </a:solidFill>
+              </a:rPr>
+              <a:t>one owner</a:t>
+            </a:r>
+            <a:r>
+              <a:rPr lang="en-US" sz="2100">
+                <a:solidFill>
+                  <a:srgbClr val="F6F7FA"/>
+                </a:solidFill>
+              </a:rPr>
+              <a:t> at a time</a:t>
+            </a:r>
+            <a:endParaRPr/>
+          </a:p>
+        </p:txBody>
+      </p:sp>
+      <p:sp>
+        <p:nvSpPr>
+          <p:cNvPr id="180" name="Google Shape;180;p19"/>
+          <p:cNvSpPr/>
+          <p:nvPr/>
+        </p:nvSpPr>
+        <p:spPr>
+          <a:xfrm>
+            <a:off x="1060704" y="4343400"/>
+            <a:ext cx="10058400" cy="22800"/>
+          </a:xfrm>
+          <a:prstGeom prst="rect">
+            <a:avLst/>
+          </a:prstGeom>
+          <a:solidFill>
+            <a:srgbClr val="BDC8D6"/>
+          </a:solidFill>
+          <a:ln>
+            <a:noFill/>
+          </a:ln>
+          <a:effectLst>
+            <a:outerShdw blurRad="40000" rotWithShape="0" dir="5400000" dist="23000">
+              <a:srgbClr val="000000">
+                <a:alpha val="34900"/>
+              </a:srgbClr>
+            </a:outerShdw>
+          </a:effectLst>
+        </p:spPr>
+        <p:txBody>
+          <a:bodyPr anchorCtr="0" anchor="ctr" bIns="45700" lIns="91425" spcFirstLastPara="1" rIns="91425" wrap="square" tIns="45700">
+            <a:noAutofit/>
+          </a:bodyPr>
+          <a:lstStyle/>
+          <a:p>
+            <a:pPr indent="0" lvl="0" marL="0" marR="0" rtl="0" algn="ctr">
+              <a:spcBef>
+                <a:spcPts val="0"/>
+              </a:spcBef>
+              <a:spcAft>
+                <a:spcPts val="0"/>
+              </a:spcAft>
+              <a:buNone/>
+            </a:pPr>
+            <a:r>
+              <a:t/>
+            </a:r>
+            <a:endParaRPr b="0" i="0" sz="1800" u="none" cap="none" strike="noStrike">
+              <a:solidFill>
+                <a:schemeClr val="dk1"/>
+              </a:solidFill>
+              <a:latin typeface="Calibri"/>
+              <a:ea typeface="Calibri"/>
+              <a:cs typeface="Calibri"/>
+              <a:sym typeface="Calibri"/>
+            </a:endParaRPr>
+          </a:p>
+        </p:txBody>
+      </p:sp>
+      <p:sp>
+        <p:nvSpPr>
+          <p:cNvPr id="181" name="Google Shape;181;p19"/>
+          <p:cNvSpPr txBox="1"/>
+          <p:nvPr/>
+        </p:nvSpPr>
+        <p:spPr>
+          <a:xfrm>
+            <a:off x="1051560" y="4754880"/>
+            <a:ext cx="1828800" cy="400200"/>
+          </a:xfrm>
+          <a:prstGeom prst="rect">
+            <a:avLst/>
+          </a:prstGeom>
+          <a:noFill/>
+          <a:ln>
+            <a:noFill/>
+          </a:ln>
+        </p:spPr>
+        <p:txBody>
+          <a:bodyPr anchorCtr="0" anchor="t" bIns="0" lIns="0" spcFirstLastPara="1" rIns="0" wrap="square" tIns="0">
+            <a:spAutoFit/>
+          </a:bodyPr>
+          <a:lstStyle/>
+          <a:p>
+            <a:pPr indent="0" lvl="0" marL="0" marR="0" rtl="0" algn="l">
+              <a:spcBef>
+                <a:spcPts val="0"/>
+              </a:spcBef>
+              <a:spcAft>
+                <a:spcPts val="0"/>
+              </a:spcAft>
+              <a:buNone/>
+            </a:pPr>
+            <a:r>
+              <a:rPr b="1" lang="en-US" sz="2600">
+                <a:solidFill>
+                  <a:srgbClr val="F08443"/>
+                </a:solidFill>
+              </a:rPr>
+              <a:t>3.</a:t>
+            </a:r>
+            <a:endParaRPr/>
+          </a:p>
+        </p:txBody>
+      </p:sp>
+      <p:sp>
+        <p:nvSpPr>
+          <p:cNvPr id="182" name="Google Shape;182;p19"/>
+          <p:cNvSpPr txBox="1"/>
+          <p:nvPr/>
+        </p:nvSpPr>
+        <p:spPr>
+          <a:xfrm>
+            <a:off x="2880360" y="4736592"/>
+            <a:ext cx="8229600" cy="323100"/>
+          </a:xfrm>
+          <a:prstGeom prst="rect">
+            <a:avLst/>
+          </a:prstGeom>
+          <a:noFill/>
+          <a:ln>
+            <a:noFill/>
+          </a:ln>
+        </p:spPr>
+        <p:txBody>
+          <a:bodyPr anchorCtr="0" anchor="t" bIns="0" lIns="0" spcFirstLastPara="1" rIns="0" wrap="square" tIns="0">
+            <a:spAutoFit/>
+          </a:bodyPr>
+          <a:lstStyle/>
+          <a:p>
+            <a:pPr indent="0" lvl="0" marL="0" marR="0" rtl="0" algn="l">
+              <a:spcBef>
+                <a:spcPts val="0"/>
+              </a:spcBef>
+              <a:spcAft>
+                <a:spcPts val="0"/>
+              </a:spcAft>
+              <a:buNone/>
+            </a:pPr>
+            <a:r>
+              <a:rPr lang="en-US" sz="2100">
+                <a:solidFill>
+                  <a:srgbClr val="F6F7FA"/>
+                </a:solidFill>
+              </a:rPr>
+              <a:t>When the owner goes </a:t>
+            </a:r>
+            <a:r>
+              <a:rPr b="1" lang="en-US" sz="2100">
+                <a:solidFill>
+                  <a:srgbClr val="F6F7FA"/>
+                </a:solidFill>
+              </a:rPr>
+              <a:t>out of scope</a:t>
+            </a:r>
+            <a:r>
+              <a:rPr lang="en-US" sz="2100">
+                <a:solidFill>
+                  <a:srgbClr val="F6F7FA"/>
+                </a:solidFill>
+              </a:rPr>
+              <a:t>, memory is freed automatically</a:t>
+            </a:r>
+            <a:endParaRPr/>
+          </a:p>
+        </p:txBody>
+      </p:sp>
+    </p:spTree>
+  </p:cSld>
+  <p:clrMapOvr>
+    <a:masterClrMapping/>
+  </p:clrMapOvr>
+</p:sld>
+</file>
+
+<file path=ppt/slides/slide8.xml><?xml version="1.0" encoding="utf-8"?>
+<p:sld xmlns:a="http://schemas.openxmlformats.org/drawingml/2006/main" xmlns:r="http://schemas.openxmlformats.org/officeDocument/2006/relationships" xmlns:mc="http://schemas.openxmlformats.org/markup-compatibility/2006" xmlns:mv="urn:schemas-microsoft-com:mac:vml" xmlns:p="http://schemas.openxmlformats.org/presentationml/2006/main" xmlns:c="http://schemas.openxmlformats.org/drawingml/2006/chart" xmlns:dgm="http://schemas.openxmlformats.org/drawingml/2006/diagram" xmlns:o="urn:schemas-microsoft-com:office:office" xmlns:v="urn:schemas-microsoft-com:vml" xmlns:pvml="urn:schemas-microsoft-com:office:powerpoint" xmlns:com="http://schemas.openxmlformats.org/drawingml/2006/compatibility" xmlns:p14="http://schemas.microsoft.com/office/powerpoint/2010/main" xmlns:p15="http://schemas.microsoft.com/office/powerpoint/2012/main" xmlns:ahyp="http://schemas.microsoft.com/office/drawing/2018/hyperlinkcolor">
+  <p:cSld>
+    <p:spTree>
+      <p:nvGrpSpPr>
+        <p:cNvPr id="186" name="Shape 186"/>
+        <p:cNvGrpSpPr/>
+        <p:nvPr/>
+      </p:nvGrpSpPr>
+      <p:grpSpPr>
+        <a:xfrm>
+          <a:off x="0" y="0"/>
+          <a:ext cx="0" cy="0"/>
+          <a:chOff x="0" y="0"/>
+          <a:chExt cx="0" cy="0"/>
+        </a:xfrm>
+      </p:grpSpPr>
+      <p:sp>
+        <p:nvSpPr>
+          <p:cNvPr id="187" name="Google Shape;187;p20"/>
+          <p:cNvSpPr/>
+          <p:nvPr/>
+        </p:nvSpPr>
+        <p:spPr>
+          <a:xfrm>
+            <a:off x="0" y="0"/>
+            <a:ext cx="12191700" cy="6858000"/>
+          </a:xfrm>
+          <a:prstGeom prst="rect">
+            <a:avLst/>
+          </a:prstGeom>
+          <a:solidFill>
+            <a:srgbClr val="111B2B"/>
+          </a:solidFill>
+          <a:ln>
+            <a:noFill/>
+          </a:ln>
+          <a:effectLst>
+            <a:outerShdw blurRad="40000" rotWithShape="0" dir="5400000" dist="23000">
+              <a:srgbClr val="000000">
+                <a:alpha val="34900"/>
+              </a:srgbClr>
+            </a:outerShdw>
+          </a:effectLst>
+        </p:spPr>
+        <p:txBody>
+          <a:bodyPr anchorCtr="0" anchor="ctr" bIns="45700" lIns="91425" spcFirstLastPara="1" rIns="91425" wrap="square" tIns="45700">
+            <a:noAutofit/>
+          </a:bodyPr>
+          <a:lstStyle/>
+          <a:p>
+            <a:pPr indent="0" lvl="0" marL="0" marR="0" rtl="0" algn="ctr">
+              <a:spcBef>
+                <a:spcPts val="0"/>
+              </a:spcBef>
+              <a:spcAft>
+                <a:spcPts val="0"/>
+              </a:spcAft>
+              <a:buNone/>
+            </a:pPr>
+            <a:r>
+              <a:t/>
+            </a:r>
+            <a:endParaRPr b="0" i="0" sz="1800" u="none" cap="none" strike="noStrike">
+              <a:solidFill>
+                <a:schemeClr val="dk1"/>
+              </a:solidFill>
+              <a:latin typeface="Calibri"/>
+              <a:ea typeface="Calibri"/>
+              <a:cs typeface="Calibri"/>
+              <a:sym typeface="Calibri"/>
+            </a:endParaRPr>
+          </a:p>
+        </p:txBody>
+      </p:sp>
+      <p:sp>
+        <p:nvSpPr>
+          <p:cNvPr id="188" name="Google Shape;188;p20"/>
+          <p:cNvSpPr/>
+          <p:nvPr/>
+        </p:nvSpPr>
+        <p:spPr>
+          <a:xfrm>
+            <a:off x="411480" y="393192"/>
+            <a:ext cx="73200" cy="429900"/>
+          </a:xfrm>
+          <a:prstGeom prst="rect">
+            <a:avLst/>
+          </a:prstGeom>
+          <a:solidFill>
+            <a:srgbClr val="F08443"/>
+          </a:solidFill>
+          <a:ln>
+            <a:noFill/>
+          </a:ln>
+          <a:effectLst>
+            <a:outerShdw blurRad="40000" rotWithShape="0" dir="5400000" dist="23000">
+              <a:srgbClr val="000000">
+                <a:alpha val="34900"/>
+              </a:srgbClr>
+            </a:outerShdw>
+          </a:effectLst>
+        </p:spPr>
+        <p:txBody>
+          <a:bodyPr anchorCtr="0" anchor="ctr" bIns="45700" lIns="91425" spcFirstLastPara="1" rIns="91425" wrap="square" tIns="45700">
+            <a:noAutofit/>
+          </a:bodyPr>
+          <a:lstStyle/>
+          <a:p>
+            <a:pPr indent="0" lvl="0" marL="0" marR="0" rtl="0" algn="ctr">
+              <a:spcBef>
+                <a:spcPts val="0"/>
+              </a:spcBef>
+              <a:spcAft>
+                <a:spcPts val="0"/>
+              </a:spcAft>
+              <a:buNone/>
+            </a:pPr>
+            <a:r>
+              <a:t/>
+            </a:r>
+            <a:endParaRPr b="0" i="0" sz="1800" u="none" cap="none" strike="noStrike">
+              <a:solidFill>
+                <a:schemeClr val="dk1"/>
+              </a:solidFill>
+              <a:latin typeface="Calibri"/>
+              <a:ea typeface="Calibri"/>
+              <a:cs typeface="Calibri"/>
+              <a:sym typeface="Calibri"/>
+            </a:endParaRPr>
+          </a:p>
+        </p:txBody>
+      </p:sp>
+      <p:sp>
+        <p:nvSpPr>
+          <p:cNvPr id="189" name="Google Shape;189;p20"/>
+          <p:cNvSpPr txBox="1"/>
+          <p:nvPr/>
+        </p:nvSpPr>
+        <p:spPr>
+          <a:xfrm>
+            <a:off x="612648" y="411480"/>
+            <a:ext cx="7315200" cy="169200"/>
+          </a:xfrm>
+          <a:prstGeom prst="rect">
+            <a:avLst/>
+          </a:prstGeom>
+          <a:noFill/>
+          <a:ln>
+            <a:noFill/>
+          </a:ln>
+        </p:spPr>
+        <p:txBody>
+          <a:bodyPr anchorCtr="0" anchor="t" bIns="0" lIns="0" spcFirstLastPara="1" rIns="0" wrap="square" tIns="0">
+            <a:spAutoFit/>
+          </a:bodyPr>
+          <a:lstStyle/>
+          <a:p>
+            <a:pPr indent="0" lvl="0" marL="0" marR="0" rtl="0" algn="l">
+              <a:spcBef>
+                <a:spcPts val="0"/>
+              </a:spcBef>
+              <a:spcAft>
+                <a:spcPts val="0"/>
+              </a:spcAft>
+              <a:buNone/>
+            </a:pPr>
+            <a:r>
+              <a:rPr b="1" i="0" lang="en-US" sz="1100" u="none" cap="none" strike="noStrike">
+                <a:solidFill>
+                  <a:srgbClr val="BDC8D6"/>
+                </a:solidFill>
+                <a:latin typeface="Arial"/>
+                <a:ea typeface="Arial"/>
+                <a:cs typeface="Arial"/>
+                <a:sym typeface="Arial"/>
+              </a:rPr>
+              <a:t>CEP146  /  SOFTWARE DEVELOPMENT CURRENT EVENT</a:t>
+            </a:r>
+            <a:endParaRPr/>
+          </a:p>
+        </p:txBody>
+      </p:sp>
+      <p:sp>
+        <p:nvSpPr>
+          <p:cNvPr id="190" name="Google Shape;190;p20"/>
+          <p:cNvSpPr txBox="1"/>
+          <p:nvPr/>
+        </p:nvSpPr>
+        <p:spPr>
+          <a:xfrm>
+            <a:off x="621792" y="978408"/>
+            <a:ext cx="10972800" cy="477300"/>
+          </a:xfrm>
+          <a:prstGeom prst="rect">
+            <a:avLst/>
+          </a:prstGeom>
+          <a:noFill/>
+          <a:ln>
+            <a:noFill/>
+          </a:ln>
+        </p:spPr>
+        <p:txBody>
+          <a:bodyPr anchorCtr="0" anchor="t" bIns="0" lIns="0" spcFirstLastPara="1" rIns="0" wrap="square" tIns="0">
+            <a:spAutoFit/>
+          </a:bodyPr>
+          <a:lstStyle/>
+          <a:p>
+            <a:pPr indent="0" lvl="0" marL="0" marR="0" rtl="0" algn="l">
+              <a:spcBef>
+                <a:spcPts val="0"/>
+              </a:spcBef>
+              <a:spcAft>
+                <a:spcPts val="0"/>
+              </a:spcAft>
+              <a:buNone/>
+            </a:pPr>
+            <a:r>
+              <a:rPr b="1" lang="en-US" sz="3100">
+                <a:solidFill>
+                  <a:srgbClr val="F6F7FA"/>
+                </a:solidFill>
+              </a:rPr>
+              <a:t>The Borrow Checker</a:t>
+            </a:r>
+            <a:endParaRPr/>
+          </a:p>
+        </p:txBody>
+      </p:sp>
+      <p:sp>
+        <p:nvSpPr>
+          <p:cNvPr id="191" name="Google Shape;191;p20"/>
+          <p:cNvSpPr txBox="1"/>
+          <p:nvPr/>
+        </p:nvSpPr>
+        <p:spPr>
+          <a:xfrm>
+            <a:off x="9875520" y="6446520"/>
+            <a:ext cx="1828800" cy="138600"/>
+          </a:xfrm>
+          <a:prstGeom prst="rect">
+            <a:avLst/>
+          </a:prstGeom>
+          <a:noFill/>
+          <a:ln>
+            <a:noFill/>
+          </a:ln>
+        </p:spPr>
+        <p:txBody>
+          <a:bodyPr anchorCtr="0" anchor="t" bIns="0" lIns="0" spcFirstLastPara="1" rIns="0" wrap="square" tIns="0">
+            <a:spAutoFit/>
+          </a:bodyPr>
+          <a:lstStyle/>
+          <a:p>
+            <a:pPr indent="0" lvl="0" marL="0" marR="0" rtl="0" algn="l">
+              <a:spcBef>
+                <a:spcPts val="0"/>
+              </a:spcBef>
+              <a:spcAft>
+                <a:spcPts val="0"/>
+              </a:spcAft>
+              <a:buNone/>
+            </a:pPr>
+            <a:r>
+              <a:rPr b="0" i="0" lang="en-US" sz="900" u="none" cap="none" strike="noStrike">
+                <a:solidFill>
+                  <a:srgbClr val="BDC8D6"/>
+                </a:solidFill>
+                <a:latin typeface="Arial"/>
+                <a:ea typeface="Arial"/>
+                <a:cs typeface="Arial"/>
+                <a:sym typeface="Arial"/>
+              </a:rPr>
+              <a:t>04  /  RUST IN 2026</a:t>
+            </a:r>
+            <a:endParaRPr/>
+          </a:p>
+        </p:txBody>
+      </p:sp>
+      <p:sp>
+        <p:nvSpPr>
+          <p:cNvPr id="192" name="Google Shape;192;p20"/>
+          <p:cNvSpPr txBox="1"/>
+          <p:nvPr/>
+        </p:nvSpPr>
+        <p:spPr>
+          <a:xfrm>
+            <a:off x="1123290" y="2412181"/>
+            <a:ext cx="10241400" cy="354000"/>
+          </a:xfrm>
+          <a:prstGeom prst="rect">
+            <a:avLst/>
+          </a:prstGeom>
+          <a:noFill/>
+          <a:ln>
+            <a:noFill/>
+          </a:ln>
+        </p:spPr>
+        <p:txBody>
+          <a:bodyPr anchorCtr="0" anchor="t" bIns="0" lIns="0" spcFirstLastPara="1" rIns="0" wrap="square" tIns="0">
+            <a:spAutoFit/>
+          </a:bodyPr>
+          <a:lstStyle/>
+          <a:p>
+            <a:pPr indent="0" lvl="0" marL="0" marR="0" rtl="0" algn="l">
+              <a:spcBef>
+                <a:spcPts val="0"/>
+              </a:spcBef>
+              <a:spcAft>
+                <a:spcPts val="0"/>
+              </a:spcAft>
+              <a:buNone/>
+            </a:pPr>
+            <a:r>
+              <a:rPr lang="en-US" sz="2300">
+                <a:solidFill>
+                  <a:srgbClr val="F6F7FA"/>
+                </a:solidFill>
+              </a:rPr>
+              <a:t>Borrowing and use data without owning it </a:t>
+            </a:r>
+            <a:endParaRPr sz="1600"/>
+          </a:p>
+        </p:txBody>
+      </p:sp>
+      <p:sp>
+        <p:nvSpPr>
+          <p:cNvPr id="193" name="Google Shape;193;p20"/>
+          <p:cNvSpPr/>
+          <p:nvPr/>
+        </p:nvSpPr>
+        <p:spPr>
+          <a:xfrm flipH="1" rot="10800000">
+            <a:off x="849400" y="2250476"/>
+            <a:ext cx="49800" cy="677400"/>
+          </a:xfrm>
+          <a:prstGeom prst="rect">
+            <a:avLst/>
+          </a:prstGeom>
+          <a:solidFill>
+            <a:srgbClr val="F08443"/>
+          </a:solidFill>
+          <a:ln>
+            <a:noFill/>
+          </a:ln>
+          <a:effectLst>
+            <a:outerShdw blurRad="40000" rotWithShape="0" dir="5400000" dist="23000">
+              <a:srgbClr val="000000">
+                <a:alpha val="34900"/>
+              </a:srgbClr>
+            </a:outerShdw>
+          </a:effectLst>
+        </p:spPr>
+        <p:txBody>
+          <a:bodyPr anchorCtr="0" anchor="ctr" bIns="45700" lIns="91425" spcFirstLastPara="1" rIns="91425" wrap="square" tIns="45700">
+            <a:noAutofit/>
+          </a:bodyPr>
+          <a:lstStyle/>
+          <a:p>
+            <a:pPr indent="0" lvl="0" marL="0" marR="0" rtl="0" algn="ctr">
+              <a:spcBef>
+                <a:spcPts val="0"/>
+              </a:spcBef>
+              <a:spcAft>
+                <a:spcPts val="0"/>
+              </a:spcAft>
+              <a:buNone/>
+            </a:pPr>
+            <a:r>
+              <a:t/>
+            </a:r>
+            <a:endParaRPr b="0" i="0" sz="1800" u="none" cap="none" strike="noStrike">
+              <a:solidFill>
+                <a:schemeClr val="dk1"/>
+              </a:solidFill>
+              <a:latin typeface="Calibri"/>
+              <a:ea typeface="Calibri"/>
+              <a:cs typeface="Calibri"/>
+              <a:sym typeface="Calibri"/>
+            </a:endParaRPr>
+          </a:p>
+        </p:txBody>
+      </p:sp>
+      <p:sp>
+        <p:nvSpPr>
+          <p:cNvPr id="194" name="Google Shape;194;p20"/>
+          <p:cNvSpPr txBox="1"/>
+          <p:nvPr/>
+        </p:nvSpPr>
+        <p:spPr>
+          <a:xfrm>
+            <a:off x="1042415" y="4177893"/>
+            <a:ext cx="10241400" cy="354000"/>
+          </a:xfrm>
+          <a:prstGeom prst="rect">
+            <a:avLst/>
+          </a:prstGeom>
+          <a:noFill/>
+          <a:ln>
+            <a:noFill/>
+          </a:ln>
+        </p:spPr>
+        <p:txBody>
+          <a:bodyPr anchorCtr="0" anchor="t" bIns="0" lIns="0" spcFirstLastPara="1" rIns="0" wrap="square" tIns="0">
+            <a:spAutoFit/>
+          </a:bodyPr>
+          <a:lstStyle/>
+          <a:p>
+            <a:pPr indent="0" lvl="0" marL="0" marR="0" rtl="0" algn="l">
+              <a:spcBef>
+                <a:spcPts val="0"/>
+              </a:spcBef>
+              <a:spcAft>
+                <a:spcPts val="0"/>
+              </a:spcAft>
+              <a:buNone/>
+            </a:pPr>
+            <a:r>
+              <a:rPr lang="en-US" sz="2300">
+                <a:solidFill>
+                  <a:srgbClr val="F6F7FA"/>
+                </a:solidFill>
+              </a:rPr>
+              <a:t>Checked </a:t>
+            </a:r>
+            <a:r>
+              <a:rPr lang="en-US" sz="2300">
+                <a:solidFill>
+                  <a:srgbClr val="F6F7FA"/>
+                </a:solidFill>
+              </a:rPr>
+              <a:t>before</a:t>
+            </a:r>
+            <a:r>
+              <a:rPr lang="en-US" sz="2300">
+                <a:solidFill>
+                  <a:srgbClr val="F6F7FA"/>
+                </a:solidFill>
+              </a:rPr>
+              <a:t> the program runs, not during it.</a:t>
+            </a:r>
+            <a:endParaRPr sz="1600"/>
+          </a:p>
+        </p:txBody>
+      </p:sp>
+      <p:sp>
+        <p:nvSpPr>
+          <p:cNvPr id="195" name="Google Shape;195;p20"/>
+          <p:cNvSpPr/>
+          <p:nvPr/>
+        </p:nvSpPr>
+        <p:spPr>
+          <a:xfrm flipH="1" rot="10800000">
+            <a:off x="849400" y="4016201"/>
+            <a:ext cx="49800" cy="677400"/>
+          </a:xfrm>
+          <a:prstGeom prst="rect">
+            <a:avLst/>
+          </a:prstGeom>
+          <a:solidFill>
+            <a:srgbClr val="F08443"/>
+          </a:solidFill>
+          <a:ln>
+            <a:noFill/>
+          </a:ln>
+          <a:effectLst>
+            <a:outerShdw blurRad="40000" rotWithShape="0" dir="5400000" dist="23000">
+              <a:srgbClr val="000000">
+                <a:alpha val="34900"/>
+              </a:srgbClr>
+            </a:outerShdw>
+          </a:effectLst>
+        </p:spPr>
+        <p:txBody>
+          <a:bodyPr anchorCtr="0" anchor="ctr" bIns="45700" lIns="91425" spcFirstLastPara="1" rIns="91425" wrap="square" tIns="45700">
+            <a:noAutofit/>
+          </a:bodyPr>
+          <a:lstStyle/>
+          <a:p>
+            <a:pPr indent="0" lvl="0" marL="0" marR="0" rtl="0" algn="ctr">
+              <a:spcBef>
+                <a:spcPts val="0"/>
+              </a:spcBef>
+              <a:spcAft>
+                <a:spcPts val="0"/>
+              </a:spcAft>
+              <a:buNone/>
+            </a:pPr>
+            <a:r>
+              <a:t/>
+            </a:r>
+            <a:endParaRPr b="0" i="0" sz="1800" u="none" cap="none" strike="noStrike">
+              <a:solidFill>
+                <a:schemeClr val="dk1"/>
+              </a:solidFill>
+              <a:latin typeface="Calibri"/>
+              <a:ea typeface="Calibri"/>
+              <a:cs typeface="Calibri"/>
+              <a:sym typeface="Calibri"/>
+            </a:endParaRPr>
+          </a:p>
+        </p:txBody>
+      </p:sp>
+    </p:spTree>
+  </p:cSld>
+  <p:clrMapOvr>
+    <a:masterClrMapping/>
+  </p:clrMapOvr>
+</p:sld>
+</file>
+
+<file path=ppt/slides/slide9.xml><?xml version="1.0" encoding="utf-8"?>
+<p:sld xmlns:a="http://schemas.openxmlformats.org/drawingml/2006/main" xmlns:r="http://schemas.openxmlformats.org/officeDocument/2006/relationships" xmlns:mc="http://schemas.openxmlformats.org/markup-compatibility/2006" xmlns:mv="urn:schemas-microsoft-com:mac:vml" xmlns:p="http://schemas.openxmlformats.org/presentationml/2006/main" xmlns:c="http://schemas.openxmlformats.org/drawingml/2006/chart" xmlns:dgm="http://schemas.openxmlformats.org/drawingml/2006/diagram" xmlns:o="urn:schemas-microsoft-com:office:office" xmlns:v="urn:schemas-microsoft-com:vml" xmlns:pvml="urn:schemas-microsoft-com:office:powerpoint" xmlns:com="http://schemas.openxmlformats.org/drawingml/2006/compatibility" xmlns:p14="http://schemas.microsoft.com/office/powerpoint/2010/main" xmlns:p15="http://schemas.microsoft.com/office/powerpoint/2012/main" xmlns:ahyp="http://schemas.microsoft.com/office/drawing/2018/hyperlinkcolor">
+  <p:cSld>
+    <p:spTree>
+      <p:nvGrpSpPr>
+        <p:cNvPr id="199" name="Shape 199"/>
+        <p:cNvGrpSpPr/>
+        <p:nvPr/>
+      </p:nvGrpSpPr>
+      <p:grpSpPr>
+        <a:xfrm>
+          <a:off x="0" y="0"/>
+          <a:ext cx="0" cy="0"/>
+          <a:chOff x="0" y="0"/>
+          <a:chExt cx="0" cy="0"/>
+        </a:xfrm>
+      </p:grpSpPr>
+      <p:sp>
+        <p:nvSpPr>
+          <p:cNvPr id="200" name="Google Shape;200;p21"/>
+          <p:cNvSpPr/>
+          <p:nvPr/>
+        </p:nvSpPr>
+        <p:spPr>
+          <a:xfrm>
+            <a:off x="0" y="0"/>
+            <a:ext cx="12191695" cy="6858000"/>
+          </a:xfrm>
+          <a:prstGeom prst="rect">
+            <a:avLst/>
+          </a:prstGeom>
+          <a:solidFill>
+            <a:srgbClr val="111B2B"/>
+          </a:solidFill>
+          <a:ln>
+            <a:noFill/>
+          </a:ln>
+          <a:effectLst>
+            <a:outerShdw blurRad="40000" rotWithShape="0" dir="5400000" dist="23000">
+              <a:srgbClr val="000000">
+                <a:alpha val="34902"/>
+              </a:srgbClr>
+            </a:outerShdw>
+          </a:effectLst>
+        </p:spPr>
+        <p:txBody>
+          <a:bodyPr anchorCtr="0" anchor="ctr" bIns="45700" lIns="91425" spcFirstLastPara="1" rIns="91425" wrap="square" tIns="45700">
+            <a:noAutofit/>
+          </a:bodyPr>
+          <a:lstStyle/>
+          <a:p>
+            <a:pPr indent="0" lvl="0" marL="0" marR="0" rtl="0" algn="ctr">
+              <a:spcBef>
+                <a:spcPts val="0"/>
+              </a:spcBef>
+              <a:spcAft>
+                <a:spcPts val="0"/>
+              </a:spcAft>
+              <a:buNone/>
+            </a:pPr>
+            <a:r>
+              <a:t/>
+            </a:r>
+            <a:endParaRPr b="0" i="0" sz="1800" u="none" cap="none" strike="noStrike">
+              <a:solidFill>
+                <a:schemeClr val="dk1"/>
+              </a:solidFill>
+              <a:latin typeface="Calibri"/>
+              <a:ea typeface="Calibri"/>
+              <a:cs typeface="Calibri"/>
+              <a:sym typeface="Calibri"/>
+            </a:endParaRPr>
+          </a:p>
+        </p:txBody>
+      </p:sp>
+      <p:sp>
+        <p:nvSpPr>
+          <p:cNvPr id="201" name="Google Shape;201;p21"/>
+          <p:cNvSpPr/>
+          <p:nvPr/>
+        </p:nvSpPr>
+        <p:spPr>
+          <a:xfrm>
+            <a:off x="411480" y="393192"/>
+            <a:ext cx="73152" cy="429768"/>
+          </a:xfrm>
+          <a:prstGeom prst="rect">
+            <a:avLst/>
+          </a:prstGeom>
+          <a:solidFill>
+            <a:srgbClr val="F08443"/>
+          </a:solidFill>
+          <a:ln>
+            <a:noFill/>
+          </a:ln>
+          <a:effectLst>
+            <a:outerShdw blurRad="40000" rotWithShape="0" dir="5400000" dist="23000">
+              <a:srgbClr val="000000">
+                <a:alpha val="34902"/>
+              </a:srgbClr>
+            </a:outerShdw>
+          </a:effectLst>
+        </p:spPr>
+        <p:txBody>
+          <a:bodyPr anchorCtr="0" anchor="ctr" bIns="45700" lIns="91425" spcFirstLastPara="1" rIns="91425" wrap="square" tIns="45700">
+            <a:noAutofit/>
+          </a:bodyPr>
+          <a:lstStyle/>
+          <a:p>
+            <a:pPr indent="0" lvl="0" marL="0" marR="0" rtl="0" algn="ctr">
+              <a:spcBef>
+                <a:spcPts val="0"/>
+              </a:spcBef>
+              <a:spcAft>
+                <a:spcPts val="0"/>
+              </a:spcAft>
+              <a:buNone/>
+            </a:pPr>
+            <a:r>
+              <a:t/>
+            </a:r>
+            <a:endParaRPr b="0" i="0" sz="1800" u="none" cap="none" strike="noStrike">
+              <a:solidFill>
+                <a:schemeClr val="dk1"/>
+              </a:solidFill>
+              <a:latin typeface="Calibri"/>
+              <a:ea typeface="Calibri"/>
+              <a:cs typeface="Calibri"/>
+              <a:sym typeface="Calibri"/>
+            </a:endParaRPr>
+          </a:p>
+        </p:txBody>
+      </p:sp>
+      <p:sp>
+        <p:nvSpPr>
+          <p:cNvPr id="202" name="Google Shape;202;p21"/>
+          <p:cNvSpPr txBox="1"/>
+          <p:nvPr/>
+        </p:nvSpPr>
+        <p:spPr>
+          <a:xfrm>
+            <a:off x="612648" y="411480"/>
+            <a:ext cx="7315200" cy="274320"/>
+          </a:xfrm>
+          <a:prstGeom prst="rect">
+            <a:avLst/>
+          </a:prstGeom>
+          <a:noFill/>
+          <a:ln>
+            <a:noFill/>
+          </a:ln>
+        </p:spPr>
+        <p:txBody>
+          <a:bodyPr anchorCtr="0" anchor="t" bIns="0" lIns="0" spcFirstLastPara="1" rIns="0" wrap="square" tIns="0">
+            <a:spAutoFit/>
+          </a:bodyPr>
+          <a:lstStyle/>
+          <a:p>
+            <a:pPr indent="0" lvl="0" marL="0" marR="0" rtl="0" algn="l">
+              <a:spcBef>
+                <a:spcPts val="0"/>
+              </a:spcBef>
+              <a:spcAft>
+                <a:spcPts val="0"/>
+              </a:spcAft>
+              <a:buNone/>
+            </a:pPr>
+            <a:r>
+              <a:rPr b="1" i="0" lang="en-US" sz="1100" u="none" cap="none" strike="noStrike">
+                <a:solidFill>
+                  <a:srgbClr val="BDC8D6"/>
+                </a:solidFill>
+                <a:latin typeface="Arial"/>
+                <a:ea typeface="Arial"/>
+                <a:cs typeface="Arial"/>
+                <a:sym typeface="Arial"/>
+              </a:rPr>
+              <a:t>CEP146  /  SOFTWARE DEVELOPMENT CURRENT EVENT</a:t>
+            </a:r>
+            <a:endParaRPr/>
+          </a:p>
+        </p:txBody>
+      </p:sp>
+      <p:sp>
+        <p:nvSpPr>
+          <p:cNvPr id="203" name="Google Shape;203;p21"/>
+          <p:cNvSpPr txBox="1"/>
+          <p:nvPr/>
+        </p:nvSpPr>
+        <p:spPr>
+          <a:xfrm>
+            <a:off x="621792" y="978408"/>
             <a:ext cx="10972800" cy="731520"/>
           </a:xfrm>
           <a:prstGeom prst="rect">
@@ -12196,7 +18618,7 @@
       </p:sp>
       <p:sp>
         <p:nvSpPr>
-          <p:cNvPr id="115" name="Google Shape;115;p15"/>
+          <p:cNvPr id="204" name="Google Shape;204;p21"/>
           <p:cNvSpPr txBox="1"/>
           <p:nvPr/>
         </p:nvSpPr>
@@ -12246,7 +18668,7 @@
       </p:sp>
       <p:sp>
         <p:nvSpPr>
-          <p:cNvPr id="116" name="Google Shape;116;p15"/>
+          <p:cNvPr id="205" name="Google Shape;205;p21"/>
           <p:cNvSpPr txBox="1"/>
           <p:nvPr/>
         </p:nvSpPr>
@@ -12296,7 +18718,7 @@
       </p:sp>
       <p:sp>
         <p:nvSpPr>
-          <p:cNvPr id="117" name="Google Shape;117;p15"/>
+          <p:cNvPr id="206" name="Google Shape;206;p21"/>
           <p:cNvSpPr txBox="1"/>
           <p:nvPr/>
         </p:nvSpPr>
@@ -12346,7 +18768,7 @@
       </p:sp>
       <p:sp>
         <p:nvSpPr>
-          <p:cNvPr id="118" name="Google Shape;118;p15"/>
+          <p:cNvPr id="207" name="Google Shape;207;p21"/>
           <p:cNvSpPr/>
           <p:nvPr/>
         </p:nvSpPr>
@@ -12404,7 +18826,7 @@
       </p:sp>
       <p:sp>
         <p:nvSpPr>
-          <p:cNvPr id="119" name="Google Shape;119;p15"/>
+          <p:cNvPr id="208" name="Google Shape;208;p21"/>
           <p:cNvSpPr txBox="1"/>
           <p:nvPr/>
         </p:nvSpPr>
@@ -12454,7 +18876,7 @@
       </p:sp>
       <p:sp>
         <p:nvSpPr>
-          <p:cNvPr id="120" name="Google Shape;120;p15"/>
+          <p:cNvPr id="209" name="Google Shape;209;p21"/>
           <p:cNvSpPr txBox="1"/>
           <p:nvPr/>
         </p:nvSpPr>
@@ -12504,7 +18926,7 @@
       </p:sp>
       <p:sp>
         <p:nvSpPr>
-          <p:cNvPr id="121" name="Google Shape;121;p15"/>
+          <p:cNvPr id="210" name="Google Shape;210;p21"/>
           <p:cNvSpPr/>
           <p:nvPr/>
         </p:nvSpPr>
@@ -12562,7 +18984,7 @@
       </p:sp>
       <p:sp>
         <p:nvSpPr>
-          <p:cNvPr id="122" name="Google Shape;122;p15"/>
+          <p:cNvPr id="211" name="Google Shape;211;p21"/>
           <p:cNvSpPr txBox="1"/>
           <p:nvPr/>
         </p:nvSpPr>
@@ -12612,7 +19034,7 @@
       </p:sp>
       <p:sp>
         <p:nvSpPr>
-          <p:cNvPr id="123" name="Google Shape;123;p15"/>
+          <p:cNvPr id="212" name="Google Shape;212;p21"/>
           <p:cNvSpPr txBox="1"/>
           <p:nvPr/>
         </p:nvSpPr>
@@ -12668,2268 +19090,286 @@
 </p:sld>
 </file>
 
-<file path=ppt/slides/slide4.xml><?xml version="1.0" encoding="utf-8"?>
-<p:sld xmlns:a="http://schemas.openxmlformats.org/drawingml/2006/main" xmlns:r="http://schemas.openxmlformats.org/officeDocument/2006/relationships" xmlns:mc="http://schemas.openxmlformats.org/markup-compatibility/2006" xmlns:mv="urn:schemas-microsoft-com:mac:vml" xmlns:p="http://schemas.openxmlformats.org/presentationml/2006/main" xmlns:c="http://schemas.openxmlformats.org/drawingml/2006/chart" xmlns:dgm="http://schemas.openxmlformats.org/drawingml/2006/diagram" xmlns:o="urn:schemas-microsoft-com:office:office" xmlns:v="urn:schemas-microsoft-com:vml" xmlns:pvml="urn:schemas-microsoft-com:office:powerpoint" xmlns:com="http://schemas.openxmlformats.org/drawingml/2006/compatibility" xmlns:p14="http://schemas.microsoft.com/office/powerpoint/2010/main" xmlns:p15="http://schemas.microsoft.com/office/powerpoint/2012/main" xmlns:ahyp="http://schemas.microsoft.com/office/drawing/2018/hyperlinkcolor">
-  <p:cSld>
-    <p:spTree>
-      <p:nvGrpSpPr>
-        <p:cNvPr id="127" name="Shape 127"/>
-        <p:cNvGrpSpPr/>
-        <p:nvPr/>
-      </p:nvGrpSpPr>
-      <p:grpSpPr>
-        <a:xfrm>
-          <a:off x="0" y="0"/>
-          <a:ext cx="0" cy="0"/>
-          <a:chOff x="0" y="0"/>
-          <a:chExt cx="0" cy="0"/>
-        </a:xfrm>
-      </p:grpSpPr>
-      <p:sp>
-        <p:nvSpPr>
-          <p:cNvPr id="128" name="Google Shape;128;p16"/>
-          <p:cNvSpPr/>
-          <p:nvPr/>
-        </p:nvSpPr>
-        <p:spPr>
-          <a:xfrm>
-            <a:off x="0" y="0"/>
-            <a:ext cx="12191695" cy="6858000"/>
-          </a:xfrm>
-          <a:prstGeom prst="rect">
-            <a:avLst/>
-          </a:prstGeom>
+<file path=ppt/theme/theme1.xml><?xml version="1.0" encoding="utf-8"?>
+<a:theme xmlns:a="http://schemas.openxmlformats.org/drawingml/2006/main" xmlns:r="http://schemas.openxmlformats.org/officeDocument/2006/relationships" name="Office Theme">
+  <a:themeElements>
+    <a:clrScheme name="Office">
+      <a:dk1>
+        <a:srgbClr val="000000"/>
+      </a:dk1>
+      <a:lt1>
+        <a:srgbClr val="FFFFFF"/>
+      </a:lt1>
+      <a:dk2>
+        <a:srgbClr val="1F497D"/>
+      </a:dk2>
+      <a:lt2>
+        <a:srgbClr val="EEECE1"/>
+      </a:lt2>
+      <a:accent1>
+        <a:srgbClr val="4F81BD"/>
+      </a:accent1>
+      <a:accent2>
+        <a:srgbClr val="C0504D"/>
+      </a:accent2>
+      <a:accent3>
+        <a:srgbClr val="9BBB59"/>
+      </a:accent3>
+      <a:accent4>
+        <a:srgbClr val="8064A2"/>
+      </a:accent4>
+      <a:accent5>
+        <a:srgbClr val="4BACC6"/>
+      </a:accent5>
+      <a:accent6>
+        <a:srgbClr val="F79646"/>
+      </a:accent6>
+      <a:hlink>
+        <a:srgbClr val="0000FF"/>
+      </a:hlink>
+      <a:folHlink>
+        <a:srgbClr val="800080"/>
+      </a:folHlink>
+    </a:clrScheme>
+    <a:fontScheme name="Office">
+      <a:majorFont>
+        <a:latin typeface="Arial"/>
+        <a:ea typeface=""/>
+        <a:cs typeface=""/>
+        <a:font script="Jpan" typeface="ＭＳ Ｐゴシック"/>
+        <a:font script="Hang" typeface="맑은 고딕"/>
+        <a:font script="Hans" typeface="宋体"/>
+        <a:font script="Hant" typeface="新細明體"/>
+        <a:font script="Arab" typeface="Times New Roman"/>
+        <a:font script="Hebr" typeface="Times New Roman"/>
+        <a:font script="Thai" typeface="Angsana New"/>
+        <a:font script="Ethi" typeface="Nyala"/>
+        <a:font script="Beng" typeface="Vrinda"/>
+        <a:font script="Gujr" typeface="Shruti"/>
+        <a:font script="Khmr" typeface="MoolBoran"/>
+        <a:font script="Knda" typeface="Tunga"/>
+        <a:font script="Guru" typeface="Raavi"/>
+        <a:font script="Cans" typeface="Euphemia"/>
+        <a:font script="Cher" typeface="Plantagenet Cherokee"/>
+        <a:font script="Yiii" typeface="Microsoft Yi Baiti"/>
+        <a:font script="Tibt" typeface="Microsoft Himalaya"/>
+        <a:font script="Thaa" typeface="MV Boli"/>
+        <a:font script="Deva" typeface="Mangal"/>
+        <a:font script="Telu" typeface="Gautami"/>
+        <a:font script="Taml" typeface="Latha"/>
+        <a:font script="Syrc" typeface="Estrangelo Edessa"/>
+        <a:font script="Orya" typeface="Kalinga"/>
+        <a:font script="Mlym" typeface="Kartika"/>
+        <a:font script="Laoo" typeface="DokChampa"/>
+        <a:font script="Sinh" typeface="Iskoola Pota"/>
+        <a:font script="Mong" typeface="Mongolian Baiti"/>
+        <a:font script="Viet" typeface="Times New Roman"/>
+        <a:font script="Uigh" typeface="Microsoft Uighur"/>
+        <a:font script="Geor" typeface="Sylfaen"/>
+      </a:majorFont>
+      <a:minorFont>
+        <a:latin typeface="Arial"/>
+        <a:ea typeface=""/>
+        <a:cs typeface=""/>
+        <a:font script="Jpan" typeface="ＭＳ Ｐゴシック"/>
+        <a:font script="Hang" typeface="맑은 고딕"/>
+        <a:font script="Hans" typeface="宋体"/>
+        <a:font script="Hant" typeface="新細明體"/>
+        <a:font script="Arab" typeface="Arial"/>
+        <a:font script="Hebr" typeface="Arial"/>
+        <a:font script="Thai" typeface="Cordia New"/>
+        <a:font script="Ethi" typeface="Nyala"/>
+        <a:font script="Beng" typeface="Vrinda"/>
+        <a:font script="Gujr" typeface="Shruti"/>
+        <a:font script="Khmr" typeface="DaunPenh"/>
+        <a:font script="Knda" typeface="Tunga"/>
+        <a:font script="Guru" typeface="Raavi"/>
+        <a:font script="Cans" typeface="Euphemia"/>
+        <a:font script="Cher" typeface="Plantagenet Cherokee"/>
+        <a:font script="Yiii" typeface="Microsoft Yi Baiti"/>
+        <a:font script="Tibt" typeface="Microsoft Himalaya"/>
+        <a:font script="Thaa" typeface="MV Boli"/>
+        <a:font script="Deva" typeface="Mangal"/>
+        <a:font script="Telu" typeface="Gautami"/>
+        <a:font script="Taml" typeface="Latha"/>
+        <a:font script="Syrc" typeface="Estrangelo Edessa"/>
+        <a:font script="Orya" typeface="Kalinga"/>
+        <a:font script="Mlym" typeface="Kartika"/>
+        <a:font script="Laoo" typeface="DokChampa"/>
+        <a:font script="Sinh" typeface="Iskoola Pota"/>
+        <a:font script="Mong" typeface="Mongolian Baiti"/>
+        <a:font script="Viet" typeface="Arial"/>
+        <a:font script="Uigh" typeface="Microsoft Uighur"/>
+        <a:font script="Geor" typeface="Sylfaen"/>
+      </a:minorFont>
+    </a:fontScheme>
+    <a:fmtScheme name="Office">
+      <a:fillStyleLst>
+        <a:solidFill>
+          <a:schemeClr val="phClr"/>
+        </a:solidFill>
+        <a:gradFill rotWithShape="1">
+          <a:gsLst>
+            <a:gs pos="0">
+              <a:schemeClr val="phClr">
+                <a:tint val="50000"/>
+                <a:satMod val="300000"/>
+              </a:schemeClr>
+            </a:gs>
+            <a:gs pos="35000">
+              <a:schemeClr val="phClr">
+                <a:tint val="37000"/>
+                <a:satMod val="300000"/>
+              </a:schemeClr>
+            </a:gs>
+            <a:gs pos="100000">
+              <a:schemeClr val="phClr">
+                <a:tint val="15000"/>
+                <a:satMod val="350000"/>
+              </a:schemeClr>
+            </a:gs>
+          </a:gsLst>
+          <a:lin ang="16200000" scaled="1"/>
+        </a:gradFill>
+        <a:gradFill rotWithShape="1">
+          <a:gsLst>
+            <a:gs pos="0">
+              <a:schemeClr val="phClr">
+                <a:tint val="100000"/>
+                <a:shade val="100000"/>
+                <a:satMod val="130000"/>
+              </a:schemeClr>
+            </a:gs>
+            <a:gs pos="100000">
+              <a:schemeClr val="phClr">
+                <a:tint val="50000"/>
+                <a:shade val="100000"/>
+                <a:satMod val="350000"/>
+              </a:schemeClr>
+            </a:gs>
+          </a:gsLst>
+          <a:lin ang="16200000" scaled="0"/>
+        </a:gradFill>
+      </a:fillStyleLst>
+      <a:lnStyleLst>
+        <a:ln w="9525" cap="flat" cmpd="sng" algn="ctr">
           <a:solidFill>
-            <a:srgbClr val="111B2B"/>
+            <a:schemeClr val="phClr">
+              <a:shade val="95000"/>
+              <a:satMod val="105000"/>
+            </a:schemeClr>
           </a:solidFill>
-          <a:ln>
-            <a:noFill/>
-          </a:ln>
+          <a:prstDash val="solid"/>
+        </a:ln>
+        <a:ln w="25400" cap="flat" cmpd="sng" algn="ctr">
+          <a:solidFill>
+            <a:schemeClr val="phClr"/>
+          </a:solidFill>
+          <a:prstDash val="solid"/>
+        </a:ln>
+        <a:ln w="38100" cap="flat" cmpd="sng" algn="ctr">
+          <a:solidFill>
+            <a:schemeClr val="phClr"/>
+          </a:solidFill>
+          <a:prstDash val="solid"/>
+        </a:ln>
+      </a:lnStyleLst>
+      <a:effectStyleLst>
+        <a:effectStyle>
           <a:effectLst>
-            <a:outerShdw blurRad="40000" rotWithShape="0" dir="5400000" dist="23000">
+            <a:outerShdw blurRad="40000" dist="20000" dir="5400000" rotWithShape="0">
               <a:srgbClr val="000000">
-                <a:alpha val="34902"/>
+                <a:alpha val="38000"/>
               </a:srgbClr>
             </a:outerShdw>
           </a:effectLst>
-        </p:spPr>
-        <p:txBody>
-          <a:bodyPr anchorCtr="0" anchor="ctr" bIns="45700" lIns="91425" spcFirstLastPara="1" rIns="91425" wrap="square" tIns="45700">
-            <a:noAutofit/>
-          </a:bodyPr>
-          <a:lstStyle/>
-          <a:p>
-            <a:pPr indent="0" lvl="0" marL="0" marR="0" rtl="0" algn="ctr">
-              <a:spcBef>
-                <a:spcPts val="0"/>
-              </a:spcBef>
-              <a:spcAft>
-                <a:spcPts val="0"/>
-              </a:spcAft>
-              <a:buNone/>
-            </a:pPr>
-            <a:r>
-              <a:t/>
-            </a:r>
-            <a:endParaRPr b="0" i="0" sz="1800" u="none" cap="none" strike="noStrike">
-              <a:solidFill>
-                <a:schemeClr val="dk1"/>
-              </a:solidFill>
-              <a:latin typeface="Calibri"/>
-              <a:ea typeface="Calibri"/>
-              <a:cs typeface="Calibri"/>
-              <a:sym typeface="Calibri"/>
-            </a:endParaRPr>
-          </a:p>
-        </p:txBody>
-      </p:sp>
-      <p:sp>
-        <p:nvSpPr>
-          <p:cNvPr id="129" name="Google Shape;129;p16"/>
-          <p:cNvSpPr/>
-          <p:nvPr/>
-        </p:nvSpPr>
-        <p:spPr>
-          <a:xfrm>
-            <a:off x="411480" y="393192"/>
-            <a:ext cx="73152" cy="429768"/>
-          </a:xfrm>
-          <a:prstGeom prst="rect">
-            <a:avLst/>
-          </a:prstGeom>
-          <a:solidFill>
-            <a:srgbClr val="F08443"/>
-          </a:solidFill>
-          <a:ln>
-            <a:noFill/>
-          </a:ln>
+        </a:effectStyle>
+        <a:effectStyle>
           <a:effectLst>
-            <a:outerShdw blurRad="40000" rotWithShape="0" dir="5400000" dist="23000">
+            <a:outerShdw blurRad="40000" dist="23000" dir="5400000" rotWithShape="0">
               <a:srgbClr val="000000">
-                <a:alpha val="34902"/>
+                <a:alpha val="35000"/>
               </a:srgbClr>
             </a:outerShdw>
           </a:effectLst>
-        </p:spPr>
-        <p:txBody>
-          <a:bodyPr anchorCtr="0" anchor="ctr" bIns="45700" lIns="91425" spcFirstLastPara="1" rIns="91425" wrap="square" tIns="45700">
-            <a:noAutofit/>
-          </a:bodyPr>
-          <a:lstStyle/>
-          <a:p>
-            <a:pPr indent="0" lvl="0" marL="0" marR="0" rtl="0" algn="ctr">
-              <a:spcBef>
-                <a:spcPts val="0"/>
-              </a:spcBef>
-              <a:spcAft>
-                <a:spcPts val="0"/>
-              </a:spcAft>
-              <a:buNone/>
-            </a:pPr>
-            <a:r>
-              <a:t/>
-            </a:r>
-            <a:endParaRPr b="0" i="0" sz="1800" u="none" cap="none" strike="noStrike">
-              <a:solidFill>
-                <a:schemeClr val="dk1"/>
-              </a:solidFill>
-              <a:latin typeface="Calibri"/>
-              <a:ea typeface="Calibri"/>
-              <a:cs typeface="Calibri"/>
-              <a:sym typeface="Calibri"/>
-            </a:endParaRPr>
-          </a:p>
-        </p:txBody>
-      </p:sp>
-      <p:sp>
-        <p:nvSpPr>
-          <p:cNvPr id="130" name="Google Shape;130;p16"/>
-          <p:cNvSpPr txBox="1"/>
-          <p:nvPr/>
-        </p:nvSpPr>
-        <p:spPr>
-          <a:xfrm>
-            <a:off x="612648" y="411480"/>
-            <a:ext cx="7315200" cy="274320"/>
-          </a:xfrm>
-          <a:prstGeom prst="rect">
-            <a:avLst/>
-          </a:prstGeom>
-          <a:noFill/>
-          <a:ln>
-            <a:noFill/>
-          </a:ln>
-        </p:spPr>
-        <p:txBody>
-          <a:bodyPr anchorCtr="0" anchor="t" bIns="0" lIns="0" spcFirstLastPara="1" rIns="0" wrap="square" tIns="0">
-            <a:spAutoFit/>
-          </a:bodyPr>
-          <a:lstStyle/>
-          <a:p>
-            <a:pPr indent="0" lvl="0" marL="0" marR="0" rtl="0" algn="l">
-              <a:spcBef>
-                <a:spcPts val="0"/>
-              </a:spcBef>
-              <a:spcAft>
-                <a:spcPts val="0"/>
-              </a:spcAft>
-              <a:buNone/>
-            </a:pPr>
-            <a:r>
-              <a:rPr b="1" i="0" lang="en-US" sz="1100" u="none" cap="none" strike="noStrike">
-                <a:solidFill>
-                  <a:srgbClr val="BDC8D6"/>
-                </a:solidFill>
-                <a:latin typeface="Arial"/>
-                <a:ea typeface="Arial"/>
-                <a:cs typeface="Arial"/>
-                <a:sym typeface="Arial"/>
-              </a:rPr>
-              <a:t>CEP146  /  SOFTWARE DEVELOPMENT CURRENT EVENT</a:t>
-            </a:r>
-            <a:endParaRPr/>
-          </a:p>
-        </p:txBody>
-      </p:sp>
-      <p:sp>
-        <p:nvSpPr>
-          <p:cNvPr id="131" name="Google Shape;131;p16"/>
-          <p:cNvSpPr txBox="1"/>
-          <p:nvPr/>
-        </p:nvSpPr>
-        <p:spPr>
-          <a:xfrm>
-            <a:off x="621792" y="978408"/>
-            <a:ext cx="10972800" cy="731520"/>
-          </a:xfrm>
-          <a:prstGeom prst="rect">
-            <a:avLst/>
-          </a:prstGeom>
-          <a:noFill/>
-          <a:ln>
-            <a:noFill/>
-          </a:ln>
-        </p:spPr>
-        <p:txBody>
-          <a:bodyPr anchorCtr="0" anchor="t" bIns="0" lIns="0" spcFirstLastPara="1" rIns="0" wrap="square" tIns="0">
-            <a:spAutoFit/>
-          </a:bodyPr>
-          <a:lstStyle/>
-          <a:p>
-            <a:pPr indent="0" lvl="0" marL="0" marR="0" rtl="0" algn="l">
-              <a:spcBef>
-                <a:spcPts val="0"/>
-              </a:spcBef>
-              <a:spcAft>
-                <a:spcPts val="0"/>
-              </a:spcAft>
-              <a:buNone/>
-            </a:pPr>
-            <a:r>
-              <a:rPr b="1" i="0" lang="en-US" sz="3100" u="none" cap="none" strike="noStrike">
-                <a:solidFill>
-                  <a:srgbClr val="F6F7FA"/>
-                </a:solidFill>
-                <a:latin typeface="Arial"/>
-                <a:ea typeface="Arial"/>
-                <a:cs typeface="Arial"/>
-                <a:sym typeface="Arial"/>
-              </a:rPr>
-              <a:t>Why does memory safety matter?</a:t>
-            </a:r>
-            <a:endParaRPr/>
-          </a:p>
-        </p:txBody>
-      </p:sp>
-      <p:sp>
-        <p:nvSpPr>
-          <p:cNvPr id="132" name="Google Shape;132;p16"/>
-          <p:cNvSpPr txBox="1"/>
-          <p:nvPr/>
-        </p:nvSpPr>
-        <p:spPr>
-          <a:xfrm>
-            <a:off x="9875520" y="6446520"/>
-            <a:ext cx="1828800" cy="182880"/>
-          </a:xfrm>
-          <a:prstGeom prst="rect">
-            <a:avLst/>
-          </a:prstGeom>
-          <a:noFill/>
-          <a:ln>
-            <a:noFill/>
-          </a:ln>
-        </p:spPr>
-        <p:txBody>
-          <a:bodyPr anchorCtr="0" anchor="t" bIns="0" lIns="0" spcFirstLastPara="1" rIns="0" wrap="square" tIns="0">
-            <a:spAutoFit/>
-          </a:bodyPr>
-          <a:lstStyle/>
-          <a:p>
-            <a:pPr indent="0" lvl="0" marL="0" marR="0" rtl="0" algn="l">
-              <a:spcBef>
-                <a:spcPts val="0"/>
-              </a:spcBef>
-              <a:spcAft>
-                <a:spcPts val="0"/>
-              </a:spcAft>
-              <a:buNone/>
-            </a:pPr>
-            <a:r>
-              <a:rPr b="0" i="0" lang="en-US" sz="900" u="none" cap="none" strike="noStrike">
-                <a:solidFill>
-                  <a:srgbClr val="BDC8D6"/>
-                </a:solidFill>
-                <a:latin typeface="Arial"/>
-                <a:ea typeface="Arial"/>
-                <a:cs typeface="Arial"/>
-                <a:sym typeface="Arial"/>
-              </a:rPr>
-              <a:t>04  /  RUST IN 2026</a:t>
-            </a:r>
-            <a:endParaRPr/>
-          </a:p>
-        </p:txBody>
-      </p:sp>
-      <p:sp>
-        <p:nvSpPr>
-          <p:cNvPr id="133" name="Google Shape;133;p16"/>
-          <p:cNvSpPr/>
-          <p:nvPr/>
-        </p:nvSpPr>
-        <p:spPr>
-          <a:xfrm>
-            <a:off x="758952" y="2157984"/>
-            <a:ext cx="100584" cy="100584"/>
-          </a:xfrm>
-          <a:prstGeom prst="rect">
-            <a:avLst/>
-          </a:prstGeom>
-          <a:solidFill>
-            <a:srgbClr val="F08443"/>
-          </a:solidFill>
-          <a:ln>
-            <a:noFill/>
-          </a:ln>
+        </a:effectStyle>
+        <a:effectStyle>
           <a:effectLst>
-            <a:outerShdw blurRad="40000" rotWithShape="0" dir="5400000" dist="23000">
+            <a:outerShdw blurRad="40000" dist="23000" dir="5400000" rotWithShape="0">
               <a:srgbClr val="000000">
-                <a:alpha val="34902"/>
+                <a:alpha val="35000"/>
               </a:srgbClr>
             </a:outerShdw>
           </a:effectLst>
-        </p:spPr>
-        <p:txBody>
-          <a:bodyPr anchorCtr="0" anchor="ctr" bIns="45700" lIns="91425" spcFirstLastPara="1" rIns="91425" wrap="square" tIns="45700">
-            <a:noAutofit/>
-          </a:bodyPr>
-          <a:lstStyle/>
-          <a:p>
-            <a:pPr indent="0" lvl="0" marL="0" marR="0" rtl="0" algn="ctr">
-              <a:spcBef>
-                <a:spcPts val="0"/>
-              </a:spcBef>
-              <a:spcAft>
-                <a:spcPts val="0"/>
-              </a:spcAft>
-              <a:buNone/>
-            </a:pPr>
-            <a:r>
-              <a:t/>
-            </a:r>
-            <a:endParaRPr b="0" i="0" sz="1800" u="none" cap="none" strike="noStrike">
-              <a:solidFill>
-                <a:schemeClr val="dk1"/>
-              </a:solidFill>
-              <a:latin typeface="Calibri"/>
-              <a:ea typeface="Calibri"/>
-              <a:cs typeface="Calibri"/>
-              <a:sym typeface="Calibri"/>
-            </a:endParaRPr>
-          </a:p>
-        </p:txBody>
-      </p:sp>
-      <p:sp>
-        <p:nvSpPr>
-          <p:cNvPr id="134" name="Google Shape;134;p16"/>
-          <p:cNvSpPr txBox="1"/>
-          <p:nvPr/>
-        </p:nvSpPr>
-        <p:spPr>
-          <a:xfrm>
-            <a:off x="1042415" y="2048256"/>
-            <a:ext cx="10241280" cy="685800"/>
-          </a:xfrm>
-          <a:prstGeom prst="rect">
-            <a:avLst/>
-          </a:prstGeom>
-          <a:noFill/>
-          <a:ln>
-            <a:noFill/>
-          </a:ln>
-        </p:spPr>
-        <p:txBody>
-          <a:bodyPr anchorCtr="0" anchor="t" bIns="0" lIns="0" spcFirstLastPara="1" rIns="0" wrap="square" tIns="0">
-            <a:spAutoFit/>
-          </a:bodyPr>
-          <a:lstStyle/>
-          <a:p>
-            <a:pPr indent="0" lvl="0" marL="0" marR="0" rtl="0" algn="l">
-              <a:spcBef>
-                <a:spcPts val="0"/>
-              </a:spcBef>
-              <a:spcAft>
-                <a:spcPts val="0"/>
-              </a:spcAft>
-              <a:buNone/>
-            </a:pPr>
-            <a:r>
-              <a:rPr b="0" i="0" lang="en-US" sz="2100" u="none" cap="none" strike="noStrike">
-                <a:solidFill>
-                  <a:srgbClr val="F6F7FA"/>
-                </a:solidFill>
-                <a:latin typeface="Arial"/>
-                <a:ea typeface="Arial"/>
-                <a:cs typeface="Arial"/>
-                <a:sym typeface="Arial"/>
-              </a:rPr>
-              <a:t>Memory mistakes can cause crashes and security problems</a:t>
-            </a:r>
-            <a:endParaRPr/>
-          </a:p>
-        </p:txBody>
-      </p:sp>
-      <p:sp>
-        <p:nvSpPr>
-          <p:cNvPr id="135" name="Google Shape;135;p16"/>
-          <p:cNvSpPr/>
-          <p:nvPr/>
-        </p:nvSpPr>
-        <p:spPr>
-          <a:xfrm>
-            <a:off x="758952" y="3264408"/>
-            <a:ext cx="100584" cy="100584"/>
-          </a:xfrm>
-          <a:prstGeom prst="rect">
-            <a:avLst/>
-          </a:prstGeom>
-          <a:solidFill>
-            <a:srgbClr val="F08443"/>
-          </a:solidFill>
-          <a:ln>
-            <a:noFill/>
-          </a:ln>
-          <a:effectLst>
-            <a:outerShdw blurRad="40000" rotWithShape="0" dir="5400000" dist="23000">
-              <a:srgbClr val="000000">
-                <a:alpha val="34902"/>
-              </a:srgbClr>
-            </a:outerShdw>
-          </a:effectLst>
-        </p:spPr>
-        <p:txBody>
-          <a:bodyPr anchorCtr="0" anchor="ctr" bIns="45700" lIns="91425" spcFirstLastPara="1" rIns="91425" wrap="square" tIns="45700">
-            <a:noAutofit/>
-          </a:bodyPr>
-          <a:lstStyle/>
-          <a:p>
-            <a:pPr indent="0" lvl="0" marL="0" marR="0" rtl="0" algn="ctr">
-              <a:spcBef>
-                <a:spcPts val="0"/>
-              </a:spcBef>
-              <a:spcAft>
-                <a:spcPts val="0"/>
-              </a:spcAft>
-              <a:buNone/>
-            </a:pPr>
-            <a:r>
-              <a:t/>
-            </a:r>
-            <a:endParaRPr b="0" i="0" sz="1800" u="none" cap="none" strike="noStrike">
-              <a:solidFill>
-                <a:schemeClr val="dk1"/>
-              </a:solidFill>
-              <a:latin typeface="Calibri"/>
-              <a:ea typeface="Calibri"/>
-              <a:cs typeface="Calibri"/>
-              <a:sym typeface="Calibri"/>
-            </a:endParaRPr>
-          </a:p>
-        </p:txBody>
-      </p:sp>
-      <p:sp>
-        <p:nvSpPr>
-          <p:cNvPr id="136" name="Google Shape;136;p16"/>
-          <p:cNvSpPr txBox="1"/>
-          <p:nvPr/>
-        </p:nvSpPr>
-        <p:spPr>
-          <a:xfrm>
-            <a:off x="1042415" y="3154680"/>
-            <a:ext cx="10241280" cy="685800"/>
-          </a:xfrm>
-          <a:prstGeom prst="rect">
-            <a:avLst/>
-          </a:prstGeom>
-          <a:noFill/>
-          <a:ln>
-            <a:noFill/>
-          </a:ln>
-        </p:spPr>
-        <p:txBody>
-          <a:bodyPr anchorCtr="0" anchor="t" bIns="0" lIns="0" spcFirstLastPara="1" rIns="0" wrap="square" tIns="0">
-            <a:spAutoFit/>
-          </a:bodyPr>
-          <a:lstStyle/>
-          <a:p>
-            <a:pPr indent="0" lvl="0" marL="0" marR="0" rtl="0" algn="l">
-              <a:spcBef>
-                <a:spcPts val="0"/>
-              </a:spcBef>
-              <a:spcAft>
-                <a:spcPts val="0"/>
-              </a:spcAft>
-              <a:buNone/>
-            </a:pPr>
-            <a:r>
-              <a:rPr b="0" i="0" lang="en-US" sz="2100" u="none" cap="none" strike="noStrike">
-                <a:solidFill>
-                  <a:srgbClr val="F6F7FA"/>
-                </a:solidFill>
-                <a:latin typeface="Arial"/>
-                <a:ea typeface="Arial"/>
-                <a:cs typeface="Arial"/>
-                <a:sym typeface="Arial"/>
-              </a:rPr>
-              <a:t>Rust checks ownership and borrowing while code is compiled</a:t>
-            </a:r>
-            <a:endParaRPr/>
-          </a:p>
-        </p:txBody>
-      </p:sp>
-      <p:sp>
-        <p:nvSpPr>
-          <p:cNvPr id="137" name="Google Shape;137;p16"/>
-          <p:cNvSpPr/>
-          <p:nvPr/>
-        </p:nvSpPr>
-        <p:spPr>
-          <a:xfrm>
-            <a:off x="758952" y="4407408"/>
-            <a:ext cx="100584" cy="100584"/>
-          </a:xfrm>
-          <a:prstGeom prst="rect">
-            <a:avLst/>
-          </a:prstGeom>
-          <a:solidFill>
-            <a:srgbClr val="F08443"/>
-          </a:solidFill>
-          <a:ln>
-            <a:noFill/>
-          </a:ln>
-          <a:effectLst>
-            <a:outerShdw blurRad="40000" rotWithShape="0" dir="5400000" dist="23000">
-              <a:srgbClr val="000000">
-                <a:alpha val="34902"/>
-              </a:srgbClr>
-            </a:outerShdw>
-          </a:effectLst>
-        </p:spPr>
-        <p:txBody>
-          <a:bodyPr anchorCtr="0" anchor="ctr" bIns="45700" lIns="91425" spcFirstLastPara="1" rIns="91425" wrap="square" tIns="45700">
-            <a:noAutofit/>
-          </a:bodyPr>
-          <a:lstStyle/>
-          <a:p>
-            <a:pPr indent="0" lvl="0" marL="0" marR="0" rtl="0" algn="ctr">
-              <a:spcBef>
-                <a:spcPts val="0"/>
-              </a:spcBef>
-              <a:spcAft>
-                <a:spcPts val="0"/>
-              </a:spcAft>
-              <a:buNone/>
-            </a:pPr>
-            <a:r>
-              <a:t/>
-            </a:r>
-            <a:endParaRPr b="0" i="0" sz="1800" u="none" cap="none" strike="noStrike">
-              <a:solidFill>
-                <a:schemeClr val="dk1"/>
-              </a:solidFill>
-              <a:latin typeface="Calibri"/>
-              <a:ea typeface="Calibri"/>
-              <a:cs typeface="Calibri"/>
-              <a:sym typeface="Calibri"/>
-            </a:endParaRPr>
-          </a:p>
-        </p:txBody>
-      </p:sp>
-      <p:sp>
-        <p:nvSpPr>
-          <p:cNvPr id="138" name="Google Shape;138;p16"/>
-          <p:cNvSpPr txBox="1"/>
-          <p:nvPr/>
-        </p:nvSpPr>
-        <p:spPr>
-          <a:xfrm>
-            <a:off x="1042415" y="4297680"/>
-            <a:ext cx="10241280" cy="685800"/>
-          </a:xfrm>
-          <a:prstGeom prst="rect">
-            <a:avLst/>
-          </a:prstGeom>
-          <a:noFill/>
-          <a:ln>
-            <a:noFill/>
-          </a:ln>
-        </p:spPr>
-        <p:txBody>
-          <a:bodyPr anchorCtr="0" anchor="t" bIns="0" lIns="0" spcFirstLastPara="1" rIns="0" wrap="square" tIns="0">
-            <a:spAutoFit/>
-          </a:bodyPr>
-          <a:lstStyle/>
-          <a:p>
-            <a:pPr indent="0" lvl="0" marL="0" marR="0" rtl="0" algn="l">
-              <a:spcBef>
-                <a:spcPts val="0"/>
-              </a:spcBef>
-              <a:spcAft>
-                <a:spcPts val="0"/>
-              </a:spcAft>
-              <a:buNone/>
-            </a:pPr>
-            <a:r>
-              <a:rPr b="0" i="0" lang="en-US" sz="2100" u="none" cap="none" strike="noStrike">
-                <a:solidFill>
-                  <a:srgbClr val="F6F7FA"/>
-                </a:solidFill>
-                <a:latin typeface="Arial"/>
-                <a:ea typeface="Arial"/>
-                <a:cs typeface="Arial"/>
-                <a:sym typeface="Arial"/>
-              </a:rPr>
-              <a:t>This helps catch some bugs before the program runs</a:t>
-            </a:r>
-            <a:endParaRPr/>
-          </a:p>
-        </p:txBody>
-      </p:sp>
-    </p:spTree>
-  </p:cSld>
-  <p:clrMapOvr>
-    <a:masterClrMapping/>
-  </p:clrMapOvr>
-</p:sld>
+          <a:scene3d>
+            <a:camera prst="orthographicFront">
+              <a:rot lat="0" lon="0" rev="0"/>
+            </a:camera>
+            <a:lightRig rig="threePt" dir="t">
+              <a:rot lat="0" lon="0" rev="1200000"/>
+            </a:lightRig>
+          </a:scene3d>
+          <a:sp3d>
+            <a:bevelT w="63500" h="25400"/>
+          </a:sp3d>
+        </a:effectStyle>
+      </a:effectStyleLst>
+      <a:bgFillStyleLst>
+        <a:solidFill>
+          <a:schemeClr val="phClr"/>
+        </a:solidFill>
+        <a:gradFill rotWithShape="1">
+          <a:gsLst>
+            <a:gs pos="0">
+              <a:schemeClr val="phClr">
+                <a:tint val="40000"/>
+                <a:satMod val="350000"/>
+              </a:schemeClr>
+            </a:gs>
+            <a:gs pos="40000">
+              <a:schemeClr val="phClr">
+                <a:tint val="45000"/>
+                <a:shade val="99000"/>
+                <a:satMod val="350000"/>
+              </a:schemeClr>
+            </a:gs>
+            <a:gs pos="100000">
+              <a:schemeClr val="phClr">
+                <a:shade val="20000"/>
+                <a:satMod val="255000"/>
+              </a:schemeClr>
+            </a:gs>
+          </a:gsLst>
+          <a:path path="circle">
+            <a:fillToRect l="50000" t="-80000" r="50000" b="180000"/>
+          </a:path>
+        </a:gradFill>
+        <a:gradFill rotWithShape="1">
+          <a:gsLst>
+            <a:gs pos="0">
+              <a:schemeClr val="phClr">
+                <a:tint val="80000"/>
+                <a:satMod val="300000"/>
+              </a:schemeClr>
+            </a:gs>
+            <a:gs pos="100000">
+              <a:schemeClr val="phClr">
+                <a:shade val="30000"/>
+                <a:satMod val="200000"/>
+              </a:schemeClr>
+            </a:gs>
+          </a:gsLst>
+          <a:path path="circle">
+            <a:fillToRect l="50000" t="50000" r="50000" b="50000"/>
+          </a:path>
+        </a:gradFill>
+      </a:bgFillStyleLst>
+    </a:fmtScheme>
+  </a:themeElements>
+</a:theme>
 </file>
 
-<file path=ppt/slides/slide5.xml><?xml version="1.0" encoding="utf-8"?>
-<p:sld xmlns:a="http://schemas.openxmlformats.org/drawingml/2006/main" xmlns:r="http://schemas.openxmlformats.org/officeDocument/2006/relationships" xmlns:mc="http://schemas.openxmlformats.org/markup-compatibility/2006" xmlns:mv="urn:schemas-microsoft-com:mac:vml" xmlns:p="http://schemas.openxmlformats.org/presentationml/2006/main" xmlns:c="http://schemas.openxmlformats.org/drawingml/2006/chart" xmlns:dgm="http://schemas.openxmlformats.org/drawingml/2006/diagram" xmlns:o="urn:schemas-microsoft-com:office:office" xmlns:v="urn:schemas-microsoft-com:vml" xmlns:pvml="urn:schemas-microsoft-com:office:powerpoint" xmlns:com="http://schemas.openxmlformats.org/drawingml/2006/compatibility" xmlns:p14="http://schemas.microsoft.com/office/powerpoint/2010/main" xmlns:p15="http://schemas.microsoft.com/office/powerpoint/2012/main" xmlns:ahyp="http://schemas.microsoft.com/office/drawing/2018/hyperlinkcolor">
-  <p:cSld>
-    <p:spTree>
-      <p:nvGrpSpPr>
-        <p:cNvPr id="142" name="Shape 142"/>
-        <p:cNvGrpSpPr/>
-        <p:nvPr/>
-      </p:nvGrpSpPr>
-      <p:grpSpPr>
-        <a:xfrm>
-          <a:off x="0" y="0"/>
-          <a:ext cx="0" cy="0"/>
-          <a:chOff x="0" y="0"/>
-          <a:chExt cx="0" cy="0"/>
-        </a:xfrm>
-      </p:grpSpPr>
-      <p:sp>
-        <p:nvSpPr>
-          <p:cNvPr id="143" name="Google Shape;143;p17"/>
-          <p:cNvSpPr/>
-          <p:nvPr/>
-        </p:nvSpPr>
-        <p:spPr>
-          <a:xfrm>
-            <a:off x="0" y="0"/>
-            <a:ext cx="12191695" cy="6858000"/>
-          </a:xfrm>
-          <a:prstGeom prst="rect">
-            <a:avLst/>
-          </a:prstGeom>
-          <a:solidFill>
-            <a:srgbClr val="111B2B"/>
-          </a:solidFill>
-          <a:ln>
-            <a:noFill/>
-          </a:ln>
-          <a:effectLst>
-            <a:outerShdw blurRad="40000" rotWithShape="0" dir="5400000" dist="23000">
-              <a:srgbClr val="000000">
-                <a:alpha val="34902"/>
-              </a:srgbClr>
-            </a:outerShdw>
-          </a:effectLst>
-        </p:spPr>
-        <p:txBody>
-          <a:bodyPr anchorCtr="0" anchor="ctr" bIns="45700" lIns="91425" spcFirstLastPara="1" rIns="91425" wrap="square" tIns="45700">
-            <a:noAutofit/>
-          </a:bodyPr>
-          <a:lstStyle/>
-          <a:p>
-            <a:pPr indent="0" lvl="0" marL="0" marR="0" rtl="0" algn="ctr">
-              <a:spcBef>
-                <a:spcPts val="0"/>
-              </a:spcBef>
-              <a:spcAft>
-                <a:spcPts val="0"/>
-              </a:spcAft>
-              <a:buNone/>
-            </a:pPr>
-            <a:r>
-              <a:t/>
-            </a:r>
-            <a:endParaRPr b="0" i="0" sz="1800" u="none" cap="none" strike="noStrike">
-              <a:solidFill>
-                <a:schemeClr val="dk1"/>
-              </a:solidFill>
-              <a:latin typeface="Calibri"/>
-              <a:ea typeface="Calibri"/>
-              <a:cs typeface="Calibri"/>
-              <a:sym typeface="Calibri"/>
-            </a:endParaRPr>
-          </a:p>
-        </p:txBody>
-      </p:sp>
-      <p:sp>
-        <p:nvSpPr>
-          <p:cNvPr id="144" name="Google Shape;144;p17"/>
-          <p:cNvSpPr/>
-          <p:nvPr/>
-        </p:nvSpPr>
-        <p:spPr>
-          <a:xfrm>
-            <a:off x="411480" y="393192"/>
-            <a:ext cx="73152" cy="429768"/>
-          </a:xfrm>
-          <a:prstGeom prst="rect">
-            <a:avLst/>
-          </a:prstGeom>
-          <a:solidFill>
-            <a:srgbClr val="F08443"/>
-          </a:solidFill>
-          <a:ln>
-            <a:noFill/>
-          </a:ln>
-          <a:effectLst>
-            <a:outerShdw blurRad="40000" rotWithShape="0" dir="5400000" dist="23000">
-              <a:srgbClr val="000000">
-                <a:alpha val="34902"/>
-              </a:srgbClr>
-            </a:outerShdw>
-          </a:effectLst>
-        </p:spPr>
-        <p:txBody>
-          <a:bodyPr anchorCtr="0" anchor="ctr" bIns="45700" lIns="91425" spcFirstLastPara="1" rIns="91425" wrap="square" tIns="45700">
-            <a:noAutofit/>
-          </a:bodyPr>
-          <a:lstStyle/>
-          <a:p>
-            <a:pPr indent="0" lvl="0" marL="0" marR="0" rtl="0" algn="ctr">
-              <a:spcBef>
-                <a:spcPts val="0"/>
-              </a:spcBef>
-              <a:spcAft>
-                <a:spcPts val="0"/>
-              </a:spcAft>
-              <a:buNone/>
-            </a:pPr>
-            <a:r>
-              <a:t/>
-            </a:r>
-            <a:endParaRPr b="0" i="0" sz="1800" u="none" cap="none" strike="noStrike">
-              <a:solidFill>
-                <a:schemeClr val="dk1"/>
-              </a:solidFill>
-              <a:latin typeface="Calibri"/>
-              <a:ea typeface="Calibri"/>
-              <a:cs typeface="Calibri"/>
-              <a:sym typeface="Calibri"/>
-            </a:endParaRPr>
-          </a:p>
-        </p:txBody>
-      </p:sp>
-      <p:sp>
-        <p:nvSpPr>
-          <p:cNvPr id="145" name="Google Shape;145;p17"/>
-          <p:cNvSpPr txBox="1"/>
-          <p:nvPr/>
-        </p:nvSpPr>
-        <p:spPr>
-          <a:xfrm>
-            <a:off x="612648" y="411480"/>
-            <a:ext cx="7315200" cy="274320"/>
-          </a:xfrm>
-          <a:prstGeom prst="rect">
-            <a:avLst/>
-          </a:prstGeom>
-          <a:noFill/>
-          <a:ln>
-            <a:noFill/>
-          </a:ln>
-        </p:spPr>
-        <p:txBody>
-          <a:bodyPr anchorCtr="0" anchor="t" bIns="0" lIns="0" spcFirstLastPara="1" rIns="0" wrap="square" tIns="0">
-            <a:spAutoFit/>
-          </a:bodyPr>
-          <a:lstStyle/>
-          <a:p>
-            <a:pPr indent="0" lvl="0" marL="0" marR="0" rtl="0" algn="l">
-              <a:spcBef>
-                <a:spcPts val="0"/>
-              </a:spcBef>
-              <a:spcAft>
-                <a:spcPts val="0"/>
-              </a:spcAft>
-              <a:buNone/>
-            </a:pPr>
-            <a:r>
-              <a:rPr b="1" i="0" lang="en-US" sz="1100" u="none" cap="none" strike="noStrike">
-                <a:solidFill>
-                  <a:srgbClr val="BDC8D6"/>
-                </a:solidFill>
-                <a:latin typeface="Arial"/>
-                <a:ea typeface="Arial"/>
-                <a:cs typeface="Arial"/>
-                <a:sym typeface="Arial"/>
-              </a:rPr>
-              <a:t>CEP146  /  SOFTWARE DEVELOPMENT CURRENT EVENT</a:t>
-            </a:r>
-            <a:endParaRPr/>
-          </a:p>
-        </p:txBody>
-      </p:sp>
-      <p:sp>
-        <p:nvSpPr>
-          <p:cNvPr id="146" name="Google Shape;146;p17"/>
-          <p:cNvSpPr txBox="1"/>
-          <p:nvPr/>
-        </p:nvSpPr>
-        <p:spPr>
-          <a:xfrm>
-            <a:off x="621792" y="978408"/>
-            <a:ext cx="10972800" cy="731520"/>
-          </a:xfrm>
-          <a:prstGeom prst="rect">
-            <a:avLst/>
-          </a:prstGeom>
-          <a:noFill/>
-          <a:ln>
-            <a:noFill/>
-          </a:ln>
-        </p:spPr>
-        <p:txBody>
-          <a:bodyPr anchorCtr="0" anchor="t" bIns="0" lIns="0" spcFirstLastPara="1" rIns="0" wrap="square" tIns="0">
-            <a:spAutoFit/>
-          </a:bodyPr>
-          <a:lstStyle/>
-          <a:p>
-            <a:pPr indent="0" lvl="0" marL="0" marR="0" rtl="0" algn="l">
-              <a:spcBef>
-                <a:spcPts val="0"/>
-              </a:spcBef>
-              <a:spcAft>
-                <a:spcPts val="0"/>
-              </a:spcAft>
-              <a:buNone/>
-            </a:pPr>
-            <a:r>
-              <a:rPr b="1" i="0" lang="en-US" sz="3100" u="none" cap="none" strike="noStrike">
-                <a:solidFill>
-                  <a:srgbClr val="F6F7FA"/>
-                </a:solidFill>
-                <a:latin typeface="Arial"/>
-                <a:ea typeface="Arial"/>
-                <a:cs typeface="Arial"/>
-                <a:sym typeface="Arial"/>
-              </a:rPr>
-              <a:t>Where is Rust being used?</a:t>
-            </a:r>
-            <a:endParaRPr/>
-          </a:p>
-        </p:txBody>
-      </p:sp>
-      <p:sp>
-        <p:nvSpPr>
-          <p:cNvPr id="147" name="Google Shape;147;p17"/>
-          <p:cNvSpPr txBox="1"/>
-          <p:nvPr/>
-        </p:nvSpPr>
-        <p:spPr>
-          <a:xfrm>
-            <a:off x="9875520" y="6446520"/>
-            <a:ext cx="1828800" cy="182880"/>
-          </a:xfrm>
-          <a:prstGeom prst="rect">
-            <a:avLst/>
-          </a:prstGeom>
-          <a:noFill/>
-          <a:ln>
-            <a:noFill/>
-          </a:ln>
-        </p:spPr>
-        <p:txBody>
-          <a:bodyPr anchorCtr="0" anchor="t" bIns="0" lIns="0" spcFirstLastPara="1" rIns="0" wrap="square" tIns="0">
-            <a:spAutoFit/>
-          </a:bodyPr>
-          <a:lstStyle/>
-          <a:p>
-            <a:pPr indent="0" lvl="0" marL="0" marR="0" rtl="0" algn="l">
-              <a:spcBef>
-                <a:spcPts val="0"/>
-              </a:spcBef>
-              <a:spcAft>
-                <a:spcPts val="0"/>
-              </a:spcAft>
-              <a:buNone/>
-            </a:pPr>
-            <a:r>
-              <a:rPr b="0" i="0" lang="en-US" sz="900" u="none" cap="none" strike="noStrike">
-                <a:solidFill>
-                  <a:srgbClr val="BDC8D6"/>
-                </a:solidFill>
-                <a:latin typeface="Arial"/>
-                <a:ea typeface="Arial"/>
-                <a:cs typeface="Arial"/>
-                <a:sym typeface="Arial"/>
-              </a:rPr>
-              <a:t>05  /  RUST IN 2026</a:t>
-            </a:r>
-            <a:endParaRPr/>
-          </a:p>
-        </p:txBody>
-      </p:sp>
-      <p:sp>
-        <p:nvSpPr>
-          <p:cNvPr id="148" name="Google Shape;148;p17"/>
-          <p:cNvSpPr/>
-          <p:nvPr/>
-        </p:nvSpPr>
-        <p:spPr>
-          <a:xfrm>
-            <a:off x="749808" y="1938528"/>
-            <a:ext cx="2514600" cy="731520"/>
-          </a:xfrm>
-          <a:prstGeom prst="rect">
-            <a:avLst/>
-          </a:prstGeom>
-          <a:solidFill>
-            <a:srgbClr val="1D2B3F"/>
-          </a:solidFill>
-          <a:ln>
-            <a:noFill/>
-          </a:ln>
-          <a:effectLst>
-            <a:outerShdw blurRad="40000" rotWithShape="0" dir="5400000" dist="23000">
-              <a:srgbClr val="000000">
-                <a:alpha val="34902"/>
-              </a:srgbClr>
-            </a:outerShdw>
-          </a:effectLst>
-        </p:spPr>
-        <p:txBody>
-          <a:bodyPr anchorCtr="0" anchor="ctr" bIns="45700" lIns="91425" spcFirstLastPara="1" rIns="91425" wrap="square" tIns="45700">
-            <a:noAutofit/>
-          </a:bodyPr>
-          <a:lstStyle/>
-          <a:p>
-            <a:pPr indent="0" lvl="0" marL="0" marR="0" rtl="0" algn="ctr">
-              <a:spcBef>
-                <a:spcPts val="0"/>
-              </a:spcBef>
-              <a:spcAft>
-                <a:spcPts val="0"/>
-              </a:spcAft>
-              <a:buNone/>
-            </a:pPr>
-            <a:r>
-              <a:t/>
-            </a:r>
-            <a:endParaRPr b="0" i="0" sz="1800" u="none" cap="none" strike="noStrike">
-              <a:solidFill>
-                <a:schemeClr val="dk1"/>
-              </a:solidFill>
-              <a:latin typeface="Calibri"/>
-              <a:ea typeface="Calibri"/>
-              <a:cs typeface="Calibri"/>
-              <a:sym typeface="Calibri"/>
-            </a:endParaRPr>
-          </a:p>
-        </p:txBody>
-      </p:sp>
-      <p:sp>
-        <p:nvSpPr>
-          <p:cNvPr id="149" name="Google Shape;149;p17"/>
-          <p:cNvSpPr txBox="1"/>
-          <p:nvPr/>
-        </p:nvSpPr>
-        <p:spPr>
-          <a:xfrm>
-            <a:off x="950976" y="2093976"/>
-            <a:ext cx="2194560" cy="393192"/>
-          </a:xfrm>
-          <a:prstGeom prst="rect">
-            <a:avLst/>
-          </a:prstGeom>
-          <a:noFill/>
-          <a:ln>
-            <a:noFill/>
-          </a:ln>
-        </p:spPr>
-        <p:txBody>
-          <a:bodyPr anchorCtr="0" anchor="t" bIns="0" lIns="0" spcFirstLastPara="1" rIns="0" wrap="square" tIns="0">
-            <a:spAutoFit/>
-          </a:bodyPr>
-          <a:lstStyle/>
-          <a:p>
-            <a:pPr indent="0" lvl="0" marL="0" marR="0" rtl="0" algn="l">
-              <a:spcBef>
-                <a:spcPts val="0"/>
-              </a:spcBef>
-              <a:spcAft>
-                <a:spcPts val="0"/>
-              </a:spcAft>
-              <a:buNone/>
-            </a:pPr>
-            <a:r>
-              <a:rPr b="1" i="0" lang="en-US" sz="1900" u="none" cap="none" strike="noStrike">
-                <a:solidFill>
-                  <a:srgbClr val="F08443"/>
-                </a:solidFill>
-                <a:latin typeface="Arial"/>
-                <a:ea typeface="Arial"/>
-                <a:cs typeface="Arial"/>
-                <a:sym typeface="Arial"/>
-              </a:rPr>
-              <a:t>Linux</a:t>
-            </a:r>
-            <a:endParaRPr/>
-          </a:p>
-        </p:txBody>
-      </p:sp>
-      <p:sp>
-        <p:nvSpPr>
-          <p:cNvPr id="150" name="Google Shape;150;p17"/>
-          <p:cNvSpPr txBox="1"/>
-          <p:nvPr/>
-        </p:nvSpPr>
-        <p:spPr>
-          <a:xfrm>
-            <a:off x="3547872" y="2057400"/>
-            <a:ext cx="7863840" cy="594360"/>
-          </a:xfrm>
-          <a:prstGeom prst="rect">
-            <a:avLst/>
-          </a:prstGeom>
-          <a:noFill/>
-          <a:ln>
-            <a:noFill/>
-          </a:ln>
-        </p:spPr>
-        <p:txBody>
-          <a:bodyPr anchorCtr="0" anchor="t" bIns="0" lIns="0" spcFirstLastPara="1" rIns="0" wrap="square" tIns="0">
-            <a:spAutoFit/>
-          </a:bodyPr>
-          <a:lstStyle/>
-          <a:p>
-            <a:pPr indent="0" lvl="0" marL="0" marR="0" rtl="0" algn="l">
-              <a:spcBef>
-                <a:spcPts val="0"/>
-              </a:spcBef>
-              <a:spcAft>
-                <a:spcPts val="0"/>
-              </a:spcAft>
-              <a:buNone/>
-            </a:pPr>
-            <a:r>
-              <a:rPr b="0" i="0" lang="en-US" sz="1900" u="none" cap="none" strike="noStrike">
-                <a:solidFill>
-                  <a:srgbClr val="F6F7FA"/>
-                </a:solidFill>
-                <a:latin typeface="Arial"/>
-                <a:ea typeface="Arial"/>
-                <a:cs typeface="Arial"/>
-                <a:sym typeface="Arial"/>
-              </a:rPr>
-              <a:t>Developers can write some kernel components in Rust.</a:t>
-            </a:r>
-            <a:endParaRPr/>
-          </a:p>
-        </p:txBody>
-      </p:sp>
-      <p:sp>
-        <p:nvSpPr>
-          <p:cNvPr id="151" name="Google Shape;151;p17"/>
-          <p:cNvSpPr/>
-          <p:nvPr/>
-        </p:nvSpPr>
-        <p:spPr>
-          <a:xfrm>
-            <a:off x="749808" y="2962656"/>
-            <a:ext cx="2514600" cy="731520"/>
-          </a:xfrm>
-          <a:prstGeom prst="rect">
-            <a:avLst/>
-          </a:prstGeom>
-          <a:solidFill>
-            <a:srgbClr val="1D2B3F"/>
-          </a:solidFill>
-          <a:ln>
-            <a:noFill/>
-          </a:ln>
-          <a:effectLst>
-            <a:outerShdw blurRad="40000" rotWithShape="0" dir="5400000" dist="23000">
-              <a:srgbClr val="000000">
-                <a:alpha val="34902"/>
-              </a:srgbClr>
-            </a:outerShdw>
-          </a:effectLst>
-        </p:spPr>
-        <p:txBody>
-          <a:bodyPr anchorCtr="0" anchor="ctr" bIns="45700" lIns="91425" spcFirstLastPara="1" rIns="91425" wrap="square" tIns="45700">
-            <a:noAutofit/>
-          </a:bodyPr>
-          <a:lstStyle/>
-          <a:p>
-            <a:pPr indent="0" lvl="0" marL="0" marR="0" rtl="0" algn="ctr">
-              <a:spcBef>
-                <a:spcPts val="0"/>
-              </a:spcBef>
-              <a:spcAft>
-                <a:spcPts val="0"/>
-              </a:spcAft>
-              <a:buNone/>
-            </a:pPr>
-            <a:r>
-              <a:t/>
-            </a:r>
-            <a:endParaRPr b="0" i="0" sz="1800" u="none" cap="none" strike="noStrike">
-              <a:solidFill>
-                <a:schemeClr val="dk1"/>
-              </a:solidFill>
-              <a:latin typeface="Calibri"/>
-              <a:ea typeface="Calibri"/>
-              <a:cs typeface="Calibri"/>
-              <a:sym typeface="Calibri"/>
-            </a:endParaRPr>
-          </a:p>
-        </p:txBody>
-      </p:sp>
-      <p:sp>
-        <p:nvSpPr>
-          <p:cNvPr id="152" name="Google Shape;152;p17"/>
-          <p:cNvSpPr txBox="1"/>
-          <p:nvPr/>
-        </p:nvSpPr>
-        <p:spPr>
-          <a:xfrm>
-            <a:off x="950976" y="3118104"/>
-            <a:ext cx="2194560" cy="393192"/>
-          </a:xfrm>
-          <a:prstGeom prst="rect">
-            <a:avLst/>
-          </a:prstGeom>
-          <a:noFill/>
-          <a:ln>
-            <a:noFill/>
-          </a:ln>
-        </p:spPr>
-        <p:txBody>
-          <a:bodyPr anchorCtr="0" anchor="t" bIns="0" lIns="0" spcFirstLastPara="1" rIns="0" wrap="square" tIns="0">
-            <a:spAutoFit/>
-          </a:bodyPr>
-          <a:lstStyle/>
-          <a:p>
-            <a:pPr indent="0" lvl="0" marL="0" marR="0" rtl="0" algn="l">
-              <a:spcBef>
-                <a:spcPts val="0"/>
-              </a:spcBef>
-              <a:spcAft>
-                <a:spcPts val="0"/>
-              </a:spcAft>
-              <a:buNone/>
-            </a:pPr>
-            <a:r>
-              <a:rPr b="1" i="0" lang="en-US" sz="1900" u="none" cap="none" strike="noStrike">
-                <a:solidFill>
-                  <a:srgbClr val="F08443"/>
-                </a:solidFill>
-                <a:latin typeface="Arial"/>
-                <a:ea typeface="Arial"/>
-                <a:cs typeface="Arial"/>
-                <a:sym typeface="Arial"/>
-              </a:rPr>
-              <a:t>Google / Android</a:t>
-            </a:r>
-            <a:endParaRPr/>
-          </a:p>
-        </p:txBody>
-      </p:sp>
-      <p:sp>
-        <p:nvSpPr>
-          <p:cNvPr id="153" name="Google Shape;153;p17"/>
-          <p:cNvSpPr txBox="1"/>
-          <p:nvPr/>
-        </p:nvSpPr>
-        <p:spPr>
-          <a:xfrm>
-            <a:off x="3547872" y="3081528"/>
-            <a:ext cx="7863840" cy="594360"/>
-          </a:xfrm>
-          <a:prstGeom prst="rect">
-            <a:avLst/>
-          </a:prstGeom>
-          <a:noFill/>
-          <a:ln>
-            <a:noFill/>
-          </a:ln>
-        </p:spPr>
-        <p:txBody>
-          <a:bodyPr anchorCtr="0" anchor="t" bIns="0" lIns="0" spcFirstLastPara="1" rIns="0" wrap="square" tIns="0">
-            <a:spAutoFit/>
-          </a:bodyPr>
-          <a:lstStyle/>
-          <a:p>
-            <a:pPr indent="0" lvl="0" marL="0" marR="0" rtl="0" algn="l">
-              <a:spcBef>
-                <a:spcPts val="0"/>
-              </a:spcBef>
-              <a:spcAft>
-                <a:spcPts val="0"/>
-              </a:spcAft>
-              <a:buNone/>
-            </a:pPr>
-            <a:r>
-              <a:rPr b="0" i="0" lang="en-US" sz="1900" u="none" cap="none" strike="noStrike">
-                <a:solidFill>
-                  <a:srgbClr val="F6F7FA"/>
-                </a:solidFill>
-                <a:latin typeface="Arial"/>
-                <a:ea typeface="Arial"/>
-                <a:cs typeface="Arial"/>
-                <a:sym typeface="Arial"/>
-              </a:rPr>
-              <a:t>Rust is used in security-sensitive Android code.</a:t>
-            </a:r>
-            <a:endParaRPr/>
-          </a:p>
-        </p:txBody>
-      </p:sp>
-      <p:sp>
-        <p:nvSpPr>
-          <p:cNvPr id="154" name="Google Shape;154;p17"/>
-          <p:cNvSpPr/>
-          <p:nvPr/>
-        </p:nvSpPr>
-        <p:spPr>
-          <a:xfrm>
-            <a:off x="749808" y="3986784"/>
-            <a:ext cx="2514600" cy="731520"/>
-          </a:xfrm>
-          <a:prstGeom prst="rect">
-            <a:avLst/>
-          </a:prstGeom>
-          <a:solidFill>
-            <a:srgbClr val="1D2B3F"/>
-          </a:solidFill>
-          <a:ln>
-            <a:noFill/>
-          </a:ln>
-          <a:effectLst>
-            <a:outerShdw blurRad="40000" rotWithShape="0" dir="5400000" dist="23000">
-              <a:srgbClr val="000000">
-                <a:alpha val="34902"/>
-              </a:srgbClr>
-            </a:outerShdw>
-          </a:effectLst>
-        </p:spPr>
-        <p:txBody>
-          <a:bodyPr anchorCtr="0" anchor="ctr" bIns="45700" lIns="91425" spcFirstLastPara="1" rIns="91425" wrap="square" tIns="45700">
-            <a:noAutofit/>
-          </a:bodyPr>
-          <a:lstStyle/>
-          <a:p>
-            <a:pPr indent="0" lvl="0" marL="0" marR="0" rtl="0" algn="ctr">
-              <a:spcBef>
-                <a:spcPts val="0"/>
-              </a:spcBef>
-              <a:spcAft>
-                <a:spcPts val="0"/>
-              </a:spcAft>
-              <a:buNone/>
-            </a:pPr>
-            <a:r>
-              <a:t/>
-            </a:r>
-            <a:endParaRPr b="0" i="0" sz="1800" u="none" cap="none" strike="noStrike">
-              <a:solidFill>
-                <a:schemeClr val="dk1"/>
-              </a:solidFill>
-              <a:latin typeface="Calibri"/>
-              <a:ea typeface="Calibri"/>
-              <a:cs typeface="Calibri"/>
-              <a:sym typeface="Calibri"/>
-            </a:endParaRPr>
-          </a:p>
-        </p:txBody>
-      </p:sp>
-      <p:sp>
-        <p:nvSpPr>
-          <p:cNvPr id="155" name="Google Shape;155;p17"/>
-          <p:cNvSpPr txBox="1"/>
-          <p:nvPr/>
-        </p:nvSpPr>
-        <p:spPr>
-          <a:xfrm>
-            <a:off x="950976" y="4142232"/>
-            <a:ext cx="2194560" cy="393192"/>
-          </a:xfrm>
-          <a:prstGeom prst="rect">
-            <a:avLst/>
-          </a:prstGeom>
-          <a:noFill/>
-          <a:ln>
-            <a:noFill/>
-          </a:ln>
-        </p:spPr>
-        <p:txBody>
-          <a:bodyPr anchorCtr="0" anchor="t" bIns="0" lIns="0" spcFirstLastPara="1" rIns="0" wrap="square" tIns="0">
-            <a:spAutoFit/>
-          </a:bodyPr>
-          <a:lstStyle/>
-          <a:p>
-            <a:pPr indent="0" lvl="0" marL="0" marR="0" rtl="0" algn="l">
-              <a:spcBef>
-                <a:spcPts val="0"/>
-              </a:spcBef>
-              <a:spcAft>
-                <a:spcPts val="0"/>
-              </a:spcAft>
-              <a:buNone/>
-            </a:pPr>
-            <a:r>
-              <a:rPr b="1" i="0" lang="en-US" sz="1900" u="none" cap="none" strike="noStrike">
-                <a:solidFill>
-                  <a:srgbClr val="F08443"/>
-                </a:solidFill>
-                <a:latin typeface="Arial"/>
-                <a:ea typeface="Arial"/>
-                <a:cs typeface="Arial"/>
-                <a:sym typeface="Arial"/>
-              </a:rPr>
-              <a:t>Microsoft</a:t>
-            </a:r>
-            <a:endParaRPr/>
-          </a:p>
-        </p:txBody>
-      </p:sp>
-      <p:sp>
-        <p:nvSpPr>
-          <p:cNvPr id="156" name="Google Shape;156;p17"/>
-          <p:cNvSpPr txBox="1"/>
-          <p:nvPr/>
-        </p:nvSpPr>
-        <p:spPr>
-          <a:xfrm>
-            <a:off x="3547872" y="4105656"/>
-            <a:ext cx="7863840" cy="594360"/>
-          </a:xfrm>
-          <a:prstGeom prst="rect">
-            <a:avLst/>
-          </a:prstGeom>
-          <a:noFill/>
-          <a:ln>
-            <a:noFill/>
-          </a:ln>
-        </p:spPr>
-        <p:txBody>
-          <a:bodyPr anchorCtr="0" anchor="t" bIns="0" lIns="0" spcFirstLastPara="1" rIns="0" wrap="square" tIns="0">
-            <a:spAutoFit/>
-          </a:bodyPr>
-          <a:lstStyle/>
-          <a:p>
-            <a:pPr indent="0" lvl="0" marL="0" marR="0" rtl="0" algn="l">
-              <a:spcBef>
-                <a:spcPts val="0"/>
-              </a:spcBef>
-              <a:spcAft>
-                <a:spcPts val="0"/>
-              </a:spcAft>
-              <a:buNone/>
-            </a:pPr>
-            <a:r>
-              <a:rPr b="0" i="0" lang="en-US" sz="1900" u="none" cap="none" strike="noStrike">
-                <a:solidFill>
-                  <a:srgbClr val="F6F7FA"/>
-                </a:solidFill>
-                <a:latin typeface="Arial"/>
-                <a:ea typeface="Arial"/>
-                <a:cs typeface="Arial"/>
-                <a:sym typeface="Arial"/>
-              </a:rPr>
-              <a:t>Rust is being explored and used in some systems work.</a:t>
-            </a:r>
-            <a:endParaRPr/>
-          </a:p>
-        </p:txBody>
-      </p:sp>
-      <p:sp>
-        <p:nvSpPr>
-          <p:cNvPr id="157" name="Google Shape;157;p17"/>
-          <p:cNvSpPr/>
-          <p:nvPr/>
-        </p:nvSpPr>
-        <p:spPr>
-          <a:xfrm>
-            <a:off x="749808" y="5010912"/>
-            <a:ext cx="2514600" cy="731520"/>
-          </a:xfrm>
-          <a:prstGeom prst="rect">
-            <a:avLst/>
-          </a:prstGeom>
-          <a:solidFill>
-            <a:srgbClr val="1D2B3F"/>
-          </a:solidFill>
-          <a:ln>
-            <a:noFill/>
-          </a:ln>
-          <a:effectLst>
-            <a:outerShdw blurRad="40000" rotWithShape="0" dir="5400000" dist="23000">
-              <a:srgbClr val="000000">
-                <a:alpha val="34902"/>
-              </a:srgbClr>
-            </a:outerShdw>
-          </a:effectLst>
-        </p:spPr>
-        <p:txBody>
-          <a:bodyPr anchorCtr="0" anchor="ctr" bIns="45700" lIns="91425" spcFirstLastPara="1" rIns="91425" wrap="square" tIns="45700">
-            <a:noAutofit/>
-          </a:bodyPr>
-          <a:lstStyle/>
-          <a:p>
-            <a:pPr indent="0" lvl="0" marL="0" marR="0" rtl="0" algn="ctr">
-              <a:spcBef>
-                <a:spcPts val="0"/>
-              </a:spcBef>
-              <a:spcAft>
-                <a:spcPts val="0"/>
-              </a:spcAft>
-              <a:buNone/>
-            </a:pPr>
-            <a:r>
-              <a:t/>
-            </a:r>
-            <a:endParaRPr b="0" i="0" sz="1800" u="none" cap="none" strike="noStrike">
-              <a:solidFill>
-                <a:schemeClr val="dk1"/>
-              </a:solidFill>
-              <a:latin typeface="Calibri"/>
-              <a:ea typeface="Calibri"/>
-              <a:cs typeface="Calibri"/>
-              <a:sym typeface="Calibri"/>
-            </a:endParaRPr>
-          </a:p>
-        </p:txBody>
-      </p:sp>
-      <p:sp>
-        <p:nvSpPr>
-          <p:cNvPr id="158" name="Google Shape;158;p17"/>
-          <p:cNvSpPr txBox="1"/>
-          <p:nvPr/>
-        </p:nvSpPr>
-        <p:spPr>
-          <a:xfrm>
-            <a:off x="950976" y="5166360"/>
-            <a:ext cx="2194560" cy="393192"/>
-          </a:xfrm>
-          <a:prstGeom prst="rect">
-            <a:avLst/>
-          </a:prstGeom>
-          <a:noFill/>
-          <a:ln>
-            <a:noFill/>
-          </a:ln>
-        </p:spPr>
-        <p:txBody>
-          <a:bodyPr anchorCtr="0" anchor="t" bIns="0" lIns="0" spcFirstLastPara="1" rIns="0" wrap="square" tIns="0">
-            <a:spAutoFit/>
-          </a:bodyPr>
-          <a:lstStyle/>
-          <a:p>
-            <a:pPr indent="0" lvl="0" marL="0" marR="0" rtl="0" algn="l">
-              <a:spcBef>
-                <a:spcPts val="0"/>
-              </a:spcBef>
-              <a:spcAft>
-                <a:spcPts val="0"/>
-              </a:spcAft>
-              <a:buNone/>
-            </a:pPr>
-            <a:r>
-              <a:rPr b="1" i="0" lang="en-US" sz="1900" u="none" cap="none" strike="noStrike">
-                <a:solidFill>
-                  <a:srgbClr val="F08443"/>
-                </a:solidFill>
-                <a:latin typeface="Arial"/>
-                <a:ea typeface="Arial"/>
-                <a:cs typeface="Arial"/>
-                <a:sym typeface="Arial"/>
-              </a:rPr>
-              <a:t>AWS</a:t>
-            </a:r>
-            <a:endParaRPr/>
-          </a:p>
-        </p:txBody>
-      </p:sp>
-      <p:sp>
-        <p:nvSpPr>
-          <p:cNvPr id="159" name="Google Shape;159;p17"/>
-          <p:cNvSpPr txBox="1"/>
-          <p:nvPr/>
-        </p:nvSpPr>
-        <p:spPr>
-          <a:xfrm>
-            <a:off x="3547872" y="5129784"/>
-            <a:ext cx="7863840" cy="594360"/>
-          </a:xfrm>
-          <a:prstGeom prst="rect">
-            <a:avLst/>
-          </a:prstGeom>
-          <a:noFill/>
-          <a:ln>
-            <a:noFill/>
-          </a:ln>
-        </p:spPr>
-        <p:txBody>
-          <a:bodyPr anchorCtr="0" anchor="t" bIns="0" lIns="0" spcFirstLastPara="1" rIns="0" wrap="square" tIns="0">
-            <a:spAutoFit/>
-          </a:bodyPr>
-          <a:lstStyle/>
-          <a:p>
-            <a:pPr indent="0" lvl="0" marL="0" marR="0" rtl="0" algn="l">
-              <a:spcBef>
-                <a:spcPts val="0"/>
-              </a:spcBef>
-              <a:spcAft>
-                <a:spcPts val="0"/>
-              </a:spcAft>
-              <a:buNone/>
-            </a:pPr>
-            <a:r>
-              <a:rPr b="0" i="0" lang="en-US" sz="1900" u="none" cap="none" strike="noStrike">
-                <a:solidFill>
-                  <a:srgbClr val="F6F7FA"/>
-                </a:solidFill>
-                <a:latin typeface="Arial"/>
-                <a:ea typeface="Arial"/>
-                <a:cs typeface="Arial"/>
-                <a:sym typeface="Arial"/>
-              </a:rPr>
-              <a:t>Rust powers projects such as Firecracker.</a:t>
-            </a:r>
-            <a:endParaRPr/>
-          </a:p>
-        </p:txBody>
-      </p:sp>
-    </p:spTree>
-  </p:cSld>
-  <p:clrMapOvr>
-    <a:masterClrMapping/>
-  </p:clrMapOvr>
-</p:sld>
-</file>
-
-<file path=ppt/slides/slide6.xml><?xml version="1.0" encoding="utf-8"?>
-<p:sld xmlns:a="http://schemas.openxmlformats.org/drawingml/2006/main" xmlns:r="http://schemas.openxmlformats.org/officeDocument/2006/relationships" xmlns:mc="http://schemas.openxmlformats.org/markup-compatibility/2006" xmlns:mv="urn:schemas-microsoft-com:mac:vml" xmlns:p="http://schemas.openxmlformats.org/presentationml/2006/main" xmlns:c="http://schemas.openxmlformats.org/drawingml/2006/chart" xmlns:dgm="http://schemas.openxmlformats.org/drawingml/2006/diagram" xmlns:o="urn:schemas-microsoft-com:office:office" xmlns:v="urn:schemas-microsoft-com:vml" xmlns:pvml="urn:schemas-microsoft-com:office:powerpoint" xmlns:com="http://schemas.openxmlformats.org/drawingml/2006/compatibility" xmlns:p14="http://schemas.microsoft.com/office/powerpoint/2010/main" xmlns:p15="http://schemas.microsoft.com/office/powerpoint/2012/main" xmlns:ahyp="http://schemas.microsoft.com/office/drawing/2018/hyperlinkcolor">
-  <p:cSld>
-    <p:spTree>
-      <p:nvGrpSpPr>
-        <p:cNvPr id="163" name="Shape 163"/>
-        <p:cNvGrpSpPr/>
-        <p:nvPr/>
-      </p:nvGrpSpPr>
-      <p:grpSpPr>
-        <a:xfrm>
-          <a:off x="0" y="0"/>
-          <a:ext cx="0" cy="0"/>
-          <a:chOff x="0" y="0"/>
-          <a:chExt cx="0" cy="0"/>
-        </a:xfrm>
-      </p:grpSpPr>
-      <p:sp>
-        <p:nvSpPr>
-          <p:cNvPr id="164" name="Google Shape;164;p18"/>
-          <p:cNvSpPr/>
-          <p:nvPr/>
-        </p:nvSpPr>
-        <p:spPr>
-          <a:xfrm>
-            <a:off x="0" y="0"/>
-            <a:ext cx="12191695" cy="6858000"/>
-          </a:xfrm>
-          <a:prstGeom prst="rect">
-            <a:avLst/>
-          </a:prstGeom>
-          <a:solidFill>
-            <a:srgbClr val="111B2B"/>
-          </a:solidFill>
-          <a:ln>
-            <a:noFill/>
-          </a:ln>
-          <a:effectLst>
-            <a:outerShdw blurRad="40000" rotWithShape="0" dir="5400000" dist="23000">
-              <a:srgbClr val="000000">
-                <a:alpha val="34902"/>
-              </a:srgbClr>
-            </a:outerShdw>
-          </a:effectLst>
-        </p:spPr>
-        <p:txBody>
-          <a:bodyPr anchorCtr="0" anchor="ctr" bIns="45700" lIns="91425" spcFirstLastPara="1" rIns="91425" wrap="square" tIns="45700">
-            <a:noAutofit/>
-          </a:bodyPr>
-          <a:lstStyle/>
-          <a:p>
-            <a:pPr indent="0" lvl="0" marL="0" marR="0" rtl="0" algn="ctr">
-              <a:spcBef>
-                <a:spcPts val="0"/>
-              </a:spcBef>
-              <a:spcAft>
-                <a:spcPts val="0"/>
-              </a:spcAft>
-              <a:buNone/>
-            </a:pPr>
-            <a:r>
-              <a:t/>
-            </a:r>
-            <a:endParaRPr b="0" i="0" sz="1800" u="none" cap="none" strike="noStrike">
-              <a:solidFill>
-                <a:schemeClr val="dk1"/>
-              </a:solidFill>
-              <a:latin typeface="Calibri"/>
-              <a:ea typeface="Calibri"/>
-              <a:cs typeface="Calibri"/>
-              <a:sym typeface="Calibri"/>
-            </a:endParaRPr>
-          </a:p>
-        </p:txBody>
-      </p:sp>
-      <p:sp>
-        <p:nvSpPr>
-          <p:cNvPr id="165" name="Google Shape;165;p18"/>
-          <p:cNvSpPr/>
-          <p:nvPr/>
-        </p:nvSpPr>
-        <p:spPr>
-          <a:xfrm>
-            <a:off x="411480" y="393192"/>
-            <a:ext cx="73152" cy="429768"/>
-          </a:xfrm>
-          <a:prstGeom prst="rect">
-            <a:avLst/>
-          </a:prstGeom>
-          <a:solidFill>
-            <a:srgbClr val="F08443"/>
-          </a:solidFill>
-          <a:ln>
-            <a:noFill/>
-          </a:ln>
-          <a:effectLst>
-            <a:outerShdw blurRad="40000" rotWithShape="0" dir="5400000" dist="23000">
-              <a:srgbClr val="000000">
-                <a:alpha val="34902"/>
-              </a:srgbClr>
-            </a:outerShdw>
-          </a:effectLst>
-        </p:spPr>
-        <p:txBody>
-          <a:bodyPr anchorCtr="0" anchor="ctr" bIns="45700" lIns="91425" spcFirstLastPara="1" rIns="91425" wrap="square" tIns="45700">
-            <a:noAutofit/>
-          </a:bodyPr>
-          <a:lstStyle/>
-          <a:p>
-            <a:pPr indent="0" lvl="0" marL="0" marR="0" rtl="0" algn="ctr">
-              <a:spcBef>
-                <a:spcPts val="0"/>
-              </a:spcBef>
-              <a:spcAft>
-                <a:spcPts val="0"/>
-              </a:spcAft>
-              <a:buNone/>
-            </a:pPr>
-            <a:r>
-              <a:t/>
-            </a:r>
-            <a:endParaRPr b="0" i="0" sz="1800" u="none" cap="none" strike="noStrike">
-              <a:solidFill>
-                <a:schemeClr val="dk1"/>
-              </a:solidFill>
-              <a:latin typeface="Calibri"/>
-              <a:ea typeface="Calibri"/>
-              <a:cs typeface="Calibri"/>
-              <a:sym typeface="Calibri"/>
-            </a:endParaRPr>
-          </a:p>
-        </p:txBody>
-      </p:sp>
-      <p:sp>
-        <p:nvSpPr>
-          <p:cNvPr id="166" name="Google Shape;166;p18"/>
-          <p:cNvSpPr txBox="1"/>
-          <p:nvPr/>
-        </p:nvSpPr>
-        <p:spPr>
-          <a:xfrm>
-            <a:off x="612648" y="411480"/>
-            <a:ext cx="7315200" cy="274320"/>
-          </a:xfrm>
-          <a:prstGeom prst="rect">
-            <a:avLst/>
-          </a:prstGeom>
-          <a:noFill/>
-          <a:ln>
-            <a:noFill/>
-          </a:ln>
-        </p:spPr>
-        <p:txBody>
-          <a:bodyPr anchorCtr="0" anchor="t" bIns="0" lIns="0" spcFirstLastPara="1" rIns="0" wrap="square" tIns="0">
-            <a:spAutoFit/>
-          </a:bodyPr>
-          <a:lstStyle/>
-          <a:p>
-            <a:pPr indent="0" lvl="0" marL="0" marR="0" rtl="0" algn="l">
-              <a:spcBef>
-                <a:spcPts val="0"/>
-              </a:spcBef>
-              <a:spcAft>
-                <a:spcPts val="0"/>
-              </a:spcAft>
-              <a:buNone/>
-            </a:pPr>
-            <a:r>
-              <a:rPr b="1" i="0" lang="en-US" sz="1100" u="none" cap="none" strike="noStrike">
-                <a:solidFill>
-                  <a:srgbClr val="BDC8D6"/>
-                </a:solidFill>
-                <a:latin typeface="Arial"/>
-                <a:ea typeface="Arial"/>
-                <a:cs typeface="Arial"/>
-                <a:sym typeface="Arial"/>
-              </a:rPr>
-              <a:t>CEP146  /  SOFTWARE DEVELOPMENT CURRENT EVENT</a:t>
-            </a:r>
-            <a:endParaRPr/>
-          </a:p>
-        </p:txBody>
-      </p:sp>
-      <p:sp>
-        <p:nvSpPr>
-          <p:cNvPr id="167" name="Google Shape;167;p18"/>
-          <p:cNvSpPr txBox="1"/>
-          <p:nvPr/>
-        </p:nvSpPr>
-        <p:spPr>
-          <a:xfrm>
-            <a:off x="621792" y="978408"/>
-            <a:ext cx="10972800" cy="731520"/>
-          </a:xfrm>
-          <a:prstGeom prst="rect">
-            <a:avLst/>
-          </a:prstGeom>
-          <a:noFill/>
-          <a:ln>
-            <a:noFill/>
-          </a:ln>
-        </p:spPr>
-        <p:txBody>
-          <a:bodyPr anchorCtr="0" anchor="t" bIns="0" lIns="0" spcFirstLastPara="1" rIns="0" wrap="square" tIns="0">
-            <a:spAutoFit/>
-          </a:bodyPr>
-          <a:lstStyle/>
-          <a:p>
-            <a:pPr indent="0" lvl="0" marL="0" marR="0" rtl="0" algn="l">
-              <a:spcBef>
-                <a:spcPts val="0"/>
-              </a:spcBef>
-              <a:spcAft>
-                <a:spcPts val="0"/>
-              </a:spcAft>
-              <a:buNone/>
-            </a:pPr>
-            <a:r>
-              <a:rPr b="1" i="0" lang="en-US" sz="3100" u="none" cap="none" strike="noStrike">
-                <a:solidFill>
-                  <a:srgbClr val="F6F7FA"/>
-                </a:solidFill>
-                <a:latin typeface="Arial"/>
-                <a:ea typeface="Arial"/>
-                <a:cs typeface="Arial"/>
-                <a:sym typeface="Arial"/>
-              </a:rPr>
-              <a:t>Challenges and final thoughts</a:t>
-            </a:r>
-            <a:endParaRPr/>
-          </a:p>
-        </p:txBody>
-      </p:sp>
-      <p:sp>
-        <p:nvSpPr>
-          <p:cNvPr id="168" name="Google Shape;168;p18"/>
-          <p:cNvSpPr txBox="1"/>
-          <p:nvPr/>
-        </p:nvSpPr>
-        <p:spPr>
-          <a:xfrm>
-            <a:off x="9875520" y="6446520"/>
-            <a:ext cx="1828800" cy="182880"/>
-          </a:xfrm>
-          <a:prstGeom prst="rect">
-            <a:avLst/>
-          </a:prstGeom>
-          <a:noFill/>
-          <a:ln>
-            <a:noFill/>
-          </a:ln>
-        </p:spPr>
-        <p:txBody>
-          <a:bodyPr anchorCtr="0" anchor="t" bIns="0" lIns="0" spcFirstLastPara="1" rIns="0" wrap="square" tIns="0">
-            <a:spAutoFit/>
-          </a:bodyPr>
-          <a:lstStyle/>
-          <a:p>
-            <a:pPr indent="0" lvl="0" marL="0" marR="0" rtl="0" algn="l">
-              <a:spcBef>
-                <a:spcPts val="0"/>
-              </a:spcBef>
-              <a:spcAft>
-                <a:spcPts val="0"/>
-              </a:spcAft>
-              <a:buNone/>
-            </a:pPr>
-            <a:r>
-              <a:rPr b="0" i="0" lang="en-US" sz="900" u="none" cap="none" strike="noStrike">
-                <a:solidFill>
-                  <a:srgbClr val="BDC8D6"/>
-                </a:solidFill>
-                <a:latin typeface="Arial"/>
-                <a:ea typeface="Arial"/>
-                <a:cs typeface="Arial"/>
-                <a:sym typeface="Arial"/>
-              </a:rPr>
-              <a:t>06  /  RUST IN 2026</a:t>
-            </a:r>
-            <a:endParaRPr/>
-          </a:p>
-        </p:txBody>
-      </p:sp>
-      <p:sp>
-        <p:nvSpPr>
-          <p:cNvPr id="169" name="Google Shape;169;p18"/>
-          <p:cNvSpPr/>
-          <p:nvPr/>
-        </p:nvSpPr>
-        <p:spPr>
-          <a:xfrm>
-            <a:off x="758952" y="2103120"/>
-            <a:ext cx="100584" cy="100584"/>
-          </a:xfrm>
-          <a:prstGeom prst="rect">
-            <a:avLst/>
-          </a:prstGeom>
-          <a:solidFill>
-            <a:srgbClr val="F08443"/>
-          </a:solidFill>
-          <a:ln>
-            <a:noFill/>
-          </a:ln>
-          <a:effectLst>
-            <a:outerShdw blurRad="40000" rotWithShape="0" dir="5400000" dist="23000">
-              <a:srgbClr val="000000">
-                <a:alpha val="34902"/>
-              </a:srgbClr>
-            </a:outerShdw>
-          </a:effectLst>
-        </p:spPr>
-        <p:txBody>
-          <a:bodyPr anchorCtr="0" anchor="ctr" bIns="45700" lIns="91425" spcFirstLastPara="1" rIns="91425" wrap="square" tIns="45700">
-            <a:noAutofit/>
-          </a:bodyPr>
-          <a:lstStyle/>
-          <a:p>
-            <a:pPr indent="0" lvl="0" marL="0" marR="0" rtl="0" algn="ctr">
-              <a:spcBef>
-                <a:spcPts val="0"/>
-              </a:spcBef>
-              <a:spcAft>
-                <a:spcPts val="0"/>
-              </a:spcAft>
-              <a:buNone/>
-            </a:pPr>
-            <a:r>
-              <a:t/>
-            </a:r>
-            <a:endParaRPr b="0" i="0" sz="1800" u="none" cap="none" strike="noStrike">
-              <a:solidFill>
-                <a:schemeClr val="dk1"/>
-              </a:solidFill>
-              <a:latin typeface="Calibri"/>
-              <a:ea typeface="Calibri"/>
-              <a:cs typeface="Calibri"/>
-              <a:sym typeface="Calibri"/>
-            </a:endParaRPr>
-          </a:p>
-        </p:txBody>
-      </p:sp>
-      <p:sp>
-        <p:nvSpPr>
-          <p:cNvPr id="170" name="Google Shape;170;p18"/>
-          <p:cNvSpPr txBox="1"/>
-          <p:nvPr/>
-        </p:nvSpPr>
-        <p:spPr>
-          <a:xfrm>
-            <a:off x="1042415" y="1993392"/>
-            <a:ext cx="10241280" cy="685800"/>
-          </a:xfrm>
-          <a:prstGeom prst="rect">
-            <a:avLst/>
-          </a:prstGeom>
-          <a:noFill/>
-          <a:ln>
-            <a:noFill/>
-          </a:ln>
-        </p:spPr>
-        <p:txBody>
-          <a:bodyPr anchorCtr="0" anchor="t" bIns="0" lIns="0" spcFirstLastPara="1" rIns="0" wrap="square" tIns="0">
-            <a:spAutoFit/>
-          </a:bodyPr>
-          <a:lstStyle/>
-          <a:p>
-            <a:pPr indent="0" lvl="0" marL="0" marR="0" rtl="0" algn="l">
-              <a:spcBef>
-                <a:spcPts val="0"/>
-              </a:spcBef>
-              <a:spcAft>
-                <a:spcPts val="0"/>
-              </a:spcAft>
-              <a:buNone/>
-            </a:pPr>
-            <a:r>
-              <a:rPr b="0" i="0" lang="en-US" sz="2000" u="none" cap="none" strike="noStrike">
-                <a:solidFill>
-                  <a:srgbClr val="F6F7FA"/>
-                </a:solidFill>
-                <a:latin typeface="Arial"/>
-                <a:ea typeface="Arial"/>
-                <a:cs typeface="Arial"/>
-                <a:sym typeface="Arial"/>
-              </a:rPr>
-              <a:t>Rust can be difficult to learn, especially ownership rules</a:t>
-            </a:r>
-            <a:endParaRPr/>
-          </a:p>
-        </p:txBody>
-      </p:sp>
-      <p:sp>
-        <p:nvSpPr>
-          <p:cNvPr id="171" name="Google Shape;171;p18"/>
-          <p:cNvSpPr/>
-          <p:nvPr/>
-        </p:nvSpPr>
-        <p:spPr>
-          <a:xfrm>
-            <a:off x="758952" y="3072384"/>
-            <a:ext cx="100584" cy="100584"/>
-          </a:xfrm>
-          <a:prstGeom prst="rect">
-            <a:avLst/>
-          </a:prstGeom>
-          <a:solidFill>
-            <a:srgbClr val="F08443"/>
-          </a:solidFill>
-          <a:ln>
-            <a:noFill/>
-          </a:ln>
-          <a:effectLst>
-            <a:outerShdw blurRad="40000" rotWithShape="0" dir="5400000" dist="23000">
-              <a:srgbClr val="000000">
-                <a:alpha val="34902"/>
-              </a:srgbClr>
-            </a:outerShdw>
-          </a:effectLst>
-        </p:spPr>
-        <p:txBody>
-          <a:bodyPr anchorCtr="0" anchor="ctr" bIns="45700" lIns="91425" spcFirstLastPara="1" rIns="91425" wrap="square" tIns="45700">
-            <a:noAutofit/>
-          </a:bodyPr>
-          <a:lstStyle/>
-          <a:p>
-            <a:pPr indent="0" lvl="0" marL="0" marR="0" rtl="0" algn="ctr">
-              <a:spcBef>
-                <a:spcPts val="0"/>
-              </a:spcBef>
-              <a:spcAft>
-                <a:spcPts val="0"/>
-              </a:spcAft>
-              <a:buNone/>
-            </a:pPr>
-            <a:r>
-              <a:t/>
-            </a:r>
-            <a:endParaRPr b="0" i="0" sz="1800" u="none" cap="none" strike="noStrike">
-              <a:solidFill>
-                <a:schemeClr val="dk1"/>
-              </a:solidFill>
-              <a:latin typeface="Calibri"/>
-              <a:ea typeface="Calibri"/>
-              <a:cs typeface="Calibri"/>
-              <a:sym typeface="Calibri"/>
-            </a:endParaRPr>
-          </a:p>
-        </p:txBody>
-      </p:sp>
-      <p:sp>
-        <p:nvSpPr>
-          <p:cNvPr id="172" name="Google Shape;172;p18"/>
-          <p:cNvSpPr txBox="1"/>
-          <p:nvPr/>
-        </p:nvSpPr>
-        <p:spPr>
-          <a:xfrm>
-            <a:off x="1042415" y="2962656"/>
-            <a:ext cx="10241280" cy="685800"/>
-          </a:xfrm>
-          <a:prstGeom prst="rect">
-            <a:avLst/>
-          </a:prstGeom>
-          <a:noFill/>
-          <a:ln>
-            <a:noFill/>
-          </a:ln>
-        </p:spPr>
-        <p:txBody>
-          <a:bodyPr anchorCtr="0" anchor="t" bIns="0" lIns="0" spcFirstLastPara="1" rIns="0" wrap="square" tIns="0">
-            <a:spAutoFit/>
-          </a:bodyPr>
-          <a:lstStyle/>
-          <a:p>
-            <a:pPr indent="0" lvl="0" marL="0" marR="0" rtl="0" algn="l">
-              <a:spcBef>
-                <a:spcPts val="0"/>
-              </a:spcBef>
-              <a:spcAft>
-                <a:spcPts val="0"/>
-              </a:spcAft>
-              <a:buNone/>
-            </a:pPr>
-            <a:r>
-              <a:rPr b="0" i="0" lang="en-US" sz="2000" u="none" cap="none" strike="noStrike">
-                <a:solidFill>
-                  <a:srgbClr val="F6F7FA"/>
-                </a:solidFill>
-                <a:latin typeface="Arial"/>
-                <a:ea typeface="Arial"/>
-                <a:cs typeface="Arial"/>
-                <a:sym typeface="Arial"/>
-              </a:rPr>
-              <a:t>Compiler checks can make development feel slower at first</a:t>
-            </a:r>
-            <a:endParaRPr/>
-          </a:p>
-        </p:txBody>
-      </p:sp>
-      <p:sp>
-        <p:nvSpPr>
-          <p:cNvPr id="173" name="Google Shape;173;p18"/>
-          <p:cNvSpPr/>
-          <p:nvPr/>
-        </p:nvSpPr>
-        <p:spPr>
-          <a:xfrm>
-            <a:off x="758952" y="4050791"/>
-            <a:ext cx="100584" cy="100584"/>
-          </a:xfrm>
-          <a:prstGeom prst="rect">
-            <a:avLst/>
-          </a:prstGeom>
-          <a:solidFill>
-            <a:srgbClr val="F08443"/>
-          </a:solidFill>
-          <a:ln>
-            <a:noFill/>
-          </a:ln>
-          <a:effectLst>
-            <a:outerShdw blurRad="40000" rotWithShape="0" dir="5400000" dist="23000">
-              <a:srgbClr val="000000">
-                <a:alpha val="34902"/>
-              </a:srgbClr>
-            </a:outerShdw>
-          </a:effectLst>
-        </p:spPr>
-        <p:txBody>
-          <a:bodyPr anchorCtr="0" anchor="ctr" bIns="45700" lIns="91425" spcFirstLastPara="1" rIns="91425" wrap="square" tIns="45700">
-            <a:noAutofit/>
-          </a:bodyPr>
-          <a:lstStyle/>
-          <a:p>
-            <a:pPr indent="0" lvl="0" marL="0" marR="0" rtl="0" algn="ctr">
-              <a:spcBef>
-                <a:spcPts val="0"/>
-              </a:spcBef>
-              <a:spcAft>
-                <a:spcPts val="0"/>
-              </a:spcAft>
-              <a:buNone/>
-            </a:pPr>
-            <a:r>
-              <a:t/>
-            </a:r>
-            <a:endParaRPr b="0" i="0" sz="1800" u="none" cap="none" strike="noStrike">
-              <a:solidFill>
-                <a:schemeClr val="dk1"/>
-              </a:solidFill>
-              <a:latin typeface="Calibri"/>
-              <a:ea typeface="Calibri"/>
-              <a:cs typeface="Calibri"/>
-              <a:sym typeface="Calibri"/>
-            </a:endParaRPr>
-          </a:p>
-        </p:txBody>
-      </p:sp>
-      <p:sp>
-        <p:nvSpPr>
-          <p:cNvPr id="174" name="Google Shape;174;p18"/>
-          <p:cNvSpPr txBox="1"/>
-          <p:nvPr/>
-        </p:nvSpPr>
-        <p:spPr>
-          <a:xfrm>
-            <a:off x="1042415" y="3941063"/>
-            <a:ext cx="10241280" cy="685800"/>
-          </a:xfrm>
-          <a:prstGeom prst="rect">
-            <a:avLst/>
-          </a:prstGeom>
-          <a:noFill/>
-          <a:ln>
-            <a:noFill/>
-          </a:ln>
-        </p:spPr>
-        <p:txBody>
-          <a:bodyPr anchorCtr="0" anchor="t" bIns="0" lIns="0" spcFirstLastPara="1" rIns="0" wrap="square" tIns="0">
-            <a:spAutoFit/>
-          </a:bodyPr>
-          <a:lstStyle/>
-          <a:p>
-            <a:pPr indent="0" lvl="0" marL="0" marR="0" rtl="0" algn="l">
-              <a:spcBef>
-                <a:spcPts val="0"/>
-              </a:spcBef>
-              <a:spcAft>
-                <a:spcPts val="0"/>
-              </a:spcAft>
-              <a:buNone/>
-            </a:pPr>
-            <a:r>
-              <a:rPr b="0" i="0" lang="en-US" sz="2000" u="none" cap="none" strike="noStrike">
-                <a:solidFill>
-                  <a:srgbClr val="F6F7FA"/>
-                </a:solidFill>
-                <a:latin typeface="Arial"/>
-                <a:ea typeface="Arial"/>
-                <a:cs typeface="Arial"/>
-                <a:sym typeface="Arial"/>
-              </a:rPr>
-              <a:t>It will not replace every C or C++ program</a:t>
-            </a:r>
-            <a:endParaRPr/>
-          </a:p>
-        </p:txBody>
-      </p:sp>
-      <p:sp>
-        <p:nvSpPr>
-          <p:cNvPr id="175" name="Google Shape;175;p18"/>
-          <p:cNvSpPr/>
-          <p:nvPr/>
-        </p:nvSpPr>
-        <p:spPr>
-          <a:xfrm>
-            <a:off x="749808" y="5074920"/>
-            <a:ext cx="10698480" cy="868680"/>
-          </a:xfrm>
-          <a:prstGeom prst="rect">
-            <a:avLst/>
-          </a:prstGeom>
-          <a:solidFill>
-            <a:srgbClr val="1D2B3F"/>
-          </a:solidFill>
-          <a:ln>
-            <a:noFill/>
-          </a:ln>
-          <a:effectLst>
-            <a:outerShdw blurRad="40000" rotWithShape="0" dir="5400000" dist="23000">
-              <a:srgbClr val="000000">
-                <a:alpha val="34902"/>
-              </a:srgbClr>
-            </a:outerShdw>
-          </a:effectLst>
-        </p:spPr>
-        <p:txBody>
-          <a:bodyPr anchorCtr="0" anchor="ctr" bIns="45700" lIns="91425" spcFirstLastPara="1" rIns="91425" wrap="square" tIns="45700">
-            <a:noAutofit/>
-          </a:bodyPr>
-          <a:lstStyle/>
-          <a:p>
-            <a:pPr indent="0" lvl="0" marL="0" marR="0" rtl="0" algn="ctr">
-              <a:spcBef>
-                <a:spcPts val="0"/>
-              </a:spcBef>
-              <a:spcAft>
-                <a:spcPts val="0"/>
-              </a:spcAft>
-              <a:buNone/>
-            </a:pPr>
-            <a:r>
-              <a:t/>
-            </a:r>
-            <a:endParaRPr b="0" i="0" sz="1800" u="none" cap="none" strike="noStrike">
-              <a:solidFill>
-                <a:schemeClr val="dk1"/>
-              </a:solidFill>
-              <a:latin typeface="Calibri"/>
-              <a:ea typeface="Calibri"/>
-              <a:cs typeface="Calibri"/>
-              <a:sym typeface="Calibri"/>
-            </a:endParaRPr>
-          </a:p>
-        </p:txBody>
-      </p:sp>
-      <p:sp>
-        <p:nvSpPr>
-          <p:cNvPr id="176" name="Google Shape;176;p18"/>
-          <p:cNvSpPr txBox="1"/>
-          <p:nvPr/>
-        </p:nvSpPr>
-        <p:spPr>
-          <a:xfrm>
-            <a:off x="1005840" y="5330952"/>
-            <a:ext cx="10241280" cy="411480"/>
-          </a:xfrm>
-          <a:prstGeom prst="rect">
-            <a:avLst/>
-          </a:prstGeom>
-          <a:noFill/>
-          <a:ln>
-            <a:noFill/>
-          </a:ln>
-        </p:spPr>
-        <p:txBody>
-          <a:bodyPr anchorCtr="0" anchor="t" bIns="0" lIns="0" spcFirstLastPara="1" rIns="0" wrap="square" tIns="0">
-            <a:spAutoFit/>
-          </a:bodyPr>
-          <a:lstStyle/>
-          <a:p>
-            <a:pPr indent="0" lvl="0" marL="0" marR="0" rtl="0" algn="l">
-              <a:spcBef>
-                <a:spcPts val="0"/>
-              </a:spcBef>
-              <a:spcAft>
-                <a:spcPts val="0"/>
-              </a:spcAft>
-              <a:buNone/>
-            </a:pPr>
-            <a:r>
-              <a:rPr b="1" i="0" lang="en-US" sz="2100" u="none" cap="none" strike="noStrike">
-                <a:solidFill>
-                  <a:srgbClr val="F6F7FA"/>
-                </a:solidFill>
-                <a:latin typeface="Arial"/>
-                <a:ea typeface="Arial"/>
-                <a:cs typeface="Arial"/>
-                <a:sym typeface="Arial"/>
-              </a:rPr>
-              <a:t>Rust is becoming a serious option for safer systems software.</a:t>
-            </a:r>
-            <a:endParaRPr/>
-          </a:p>
-        </p:txBody>
-      </p:sp>
-    </p:spTree>
-  </p:cSld>
-  <p:clrMapOvr>
-    <a:masterClrMapping/>
-  </p:clrMapOvr>
-</p:sld>
-</file>
-
-<file path=ppt/theme/theme1.xml><?xml version="1.0" encoding="utf-8"?>
+<file path=ppt/theme/theme2.xml><?xml version="1.0" encoding="utf-8"?>
 <a:theme xmlns:a="http://schemas.openxmlformats.org/drawingml/2006/main" xmlns:r="http://schemas.openxmlformats.org/officeDocument/2006/relationships">
   <a:themeElements>
     <a:clrScheme name="Default">
@@ -15206,283 +19646,4 @@
     </a:fmtScheme>
   </a:themeElements>
 </a:theme>
-</file>
-
-<file path=ppt/theme/theme2.xml><?xml version="1.0" encoding="utf-8"?>
-<a:theme xmlns:a="http://schemas.openxmlformats.org/drawingml/2006/main" xmlns:r="http://schemas.openxmlformats.org/officeDocument/2006/relationships" name="Office Theme">
-  <a:themeElements>
-    <a:clrScheme name="Office">
-      <a:dk1>
-        <a:srgbClr val="000000"/>
-      </a:dk1>
-      <a:lt1>
-        <a:srgbClr val="FFFFFF"/>
-      </a:lt1>
-      <a:dk2>
-        <a:srgbClr val="1F497D"/>
-      </a:dk2>
-      <a:lt2>
-        <a:srgbClr val="EEECE1"/>
-      </a:lt2>
-      <a:accent1>
-        <a:srgbClr val="4F81BD"/>
-      </a:accent1>
-      <a:accent2>
-        <a:srgbClr val="C0504D"/>
-      </a:accent2>
-      <a:accent3>
-        <a:srgbClr val="9BBB59"/>
-      </a:accent3>
-      <a:accent4>
-        <a:srgbClr val="8064A2"/>
-      </a:accent4>
-      <a:accent5>
-        <a:srgbClr val="4BACC6"/>
-      </a:accent5>
-      <a:accent6>
-        <a:srgbClr val="F79646"/>
-      </a:accent6>
-      <a:hlink>
-        <a:srgbClr val="0000FF"/>
-      </a:hlink>
-      <a:folHlink>
-        <a:srgbClr val="800080"/>
-      </a:folHlink>
-    </a:clrScheme>
-    <a:fontScheme name="Office">
-      <a:majorFont>
-        <a:latin typeface="Arial"/>
-        <a:ea typeface=""/>
-        <a:cs typeface=""/>
-        <a:font script="Jpan" typeface="ＭＳ Ｐゴシック"/>
-        <a:font script="Hang" typeface="맑은 고딕"/>
-        <a:font script="Hans" typeface="宋体"/>
-        <a:font script="Hant" typeface="新細明體"/>
-        <a:font script="Arab" typeface="Times New Roman"/>
-        <a:font script="Hebr" typeface="Times New Roman"/>
-        <a:font script="Thai" typeface="Angsana New"/>
-        <a:font script="Ethi" typeface="Nyala"/>
-        <a:font script="Beng" typeface="Vrinda"/>
-        <a:font script="Gujr" typeface="Shruti"/>
-        <a:font script="Khmr" typeface="MoolBoran"/>
-        <a:font script="Knda" typeface="Tunga"/>
-        <a:font script="Guru" typeface="Raavi"/>
-        <a:font script="Cans" typeface="Euphemia"/>
-        <a:font script="Cher" typeface="Plantagenet Cherokee"/>
-        <a:font script="Yiii" typeface="Microsoft Yi Baiti"/>
-        <a:font script="Tibt" typeface="Microsoft Himalaya"/>
-        <a:font script="Thaa" typeface="MV Boli"/>
-        <a:font script="Deva" typeface="Mangal"/>
-        <a:font script="Telu" typeface="Gautami"/>
-        <a:font script="Taml" typeface="Latha"/>
-        <a:font script="Syrc" typeface="Estrangelo Edessa"/>
-        <a:font script="Orya" typeface="Kalinga"/>
-        <a:font script="Mlym" typeface="Kartika"/>
-        <a:font script="Laoo" typeface="DokChampa"/>
-        <a:font script="Sinh" typeface="Iskoola Pota"/>
-        <a:font script="Mong" typeface="Mongolian Baiti"/>
-        <a:font script="Viet" typeface="Times New Roman"/>
-        <a:font script="Uigh" typeface="Microsoft Uighur"/>
-        <a:font script="Geor" typeface="Sylfaen"/>
-      </a:majorFont>
-      <a:minorFont>
-        <a:latin typeface="Arial"/>
-        <a:ea typeface=""/>
-        <a:cs typeface=""/>
-        <a:font script="Jpan" typeface="ＭＳ Ｐゴシック"/>
-        <a:font script="Hang" typeface="맑은 고딕"/>
-        <a:font script="Hans" typeface="宋体"/>
-        <a:font script="Hant" typeface="新細明體"/>
-        <a:font script="Arab" typeface="Arial"/>
-        <a:font script="Hebr" typeface="Arial"/>
-        <a:font script="Thai" typeface="Cordia New"/>
-        <a:font script="Ethi" typeface="Nyala"/>
-        <a:font script="Beng" typeface="Vrinda"/>
-        <a:font script="Gujr" typeface="Shruti"/>
-        <a:font script="Khmr" typeface="DaunPenh"/>
-        <a:font script="Knda" typeface="Tunga"/>
-        <a:font script="Guru" typeface="Raavi"/>
-        <a:font script="Cans" typeface="Euphemia"/>
-        <a:font script="Cher" typeface="Plantagenet Cherokee"/>
-        <a:font script="Yiii" typeface="Microsoft Yi Baiti"/>
-        <a:font script="Tibt" typeface="Microsoft Himalaya"/>
-        <a:font script="Thaa" typeface="MV Boli"/>
-        <a:font script="Deva" typeface="Mangal"/>
-        <a:font script="Telu" typeface="Gautami"/>
-        <a:font script="Taml" typeface="Latha"/>
-        <a:font script="Syrc" typeface="Estrangelo Edessa"/>
-        <a:font script="Orya" typeface="Kalinga"/>
-        <a:font script="Mlym" typeface="Kartika"/>
-        <a:font script="Laoo" typeface="DokChampa"/>
-        <a:font script="Sinh" typeface="Iskoola Pota"/>
-        <a:font script="Mong" typeface="Mongolian Baiti"/>
-        <a:font script="Viet" typeface="Arial"/>
-        <a:font script="Uigh" typeface="Microsoft Uighur"/>
-        <a:font script="Geor" typeface="Sylfaen"/>
-      </a:minorFont>
-    </a:fontScheme>
-    <a:fmtScheme name="Office">
-      <a:fillStyleLst>
-        <a:solidFill>
-          <a:schemeClr val="phClr"/>
-        </a:solidFill>
-        <a:gradFill rotWithShape="1">
-          <a:gsLst>
-            <a:gs pos="0">
-              <a:schemeClr val="phClr">
-                <a:tint val="50000"/>
-                <a:satMod val="300000"/>
-              </a:schemeClr>
-            </a:gs>
-            <a:gs pos="35000">
-              <a:schemeClr val="phClr">
-                <a:tint val="37000"/>
-                <a:satMod val="300000"/>
-              </a:schemeClr>
-            </a:gs>
-            <a:gs pos="100000">
-              <a:schemeClr val="phClr">
-                <a:tint val="15000"/>
-                <a:satMod val="350000"/>
-              </a:schemeClr>
-            </a:gs>
-          </a:gsLst>
-          <a:lin ang="16200000" scaled="1"/>
-        </a:gradFill>
-        <a:gradFill rotWithShape="1">
-          <a:gsLst>
-            <a:gs pos="0">
-              <a:schemeClr val="phClr">
-                <a:tint val="100000"/>
-                <a:shade val="100000"/>
-                <a:satMod val="130000"/>
-              </a:schemeClr>
-            </a:gs>
-            <a:gs pos="100000">
-              <a:schemeClr val="phClr">
-                <a:tint val="50000"/>
-                <a:shade val="100000"/>
-                <a:satMod val="350000"/>
-              </a:schemeClr>
-            </a:gs>
-          </a:gsLst>
-          <a:lin ang="16200000" scaled="0"/>
-        </a:gradFill>
-      </a:fillStyleLst>
-      <a:lnStyleLst>
-        <a:ln w="9525" cap="flat" cmpd="sng" algn="ctr">
-          <a:solidFill>
-            <a:schemeClr val="phClr">
-              <a:shade val="95000"/>
-              <a:satMod val="105000"/>
-            </a:schemeClr>
-          </a:solidFill>
-          <a:prstDash val="solid"/>
-        </a:ln>
-        <a:ln w="25400" cap="flat" cmpd="sng" algn="ctr">
-          <a:solidFill>
-            <a:schemeClr val="phClr"/>
-          </a:solidFill>
-          <a:prstDash val="solid"/>
-        </a:ln>
-        <a:ln w="38100" cap="flat" cmpd="sng" algn="ctr">
-          <a:solidFill>
-            <a:schemeClr val="phClr"/>
-          </a:solidFill>
-          <a:prstDash val="solid"/>
-        </a:ln>
-      </a:lnStyleLst>
-      <a:effectStyleLst>
-        <a:effectStyle>
-          <a:effectLst>
-            <a:outerShdw blurRad="40000" dist="20000" dir="5400000" rotWithShape="0">
-              <a:srgbClr val="000000">
-                <a:alpha val="38000"/>
-              </a:srgbClr>
-            </a:outerShdw>
-          </a:effectLst>
-        </a:effectStyle>
-        <a:effectStyle>
-          <a:effectLst>
-            <a:outerShdw blurRad="40000" dist="23000" dir="5400000" rotWithShape="0">
-              <a:srgbClr val="000000">
-                <a:alpha val="35000"/>
-              </a:srgbClr>
-            </a:outerShdw>
-          </a:effectLst>
-        </a:effectStyle>
-        <a:effectStyle>
-          <a:effectLst>
-            <a:outerShdw blurRad="40000" dist="23000" dir="5400000" rotWithShape="0">
-              <a:srgbClr val="000000">
-                <a:alpha val="35000"/>
-              </a:srgbClr>
-            </a:outerShdw>
-          </a:effectLst>
-          <a:scene3d>
-            <a:camera prst="orthographicFront">
-              <a:rot lat="0" lon="0" rev="0"/>
-            </a:camera>
-            <a:lightRig rig="threePt" dir="t">
-              <a:rot lat="0" lon="0" rev="1200000"/>
-            </a:lightRig>
-          </a:scene3d>
-          <a:sp3d>
-            <a:bevelT w="63500" h="25400"/>
-          </a:sp3d>
-        </a:effectStyle>
-      </a:effectStyleLst>
-      <a:bgFillStyleLst>
-        <a:solidFill>
-          <a:schemeClr val="phClr"/>
-        </a:solidFill>
-        <a:gradFill rotWithShape="1">
-          <a:gsLst>
-            <a:gs pos="0">
-              <a:schemeClr val="phClr">
-                <a:tint val="40000"/>
-                <a:satMod val="350000"/>
-              </a:schemeClr>
-            </a:gs>
-            <a:gs pos="40000">
-              <a:schemeClr val="phClr">
-                <a:tint val="45000"/>
-                <a:shade val="99000"/>
-                <a:satMod val="350000"/>
-              </a:schemeClr>
-            </a:gs>
-            <a:gs pos="100000">
-              <a:schemeClr val="phClr">
-                <a:shade val="20000"/>
-                <a:satMod val="255000"/>
-              </a:schemeClr>
-            </a:gs>
-          </a:gsLst>
-          <a:path path="circle">
-            <a:fillToRect l="50000" t="-80000" r="50000" b="180000"/>
-          </a:path>
-        </a:gradFill>
-        <a:gradFill rotWithShape="1">
-          <a:gsLst>
-            <a:gs pos="0">
-              <a:schemeClr val="phClr">
-                <a:tint val="80000"/>
-                <a:satMod val="300000"/>
-              </a:schemeClr>
-            </a:gs>
-            <a:gs pos="100000">
-              <a:schemeClr val="phClr">
-                <a:shade val="30000"/>
-                <a:satMod val="200000"/>
-              </a:schemeClr>
-            </a:gs>
-          </a:gsLst>
-          <a:path path="circle">
-            <a:fillToRect l="50000" t="50000" r="50000" b="50000"/>
-          </a:path>
-        </a:gradFill>
-      </a:bgFillStyleLst>
-    </a:fmtScheme>
-  </a:themeElements>
-</a:theme>
 </file>
--- a/slides/CEP146_Rust_2026.pptx
+++ b/slides/CEP146_Rust_2026.pptx
@@ -19,7 +19,6 @@
     <p:sldId id="264" r:id="rId14"/>
     <p:sldId id="265" r:id="rId15"/>
     <p:sldId id="266" r:id="rId16"/>
-    <p:sldId id="267" r:id="rId17"/>
   </p:sldIdLst>
   <p:sldSz cy="6858000" cx="12191675"/>
   <p:notesSz cx="6858000" cy="9144000"/>
@@ -801,7 +800,7 @@
   <p:cSld>
     <p:spTree>
       <p:nvGrpSpPr>
-        <p:cNvPr id="213" name="Shape 213"/>
+        <p:cNvPr id="217" name="Shape 217"/>
         <p:cNvGrpSpPr/>
         <p:nvPr/>
       </p:nvGrpSpPr>
@@ -815,7 +814,7 @@
       </p:grpSpPr>
       <p:sp>
         <p:nvSpPr>
-          <p:cNvPr id="214" name="Google Shape;214;p4:notes"/>
+          <p:cNvPr id="218" name="Google Shape;218;p6:notes"/>
           <p:cNvSpPr txBox="1"/>
           <p:nvPr>
             <p:ph idx="1" type="body"/>
@@ -854,7 +853,7 @@
       </p:sp>
       <p:sp>
         <p:nvSpPr>
-          <p:cNvPr id="215" name="Google Shape;215;p4:notes"/>
+          <p:cNvPr id="219" name="Google Shape;219;p6:notes"/>
           <p:cNvSpPr/>
           <p:nvPr>
             <p:ph idx="2" type="sldImg"/>
@@ -900,7 +899,7 @@
   <p:cSld>
     <p:spTree>
       <p:nvGrpSpPr>
-        <p:cNvPr id="228" name="Shape 228"/>
+        <p:cNvPr id="234" name="Shape 234"/>
         <p:cNvGrpSpPr/>
         <p:nvPr/>
       </p:nvGrpSpPr>
@@ -914,7 +913,7 @@
       </p:grpSpPr>
       <p:sp>
         <p:nvSpPr>
-          <p:cNvPr id="229" name="Google Shape;229;p5:notes"/>
+          <p:cNvPr id="235" name="Google Shape;235;h1398c9f15236e7fa_1_0:notes"/>
           <p:cNvSpPr txBox="1"/>
           <p:nvPr>
             <p:ph idx="1" type="body"/>
@@ -953,7 +952,7 @@
       </p:sp>
       <p:sp>
         <p:nvSpPr>
-          <p:cNvPr id="230" name="Google Shape;230;p5:notes"/>
+          <p:cNvPr id="236" name="Google Shape;236;h1398c9f15236e7fa_1_0:notes"/>
           <p:cNvSpPr/>
           <p:nvPr>
             <p:ph idx="2" type="sldImg"/>
@@ -962,106 +961,7 @@
         <p:spPr>
           <a:xfrm>
             <a:off x="1143225" y="685800"/>
-            <a:ext cx="4572225" cy="3429000"/>
-          </a:xfrm>
-          <a:custGeom>
-            <a:rect b="b" l="l" r="r" t="t"/>
-            <a:pathLst>
-              <a:path extrusionOk="0" h="120000" w="120000">
-                <a:moveTo>
-                  <a:pt x="0" y="0"/>
-                </a:moveTo>
-                <a:lnTo>
-                  <a:pt x="120000" y="0"/>
-                </a:lnTo>
-                <a:lnTo>
-                  <a:pt x="120000" y="120000"/>
-                </a:lnTo>
-                <a:lnTo>
-                  <a:pt x="0" y="120000"/>
-                </a:lnTo>
-                <a:close/>
-              </a:path>
-            </a:pathLst>
-          </a:custGeom>
-        </p:spPr>
-      </p:sp>
-    </p:spTree>
-  </p:cSld>
-  <p:clrMapOvr>
-    <a:masterClrMapping/>
-  </p:clrMapOvr>
-</p:notes>
-</file>
-
-<file path=ppt/notesSlides/notesSlide12.xml><?xml version="1.0" encoding="utf-8"?>
-<p:notes xmlns:a="http://schemas.openxmlformats.org/drawingml/2006/main" xmlns:r="http://schemas.openxmlformats.org/officeDocument/2006/relationships" xmlns:mc="http://schemas.openxmlformats.org/markup-compatibility/2006" xmlns:mv="urn:schemas-microsoft-com:mac:vml" xmlns:p="http://schemas.openxmlformats.org/presentationml/2006/main" xmlns:c="http://schemas.openxmlformats.org/drawingml/2006/chart" xmlns:dgm="http://schemas.openxmlformats.org/drawingml/2006/diagram" xmlns:o="urn:schemas-microsoft-com:office:office" xmlns:v="urn:schemas-microsoft-com:vml" xmlns:pvml="urn:schemas-microsoft-com:office:powerpoint" xmlns:com="http://schemas.openxmlformats.org/drawingml/2006/compatibility" xmlns:p14="http://schemas.microsoft.com/office/powerpoint/2010/main" xmlns:p15="http://schemas.microsoft.com/office/powerpoint/2012/main" xmlns:ahyp="http://schemas.microsoft.com/office/drawing/2018/hyperlinkcolor" showMasterPhAnim="0" showMasterSp="0">
-  <p:cSld>
-    <p:spTree>
-      <p:nvGrpSpPr>
-        <p:cNvPr id="249" name="Shape 249"/>
-        <p:cNvGrpSpPr/>
-        <p:nvPr/>
-      </p:nvGrpSpPr>
-      <p:grpSpPr>
-        <a:xfrm>
-          <a:off x="0" y="0"/>
-          <a:ext cx="0" cy="0"/>
-          <a:chOff x="0" y="0"/>
-          <a:chExt cx="0" cy="0"/>
-        </a:xfrm>
-      </p:grpSpPr>
-      <p:sp>
-        <p:nvSpPr>
-          <p:cNvPr id="250" name="Google Shape;250;p6:notes"/>
-          <p:cNvSpPr txBox="1"/>
-          <p:nvPr>
-            <p:ph idx="1" type="body"/>
-          </p:nvPr>
-        </p:nvSpPr>
-        <p:spPr>
-          <a:xfrm>
-            <a:off x="685800" y="4343400"/>
-            <a:ext cx="5486400" cy="4114800"/>
-          </a:xfrm>
-          <a:prstGeom prst="rect">
-            <a:avLst/>
-          </a:prstGeom>
-        </p:spPr>
-        <p:txBody>
-          <a:bodyPr anchorCtr="0" anchor="t" bIns="91425" lIns="91425" spcFirstLastPara="1" rIns="91425" wrap="square" tIns="91425">
-            <a:noAutofit/>
-          </a:bodyPr>
-          <a:lstStyle/>
-          <a:p>
-            <a:pPr indent="0" lvl="0" marL="0" rtl="0" algn="l">
-              <a:spcBef>
-                <a:spcPts val="0"/>
-              </a:spcBef>
-              <a:spcAft>
-                <a:spcPts val="0"/>
-              </a:spcAft>
-              <a:buNone/>
-            </a:pPr>
-            <a:r>
-              <a:t/>
-            </a:r>
-            <a:endParaRPr/>
-          </a:p>
-        </p:txBody>
-      </p:sp>
-      <p:sp>
-        <p:nvSpPr>
-          <p:cNvPr id="251" name="Google Shape;251;p6:notes"/>
-          <p:cNvSpPr/>
-          <p:nvPr>
-            <p:ph idx="2" type="sldImg"/>
-          </p:nvPr>
-        </p:nvSpPr>
-        <p:spPr>
-          <a:xfrm>
-            <a:off x="1143225" y="685800"/>
-            <a:ext cx="4572225" cy="3429000"/>
+            <a:ext cx="4572300" cy="3429000"/>
           </a:xfrm>
           <a:custGeom>
             <a:rect b="b" l="l" r="r" t="t"/>
@@ -1805,7 +1705,7 @@
       </p:grpSpPr>
       <p:sp>
         <p:nvSpPr>
-          <p:cNvPr id="197" name="Google Shape;197;p3:notes"/>
+          <p:cNvPr id="197" name="Google Shape;197;p5:notes"/>
           <p:cNvSpPr txBox="1"/>
           <p:nvPr>
             <p:ph idx="1" type="body"/>
@@ -1844,7 +1744,7 @@
       </p:sp>
       <p:sp>
         <p:nvSpPr>
-          <p:cNvPr id="198" name="Google Shape;198;p3:notes"/>
+          <p:cNvPr id="198" name="Google Shape;198;p5:notes"/>
           <p:cNvSpPr/>
           <p:nvPr>
             <p:ph idx="2" type="sldImg"/>
@@ -11901,7 +11801,7 @@
   <p:cSld>
     <p:spTree>
       <p:nvGrpSpPr>
-        <p:cNvPr id="216" name="Shape 216"/>
+        <p:cNvPr id="220" name="Shape 220"/>
         <p:cNvGrpSpPr/>
         <p:nvPr/>
       </p:nvGrpSpPr>
@@ -11915,7 +11815,7 @@
       </p:grpSpPr>
       <p:sp>
         <p:nvSpPr>
-          <p:cNvPr id="217" name="Google Shape;217;p22"/>
+          <p:cNvPr id="221" name="Google Shape;221;p22"/>
           <p:cNvSpPr/>
           <p:nvPr/>
         </p:nvSpPr>
@@ -11973,7 +11873,7 @@
       </p:sp>
       <p:sp>
         <p:nvSpPr>
-          <p:cNvPr id="218" name="Google Shape;218;p22"/>
+          <p:cNvPr id="222" name="Google Shape;222;p22"/>
           <p:cNvSpPr/>
           <p:nvPr/>
         </p:nvSpPr>
@@ -12031,7 +11931,7 @@
       </p:sp>
       <p:sp>
         <p:nvSpPr>
-          <p:cNvPr id="219" name="Google Shape;219;p22"/>
+          <p:cNvPr id="223" name="Google Shape;223;p22"/>
           <p:cNvSpPr txBox="1"/>
           <p:nvPr/>
         </p:nvSpPr>
@@ -12081,14 +11981,14 @@
       </p:sp>
       <p:sp>
         <p:nvSpPr>
-          <p:cNvPr id="220" name="Google Shape;220;p22"/>
+          <p:cNvPr id="224" name="Google Shape;224;p22"/>
           <p:cNvSpPr txBox="1"/>
           <p:nvPr/>
         </p:nvSpPr>
         <p:spPr>
           <a:xfrm>
             <a:off x="621792" y="978408"/>
-            <a:ext cx="10972800" cy="731520"/>
+            <a:ext cx="10972800" cy="477300"/>
           </a:xfrm>
           <a:prstGeom prst="rect">
             <a:avLst/>
@@ -12123,7 +12023,47 @@
                 <a:cs typeface="Arial"/>
                 <a:sym typeface="Arial"/>
               </a:rPr>
-              <a:t>Why does memory safety matter?</a:t>
+              <a:t>Challenges and </a:t>
+            </a:r>
+            <a:r>
+              <a:rPr b="1" lang="en-US" sz="3100">
+                <a:solidFill>
+                  <a:srgbClr val="F6F7FA"/>
+                </a:solidFill>
+              </a:rPr>
+              <a:t>F</a:t>
+            </a:r>
+            <a:r>
+              <a:rPr b="1" i="0" lang="en-US" sz="3100" u="none" cap="none" strike="noStrike">
+                <a:solidFill>
+                  <a:srgbClr val="F6F7FA"/>
+                </a:solidFill>
+                <a:latin typeface="Arial"/>
+                <a:ea typeface="Arial"/>
+                <a:cs typeface="Arial"/>
+                <a:sym typeface="Arial"/>
+              </a:rPr>
+              <a:t>inal </a:t>
+            </a:r>
+            <a:r>
+              <a:rPr b="1" lang="en-US" sz="3100">
+                <a:solidFill>
+                  <a:srgbClr val="F6F7FA"/>
+                </a:solidFill>
+              </a:rPr>
+              <a:t>T</a:t>
+            </a:r>
+            <a:r>
+              <a:rPr b="1" i="0" lang="en-US" sz="3100" u="none" cap="none" strike="noStrike">
+                <a:solidFill>
+                  <a:srgbClr val="F6F7FA"/>
+                </a:solidFill>
+                <a:latin typeface="Arial"/>
+                <a:ea typeface="Arial"/>
+                <a:cs typeface="Arial"/>
+                <a:sym typeface="Arial"/>
+              </a:rPr>
+              <a:t>houghts</a:t>
             </a:r>
             <a:endParaRPr/>
           </a:p>
@@ -12131,7 +12071,7 @@
       </p:sp>
       <p:sp>
         <p:nvSpPr>
-          <p:cNvPr id="221" name="Google Shape;221;p22"/>
+          <p:cNvPr id="225" name="Google Shape;225;p22"/>
           <p:cNvSpPr txBox="1"/>
           <p:nvPr/>
         </p:nvSpPr>
@@ -12173,7 +12113,7 @@
                 <a:cs typeface="Arial"/>
                 <a:sym typeface="Arial"/>
               </a:rPr>
-              <a:t>04  /  RUST IN 2026</a:t>
+              <a:t>06  /  RUST IN 2026</a:t>
             </a:r>
             <a:endParaRPr/>
           </a:p>
@@ -12181,13 +12121,13 @@
       </p:sp>
       <p:sp>
         <p:nvSpPr>
-          <p:cNvPr id="222" name="Google Shape;222;p22"/>
+          <p:cNvPr id="226" name="Google Shape;226;p22"/>
           <p:cNvSpPr/>
           <p:nvPr/>
         </p:nvSpPr>
         <p:spPr>
           <a:xfrm>
-            <a:off x="758952" y="2157984"/>
+            <a:off x="758952" y="2103120"/>
             <a:ext cx="100584" cy="100584"/>
           </a:xfrm>
           <a:prstGeom prst="rect">
@@ -12239,13 +12179,13 @@
       </p:sp>
       <p:sp>
         <p:nvSpPr>
-          <p:cNvPr id="223" name="Google Shape;223;p22"/>
+          <p:cNvPr id="227" name="Google Shape;227;p22"/>
           <p:cNvSpPr txBox="1"/>
           <p:nvPr/>
         </p:nvSpPr>
         <p:spPr>
           <a:xfrm>
-            <a:off x="1042415" y="2048256"/>
+            <a:off x="1042415" y="1993392"/>
             <a:ext cx="10241280" cy="685800"/>
           </a:xfrm>
           <a:prstGeom prst="rect">
@@ -12272,7 +12212,7 @@
               <a:buNone/>
             </a:pPr>
             <a:r>
-              <a:rPr b="0" i="0" lang="en-US" sz="2100" u="none" cap="none" strike="noStrike">
+              <a:rPr b="0" i="0" lang="en-US" sz="2000" u="none" cap="none" strike="noStrike">
                 <a:solidFill>
                   <a:srgbClr val="F6F7FA"/>
                 </a:solidFill>
@@ -12281,7 +12221,7 @@
                 <a:cs typeface="Arial"/>
                 <a:sym typeface="Arial"/>
               </a:rPr>
-              <a:t>Memory mistakes can cause crashes and security problems</a:t>
+              <a:t>Rust can be difficult to learn, especially ownership rules</a:t>
             </a:r>
             <a:endParaRPr/>
           </a:p>
@@ -12289,13 +12229,13 @@
       </p:sp>
       <p:sp>
         <p:nvSpPr>
-          <p:cNvPr id="224" name="Google Shape;224;p22"/>
+          <p:cNvPr id="228" name="Google Shape;228;p22"/>
           <p:cNvSpPr/>
           <p:nvPr/>
         </p:nvSpPr>
         <p:spPr>
           <a:xfrm>
-            <a:off x="758952" y="3264408"/>
+            <a:off x="758952" y="3072384"/>
             <a:ext cx="100584" cy="100584"/>
           </a:xfrm>
           <a:prstGeom prst="rect">
@@ -12347,13 +12287,13 @@
       </p:sp>
       <p:sp>
         <p:nvSpPr>
-          <p:cNvPr id="225" name="Google Shape;225;p22"/>
+          <p:cNvPr id="229" name="Google Shape;229;p22"/>
           <p:cNvSpPr txBox="1"/>
           <p:nvPr/>
         </p:nvSpPr>
         <p:spPr>
           <a:xfrm>
-            <a:off x="1042415" y="3154680"/>
+            <a:off x="1042415" y="2962656"/>
             <a:ext cx="10241280" cy="685800"/>
           </a:xfrm>
           <a:prstGeom prst="rect">
@@ -12380,7 +12320,7 @@
               <a:buNone/>
             </a:pPr>
             <a:r>
-              <a:rPr b="0" i="0" lang="en-US" sz="2100" u="none" cap="none" strike="noStrike">
+              <a:rPr b="0" i="0" lang="en-US" sz="2000" u="none" cap="none" strike="noStrike">
                 <a:solidFill>
                   <a:srgbClr val="F6F7FA"/>
                 </a:solidFill>
@@ -12389,7 +12329,7 @@
                 <a:cs typeface="Arial"/>
                 <a:sym typeface="Arial"/>
               </a:rPr>
-              <a:t>Rust checks ownership and borrowing while code is compiled</a:t>
+              <a:t>Compiler checks can make development feel slower at first</a:t>
             </a:r>
             <a:endParaRPr/>
           </a:p>
@@ -12397,13 +12337,13 @@
       </p:sp>
       <p:sp>
         <p:nvSpPr>
-          <p:cNvPr id="226" name="Google Shape;226;p22"/>
+          <p:cNvPr id="230" name="Google Shape;230;p22"/>
           <p:cNvSpPr/>
           <p:nvPr/>
         </p:nvSpPr>
         <p:spPr>
           <a:xfrm>
-            <a:off x="758952" y="4407408"/>
+            <a:off x="758952" y="4050791"/>
             <a:ext cx="100584" cy="100584"/>
           </a:xfrm>
           <a:prstGeom prst="rect">
@@ -12455,13 +12395,13 @@
       </p:sp>
       <p:sp>
         <p:nvSpPr>
-          <p:cNvPr id="227" name="Google Shape;227;p22"/>
+          <p:cNvPr id="231" name="Google Shape;231;p22"/>
           <p:cNvSpPr txBox="1"/>
           <p:nvPr/>
         </p:nvSpPr>
         <p:spPr>
           <a:xfrm>
-            <a:off x="1042415" y="4297680"/>
+            <a:off x="1042415" y="3941063"/>
             <a:ext cx="10241280" cy="685800"/>
           </a:xfrm>
           <a:prstGeom prst="rect">
@@ -12488,7 +12428,7 @@
               <a:buNone/>
             </a:pPr>
             <a:r>
-              <a:rPr b="0" i="0" lang="en-US" sz="2100" u="none" cap="none" strike="noStrike">
+              <a:rPr b="0" i="0" lang="en-US" sz="2000" u="none" cap="none" strike="noStrike">
                 <a:solidFill>
                   <a:srgbClr val="F6F7FA"/>
                 </a:solidFill>
@@ -12497,53 +12437,28 @@
                 <a:cs typeface="Arial"/>
                 <a:sym typeface="Arial"/>
               </a:rPr>
-              <a:t>This helps catch some bugs before the program runs</a:t>
+              <a:t>It will not replace every C or C++ program</a:t>
             </a:r>
             <a:endParaRPr/>
           </a:p>
         </p:txBody>
       </p:sp>
-    </p:spTree>
-  </p:cSld>
-  <p:clrMapOvr>
-    <a:masterClrMapping/>
-  </p:clrMapOvr>
-</p:sld>
-</file>
-
-<file path=ppt/slides/slide11.xml><?xml version="1.0" encoding="utf-8"?>
-<p:sld xmlns:a="http://schemas.openxmlformats.org/drawingml/2006/main" xmlns:r="http://schemas.openxmlformats.org/officeDocument/2006/relationships" xmlns:mc="http://schemas.openxmlformats.org/markup-compatibility/2006" xmlns:mv="urn:schemas-microsoft-com:mac:vml" xmlns:p="http://schemas.openxmlformats.org/presentationml/2006/main" xmlns:c="http://schemas.openxmlformats.org/drawingml/2006/chart" xmlns:dgm="http://schemas.openxmlformats.org/drawingml/2006/diagram" xmlns:o="urn:schemas-microsoft-com:office:office" xmlns:v="urn:schemas-microsoft-com:vml" xmlns:pvml="urn:schemas-microsoft-com:office:powerpoint" xmlns:com="http://schemas.openxmlformats.org/drawingml/2006/compatibility" xmlns:p14="http://schemas.microsoft.com/office/powerpoint/2010/main" xmlns:p15="http://schemas.microsoft.com/office/powerpoint/2012/main" xmlns:ahyp="http://schemas.microsoft.com/office/drawing/2018/hyperlinkcolor">
-  <p:cSld>
-    <p:spTree>
-      <p:nvGrpSpPr>
-        <p:cNvPr id="231" name="Shape 231"/>
-        <p:cNvGrpSpPr/>
-        <p:nvPr/>
-      </p:nvGrpSpPr>
-      <p:grpSpPr>
-        <a:xfrm>
-          <a:off x="0" y="0"/>
-          <a:ext cx="0" cy="0"/>
-          <a:chOff x="0" y="0"/>
-          <a:chExt cx="0" cy="0"/>
-        </a:xfrm>
-      </p:grpSpPr>
-      <p:sp>
-        <p:nvSpPr>
-          <p:cNvPr id="232" name="Google Shape;232;p23"/>
+      <p:sp>
+        <p:nvSpPr>
+          <p:cNvPr id="232" name="Google Shape;232;p22"/>
           <p:cNvSpPr/>
           <p:nvPr/>
         </p:nvSpPr>
         <p:spPr>
           <a:xfrm>
-            <a:off x="0" y="0"/>
-            <a:ext cx="12191695" cy="6858000"/>
+            <a:off x="749808" y="5074920"/>
+            <a:ext cx="10698480" cy="868680"/>
           </a:xfrm>
           <a:prstGeom prst="rect">
             <a:avLst/>
           </a:prstGeom>
           <a:solidFill>
-            <a:srgbClr val="111B2B"/>
+            <a:srgbClr val="1D2B3F"/>
           </a:solidFill>
           <a:ln>
             <a:noFill/>
@@ -12588,20 +12503,95 @@
       </p:sp>
       <p:sp>
         <p:nvSpPr>
-          <p:cNvPr id="233" name="Google Shape;233;p23"/>
+          <p:cNvPr id="233" name="Google Shape;233;p22"/>
+          <p:cNvSpPr txBox="1"/>
+          <p:nvPr/>
+        </p:nvSpPr>
+        <p:spPr>
+          <a:xfrm>
+            <a:off x="1005840" y="5330952"/>
+            <a:ext cx="10241280" cy="411480"/>
+          </a:xfrm>
+          <a:prstGeom prst="rect">
+            <a:avLst/>
+          </a:prstGeom>
+          <a:noFill/>
+          <a:ln>
+            <a:noFill/>
+          </a:ln>
+        </p:spPr>
+        <p:txBody>
+          <a:bodyPr anchorCtr="0" anchor="t" bIns="0" lIns="0" spcFirstLastPara="1" rIns="0" wrap="square" tIns="0">
+            <a:spAutoFit/>
+          </a:bodyPr>
+          <a:lstStyle/>
+          <a:p>
+            <a:pPr indent="0" lvl="0" marL="0" marR="0" rtl="0" algn="l">
+              <a:spcBef>
+                <a:spcPts val="0"/>
+              </a:spcBef>
+              <a:spcAft>
+                <a:spcPts val="0"/>
+              </a:spcAft>
+              <a:buNone/>
+            </a:pPr>
+            <a:r>
+              <a:rPr b="1" i="0" lang="en-US" sz="2100" u="none" cap="none" strike="noStrike">
+                <a:solidFill>
+                  <a:srgbClr val="F6F7FA"/>
+                </a:solidFill>
+                <a:latin typeface="Arial"/>
+                <a:ea typeface="Arial"/>
+                <a:cs typeface="Arial"/>
+                <a:sym typeface="Arial"/>
+              </a:rPr>
+              <a:t>Rust is becoming a serious option for safer systems software.</a:t>
+            </a:r>
+            <a:endParaRPr/>
+          </a:p>
+        </p:txBody>
+      </p:sp>
+    </p:spTree>
+  </p:cSld>
+  <p:clrMapOvr>
+    <a:masterClrMapping/>
+  </p:clrMapOvr>
+</p:sld>
+</file>
+
+<file path=ppt/slides/slide11.xml><?xml version="1.0" encoding="utf-8"?>
+<p:sld xmlns:a="http://schemas.openxmlformats.org/drawingml/2006/main" xmlns:r="http://schemas.openxmlformats.org/officeDocument/2006/relationships" xmlns:mc="http://schemas.openxmlformats.org/markup-compatibility/2006" xmlns:mv="urn:schemas-microsoft-com:mac:vml" xmlns:p="http://schemas.openxmlformats.org/presentationml/2006/main" xmlns:c="http://schemas.openxmlformats.org/drawingml/2006/chart" xmlns:dgm="http://schemas.openxmlformats.org/drawingml/2006/diagram" xmlns:o="urn:schemas-microsoft-com:office:office" xmlns:v="urn:schemas-microsoft-com:vml" xmlns:pvml="urn:schemas-microsoft-com:office:powerpoint" xmlns:com="http://schemas.openxmlformats.org/drawingml/2006/compatibility" xmlns:p14="http://schemas.microsoft.com/office/powerpoint/2010/main" xmlns:p15="http://schemas.microsoft.com/office/powerpoint/2012/main" xmlns:ahyp="http://schemas.microsoft.com/office/drawing/2018/hyperlinkcolor">
+  <p:cSld>
+    <p:spTree>
+      <p:nvGrpSpPr>
+        <p:cNvPr id="237" name="Shape 237"/>
+        <p:cNvGrpSpPr/>
+        <p:nvPr/>
+      </p:nvGrpSpPr>
+      <p:grpSpPr>
+        <a:xfrm>
+          <a:off x="0" y="0"/>
+          <a:ext cx="0" cy="0"/>
+          <a:chOff x="0" y="0"/>
+          <a:chExt cx="0" cy="0"/>
+        </a:xfrm>
+      </p:grpSpPr>
+      <p:sp>
+        <p:nvSpPr>
+          <p:cNvPr id="238" name="Google Shape;238;p23"/>
           <p:cNvSpPr/>
           <p:nvPr/>
         </p:nvSpPr>
         <p:spPr>
           <a:xfrm>
-            <a:off x="411480" y="393192"/>
-            <a:ext cx="73152" cy="429768"/>
+            <a:off x="0" y="0"/>
+            <a:ext cx="12191700" cy="6858000"/>
           </a:xfrm>
           <a:prstGeom prst="rect">
             <a:avLst/>
           </a:prstGeom>
           <a:solidFill>
-            <a:srgbClr val="F08443"/>
+            <a:srgbClr val="111B2B"/>
           </a:solidFill>
           <a:ln>
             <a:noFill/>
@@ -12609,7 +12599,7 @@
           <a:effectLst>
             <a:outerShdw blurRad="40000" rotWithShape="0" dir="5400000" dist="23000">
               <a:srgbClr val="000000">
-                <a:alpha val="34902"/>
+                <a:alpha val="34900"/>
               </a:srgbClr>
             </a:outerShdw>
           </a:effectLst>
@@ -12646,14 +12636,72 @@
       </p:sp>
       <p:sp>
         <p:nvSpPr>
-          <p:cNvPr id="234" name="Google Shape;234;p23"/>
+          <p:cNvPr id="239" name="Google Shape;239;p23"/>
+          <p:cNvSpPr/>
+          <p:nvPr/>
+        </p:nvSpPr>
+        <p:spPr>
+          <a:xfrm>
+            <a:off x="411480" y="393192"/>
+            <a:ext cx="73200" cy="429900"/>
+          </a:xfrm>
+          <a:prstGeom prst="rect">
+            <a:avLst/>
+          </a:prstGeom>
+          <a:solidFill>
+            <a:srgbClr val="F08443"/>
+          </a:solidFill>
+          <a:ln>
+            <a:noFill/>
+          </a:ln>
+          <a:effectLst>
+            <a:outerShdw blurRad="40000" rotWithShape="0" dir="5400000" dist="23000">
+              <a:srgbClr val="000000">
+                <a:alpha val="34900"/>
+              </a:srgbClr>
+            </a:outerShdw>
+          </a:effectLst>
+        </p:spPr>
+        <p:txBody>
+          <a:bodyPr anchorCtr="0" anchor="ctr" bIns="45700" lIns="91425" spcFirstLastPara="1" rIns="91425" wrap="square" tIns="45700">
+            <a:noAutofit/>
+          </a:bodyPr>
+          <a:lstStyle/>
+          <a:p>
+            <a:pPr indent="0" lvl="0" marL="0" marR="0" rtl="0" algn="ctr">
+              <a:spcBef>
+                <a:spcPts val="0"/>
+              </a:spcBef>
+              <a:spcAft>
+                <a:spcPts val="0"/>
+              </a:spcAft>
+              <a:buNone/>
+            </a:pPr>
+            <a:r>
+              <a:t/>
+            </a:r>
+            <a:endParaRPr b="0" i="0" sz="1800" u="none" cap="none" strike="noStrike">
+              <a:solidFill>
+                <a:schemeClr val="dk1"/>
+              </a:solidFill>
+              <a:latin typeface="Calibri"/>
+              <a:ea typeface="Calibri"/>
+              <a:cs typeface="Calibri"/>
+              <a:sym typeface="Calibri"/>
+            </a:endParaRPr>
+          </a:p>
+        </p:txBody>
+      </p:sp>
+      <p:sp>
+        <p:nvSpPr>
+          <p:cNvPr id="240" name="Google Shape;240;p23"/>
           <p:cNvSpPr txBox="1"/>
           <p:nvPr/>
         </p:nvSpPr>
         <p:spPr>
           <a:xfrm>
             <a:off x="612648" y="411480"/>
-            <a:ext cx="7315200" cy="274320"/>
+            <a:ext cx="7315200" cy="169200"/>
           </a:xfrm>
           <a:prstGeom prst="rect">
             <a:avLst/>
@@ -12696,14 +12744,14 @@
       </p:sp>
       <p:sp>
         <p:nvSpPr>
-          <p:cNvPr id="235" name="Google Shape;235;p23"/>
+          <p:cNvPr id="241" name="Google Shape;241;p23"/>
           <p:cNvSpPr txBox="1"/>
           <p:nvPr/>
         </p:nvSpPr>
         <p:spPr>
           <a:xfrm>
-            <a:off x="621792" y="978408"/>
-            <a:ext cx="10972800" cy="731520"/>
+            <a:off x="609442" y="2639108"/>
+            <a:ext cx="10972800" cy="477300"/>
           </a:xfrm>
           <a:prstGeom prst="rect">
             <a:avLst/>
@@ -12719,7 +12767,7 @@
           </a:bodyPr>
           <a:lstStyle/>
           <a:p>
-            <a:pPr indent="0" lvl="0" marL="0" marR="0" rtl="0" algn="l">
+            <a:pPr indent="0" lvl="0" marL="0" marR="0" rtl="0" algn="ctr">
               <a:spcBef>
                 <a:spcPts val="0"/>
               </a:spcBef>
@@ -12729,16 +12777,12 @@
               <a:buNone/>
             </a:pPr>
             <a:r>
-              <a:rPr b="1" i="0" lang="en-US" sz="3100" u="none" cap="none" strike="noStrike">
+              <a:rPr b="1" lang="en-US" sz="3100">
                 <a:solidFill>
                   <a:srgbClr val="F6F7FA"/>
                 </a:solidFill>
-                <a:latin typeface="Arial"/>
-                <a:ea typeface="Arial"/>
-                <a:cs typeface="Arial"/>
-                <a:sym typeface="Arial"/>
               </a:rPr>
-              <a:t>Where is Rust being used?</a:t>
+              <a:t>The End</a:t>
             </a:r>
             <a:endParaRPr/>
           </a:p>
@@ -12746,14 +12790,14 @@
       </p:sp>
       <p:sp>
         <p:nvSpPr>
-          <p:cNvPr id="236" name="Google Shape;236;p23"/>
+          <p:cNvPr id="242" name="Google Shape;242;p23"/>
           <p:cNvSpPr txBox="1"/>
           <p:nvPr/>
         </p:nvSpPr>
         <p:spPr>
           <a:xfrm>
             <a:off x="9875520" y="6446520"/>
-            <a:ext cx="1828800" cy="182880"/>
+            <a:ext cx="1828800" cy="138600"/>
           </a:xfrm>
           <a:prstGeom prst="rect">
             <a:avLst/>
@@ -12788,1362 +12832,7 @@
                 <a:cs typeface="Arial"/>
                 <a:sym typeface="Arial"/>
               </a:rPr>
-              <a:t>05  /  RUST IN 2026</a:t>
-            </a:r>
-            <a:endParaRPr/>
-          </a:p>
-        </p:txBody>
-      </p:sp>
-      <p:sp>
-        <p:nvSpPr>
-          <p:cNvPr id="237" name="Google Shape;237;p23"/>
-          <p:cNvSpPr/>
-          <p:nvPr/>
-        </p:nvSpPr>
-        <p:spPr>
-          <a:xfrm>
-            <a:off x="749808" y="1938528"/>
-            <a:ext cx="2514600" cy="731520"/>
-          </a:xfrm>
-          <a:prstGeom prst="rect">
-            <a:avLst/>
-          </a:prstGeom>
-          <a:solidFill>
-            <a:srgbClr val="1D2B3F"/>
-          </a:solidFill>
-          <a:ln>
-            <a:noFill/>
-          </a:ln>
-          <a:effectLst>
-            <a:outerShdw blurRad="40000" rotWithShape="0" dir="5400000" dist="23000">
-              <a:srgbClr val="000000">
-                <a:alpha val="34902"/>
-              </a:srgbClr>
-            </a:outerShdw>
-          </a:effectLst>
-        </p:spPr>
-        <p:txBody>
-          <a:bodyPr anchorCtr="0" anchor="ctr" bIns="45700" lIns="91425" spcFirstLastPara="1" rIns="91425" wrap="square" tIns="45700">
-            <a:noAutofit/>
-          </a:bodyPr>
-          <a:lstStyle/>
-          <a:p>
-            <a:pPr indent="0" lvl="0" marL="0" marR="0" rtl="0" algn="ctr">
-              <a:spcBef>
-                <a:spcPts val="0"/>
-              </a:spcBef>
-              <a:spcAft>
-                <a:spcPts val="0"/>
-              </a:spcAft>
-              <a:buNone/>
-            </a:pPr>
-            <a:r>
-              <a:t/>
-            </a:r>
-            <a:endParaRPr b="0" i="0" sz="1800" u="none" cap="none" strike="noStrike">
-              <a:solidFill>
-                <a:schemeClr val="dk1"/>
-              </a:solidFill>
-              <a:latin typeface="Calibri"/>
-              <a:ea typeface="Calibri"/>
-              <a:cs typeface="Calibri"/>
-              <a:sym typeface="Calibri"/>
-            </a:endParaRPr>
-          </a:p>
-        </p:txBody>
-      </p:sp>
-      <p:sp>
-        <p:nvSpPr>
-          <p:cNvPr id="238" name="Google Shape;238;p23"/>
-          <p:cNvSpPr txBox="1"/>
-          <p:nvPr/>
-        </p:nvSpPr>
-        <p:spPr>
-          <a:xfrm>
-            <a:off x="950976" y="2093976"/>
-            <a:ext cx="2194560" cy="393192"/>
-          </a:xfrm>
-          <a:prstGeom prst="rect">
-            <a:avLst/>
-          </a:prstGeom>
-          <a:noFill/>
-          <a:ln>
-            <a:noFill/>
-          </a:ln>
-        </p:spPr>
-        <p:txBody>
-          <a:bodyPr anchorCtr="0" anchor="t" bIns="0" lIns="0" spcFirstLastPara="1" rIns="0" wrap="square" tIns="0">
-            <a:spAutoFit/>
-          </a:bodyPr>
-          <a:lstStyle/>
-          <a:p>
-            <a:pPr indent="0" lvl="0" marL="0" marR="0" rtl="0" algn="l">
-              <a:spcBef>
-                <a:spcPts val="0"/>
-              </a:spcBef>
-              <a:spcAft>
-                <a:spcPts val="0"/>
-              </a:spcAft>
-              <a:buNone/>
-            </a:pPr>
-            <a:r>
-              <a:rPr b="1" i="0" lang="en-US" sz="1900" u="none" cap="none" strike="noStrike">
-                <a:solidFill>
-                  <a:srgbClr val="F08443"/>
-                </a:solidFill>
-                <a:latin typeface="Arial"/>
-                <a:ea typeface="Arial"/>
-                <a:cs typeface="Arial"/>
-                <a:sym typeface="Arial"/>
-              </a:rPr>
-              <a:t>Linux</a:t>
-            </a:r>
-            <a:endParaRPr/>
-          </a:p>
-        </p:txBody>
-      </p:sp>
-      <p:sp>
-        <p:nvSpPr>
-          <p:cNvPr id="239" name="Google Shape;239;p23"/>
-          <p:cNvSpPr txBox="1"/>
-          <p:nvPr/>
-        </p:nvSpPr>
-        <p:spPr>
-          <a:xfrm>
-            <a:off x="3547872" y="2057400"/>
-            <a:ext cx="7863840" cy="594360"/>
-          </a:xfrm>
-          <a:prstGeom prst="rect">
-            <a:avLst/>
-          </a:prstGeom>
-          <a:noFill/>
-          <a:ln>
-            <a:noFill/>
-          </a:ln>
-        </p:spPr>
-        <p:txBody>
-          <a:bodyPr anchorCtr="0" anchor="t" bIns="0" lIns="0" spcFirstLastPara="1" rIns="0" wrap="square" tIns="0">
-            <a:spAutoFit/>
-          </a:bodyPr>
-          <a:lstStyle/>
-          <a:p>
-            <a:pPr indent="0" lvl="0" marL="0" marR="0" rtl="0" algn="l">
-              <a:spcBef>
-                <a:spcPts val="0"/>
-              </a:spcBef>
-              <a:spcAft>
-                <a:spcPts val="0"/>
-              </a:spcAft>
-              <a:buNone/>
-            </a:pPr>
-            <a:r>
-              <a:rPr b="0" i="0" lang="en-US" sz="1900" u="none" cap="none" strike="noStrike">
-                <a:solidFill>
-                  <a:srgbClr val="F6F7FA"/>
-                </a:solidFill>
-                <a:latin typeface="Arial"/>
-                <a:ea typeface="Arial"/>
-                <a:cs typeface="Arial"/>
-                <a:sym typeface="Arial"/>
-              </a:rPr>
-              <a:t>Developers can write some kernel components in Rust.</a:t>
-            </a:r>
-            <a:endParaRPr/>
-          </a:p>
-        </p:txBody>
-      </p:sp>
-      <p:sp>
-        <p:nvSpPr>
-          <p:cNvPr id="240" name="Google Shape;240;p23"/>
-          <p:cNvSpPr/>
-          <p:nvPr/>
-        </p:nvSpPr>
-        <p:spPr>
-          <a:xfrm>
-            <a:off x="749808" y="2962656"/>
-            <a:ext cx="2514600" cy="731520"/>
-          </a:xfrm>
-          <a:prstGeom prst="rect">
-            <a:avLst/>
-          </a:prstGeom>
-          <a:solidFill>
-            <a:srgbClr val="1D2B3F"/>
-          </a:solidFill>
-          <a:ln>
-            <a:noFill/>
-          </a:ln>
-          <a:effectLst>
-            <a:outerShdw blurRad="40000" rotWithShape="0" dir="5400000" dist="23000">
-              <a:srgbClr val="000000">
-                <a:alpha val="34902"/>
-              </a:srgbClr>
-            </a:outerShdw>
-          </a:effectLst>
-        </p:spPr>
-        <p:txBody>
-          <a:bodyPr anchorCtr="0" anchor="ctr" bIns="45700" lIns="91425" spcFirstLastPara="1" rIns="91425" wrap="square" tIns="45700">
-            <a:noAutofit/>
-          </a:bodyPr>
-          <a:lstStyle/>
-          <a:p>
-            <a:pPr indent="0" lvl="0" marL="0" marR="0" rtl="0" algn="ctr">
-              <a:spcBef>
-                <a:spcPts val="0"/>
-              </a:spcBef>
-              <a:spcAft>
-                <a:spcPts val="0"/>
-              </a:spcAft>
-              <a:buNone/>
-            </a:pPr>
-            <a:r>
-              <a:t/>
-            </a:r>
-            <a:endParaRPr b="0" i="0" sz="1800" u="none" cap="none" strike="noStrike">
-              <a:solidFill>
-                <a:schemeClr val="dk1"/>
-              </a:solidFill>
-              <a:latin typeface="Calibri"/>
-              <a:ea typeface="Calibri"/>
-              <a:cs typeface="Calibri"/>
-              <a:sym typeface="Calibri"/>
-            </a:endParaRPr>
-          </a:p>
-        </p:txBody>
-      </p:sp>
-      <p:sp>
-        <p:nvSpPr>
-          <p:cNvPr id="241" name="Google Shape;241;p23"/>
-          <p:cNvSpPr txBox="1"/>
-          <p:nvPr/>
-        </p:nvSpPr>
-        <p:spPr>
-          <a:xfrm>
-            <a:off x="950976" y="3118104"/>
-            <a:ext cx="2194560" cy="393192"/>
-          </a:xfrm>
-          <a:prstGeom prst="rect">
-            <a:avLst/>
-          </a:prstGeom>
-          <a:noFill/>
-          <a:ln>
-            <a:noFill/>
-          </a:ln>
-        </p:spPr>
-        <p:txBody>
-          <a:bodyPr anchorCtr="0" anchor="t" bIns="0" lIns="0" spcFirstLastPara="1" rIns="0" wrap="square" tIns="0">
-            <a:spAutoFit/>
-          </a:bodyPr>
-          <a:lstStyle/>
-          <a:p>
-            <a:pPr indent="0" lvl="0" marL="0" marR="0" rtl="0" algn="l">
-              <a:spcBef>
-                <a:spcPts val="0"/>
-              </a:spcBef>
-              <a:spcAft>
-                <a:spcPts val="0"/>
-              </a:spcAft>
-              <a:buNone/>
-            </a:pPr>
-            <a:r>
-              <a:rPr b="1" i="0" lang="en-US" sz="1900" u="none" cap="none" strike="noStrike">
-                <a:solidFill>
-                  <a:srgbClr val="F08443"/>
-                </a:solidFill>
-                <a:latin typeface="Arial"/>
-                <a:ea typeface="Arial"/>
-                <a:cs typeface="Arial"/>
-                <a:sym typeface="Arial"/>
-              </a:rPr>
-              <a:t>Google / Android</a:t>
-            </a:r>
-            <a:endParaRPr/>
-          </a:p>
-        </p:txBody>
-      </p:sp>
-      <p:sp>
-        <p:nvSpPr>
-          <p:cNvPr id="242" name="Google Shape;242;p23"/>
-          <p:cNvSpPr txBox="1"/>
-          <p:nvPr/>
-        </p:nvSpPr>
-        <p:spPr>
-          <a:xfrm>
-            <a:off x="3547872" y="3081528"/>
-            <a:ext cx="7863840" cy="594360"/>
-          </a:xfrm>
-          <a:prstGeom prst="rect">
-            <a:avLst/>
-          </a:prstGeom>
-          <a:noFill/>
-          <a:ln>
-            <a:noFill/>
-          </a:ln>
-        </p:spPr>
-        <p:txBody>
-          <a:bodyPr anchorCtr="0" anchor="t" bIns="0" lIns="0" spcFirstLastPara="1" rIns="0" wrap="square" tIns="0">
-            <a:spAutoFit/>
-          </a:bodyPr>
-          <a:lstStyle/>
-          <a:p>
-            <a:pPr indent="0" lvl="0" marL="0" marR="0" rtl="0" algn="l">
-              <a:spcBef>
-                <a:spcPts val="0"/>
-              </a:spcBef>
-              <a:spcAft>
-                <a:spcPts val="0"/>
-              </a:spcAft>
-              <a:buNone/>
-            </a:pPr>
-            <a:r>
-              <a:rPr b="0" i="0" lang="en-US" sz="1900" u="none" cap="none" strike="noStrike">
-                <a:solidFill>
-                  <a:srgbClr val="F6F7FA"/>
-                </a:solidFill>
-                <a:latin typeface="Arial"/>
-                <a:ea typeface="Arial"/>
-                <a:cs typeface="Arial"/>
-                <a:sym typeface="Arial"/>
-              </a:rPr>
-              <a:t>Rust is used in security-sensitive Android code.</a:t>
-            </a:r>
-            <a:endParaRPr/>
-          </a:p>
-        </p:txBody>
-      </p:sp>
-      <p:sp>
-        <p:nvSpPr>
-          <p:cNvPr id="243" name="Google Shape;243;p23"/>
-          <p:cNvSpPr/>
-          <p:nvPr/>
-        </p:nvSpPr>
-        <p:spPr>
-          <a:xfrm>
-            <a:off x="749808" y="3986784"/>
-            <a:ext cx="2514600" cy="731520"/>
-          </a:xfrm>
-          <a:prstGeom prst="rect">
-            <a:avLst/>
-          </a:prstGeom>
-          <a:solidFill>
-            <a:srgbClr val="1D2B3F"/>
-          </a:solidFill>
-          <a:ln>
-            <a:noFill/>
-          </a:ln>
-          <a:effectLst>
-            <a:outerShdw blurRad="40000" rotWithShape="0" dir="5400000" dist="23000">
-              <a:srgbClr val="000000">
-                <a:alpha val="34902"/>
-              </a:srgbClr>
-            </a:outerShdw>
-          </a:effectLst>
-        </p:spPr>
-        <p:txBody>
-          <a:bodyPr anchorCtr="0" anchor="ctr" bIns="45700" lIns="91425" spcFirstLastPara="1" rIns="91425" wrap="square" tIns="45700">
-            <a:noAutofit/>
-          </a:bodyPr>
-          <a:lstStyle/>
-          <a:p>
-            <a:pPr indent="0" lvl="0" marL="0" marR="0" rtl="0" algn="ctr">
-              <a:spcBef>
-                <a:spcPts val="0"/>
-              </a:spcBef>
-              <a:spcAft>
-                <a:spcPts val="0"/>
-              </a:spcAft>
-              <a:buNone/>
-            </a:pPr>
-            <a:r>
-              <a:t/>
-            </a:r>
-            <a:endParaRPr b="0" i="0" sz="1800" u="none" cap="none" strike="noStrike">
-              <a:solidFill>
-                <a:schemeClr val="dk1"/>
-              </a:solidFill>
-              <a:latin typeface="Calibri"/>
-              <a:ea typeface="Calibri"/>
-              <a:cs typeface="Calibri"/>
-              <a:sym typeface="Calibri"/>
-            </a:endParaRPr>
-          </a:p>
-        </p:txBody>
-      </p:sp>
-      <p:sp>
-        <p:nvSpPr>
-          <p:cNvPr id="244" name="Google Shape;244;p23"/>
-          <p:cNvSpPr txBox="1"/>
-          <p:nvPr/>
-        </p:nvSpPr>
-        <p:spPr>
-          <a:xfrm>
-            <a:off x="950976" y="4142232"/>
-            <a:ext cx="2194560" cy="393192"/>
-          </a:xfrm>
-          <a:prstGeom prst="rect">
-            <a:avLst/>
-          </a:prstGeom>
-          <a:noFill/>
-          <a:ln>
-            <a:noFill/>
-          </a:ln>
-        </p:spPr>
-        <p:txBody>
-          <a:bodyPr anchorCtr="0" anchor="t" bIns="0" lIns="0" spcFirstLastPara="1" rIns="0" wrap="square" tIns="0">
-            <a:spAutoFit/>
-          </a:bodyPr>
-          <a:lstStyle/>
-          <a:p>
-            <a:pPr indent="0" lvl="0" marL="0" marR="0" rtl="0" algn="l">
-              <a:spcBef>
-                <a:spcPts val="0"/>
-              </a:spcBef>
-              <a:spcAft>
-                <a:spcPts val="0"/>
-              </a:spcAft>
-              <a:buNone/>
-            </a:pPr>
-            <a:r>
-              <a:rPr b="1" i="0" lang="en-US" sz="1900" u="none" cap="none" strike="noStrike">
-                <a:solidFill>
-                  <a:srgbClr val="F08443"/>
-                </a:solidFill>
-                <a:latin typeface="Arial"/>
-                <a:ea typeface="Arial"/>
-                <a:cs typeface="Arial"/>
-                <a:sym typeface="Arial"/>
-              </a:rPr>
-              <a:t>Microsoft</a:t>
-            </a:r>
-            <a:endParaRPr/>
-          </a:p>
-        </p:txBody>
-      </p:sp>
-      <p:sp>
-        <p:nvSpPr>
-          <p:cNvPr id="245" name="Google Shape;245;p23"/>
-          <p:cNvSpPr txBox="1"/>
-          <p:nvPr/>
-        </p:nvSpPr>
-        <p:spPr>
-          <a:xfrm>
-            <a:off x="3547872" y="4105656"/>
-            <a:ext cx="7863840" cy="594360"/>
-          </a:xfrm>
-          <a:prstGeom prst="rect">
-            <a:avLst/>
-          </a:prstGeom>
-          <a:noFill/>
-          <a:ln>
-            <a:noFill/>
-          </a:ln>
-        </p:spPr>
-        <p:txBody>
-          <a:bodyPr anchorCtr="0" anchor="t" bIns="0" lIns="0" spcFirstLastPara="1" rIns="0" wrap="square" tIns="0">
-            <a:spAutoFit/>
-          </a:bodyPr>
-          <a:lstStyle/>
-          <a:p>
-            <a:pPr indent="0" lvl="0" marL="0" marR="0" rtl="0" algn="l">
-              <a:spcBef>
-                <a:spcPts val="0"/>
-              </a:spcBef>
-              <a:spcAft>
-                <a:spcPts val="0"/>
-              </a:spcAft>
-              <a:buNone/>
-            </a:pPr>
-            <a:r>
-              <a:rPr b="0" i="0" lang="en-US" sz="1900" u="none" cap="none" strike="noStrike">
-                <a:solidFill>
-                  <a:srgbClr val="F6F7FA"/>
-                </a:solidFill>
-                <a:latin typeface="Arial"/>
-                <a:ea typeface="Arial"/>
-                <a:cs typeface="Arial"/>
-                <a:sym typeface="Arial"/>
-              </a:rPr>
-              <a:t>Rust is being explored and used in some systems work.</a:t>
-            </a:r>
-            <a:endParaRPr/>
-          </a:p>
-        </p:txBody>
-      </p:sp>
-      <p:sp>
-        <p:nvSpPr>
-          <p:cNvPr id="246" name="Google Shape;246;p23"/>
-          <p:cNvSpPr/>
-          <p:nvPr/>
-        </p:nvSpPr>
-        <p:spPr>
-          <a:xfrm>
-            <a:off x="749808" y="5010912"/>
-            <a:ext cx="2514600" cy="731520"/>
-          </a:xfrm>
-          <a:prstGeom prst="rect">
-            <a:avLst/>
-          </a:prstGeom>
-          <a:solidFill>
-            <a:srgbClr val="1D2B3F"/>
-          </a:solidFill>
-          <a:ln>
-            <a:noFill/>
-          </a:ln>
-          <a:effectLst>
-            <a:outerShdw blurRad="40000" rotWithShape="0" dir="5400000" dist="23000">
-              <a:srgbClr val="000000">
-                <a:alpha val="34902"/>
-              </a:srgbClr>
-            </a:outerShdw>
-          </a:effectLst>
-        </p:spPr>
-        <p:txBody>
-          <a:bodyPr anchorCtr="0" anchor="ctr" bIns="45700" lIns="91425" spcFirstLastPara="1" rIns="91425" wrap="square" tIns="45700">
-            <a:noAutofit/>
-          </a:bodyPr>
-          <a:lstStyle/>
-          <a:p>
-            <a:pPr indent="0" lvl="0" marL="0" marR="0" rtl="0" algn="ctr">
-              <a:spcBef>
-                <a:spcPts val="0"/>
-              </a:spcBef>
-              <a:spcAft>
-                <a:spcPts val="0"/>
-              </a:spcAft>
-              <a:buNone/>
-            </a:pPr>
-            <a:r>
-              <a:t/>
-            </a:r>
-            <a:endParaRPr b="0" i="0" sz="1800" u="none" cap="none" strike="noStrike">
-              <a:solidFill>
-                <a:schemeClr val="dk1"/>
-              </a:solidFill>
-              <a:latin typeface="Calibri"/>
-              <a:ea typeface="Calibri"/>
-              <a:cs typeface="Calibri"/>
-              <a:sym typeface="Calibri"/>
-            </a:endParaRPr>
-          </a:p>
-        </p:txBody>
-      </p:sp>
-      <p:sp>
-        <p:nvSpPr>
-          <p:cNvPr id="247" name="Google Shape;247;p23"/>
-          <p:cNvSpPr txBox="1"/>
-          <p:nvPr/>
-        </p:nvSpPr>
-        <p:spPr>
-          <a:xfrm>
-            <a:off x="950976" y="5166360"/>
-            <a:ext cx="2194560" cy="393192"/>
-          </a:xfrm>
-          <a:prstGeom prst="rect">
-            <a:avLst/>
-          </a:prstGeom>
-          <a:noFill/>
-          <a:ln>
-            <a:noFill/>
-          </a:ln>
-        </p:spPr>
-        <p:txBody>
-          <a:bodyPr anchorCtr="0" anchor="t" bIns="0" lIns="0" spcFirstLastPara="1" rIns="0" wrap="square" tIns="0">
-            <a:spAutoFit/>
-          </a:bodyPr>
-          <a:lstStyle/>
-          <a:p>
-            <a:pPr indent="0" lvl="0" marL="0" marR="0" rtl="0" algn="l">
-              <a:spcBef>
-                <a:spcPts val="0"/>
-              </a:spcBef>
-              <a:spcAft>
-                <a:spcPts val="0"/>
-              </a:spcAft>
-              <a:buNone/>
-            </a:pPr>
-            <a:r>
-              <a:rPr b="1" i="0" lang="en-US" sz="1900" u="none" cap="none" strike="noStrike">
-                <a:solidFill>
-                  <a:srgbClr val="F08443"/>
-                </a:solidFill>
-                <a:latin typeface="Arial"/>
-                <a:ea typeface="Arial"/>
-                <a:cs typeface="Arial"/>
-                <a:sym typeface="Arial"/>
-              </a:rPr>
-              <a:t>AWS</a:t>
-            </a:r>
-            <a:endParaRPr/>
-          </a:p>
-        </p:txBody>
-      </p:sp>
-      <p:sp>
-        <p:nvSpPr>
-          <p:cNvPr id="248" name="Google Shape;248;p23"/>
-          <p:cNvSpPr txBox="1"/>
-          <p:nvPr/>
-        </p:nvSpPr>
-        <p:spPr>
-          <a:xfrm>
-            <a:off x="3547872" y="5129784"/>
-            <a:ext cx="7863840" cy="594360"/>
-          </a:xfrm>
-          <a:prstGeom prst="rect">
-            <a:avLst/>
-          </a:prstGeom>
-          <a:noFill/>
-          <a:ln>
-            <a:noFill/>
-          </a:ln>
-        </p:spPr>
-        <p:txBody>
-          <a:bodyPr anchorCtr="0" anchor="t" bIns="0" lIns="0" spcFirstLastPara="1" rIns="0" wrap="square" tIns="0">
-            <a:spAutoFit/>
-          </a:bodyPr>
-          <a:lstStyle/>
-          <a:p>
-            <a:pPr indent="0" lvl="0" marL="0" marR="0" rtl="0" algn="l">
-              <a:spcBef>
-                <a:spcPts val="0"/>
-              </a:spcBef>
-              <a:spcAft>
-                <a:spcPts val="0"/>
-              </a:spcAft>
-              <a:buNone/>
-            </a:pPr>
-            <a:r>
-              <a:rPr b="0" i="0" lang="en-US" sz="1900" u="none" cap="none" strike="noStrike">
-                <a:solidFill>
-                  <a:srgbClr val="F6F7FA"/>
-                </a:solidFill>
-                <a:latin typeface="Arial"/>
-                <a:ea typeface="Arial"/>
-                <a:cs typeface="Arial"/>
-                <a:sym typeface="Arial"/>
-              </a:rPr>
-              <a:t>Rust powers projects such as Firecracker.</a:t>
-            </a:r>
-            <a:endParaRPr/>
-          </a:p>
-        </p:txBody>
-      </p:sp>
-    </p:spTree>
-  </p:cSld>
-  <p:clrMapOvr>
-    <a:masterClrMapping/>
-  </p:clrMapOvr>
-</p:sld>
-</file>
-
-<file path=ppt/slides/slide12.xml><?xml version="1.0" encoding="utf-8"?>
-<p:sld xmlns:a="http://schemas.openxmlformats.org/drawingml/2006/main" xmlns:r="http://schemas.openxmlformats.org/officeDocument/2006/relationships" xmlns:mc="http://schemas.openxmlformats.org/markup-compatibility/2006" xmlns:mv="urn:schemas-microsoft-com:mac:vml" xmlns:p="http://schemas.openxmlformats.org/presentationml/2006/main" xmlns:c="http://schemas.openxmlformats.org/drawingml/2006/chart" xmlns:dgm="http://schemas.openxmlformats.org/drawingml/2006/diagram" xmlns:o="urn:schemas-microsoft-com:office:office" xmlns:v="urn:schemas-microsoft-com:vml" xmlns:pvml="urn:schemas-microsoft-com:office:powerpoint" xmlns:com="http://schemas.openxmlformats.org/drawingml/2006/compatibility" xmlns:p14="http://schemas.microsoft.com/office/powerpoint/2010/main" xmlns:p15="http://schemas.microsoft.com/office/powerpoint/2012/main" xmlns:ahyp="http://schemas.microsoft.com/office/drawing/2018/hyperlinkcolor">
-  <p:cSld>
-    <p:spTree>
-      <p:nvGrpSpPr>
-        <p:cNvPr id="252" name="Shape 252"/>
-        <p:cNvGrpSpPr/>
-        <p:nvPr/>
-      </p:nvGrpSpPr>
-      <p:grpSpPr>
-        <a:xfrm>
-          <a:off x="0" y="0"/>
-          <a:ext cx="0" cy="0"/>
-          <a:chOff x="0" y="0"/>
-          <a:chExt cx="0" cy="0"/>
-        </a:xfrm>
-      </p:grpSpPr>
-      <p:sp>
-        <p:nvSpPr>
-          <p:cNvPr id="253" name="Google Shape;253;p24"/>
-          <p:cNvSpPr/>
-          <p:nvPr/>
-        </p:nvSpPr>
-        <p:spPr>
-          <a:xfrm>
-            <a:off x="0" y="0"/>
-            <a:ext cx="12191695" cy="6858000"/>
-          </a:xfrm>
-          <a:prstGeom prst="rect">
-            <a:avLst/>
-          </a:prstGeom>
-          <a:solidFill>
-            <a:srgbClr val="111B2B"/>
-          </a:solidFill>
-          <a:ln>
-            <a:noFill/>
-          </a:ln>
-          <a:effectLst>
-            <a:outerShdw blurRad="40000" rotWithShape="0" dir="5400000" dist="23000">
-              <a:srgbClr val="000000">
-                <a:alpha val="34902"/>
-              </a:srgbClr>
-            </a:outerShdw>
-          </a:effectLst>
-        </p:spPr>
-        <p:txBody>
-          <a:bodyPr anchorCtr="0" anchor="ctr" bIns="45700" lIns="91425" spcFirstLastPara="1" rIns="91425" wrap="square" tIns="45700">
-            <a:noAutofit/>
-          </a:bodyPr>
-          <a:lstStyle/>
-          <a:p>
-            <a:pPr indent="0" lvl="0" marL="0" marR="0" rtl="0" algn="ctr">
-              <a:spcBef>
-                <a:spcPts val="0"/>
-              </a:spcBef>
-              <a:spcAft>
-                <a:spcPts val="0"/>
-              </a:spcAft>
-              <a:buNone/>
-            </a:pPr>
-            <a:r>
-              <a:t/>
-            </a:r>
-            <a:endParaRPr b="0" i="0" sz="1800" u="none" cap="none" strike="noStrike">
-              <a:solidFill>
-                <a:schemeClr val="dk1"/>
-              </a:solidFill>
-              <a:latin typeface="Calibri"/>
-              <a:ea typeface="Calibri"/>
-              <a:cs typeface="Calibri"/>
-              <a:sym typeface="Calibri"/>
-            </a:endParaRPr>
-          </a:p>
-        </p:txBody>
-      </p:sp>
-      <p:sp>
-        <p:nvSpPr>
-          <p:cNvPr id="254" name="Google Shape;254;p24"/>
-          <p:cNvSpPr/>
-          <p:nvPr/>
-        </p:nvSpPr>
-        <p:spPr>
-          <a:xfrm>
-            <a:off x="411480" y="393192"/>
-            <a:ext cx="73152" cy="429768"/>
-          </a:xfrm>
-          <a:prstGeom prst="rect">
-            <a:avLst/>
-          </a:prstGeom>
-          <a:solidFill>
-            <a:srgbClr val="F08443"/>
-          </a:solidFill>
-          <a:ln>
-            <a:noFill/>
-          </a:ln>
-          <a:effectLst>
-            <a:outerShdw blurRad="40000" rotWithShape="0" dir="5400000" dist="23000">
-              <a:srgbClr val="000000">
-                <a:alpha val="34902"/>
-              </a:srgbClr>
-            </a:outerShdw>
-          </a:effectLst>
-        </p:spPr>
-        <p:txBody>
-          <a:bodyPr anchorCtr="0" anchor="ctr" bIns="45700" lIns="91425" spcFirstLastPara="1" rIns="91425" wrap="square" tIns="45700">
-            <a:noAutofit/>
-          </a:bodyPr>
-          <a:lstStyle/>
-          <a:p>
-            <a:pPr indent="0" lvl="0" marL="0" marR="0" rtl="0" algn="ctr">
-              <a:spcBef>
-                <a:spcPts val="0"/>
-              </a:spcBef>
-              <a:spcAft>
-                <a:spcPts val="0"/>
-              </a:spcAft>
-              <a:buNone/>
-            </a:pPr>
-            <a:r>
-              <a:t/>
-            </a:r>
-            <a:endParaRPr b="0" i="0" sz="1800" u="none" cap="none" strike="noStrike">
-              <a:solidFill>
-                <a:schemeClr val="dk1"/>
-              </a:solidFill>
-              <a:latin typeface="Calibri"/>
-              <a:ea typeface="Calibri"/>
-              <a:cs typeface="Calibri"/>
-              <a:sym typeface="Calibri"/>
-            </a:endParaRPr>
-          </a:p>
-        </p:txBody>
-      </p:sp>
-      <p:sp>
-        <p:nvSpPr>
-          <p:cNvPr id="255" name="Google Shape;255;p24"/>
-          <p:cNvSpPr txBox="1"/>
-          <p:nvPr/>
-        </p:nvSpPr>
-        <p:spPr>
-          <a:xfrm>
-            <a:off x="612648" y="411480"/>
-            <a:ext cx="7315200" cy="274320"/>
-          </a:xfrm>
-          <a:prstGeom prst="rect">
-            <a:avLst/>
-          </a:prstGeom>
-          <a:noFill/>
-          <a:ln>
-            <a:noFill/>
-          </a:ln>
-        </p:spPr>
-        <p:txBody>
-          <a:bodyPr anchorCtr="0" anchor="t" bIns="0" lIns="0" spcFirstLastPara="1" rIns="0" wrap="square" tIns="0">
-            <a:spAutoFit/>
-          </a:bodyPr>
-          <a:lstStyle/>
-          <a:p>
-            <a:pPr indent="0" lvl="0" marL="0" marR="0" rtl="0" algn="l">
-              <a:spcBef>
-                <a:spcPts val="0"/>
-              </a:spcBef>
-              <a:spcAft>
-                <a:spcPts val="0"/>
-              </a:spcAft>
-              <a:buNone/>
-            </a:pPr>
-            <a:r>
-              <a:rPr b="1" i="0" lang="en-US" sz="1100" u="none" cap="none" strike="noStrike">
-                <a:solidFill>
-                  <a:srgbClr val="BDC8D6"/>
-                </a:solidFill>
-                <a:latin typeface="Arial"/>
-                <a:ea typeface="Arial"/>
-                <a:cs typeface="Arial"/>
-                <a:sym typeface="Arial"/>
-              </a:rPr>
-              <a:t>CEP146  /  SOFTWARE DEVELOPMENT CURRENT EVENT</a:t>
-            </a:r>
-            <a:endParaRPr/>
-          </a:p>
-        </p:txBody>
-      </p:sp>
-      <p:sp>
-        <p:nvSpPr>
-          <p:cNvPr id="256" name="Google Shape;256;p24"/>
-          <p:cNvSpPr txBox="1"/>
-          <p:nvPr/>
-        </p:nvSpPr>
-        <p:spPr>
-          <a:xfrm>
-            <a:off x="621792" y="978408"/>
-            <a:ext cx="10972800" cy="731520"/>
-          </a:xfrm>
-          <a:prstGeom prst="rect">
-            <a:avLst/>
-          </a:prstGeom>
-          <a:noFill/>
-          <a:ln>
-            <a:noFill/>
-          </a:ln>
-        </p:spPr>
-        <p:txBody>
-          <a:bodyPr anchorCtr="0" anchor="t" bIns="0" lIns="0" spcFirstLastPara="1" rIns="0" wrap="square" tIns="0">
-            <a:spAutoFit/>
-          </a:bodyPr>
-          <a:lstStyle/>
-          <a:p>
-            <a:pPr indent="0" lvl="0" marL="0" marR="0" rtl="0" algn="l">
-              <a:spcBef>
-                <a:spcPts val="0"/>
-              </a:spcBef>
-              <a:spcAft>
-                <a:spcPts val="0"/>
-              </a:spcAft>
-              <a:buNone/>
-            </a:pPr>
-            <a:r>
-              <a:rPr b="1" i="0" lang="en-US" sz="3100" u="none" cap="none" strike="noStrike">
-                <a:solidFill>
-                  <a:srgbClr val="F6F7FA"/>
-                </a:solidFill>
-                <a:latin typeface="Arial"/>
-                <a:ea typeface="Arial"/>
-                <a:cs typeface="Arial"/>
-                <a:sym typeface="Arial"/>
-              </a:rPr>
-              <a:t>Challenges and final thoughts</a:t>
-            </a:r>
-            <a:endParaRPr/>
-          </a:p>
-        </p:txBody>
-      </p:sp>
-      <p:sp>
-        <p:nvSpPr>
-          <p:cNvPr id="257" name="Google Shape;257;p24"/>
-          <p:cNvSpPr txBox="1"/>
-          <p:nvPr/>
-        </p:nvSpPr>
-        <p:spPr>
-          <a:xfrm>
-            <a:off x="9875520" y="6446520"/>
-            <a:ext cx="1828800" cy="182880"/>
-          </a:xfrm>
-          <a:prstGeom prst="rect">
-            <a:avLst/>
-          </a:prstGeom>
-          <a:noFill/>
-          <a:ln>
-            <a:noFill/>
-          </a:ln>
-        </p:spPr>
-        <p:txBody>
-          <a:bodyPr anchorCtr="0" anchor="t" bIns="0" lIns="0" spcFirstLastPara="1" rIns="0" wrap="square" tIns="0">
-            <a:spAutoFit/>
-          </a:bodyPr>
-          <a:lstStyle/>
-          <a:p>
-            <a:pPr indent="0" lvl="0" marL="0" marR="0" rtl="0" algn="l">
-              <a:spcBef>
-                <a:spcPts val="0"/>
-              </a:spcBef>
-              <a:spcAft>
-                <a:spcPts val="0"/>
-              </a:spcAft>
-              <a:buNone/>
-            </a:pPr>
-            <a:r>
-              <a:rPr b="0" i="0" lang="en-US" sz="900" u="none" cap="none" strike="noStrike">
-                <a:solidFill>
-                  <a:srgbClr val="BDC8D6"/>
-                </a:solidFill>
-                <a:latin typeface="Arial"/>
-                <a:ea typeface="Arial"/>
-                <a:cs typeface="Arial"/>
-                <a:sym typeface="Arial"/>
-              </a:rPr>
-              <a:t>06  /  RUST IN 2026</a:t>
-            </a:r>
-            <a:endParaRPr/>
-          </a:p>
-        </p:txBody>
-      </p:sp>
-      <p:sp>
-        <p:nvSpPr>
-          <p:cNvPr id="258" name="Google Shape;258;p24"/>
-          <p:cNvSpPr/>
-          <p:nvPr/>
-        </p:nvSpPr>
-        <p:spPr>
-          <a:xfrm>
-            <a:off x="758952" y="2103120"/>
-            <a:ext cx="100584" cy="100584"/>
-          </a:xfrm>
-          <a:prstGeom prst="rect">
-            <a:avLst/>
-          </a:prstGeom>
-          <a:solidFill>
-            <a:srgbClr val="F08443"/>
-          </a:solidFill>
-          <a:ln>
-            <a:noFill/>
-          </a:ln>
-          <a:effectLst>
-            <a:outerShdw blurRad="40000" rotWithShape="0" dir="5400000" dist="23000">
-              <a:srgbClr val="000000">
-                <a:alpha val="34902"/>
-              </a:srgbClr>
-            </a:outerShdw>
-          </a:effectLst>
-        </p:spPr>
-        <p:txBody>
-          <a:bodyPr anchorCtr="0" anchor="ctr" bIns="45700" lIns="91425" spcFirstLastPara="1" rIns="91425" wrap="square" tIns="45700">
-            <a:noAutofit/>
-          </a:bodyPr>
-          <a:lstStyle/>
-          <a:p>
-            <a:pPr indent="0" lvl="0" marL="0" marR="0" rtl="0" algn="ctr">
-              <a:spcBef>
-                <a:spcPts val="0"/>
-              </a:spcBef>
-              <a:spcAft>
-                <a:spcPts val="0"/>
-              </a:spcAft>
-              <a:buNone/>
-            </a:pPr>
-            <a:r>
-              <a:t/>
-            </a:r>
-            <a:endParaRPr b="0" i="0" sz="1800" u="none" cap="none" strike="noStrike">
-              <a:solidFill>
-                <a:schemeClr val="dk1"/>
-              </a:solidFill>
-              <a:latin typeface="Calibri"/>
-              <a:ea typeface="Calibri"/>
-              <a:cs typeface="Calibri"/>
-              <a:sym typeface="Calibri"/>
-            </a:endParaRPr>
-          </a:p>
-        </p:txBody>
-      </p:sp>
-      <p:sp>
-        <p:nvSpPr>
-          <p:cNvPr id="259" name="Google Shape;259;p24"/>
-          <p:cNvSpPr txBox="1"/>
-          <p:nvPr/>
-        </p:nvSpPr>
-        <p:spPr>
-          <a:xfrm>
-            <a:off x="1042415" y="1993392"/>
-            <a:ext cx="10241280" cy="685800"/>
-          </a:xfrm>
-          <a:prstGeom prst="rect">
-            <a:avLst/>
-          </a:prstGeom>
-          <a:noFill/>
-          <a:ln>
-            <a:noFill/>
-          </a:ln>
-        </p:spPr>
-        <p:txBody>
-          <a:bodyPr anchorCtr="0" anchor="t" bIns="0" lIns="0" spcFirstLastPara="1" rIns="0" wrap="square" tIns="0">
-            <a:spAutoFit/>
-          </a:bodyPr>
-          <a:lstStyle/>
-          <a:p>
-            <a:pPr indent="0" lvl="0" marL="0" marR="0" rtl="0" algn="l">
-              <a:spcBef>
-                <a:spcPts val="0"/>
-              </a:spcBef>
-              <a:spcAft>
-                <a:spcPts val="0"/>
-              </a:spcAft>
-              <a:buNone/>
-            </a:pPr>
-            <a:r>
-              <a:rPr b="0" i="0" lang="en-US" sz="2000" u="none" cap="none" strike="noStrike">
-                <a:solidFill>
-                  <a:srgbClr val="F6F7FA"/>
-                </a:solidFill>
-                <a:latin typeface="Arial"/>
-                <a:ea typeface="Arial"/>
-                <a:cs typeface="Arial"/>
-                <a:sym typeface="Arial"/>
-              </a:rPr>
-              <a:t>Rust can be difficult to learn, especially ownership rules</a:t>
-            </a:r>
-            <a:endParaRPr/>
-          </a:p>
-        </p:txBody>
-      </p:sp>
-      <p:sp>
-        <p:nvSpPr>
-          <p:cNvPr id="260" name="Google Shape;260;p24"/>
-          <p:cNvSpPr/>
-          <p:nvPr/>
-        </p:nvSpPr>
-        <p:spPr>
-          <a:xfrm>
-            <a:off x="758952" y="3072384"/>
-            <a:ext cx="100584" cy="100584"/>
-          </a:xfrm>
-          <a:prstGeom prst="rect">
-            <a:avLst/>
-          </a:prstGeom>
-          <a:solidFill>
-            <a:srgbClr val="F08443"/>
-          </a:solidFill>
-          <a:ln>
-            <a:noFill/>
-          </a:ln>
-          <a:effectLst>
-            <a:outerShdw blurRad="40000" rotWithShape="0" dir="5400000" dist="23000">
-              <a:srgbClr val="000000">
-                <a:alpha val="34902"/>
-              </a:srgbClr>
-            </a:outerShdw>
-          </a:effectLst>
-        </p:spPr>
-        <p:txBody>
-          <a:bodyPr anchorCtr="0" anchor="ctr" bIns="45700" lIns="91425" spcFirstLastPara="1" rIns="91425" wrap="square" tIns="45700">
-            <a:noAutofit/>
-          </a:bodyPr>
-          <a:lstStyle/>
-          <a:p>
-            <a:pPr indent="0" lvl="0" marL="0" marR="0" rtl="0" algn="ctr">
-              <a:spcBef>
-                <a:spcPts val="0"/>
-              </a:spcBef>
-              <a:spcAft>
-                <a:spcPts val="0"/>
-              </a:spcAft>
-              <a:buNone/>
-            </a:pPr>
-            <a:r>
-              <a:t/>
-            </a:r>
-            <a:endParaRPr b="0" i="0" sz="1800" u="none" cap="none" strike="noStrike">
-              <a:solidFill>
-                <a:schemeClr val="dk1"/>
-              </a:solidFill>
-              <a:latin typeface="Calibri"/>
-              <a:ea typeface="Calibri"/>
-              <a:cs typeface="Calibri"/>
-              <a:sym typeface="Calibri"/>
-            </a:endParaRPr>
-          </a:p>
-        </p:txBody>
-      </p:sp>
-      <p:sp>
-        <p:nvSpPr>
-          <p:cNvPr id="261" name="Google Shape;261;p24"/>
-          <p:cNvSpPr txBox="1"/>
-          <p:nvPr/>
-        </p:nvSpPr>
-        <p:spPr>
-          <a:xfrm>
-            <a:off x="1042415" y="2962656"/>
-            <a:ext cx="10241280" cy="685800"/>
-          </a:xfrm>
-          <a:prstGeom prst="rect">
-            <a:avLst/>
-          </a:prstGeom>
-          <a:noFill/>
-          <a:ln>
-            <a:noFill/>
-          </a:ln>
-        </p:spPr>
-        <p:txBody>
-          <a:bodyPr anchorCtr="0" anchor="t" bIns="0" lIns="0" spcFirstLastPara="1" rIns="0" wrap="square" tIns="0">
-            <a:spAutoFit/>
-          </a:bodyPr>
-          <a:lstStyle/>
-          <a:p>
-            <a:pPr indent="0" lvl="0" marL="0" marR="0" rtl="0" algn="l">
-              <a:spcBef>
-                <a:spcPts val="0"/>
-              </a:spcBef>
-              <a:spcAft>
-                <a:spcPts val="0"/>
-              </a:spcAft>
-              <a:buNone/>
-            </a:pPr>
-            <a:r>
-              <a:rPr b="0" i="0" lang="en-US" sz="2000" u="none" cap="none" strike="noStrike">
-                <a:solidFill>
-                  <a:srgbClr val="F6F7FA"/>
-                </a:solidFill>
-                <a:latin typeface="Arial"/>
-                <a:ea typeface="Arial"/>
-                <a:cs typeface="Arial"/>
-                <a:sym typeface="Arial"/>
-              </a:rPr>
-              <a:t>Compiler checks can make development feel slower at first</a:t>
-            </a:r>
-            <a:endParaRPr/>
-          </a:p>
-        </p:txBody>
-      </p:sp>
-      <p:sp>
-        <p:nvSpPr>
-          <p:cNvPr id="262" name="Google Shape;262;p24"/>
-          <p:cNvSpPr/>
-          <p:nvPr/>
-        </p:nvSpPr>
-        <p:spPr>
-          <a:xfrm>
-            <a:off x="758952" y="4050791"/>
-            <a:ext cx="100584" cy="100584"/>
-          </a:xfrm>
-          <a:prstGeom prst="rect">
-            <a:avLst/>
-          </a:prstGeom>
-          <a:solidFill>
-            <a:srgbClr val="F08443"/>
-          </a:solidFill>
-          <a:ln>
-            <a:noFill/>
-          </a:ln>
-          <a:effectLst>
-            <a:outerShdw blurRad="40000" rotWithShape="0" dir="5400000" dist="23000">
-              <a:srgbClr val="000000">
-                <a:alpha val="34902"/>
-              </a:srgbClr>
-            </a:outerShdw>
-          </a:effectLst>
-        </p:spPr>
-        <p:txBody>
-          <a:bodyPr anchorCtr="0" anchor="ctr" bIns="45700" lIns="91425" spcFirstLastPara="1" rIns="91425" wrap="square" tIns="45700">
-            <a:noAutofit/>
-          </a:bodyPr>
-          <a:lstStyle/>
-          <a:p>
-            <a:pPr indent="0" lvl="0" marL="0" marR="0" rtl="0" algn="ctr">
-              <a:spcBef>
-                <a:spcPts val="0"/>
-              </a:spcBef>
-              <a:spcAft>
-                <a:spcPts val="0"/>
-              </a:spcAft>
-              <a:buNone/>
-            </a:pPr>
-            <a:r>
-              <a:t/>
-            </a:r>
-            <a:endParaRPr b="0" i="0" sz="1800" u="none" cap="none" strike="noStrike">
-              <a:solidFill>
-                <a:schemeClr val="dk1"/>
-              </a:solidFill>
-              <a:latin typeface="Calibri"/>
-              <a:ea typeface="Calibri"/>
-              <a:cs typeface="Calibri"/>
-              <a:sym typeface="Calibri"/>
-            </a:endParaRPr>
-          </a:p>
-        </p:txBody>
-      </p:sp>
-      <p:sp>
-        <p:nvSpPr>
-          <p:cNvPr id="263" name="Google Shape;263;p24"/>
-          <p:cNvSpPr txBox="1"/>
-          <p:nvPr/>
-        </p:nvSpPr>
-        <p:spPr>
-          <a:xfrm>
-            <a:off x="1042415" y="3941063"/>
-            <a:ext cx="10241280" cy="685800"/>
-          </a:xfrm>
-          <a:prstGeom prst="rect">
-            <a:avLst/>
-          </a:prstGeom>
-          <a:noFill/>
-          <a:ln>
-            <a:noFill/>
-          </a:ln>
-        </p:spPr>
-        <p:txBody>
-          <a:bodyPr anchorCtr="0" anchor="t" bIns="0" lIns="0" spcFirstLastPara="1" rIns="0" wrap="square" tIns="0">
-            <a:spAutoFit/>
-          </a:bodyPr>
-          <a:lstStyle/>
-          <a:p>
-            <a:pPr indent="0" lvl="0" marL="0" marR="0" rtl="0" algn="l">
-              <a:spcBef>
-                <a:spcPts val="0"/>
-              </a:spcBef>
-              <a:spcAft>
-                <a:spcPts val="0"/>
-              </a:spcAft>
-              <a:buNone/>
-            </a:pPr>
-            <a:r>
-              <a:rPr b="0" i="0" lang="en-US" sz="2000" u="none" cap="none" strike="noStrike">
-                <a:solidFill>
-                  <a:srgbClr val="F6F7FA"/>
-                </a:solidFill>
-                <a:latin typeface="Arial"/>
-                <a:ea typeface="Arial"/>
-                <a:cs typeface="Arial"/>
-                <a:sym typeface="Arial"/>
-              </a:rPr>
-              <a:t>It will not replace every C or C++ program</a:t>
-            </a:r>
-            <a:endParaRPr/>
-          </a:p>
-        </p:txBody>
-      </p:sp>
-      <p:sp>
-        <p:nvSpPr>
-          <p:cNvPr id="264" name="Google Shape;264;p24"/>
-          <p:cNvSpPr/>
-          <p:nvPr/>
-        </p:nvSpPr>
-        <p:spPr>
-          <a:xfrm>
-            <a:off x="749808" y="5074920"/>
-            <a:ext cx="10698480" cy="868680"/>
-          </a:xfrm>
-          <a:prstGeom prst="rect">
-            <a:avLst/>
-          </a:prstGeom>
-          <a:solidFill>
-            <a:srgbClr val="1D2B3F"/>
-          </a:solidFill>
-          <a:ln>
-            <a:noFill/>
-          </a:ln>
-          <a:effectLst>
-            <a:outerShdw blurRad="40000" rotWithShape="0" dir="5400000" dist="23000">
-              <a:srgbClr val="000000">
-                <a:alpha val="34902"/>
-              </a:srgbClr>
-            </a:outerShdw>
-          </a:effectLst>
-        </p:spPr>
-        <p:txBody>
-          <a:bodyPr anchorCtr="0" anchor="ctr" bIns="45700" lIns="91425" spcFirstLastPara="1" rIns="91425" wrap="square" tIns="45700">
-            <a:noAutofit/>
-          </a:bodyPr>
-          <a:lstStyle/>
-          <a:p>
-            <a:pPr indent="0" lvl="0" marL="0" marR="0" rtl="0" algn="ctr">
-              <a:spcBef>
-                <a:spcPts val="0"/>
-              </a:spcBef>
-              <a:spcAft>
-                <a:spcPts val="0"/>
-              </a:spcAft>
-              <a:buNone/>
-            </a:pPr>
-            <a:r>
-              <a:t/>
-            </a:r>
-            <a:endParaRPr b="0" i="0" sz="1800" u="none" cap="none" strike="noStrike">
-              <a:solidFill>
-                <a:schemeClr val="dk1"/>
-              </a:solidFill>
-              <a:latin typeface="Calibri"/>
-              <a:ea typeface="Calibri"/>
-              <a:cs typeface="Calibri"/>
-              <a:sym typeface="Calibri"/>
-            </a:endParaRPr>
-          </a:p>
-        </p:txBody>
-      </p:sp>
-      <p:sp>
-        <p:nvSpPr>
-          <p:cNvPr id="265" name="Google Shape;265;p24"/>
-          <p:cNvSpPr txBox="1"/>
-          <p:nvPr/>
-        </p:nvSpPr>
-        <p:spPr>
-          <a:xfrm>
-            <a:off x="1005840" y="5330952"/>
-            <a:ext cx="10241280" cy="411480"/>
-          </a:xfrm>
-          <a:prstGeom prst="rect">
-            <a:avLst/>
-          </a:prstGeom>
-          <a:noFill/>
-          <a:ln>
-            <a:noFill/>
-          </a:ln>
-        </p:spPr>
-        <p:txBody>
-          <a:bodyPr anchorCtr="0" anchor="t" bIns="0" lIns="0" spcFirstLastPara="1" rIns="0" wrap="square" tIns="0">
-            <a:spAutoFit/>
-          </a:bodyPr>
-          <a:lstStyle/>
-          <a:p>
-            <a:pPr indent="0" lvl="0" marL="0" marR="0" rtl="0" algn="l">
-              <a:spcBef>
-                <a:spcPts val="0"/>
-              </a:spcBef>
-              <a:spcAft>
-                <a:spcPts val="0"/>
-              </a:spcAft>
-              <a:buNone/>
-            </a:pPr>
-            <a:r>
-              <a:rPr b="1" i="0" lang="en-US" sz="2100" u="none" cap="none" strike="noStrike">
-                <a:solidFill>
-                  <a:srgbClr val="F6F7FA"/>
-                </a:solidFill>
-                <a:latin typeface="Arial"/>
-                <a:ea typeface="Arial"/>
-                <a:cs typeface="Arial"/>
-                <a:sym typeface="Arial"/>
-              </a:rPr>
-              <a:t>Rust is becoming a serious option for safer systems software.</a:t>
+              <a:t>04  /  RUST IN 2026</a:t>
             </a:r>
             <a:endParaRPr/>
           </a:p>
@@ -18295,23 +16984,7 @@
                   <a:srgbClr val="F6F7FA"/>
                 </a:solidFill>
               </a:rPr>
-              <a:t>Checked </a:t>
-            </a:r>
-            <a:r>
-              <a:rPr lang="en-US" sz="2300">
-                <a:solidFill>
-                  <a:srgbClr val="F6F7FA"/>
-                </a:solidFill>
-              </a:rPr>
-              <a:t>before</a:t>
-            </a:r>
-            <a:r>
-              <a:rPr lang="en-US" sz="2300">
-                <a:solidFill>
-                  <a:srgbClr val="F6F7FA"/>
-                </a:solidFill>
-              </a:rPr>
-              <a:t> the program runs, not during it.</a:t>
+              <a:t>Checked before the program runs, not during it.</a:t>
             </a:r>
             <a:endParaRPr sz="1600"/>
           </a:p>
@@ -18575,7 +17248,7 @@
         <p:spPr>
           <a:xfrm>
             <a:off x="621792" y="978408"/>
-            <a:ext cx="10972800" cy="731520"/>
+            <a:ext cx="10972800" cy="477300"/>
           </a:xfrm>
           <a:prstGeom prst="rect">
             <a:avLst/>
@@ -18610,7 +17283,27 @@
                 <a:cs typeface="Arial"/>
                 <a:sym typeface="Arial"/>
               </a:rPr>
-              <a:t>Rust and the Linux kernel</a:t>
+              <a:t>Where is Rust being </a:t>
+            </a:r>
+            <a:r>
+              <a:rPr b="1" lang="en-US" sz="3100">
+                <a:solidFill>
+                  <a:srgbClr val="F6F7FA"/>
+                </a:solidFill>
+              </a:rPr>
+              <a:t>U</a:t>
+            </a:r>
+            <a:r>
+              <a:rPr b="1" i="0" lang="en-US" sz="3100" u="none" cap="none" strike="noStrike">
+                <a:solidFill>
+                  <a:srgbClr val="F6F7FA"/>
+                </a:solidFill>
+                <a:latin typeface="Arial"/>
+                <a:ea typeface="Arial"/>
+                <a:cs typeface="Arial"/>
+                <a:sym typeface="Arial"/>
+              </a:rPr>
+              <a:t>sed?</a:t>
             </a:r>
             <a:endParaRPr/>
           </a:p>
@@ -18660,7 +17353,7 @@
                 <a:cs typeface="Arial"/>
                 <a:sym typeface="Arial"/>
               </a:rPr>
-              <a:t>03  /  RUST IN 2026</a:t>
+              <a:t>05  /  RUST IN 2026</a:t>
             </a:r>
             <a:endParaRPr/>
           </a:p>
@@ -18669,119 +17362,19 @@
       <p:sp>
         <p:nvSpPr>
           <p:cNvPr id="205" name="Google Shape;205;p21"/>
-          <p:cNvSpPr txBox="1"/>
-          <p:nvPr/>
-        </p:nvSpPr>
-        <p:spPr>
-          <a:xfrm>
-            <a:off x="1051560" y="2039112"/>
-            <a:ext cx="1828800" cy="548640"/>
-          </a:xfrm>
-          <a:prstGeom prst="rect">
-            <a:avLst/>
-          </a:prstGeom>
-          <a:noFill/>
-          <a:ln>
-            <a:noFill/>
-          </a:ln>
-        </p:spPr>
-        <p:txBody>
-          <a:bodyPr anchorCtr="0" anchor="t" bIns="0" lIns="0" spcFirstLastPara="1" rIns="0" wrap="square" tIns="0">
-            <a:spAutoFit/>
-          </a:bodyPr>
-          <a:lstStyle/>
-          <a:p>
-            <a:pPr indent="0" lvl="0" marL="0" marR="0" rtl="0" algn="l">
-              <a:spcBef>
-                <a:spcPts val="0"/>
-              </a:spcBef>
-              <a:spcAft>
-                <a:spcPts val="0"/>
-              </a:spcAft>
-              <a:buNone/>
-            </a:pPr>
-            <a:r>
-              <a:rPr b="1" i="0" lang="en-US" sz="2600" u="none" cap="none" strike="noStrike">
-                <a:solidFill>
-                  <a:srgbClr val="F08443"/>
-                </a:solidFill>
-                <a:latin typeface="Arial"/>
-                <a:ea typeface="Arial"/>
-                <a:cs typeface="Arial"/>
-                <a:sym typeface="Arial"/>
-              </a:rPr>
-              <a:t>2022</a:t>
-            </a:r>
-            <a:endParaRPr/>
-          </a:p>
-        </p:txBody>
-      </p:sp>
-      <p:sp>
-        <p:nvSpPr>
-          <p:cNvPr id="206" name="Google Shape;206;p21"/>
-          <p:cNvSpPr txBox="1"/>
-          <p:nvPr/>
-        </p:nvSpPr>
-        <p:spPr>
-          <a:xfrm>
-            <a:off x="2880360" y="2011680"/>
-            <a:ext cx="8229600" cy="694944"/>
-          </a:xfrm>
-          <a:prstGeom prst="rect">
-            <a:avLst/>
-          </a:prstGeom>
-          <a:noFill/>
-          <a:ln>
-            <a:noFill/>
-          </a:ln>
-        </p:spPr>
-        <p:txBody>
-          <a:bodyPr anchorCtr="0" anchor="t" bIns="0" lIns="0" spcFirstLastPara="1" rIns="0" wrap="square" tIns="0">
-            <a:spAutoFit/>
-          </a:bodyPr>
-          <a:lstStyle/>
-          <a:p>
-            <a:pPr indent="0" lvl="0" marL="0" marR="0" rtl="0" algn="l">
-              <a:spcBef>
-                <a:spcPts val="0"/>
-              </a:spcBef>
-              <a:spcAft>
-                <a:spcPts val="0"/>
-              </a:spcAft>
-              <a:buNone/>
-            </a:pPr>
-            <a:r>
-              <a:rPr b="0" i="0" lang="en-US" sz="2100" u="none" cap="none" strike="noStrike">
-                <a:solidFill>
-                  <a:srgbClr val="F6F7FA"/>
-                </a:solidFill>
-                <a:latin typeface="Arial"/>
-                <a:ea typeface="Arial"/>
-                <a:cs typeface="Arial"/>
-                <a:sym typeface="Arial"/>
-              </a:rPr>
-              <a:t>Rust support entered the Linux kernel.</a:t>
-            </a:r>
-            <a:endParaRPr/>
-          </a:p>
-        </p:txBody>
-      </p:sp>
-      <p:sp>
-        <p:nvSpPr>
-          <p:cNvPr id="207" name="Google Shape;207;p21"/>
           <p:cNvSpPr/>
           <p:nvPr/>
         </p:nvSpPr>
         <p:spPr>
           <a:xfrm>
-            <a:off x="1060704" y="2926080"/>
-            <a:ext cx="10058400" cy="22860"/>
+            <a:off x="749808" y="1938528"/>
+            <a:ext cx="2514600" cy="731520"/>
           </a:xfrm>
           <a:prstGeom prst="rect">
             <a:avLst/>
           </a:prstGeom>
           <a:solidFill>
-            <a:srgbClr val="BDC8D6"/>
+            <a:srgbClr val="1D2B3F"/>
           </a:solidFill>
           <a:ln>
             <a:noFill/>
@@ -18826,14 +17419,14 @@
       </p:sp>
       <p:sp>
         <p:nvSpPr>
-          <p:cNvPr id="208" name="Google Shape;208;p21"/>
+          <p:cNvPr id="206" name="Google Shape;206;p21"/>
           <p:cNvSpPr txBox="1"/>
           <p:nvPr/>
         </p:nvSpPr>
         <p:spPr>
           <a:xfrm>
-            <a:off x="1051560" y="3328416"/>
-            <a:ext cx="2011680" cy="548640"/>
+            <a:off x="950976" y="2093976"/>
+            <a:ext cx="2194560" cy="393192"/>
           </a:xfrm>
           <a:prstGeom prst="rect">
             <a:avLst/>
@@ -18859,7 +17452,7 @@
               <a:buNone/>
             </a:pPr>
             <a:r>
-              <a:rPr b="1" i="0" lang="en-US" sz="2500" u="none" cap="none" strike="noStrike">
+              <a:rPr b="1" i="0" lang="en-US" sz="1900" u="none" cap="none" strike="noStrike">
                 <a:solidFill>
                   <a:srgbClr val="F08443"/>
                 </a:solidFill>
@@ -18868,7 +17461,7 @@
                 <a:cs typeface="Arial"/>
                 <a:sym typeface="Arial"/>
               </a:rPr>
-              <a:t>Dec 2025</a:t>
+              <a:t>Linux</a:t>
             </a:r>
             <a:endParaRPr/>
           </a:p>
@@ -18876,14 +17469,14 @@
       </p:sp>
       <p:sp>
         <p:nvSpPr>
-          <p:cNvPr id="209" name="Google Shape;209;p21"/>
+          <p:cNvPr id="207" name="Google Shape;207;p21"/>
           <p:cNvSpPr txBox="1"/>
           <p:nvPr/>
         </p:nvSpPr>
         <p:spPr>
           <a:xfrm>
-            <a:off x="2880360" y="3310128"/>
-            <a:ext cx="8138160" cy="868680"/>
+            <a:off x="3547872" y="2057400"/>
+            <a:ext cx="7863840" cy="594360"/>
           </a:xfrm>
           <a:prstGeom prst="rect">
             <a:avLst/>
@@ -18909,7 +17502,7 @@
               <a:buNone/>
             </a:pPr>
             <a:r>
-              <a:rPr b="0" i="0" lang="en-US" sz="2100" u="none" cap="none" strike="noStrike">
+              <a:rPr b="0" i="0" lang="en-US" sz="1900" u="none" cap="none" strike="noStrike">
                 <a:solidFill>
                   <a:srgbClr val="F6F7FA"/>
                 </a:solidFill>
@@ -18918,7 +17511,7 @@
                 <a:cs typeface="Arial"/>
                 <a:sym typeface="Arial"/>
               </a:rPr>
-              <a:t>Linux maintainers said Rust was no longer experimental.</a:t>
+              <a:t>Developers can write some kernel components in Rust.</a:t>
             </a:r>
             <a:endParaRPr/>
           </a:p>
@@ -18926,20 +17519,20 @@
       </p:sp>
       <p:sp>
         <p:nvSpPr>
-          <p:cNvPr id="210" name="Google Shape;210;p21"/>
+          <p:cNvPr id="208" name="Google Shape;208;p21"/>
           <p:cNvSpPr/>
           <p:nvPr/>
         </p:nvSpPr>
         <p:spPr>
           <a:xfrm>
-            <a:off x="1060704" y="4343400"/>
-            <a:ext cx="10058400" cy="22860"/>
+            <a:off x="749808" y="2962656"/>
+            <a:ext cx="2514600" cy="731520"/>
           </a:xfrm>
           <a:prstGeom prst="rect">
             <a:avLst/>
           </a:prstGeom>
           <a:solidFill>
-            <a:srgbClr val="BDC8D6"/>
+            <a:srgbClr val="1D2B3F"/>
           </a:solidFill>
           <a:ln>
             <a:noFill/>
@@ -18984,14 +17577,14 @@
       </p:sp>
       <p:sp>
         <p:nvSpPr>
-          <p:cNvPr id="211" name="Google Shape;211;p21"/>
+          <p:cNvPr id="209" name="Google Shape;209;p21"/>
           <p:cNvSpPr txBox="1"/>
           <p:nvPr/>
         </p:nvSpPr>
         <p:spPr>
           <a:xfrm>
-            <a:off x="1051560" y="4754880"/>
-            <a:ext cx="1828800" cy="548640"/>
+            <a:off x="950976" y="3118104"/>
+            <a:ext cx="2194560" cy="393192"/>
           </a:xfrm>
           <a:prstGeom prst="rect">
             <a:avLst/>
@@ -19017,7 +17610,7 @@
               <a:buNone/>
             </a:pPr>
             <a:r>
-              <a:rPr b="1" i="0" lang="en-US" sz="2600" u="none" cap="none" strike="noStrike">
+              <a:rPr b="1" i="0" lang="en-US" sz="1900" u="none" cap="none" strike="noStrike">
                 <a:solidFill>
                   <a:srgbClr val="F08443"/>
                 </a:solidFill>
@@ -19026,7 +17619,7 @@
                 <a:cs typeface="Arial"/>
                 <a:sym typeface="Arial"/>
               </a:rPr>
-              <a:t>2026</a:t>
+              <a:t>Google / Android</a:t>
             </a:r>
             <a:endParaRPr/>
           </a:p>
@@ -19034,14 +17627,14 @@
       </p:sp>
       <p:sp>
         <p:nvSpPr>
-          <p:cNvPr id="212" name="Google Shape;212;p21"/>
+          <p:cNvPr id="210" name="Google Shape;210;p21"/>
           <p:cNvSpPr txBox="1"/>
           <p:nvPr/>
         </p:nvSpPr>
         <p:spPr>
           <a:xfrm>
-            <a:off x="2880360" y="4736592"/>
-            <a:ext cx="8229600" cy="731520"/>
+            <a:off x="3547872" y="3081528"/>
+            <a:ext cx="7863840" cy="594360"/>
           </a:xfrm>
           <a:prstGeom prst="rect">
             <a:avLst/>
@@ -19067,7 +17660,7 @@
               <a:buNone/>
             </a:pPr>
             <a:r>
-              <a:rPr b="0" i="0" lang="en-US" sz="2100" u="none" cap="none" strike="noStrike">
+              <a:rPr b="0" i="0" lang="en-US" sz="1900" u="none" cap="none" strike="noStrike">
                 <a:solidFill>
                   <a:srgbClr val="F6F7FA"/>
                 </a:solidFill>
@@ -19076,7 +17669,323 @@
                 <a:cs typeface="Arial"/>
                 <a:sym typeface="Arial"/>
               </a:rPr>
-              <a:t>More Rust work continues alongside C.</a:t>
+              <a:t>Rust is used in security-sensitive Android code.</a:t>
+            </a:r>
+            <a:endParaRPr/>
+          </a:p>
+        </p:txBody>
+      </p:sp>
+      <p:sp>
+        <p:nvSpPr>
+          <p:cNvPr id="211" name="Google Shape;211;p21"/>
+          <p:cNvSpPr/>
+          <p:nvPr/>
+        </p:nvSpPr>
+        <p:spPr>
+          <a:xfrm>
+            <a:off x="749808" y="3986784"/>
+            <a:ext cx="2514600" cy="731520"/>
+          </a:xfrm>
+          <a:prstGeom prst="rect">
+            <a:avLst/>
+          </a:prstGeom>
+          <a:solidFill>
+            <a:srgbClr val="1D2B3F"/>
+          </a:solidFill>
+          <a:ln>
+            <a:noFill/>
+          </a:ln>
+          <a:effectLst>
+            <a:outerShdw blurRad="40000" rotWithShape="0" dir="5400000" dist="23000">
+              <a:srgbClr val="000000">
+                <a:alpha val="34902"/>
+              </a:srgbClr>
+            </a:outerShdw>
+          </a:effectLst>
+        </p:spPr>
+        <p:txBody>
+          <a:bodyPr anchorCtr="0" anchor="ctr" bIns="45700" lIns="91425" spcFirstLastPara="1" rIns="91425" wrap="square" tIns="45700">
+            <a:noAutofit/>
+          </a:bodyPr>
+          <a:lstStyle/>
+          <a:p>
+            <a:pPr indent="0" lvl="0" marL="0" marR="0" rtl="0" algn="ctr">
+              <a:spcBef>
+                <a:spcPts val="0"/>
+              </a:spcBef>
+              <a:spcAft>
+                <a:spcPts val="0"/>
+              </a:spcAft>
+              <a:buNone/>
+            </a:pPr>
+            <a:r>
+              <a:t/>
+            </a:r>
+            <a:endParaRPr b="0" i="0" sz="1800" u="none" cap="none" strike="noStrike">
+              <a:solidFill>
+                <a:schemeClr val="dk1"/>
+              </a:solidFill>
+              <a:latin typeface="Calibri"/>
+              <a:ea typeface="Calibri"/>
+              <a:cs typeface="Calibri"/>
+              <a:sym typeface="Calibri"/>
+            </a:endParaRPr>
+          </a:p>
+        </p:txBody>
+      </p:sp>
+      <p:sp>
+        <p:nvSpPr>
+          <p:cNvPr id="212" name="Google Shape;212;p21"/>
+          <p:cNvSpPr txBox="1"/>
+          <p:nvPr/>
+        </p:nvSpPr>
+        <p:spPr>
+          <a:xfrm>
+            <a:off x="950976" y="4142232"/>
+            <a:ext cx="2194560" cy="393192"/>
+          </a:xfrm>
+          <a:prstGeom prst="rect">
+            <a:avLst/>
+          </a:prstGeom>
+          <a:noFill/>
+          <a:ln>
+            <a:noFill/>
+          </a:ln>
+        </p:spPr>
+        <p:txBody>
+          <a:bodyPr anchorCtr="0" anchor="t" bIns="0" lIns="0" spcFirstLastPara="1" rIns="0" wrap="square" tIns="0">
+            <a:spAutoFit/>
+          </a:bodyPr>
+          <a:lstStyle/>
+          <a:p>
+            <a:pPr indent="0" lvl="0" marL="0" marR="0" rtl="0" algn="l">
+              <a:spcBef>
+                <a:spcPts val="0"/>
+              </a:spcBef>
+              <a:spcAft>
+                <a:spcPts val="0"/>
+              </a:spcAft>
+              <a:buNone/>
+            </a:pPr>
+            <a:r>
+              <a:rPr b="1" i="0" lang="en-US" sz="1900" u="none" cap="none" strike="noStrike">
+                <a:solidFill>
+                  <a:srgbClr val="F08443"/>
+                </a:solidFill>
+                <a:latin typeface="Arial"/>
+                <a:ea typeface="Arial"/>
+                <a:cs typeface="Arial"/>
+                <a:sym typeface="Arial"/>
+              </a:rPr>
+              <a:t>Microsoft</a:t>
+            </a:r>
+            <a:endParaRPr/>
+          </a:p>
+        </p:txBody>
+      </p:sp>
+      <p:sp>
+        <p:nvSpPr>
+          <p:cNvPr id="213" name="Google Shape;213;p21"/>
+          <p:cNvSpPr txBox="1"/>
+          <p:nvPr/>
+        </p:nvSpPr>
+        <p:spPr>
+          <a:xfrm>
+            <a:off x="3547872" y="4105656"/>
+            <a:ext cx="7863840" cy="594360"/>
+          </a:xfrm>
+          <a:prstGeom prst="rect">
+            <a:avLst/>
+          </a:prstGeom>
+          <a:noFill/>
+          <a:ln>
+            <a:noFill/>
+          </a:ln>
+        </p:spPr>
+        <p:txBody>
+          <a:bodyPr anchorCtr="0" anchor="t" bIns="0" lIns="0" spcFirstLastPara="1" rIns="0" wrap="square" tIns="0">
+            <a:spAutoFit/>
+          </a:bodyPr>
+          <a:lstStyle/>
+          <a:p>
+            <a:pPr indent="0" lvl="0" marL="0" marR="0" rtl="0" algn="l">
+              <a:spcBef>
+                <a:spcPts val="0"/>
+              </a:spcBef>
+              <a:spcAft>
+                <a:spcPts val="0"/>
+              </a:spcAft>
+              <a:buNone/>
+            </a:pPr>
+            <a:r>
+              <a:rPr b="0" i="0" lang="en-US" sz="1900" u="none" cap="none" strike="noStrike">
+                <a:solidFill>
+                  <a:srgbClr val="F6F7FA"/>
+                </a:solidFill>
+                <a:latin typeface="Arial"/>
+                <a:ea typeface="Arial"/>
+                <a:cs typeface="Arial"/>
+                <a:sym typeface="Arial"/>
+              </a:rPr>
+              <a:t>Rust is being explored and used in some systems work.</a:t>
+            </a:r>
+            <a:endParaRPr/>
+          </a:p>
+        </p:txBody>
+      </p:sp>
+      <p:sp>
+        <p:nvSpPr>
+          <p:cNvPr id="214" name="Google Shape;214;p21"/>
+          <p:cNvSpPr/>
+          <p:nvPr/>
+        </p:nvSpPr>
+        <p:spPr>
+          <a:xfrm>
+            <a:off x="749808" y="5010912"/>
+            <a:ext cx="2514600" cy="731520"/>
+          </a:xfrm>
+          <a:prstGeom prst="rect">
+            <a:avLst/>
+          </a:prstGeom>
+          <a:solidFill>
+            <a:srgbClr val="1D2B3F"/>
+          </a:solidFill>
+          <a:ln>
+            <a:noFill/>
+          </a:ln>
+          <a:effectLst>
+            <a:outerShdw blurRad="40000" rotWithShape="0" dir="5400000" dist="23000">
+              <a:srgbClr val="000000">
+                <a:alpha val="34902"/>
+              </a:srgbClr>
+            </a:outerShdw>
+          </a:effectLst>
+        </p:spPr>
+        <p:txBody>
+          <a:bodyPr anchorCtr="0" anchor="ctr" bIns="45700" lIns="91425" spcFirstLastPara="1" rIns="91425" wrap="square" tIns="45700">
+            <a:noAutofit/>
+          </a:bodyPr>
+          <a:lstStyle/>
+          <a:p>
+            <a:pPr indent="0" lvl="0" marL="0" marR="0" rtl="0" algn="ctr">
+              <a:spcBef>
+                <a:spcPts val="0"/>
+              </a:spcBef>
+              <a:spcAft>
+                <a:spcPts val="0"/>
+              </a:spcAft>
+              <a:buNone/>
+            </a:pPr>
+            <a:r>
+              <a:t/>
+            </a:r>
+            <a:endParaRPr b="0" i="0" sz="1800" u="none" cap="none" strike="noStrike">
+              <a:solidFill>
+                <a:schemeClr val="dk1"/>
+              </a:solidFill>
+              <a:latin typeface="Calibri"/>
+              <a:ea typeface="Calibri"/>
+              <a:cs typeface="Calibri"/>
+              <a:sym typeface="Calibri"/>
+            </a:endParaRPr>
+          </a:p>
+        </p:txBody>
+      </p:sp>
+      <p:sp>
+        <p:nvSpPr>
+          <p:cNvPr id="215" name="Google Shape;215;p21"/>
+          <p:cNvSpPr txBox="1"/>
+          <p:nvPr/>
+        </p:nvSpPr>
+        <p:spPr>
+          <a:xfrm>
+            <a:off x="950976" y="5166360"/>
+            <a:ext cx="2194560" cy="393192"/>
+          </a:xfrm>
+          <a:prstGeom prst="rect">
+            <a:avLst/>
+          </a:prstGeom>
+          <a:noFill/>
+          <a:ln>
+            <a:noFill/>
+          </a:ln>
+        </p:spPr>
+        <p:txBody>
+          <a:bodyPr anchorCtr="0" anchor="t" bIns="0" lIns="0" spcFirstLastPara="1" rIns="0" wrap="square" tIns="0">
+            <a:spAutoFit/>
+          </a:bodyPr>
+          <a:lstStyle/>
+          <a:p>
+            <a:pPr indent="0" lvl="0" marL="0" marR="0" rtl="0" algn="l">
+              <a:spcBef>
+                <a:spcPts val="0"/>
+              </a:spcBef>
+              <a:spcAft>
+                <a:spcPts val="0"/>
+              </a:spcAft>
+              <a:buNone/>
+            </a:pPr>
+            <a:r>
+              <a:rPr b="1" i="0" lang="en-US" sz="1900" u="none" cap="none" strike="noStrike">
+                <a:solidFill>
+                  <a:srgbClr val="F08443"/>
+                </a:solidFill>
+                <a:latin typeface="Arial"/>
+                <a:ea typeface="Arial"/>
+                <a:cs typeface="Arial"/>
+                <a:sym typeface="Arial"/>
+              </a:rPr>
+              <a:t>AWS</a:t>
+            </a:r>
+            <a:endParaRPr/>
+          </a:p>
+        </p:txBody>
+      </p:sp>
+      <p:sp>
+        <p:nvSpPr>
+          <p:cNvPr id="216" name="Google Shape;216;p21"/>
+          <p:cNvSpPr txBox="1"/>
+          <p:nvPr/>
+        </p:nvSpPr>
+        <p:spPr>
+          <a:xfrm>
+            <a:off x="3547872" y="5129784"/>
+            <a:ext cx="7863840" cy="594360"/>
+          </a:xfrm>
+          <a:prstGeom prst="rect">
+            <a:avLst/>
+          </a:prstGeom>
+          <a:noFill/>
+          <a:ln>
+            <a:noFill/>
+          </a:ln>
+        </p:spPr>
+        <p:txBody>
+          <a:bodyPr anchorCtr="0" anchor="t" bIns="0" lIns="0" spcFirstLastPara="1" rIns="0" wrap="square" tIns="0">
+            <a:spAutoFit/>
+          </a:bodyPr>
+          <a:lstStyle/>
+          <a:p>
+            <a:pPr indent="0" lvl="0" marL="0" marR="0" rtl="0" algn="l">
+              <a:spcBef>
+                <a:spcPts val="0"/>
+              </a:spcBef>
+              <a:spcAft>
+                <a:spcPts val="0"/>
+              </a:spcAft>
+              <a:buNone/>
+            </a:pPr>
+            <a:r>
+              <a:rPr b="0" i="0" lang="en-US" sz="1900" u="none" cap="none" strike="noStrike">
+                <a:solidFill>
+                  <a:srgbClr val="F6F7FA"/>
+                </a:solidFill>
+                <a:latin typeface="Arial"/>
+                <a:ea typeface="Arial"/>
+                <a:cs typeface="Arial"/>
+                <a:sym typeface="Arial"/>
+              </a:rPr>
+              <a:t>Rust powers projects such as Firecracker.</a:t>
             </a:r>
             <a:endParaRPr/>
           </a:p>
